--- a/downloads/presentations/modules/lesson-54-record-linkage-entity-resolution-and-deduplication.pptx
+++ b/downloads/presentations/modules/lesson-54-record-linkage-entity-resolution-and-deduplication.pptx
@@ -25,9 +25,11 @@
     <p:sldId id="273" r:id="rId19"/>
     <p:sldId id="274" r:id="rId20"/>
     <p:sldId id="275" r:id="rId21"/>
+    <p:sldId id="276" r:id="rId22"/>
+    <p:sldId id="277" r:id="rId23"/>
   </p:sldIdLst>
   <p:notesMasterIdLst>
-    <p:notesMasterId r:id="rId22"/>
+    <p:notesMasterId r:id="rId24"/>
   </p:notesMasterIdLst>
   <p:sldSz cx="12192000" cy="6858000"/>
   <p:notesSz cx="6858000" cy="12192000"/>
@@ -610,10 +612,9 @@
           <a:p>
             <a:r>
               <a:rPr lang="en-US" dirty="0"/>
-              <a:t>Risks, Failure Modes, and Guardrails
-False matches. False matches can combine data from different people or entities. Guardrails include conservative thresholds for consequential uses, clerical review, and source display.
-Missed matches. Missed matches can fragment histories and create duplicate work. Guardrails include matching quality monitoring, feedback loops, and review queues.
-Equity variation. Matching may perform differently across populations. Guardrails include subgroup evaluation, alternative identifiers, and review of naming and address patterns.</a:t>
+              <a:t>Public Health Example
+An AI-supported case summary may pull together lab reports, case notes, hospitalization information, and prior reports for the same person. If the person matching process incorrectly combines two people, the summary may include information that belongs to someone else. If the process misses a prior record, the summary may omit important history. The investigator needs visibility into linkage confidence and source records.
+An outbreak detection workflow may link complaints, lab results, facility inspections, and geographic data. Entity resolution may be needed to identify whether different facility names refer to the same establishment. AI-generated cluster summaries can be misleading if the facility resolution process is weak.</a:t>
             </a:r>
             <a:endParaRPr lang="en-US" dirty="0"/>
           </a:p>
@@ -701,8 +702,10 @@
           <a:p>
             <a:r>
               <a:rPr lang="en-US" dirty="0"/>
-              <a:t>Risks, Failure Modes, and Guardrails
-Hidden linkage uncertainty. AI outputs may present linked data as certain. Guardrails include confidence indicators, source records, and user review of uncertain matches.</a:t>
+              <a:t>Technical Deep Dive
+Matching design begins with the entity being matched and the decision that depends on the match. Person matching may use name, date of birth, address, phone, medical record number, email, sex, or other identifiers. Facility matching may use name, address, license number, geocode, and ownership information. Event matching may use dates, locations, condition, exposure, and related records.
+Thresholds determine when records are automatically linked, automatically separated, or sent for review. Low thresholds may increase false matches. High thresholds may increase missed matches. The right balance depends on the use case. A workflow that affects individual services may need a different tolerance for error than an aggregate trend analysis.
+AI readiness requires documentation of matching methods, fields, thresholds, review processes, error rates, and known limitations. If an AI tool uses linked records, staff should know whether linkage is deterministic, probabilistic, manual, or hybrid. They should also know whether uncertain matches are visible to users and whether AI outputs indicate linkage uncertainty.</a:t>
             </a:r>
             <a:endParaRPr lang="en-US" dirty="0"/>
           </a:p>
@@ -790,8 +793,10 @@
           <a:p>
             <a:r>
               <a:rPr lang="en-US" dirty="0"/>
-              <a:t>Application to AI-Supported Workflows
-Generative AI may summarize linked records, so source attribution and linkage confidence should be visible. Predictive analytics may use features created from linked records, making match quality part of model validity. NLP may extract identifiers from text to support linkage, which requires privacy and accuracy review. Agentic AI should not automatically merge or update records without strong approval and rollback procedures.</a:t>
+              <a:t>Risks, Failure Modes, and Guardrails
+False matches. False matches can combine data from different people or entities. Guardrails include conservative thresholds for consequential uses, clerical review, and source display.
+Missed matches. Missed matches can fragment histories and create duplicate work. Guardrails include matching quality monitoring, feedback loops, and review queues.
+Equity variation. Matching may perform differently across populations. Guardrails include subgroup evaluation, alternative identifiers, and review of naming and address patterns.</a:t>
             </a:r>
             <a:endParaRPr lang="en-US" dirty="0"/>
           </a:p>
@@ -879,10 +884,8 @@
           <a:p>
             <a:r>
               <a:rPr lang="en-US" dirty="0"/>
-              <a:t>Reflection Questions
-Which workflows in your agency depend on matching records across systems?
-What fields are used for matching, and how complete are they?
-Which populations may be more likely to experience missed or incorrect matches?</a:t>
+              <a:t>Risks, Failure Modes, and Guardrails
+Hidden linkage uncertainty. AI outputs may present linked data as certain. Guardrails include confidence indicators, source records, and user review of uncertain matches.</a:t>
             </a:r>
             <a:endParaRPr lang="en-US" dirty="0"/>
           </a:p>
@@ -970,9 +973,8 @@
           <a:p>
             <a:r>
               <a:rPr lang="en-US" dirty="0"/>
-              <a:t>Reflection Questions
-What happens when records are incorrectly merged or not merged?
-Where should human review be required?</a:t>
+              <a:t>Application to AI-Supported Workflows
+Generative AI may summarize linked records, so source attribution and linkage confidence should be visible. Predictive analytics may use features created from linked records, making match quality part of model validity. NLP may extract identifiers from text to support linkage, which requires privacy and accuracy review. Agentic AI should not automatically merge or update records without strong approval and rollback procedures.</a:t>
             </a:r>
             <a:endParaRPr lang="en-US" dirty="0"/>
           </a:p>
@@ -1060,8 +1062,10 @@
           <a:p>
             <a:r>
               <a:rPr lang="en-US" dirty="0"/>
-              <a:t>Practical Exercise
-Create a linkage risk review for one AI-supported public health workflow. Include the matching purpose, data sources, matching fields, known field quality issues, match method, thresholds, clerical review process, false match risks, missed match risks, equity considerations, and AI output affected.</a:t>
+              <a:t>Reflection Questions
+Which workflows in your agency depend on matching records across systems?
+What fields are used for matching, and how complete are they?
+Which populations may be more likely to experience missed or incorrect matches?</a:t>
             </a:r>
             <a:endParaRPr lang="en-US" dirty="0"/>
           </a:p>
@@ -1149,10 +1153,9 @@
           <a:p>
             <a:r>
               <a:rPr lang="en-US" dirty="0"/>
-              <a:t>Expected Artifact or Evidence
-Linkage risk review
-Deduplication workflow map
-Match review questions</a:t>
+              <a:t>Reflection Questions
+What happens when records are incorrectly merged or not merged?
+Where should human review be required?</a:t>
             </a:r>
             <a:endParaRPr lang="en-US" dirty="0"/>
           </a:p>
@@ -1240,8 +1243,8 @@
           <a:p>
             <a:r>
               <a:rPr lang="en-US" dirty="0"/>
-              <a:t>Expected Artifact or Evidence
-Equity and escalation notes</a:t>
+              <a:t>Practical Exercise
+Create a linkage risk review for one AI-supported public health workflow. Include the matching purpose, data sources, matching fields, known field quality issues, match method, thresholds, clerical review process, false match risks, missed match risks, equity considerations, and AI output affected.</a:t>
             </a:r>
             <a:endParaRPr lang="en-US" dirty="0"/>
           </a:p>
@@ -1329,11 +1332,10 @@
           <a:p>
             <a:r>
               <a:rPr lang="en-US" dirty="0"/>
-              <a:t>Expected Assignment
+              <a:t>Expected Artifact or Evidence
 Linkage risk review
 Deduplication workflow map
-Match review questions
-Equity and escalation notes</a:t>
+Match review questions</a:t>
             </a:r>
             <a:endParaRPr lang="en-US" dirty="0"/>
           </a:p>
@@ -1421,12 +1423,8 @@
           <a:p>
             <a:r>
               <a:rPr lang="en-US" dirty="0"/>
-              <a:t>Knowledge Check
-1. What is a false match?
-2. What is a missed match?
-3. Why does record linkage matter for AI?
-4. Who may need to review uncertain matches?
-5. What is strong completion evidence for this module?</a:t>
+              <a:t>Expected Artifact or Evidence
+Equity and escalation notes</a:t>
             </a:r>
             <a:endParaRPr lang="en-US" dirty="0"/>
           </a:p>
@@ -1606,11 +1604,11 @@
           <a:p>
             <a:r>
               <a:rPr lang="en-US" dirty="0"/>
-              <a:t>References and Resources
-Public health IIS and surveillance data quality resources
-CDC data modernization resources
-Health information exchange data quality materials
-Agency matching and deduplication procedures</a:t>
+              <a:t>Expected Assignment
+Linkage risk review
+Deduplication workflow map
+Match review questions
+Equity and escalation notes</a:t>
             </a:r>
             <a:endParaRPr lang="en-US" dirty="0"/>
           </a:p>
@@ -1634,6 +1632,191 @@
             <a:fld id="{F7021451-1387-4CA6-816F-3879F97B5CBC}" type="slidenum">
               <a:rPr lang="en-US"/>
               <a:t>20</a:t>
+            </a:fld>
+            <a:endParaRPr lang="en-US"/>
+          </a:p>
+        </p:txBody>
+      </p:sp>
+    </p:spTree>
+    <p:extLst>
+      <p:ext uri="{BB962C8B-B14F-4D97-AF65-F5344CB8AC3E}">
+        <p14:creationId xmlns:p14="http://schemas.microsoft.com/office/powerpoint/2010/main" val="1024086991"/>
+      </p:ext>
+    </p:extLst>
+  </p:cSld>
+  <p:clrMapOvr>
+    <a:masterClrMapping/>
+  </p:clrMapOvr>
+</p:notes>
+</file>
+
+<file path=ppt/notesSlides/notesSlide21.xml><?xml version="1.0" encoding="utf-8"?>
+<p:notes xmlns:a="http://schemas.openxmlformats.org/drawingml/2006/main" xmlns:r="http://schemas.openxmlformats.org/officeDocument/2006/relationships" xmlns:p="http://schemas.openxmlformats.org/presentationml/2006/main">
+  <p:cSld>
+    <p:spTree>
+      <p:nvGrpSpPr>
+        <p:cNvPr id="1" name=""/>
+        <p:cNvGrpSpPr/>
+        <p:nvPr/>
+      </p:nvGrpSpPr>
+      <p:grpSpPr>
+        <a:xfrm>
+          <a:off x="0" y="0"/>
+          <a:ext cx="0" cy="0"/>
+          <a:chOff x="0" y="0"/>
+          <a:chExt cx="0" cy="0"/>
+        </a:xfrm>
+      </p:grpSpPr>
+      <p:sp>
+        <p:nvSpPr>
+          <p:cNvPr id="2" name="Slide Image Placeholder 1"/>
+          <p:cNvSpPr>
+            <a:spLocks noGrp="1" noRot="1" noChangeAspect="1"/>
+          </p:cNvSpPr>
+          <p:nvPr>
+            <p:ph type="sldImg"/>
+          </p:nvPr>
+        </p:nvSpPr>
+        <p:spPr/>
+      </p:sp>
+      <p:sp>
+        <p:nvSpPr>
+          <p:cNvPr id="3" name="Notes Placeholder 2"/>
+          <p:cNvSpPr>
+            <a:spLocks noGrp="1"/>
+          </p:cNvSpPr>
+          <p:nvPr>
+            <p:ph type="body" idx="1"/>
+          </p:nvPr>
+        </p:nvSpPr>
+        <p:spPr/>
+        <p:txBody>
+          <a:bodyPr/>
+          <a:lstStyle/>
+          <a:p>
+            <a:r>
+              <a:rPr lang="en-US" dirty="0"/>
+              <a:t>Knowledge Check
+1. What is a false match?
+2. What is a missed match?
+3. Why does record linkage matter for AI?
+4. Who may need to review uncertain matches?
+5. What is strong completion evidence for this module?</a:t>
+            </a:r>
+            <a:endParaRPr lang="en-US" dirty="0"/>
+          </a:p>
+        </p:txBody>
+      </p:sp>
+      <p:sp>
+        <p:nvSpPr>
+          <p:cNvPr id="4" name="Slide Number Placeholder 3"/>
+          <p:cNvSpPr>
+            <a:spLocks noGrp="1"/>
+          </p:cNvSpPr>
+          <p:nvPr>
+            <p:ph type="sldNum" sz="quarter" idx="10"/>
+          </p:nvPr>
+        </p:nvSpPr>
+        <p:spPr/>
+        <p:txBody>
+          <a:bodyPr/>
+          <a:lstStyle/>
+          <a:p>
+            <a:fld id="{F7021451-1387-4CA6-816F-3879F97B5CBC}" type="slidenum">
+              <a:rPr lang="en-US"/>
+              <a:t>21</a:t>
+            </a:fld>
+            <a:endParaRPr lang="en-US"/>
+          </a:p>
+        </p:txBody>
+      </p:sp>
+    </p:spTree>
+    <p:extLst>
+      <p:ext uri="{BB962C8B-B14F-4D97-AF65-F5344CB8AC3E}">
+        <p14:creationId xmlns:p14="http://schemas.microsoft.com/office/powerpoint/2010/main" val="1024086991"/>
+      </p:ext>
+    </p:extLst>
+  </p:cSld>
+  <p:clrMapOvr>
+    <a:masterClrMapping/>
+  </p:clrMapOvr>
+</p:notes>
+</file>
+
+<file path=ppt/notesSlides/notesSlide22.xml><?xml version="1.0" encoding="utf-8"?>
+<p:notes xmlns:a="http://schemas.openxmlformats.org/drawingml/2006/main" xmlns:r="http://schemas.openxmlformats.org/officeDocument/2006/relationships" xmlns:p="http://schemas.openxmlformats.org/presentationml/2006/main">
+  <p:cSld>
+    <p:spTree>
+      <p:nvGrpSpPr>
+        <p:cNvPr id="1" name=""/>
+        <p:cNvGrpSpPr/>
+        <p:nvPr/>
+      </p:nvGrpSpPr>
+      <p:grpSpPr>
+        <a:xfrm>
+          <a:off x="0" y="0"/>
+          <a:ext cx="0" cy="0"/>
+          <a:chOff x="0" y="0"/>
+          <a:chExt cx="0" cy="0"/>
+        </a:xfrm>
+      </p:grpSpPr>
+      <p:sp>
+        <p:nvSpPr>
+          <p:cNvPr id="2" name="Slide Image Placeholder 1"/>
+          <p:cNvSpPr>
+            <a:spLocks noGrp="1" noRot="1" noChangeAspect="1"/>
+          </p:cNvSpPr>
+          <p:nvPr>
+            <p:ph type="sldImg"/>
+          </p:nvPr>
+        </p:nvSpPr>
+        <p:spPr/>
+      </p:sp>
+      <p:sp>
+        <p:nvSpPr>
+          <p:cNvPr id="3" name="Notes Placeholder 2"/>
+          <p:cNvSpPr>
+            <a:spLocks noGrp="1"/>
+          </p:cNvSpPr>
+          <p:nvPr>
+            <p:ph type="body" idx="1"/>
+          </p:nvPr>
+        </p:nvSpPr>
+        <p:spPr/>
+        <p:txBody>
+          <a:bodyPr/>
+          <a:lstStyle/>
+          <a:p>
+            <a:r>
+              <a:rPr lang="en-US" dirty="0"/>
+              <a:t>References and Resources
+Public health IIS and surveillance data quality resources
+CDC data modernization resources
+Health information exchange data quality materials
+Agency matching and deduplication procedures</a:t>
+            </a:r>
+            <a:endParaRPr lang="en-US" dirty="0"/>
+          </a:p>
+        </p:txBody>
+      </p:sp>
+      <p:sp>
+        <p:nvSpPr>
+          <p:cNvPr id="4" name="Slide Number Placeholder 3"/>
+          <p:cNvSpPr>
+            <a:spLocks noGrp="1"/>
+          </p:cNvSpPr>
+          <p:nvPr>
+            <p:ph type="sldNum" sz="quarter" idx="10"/>
+          </p:nvPr>
+        </p:nvSpPr>
+        <p:spPr/>
+        <p:txBody>
+          <a:bodyPr/>
+          <a:lstStyle/>
+          <a:p>
+            <a:fld id="{F7021451-1387-4CA6-816F-3879F97B5CBC}" type="slidenum">
+              <a:rPr lang="en-US"/>
+              <a:t>22</a:t>
             </a:fld>
             <a:endParaRPr lang="en-US"/>
           </a:p>
@@ -1698,12 +1881,11 @@
           <a:p>
             <a:r>
               <a:rPr lang="en-US" dirty="0"/>
-              <a:t>Learning Objectives
-Explain why record linkage matters for public health AI.
-Distinguish between deterministic matching, probabilistic matching, entity resolution, and deduplication.
-Identify risks from false matches and missed matches.
-Describe how thresholds, clerical review, and data quality affect matching.
-Produce a linkage risk review for an AI-supported workflow.</a:t>
+              <a:t>Related Playbook Plays
+Play 7: Prioritize Use Cases - This lesson informs Play 7 by helping learners connect the lesson topic to prioritize use cases work in the AI Playbook sequence.
+Play 11: Build and Deploy AI Solutions - This lesson informs Play 11 by helping learners connect the lesson topic to build and deploy ai solutions work in the AI Playbook.
+Play 1: Vision &amp; Guardrails - This lesson informs Play 1 by helping learners connect the lesson topic to vision &amp; guardrails work in the AI Playbook sequence.
+Play 2: Readiness Assessment - This lesson informs Play 2 by helping learners connect the lesson topic to readiness assessment work in the AI Playbook sequence.</a:t>
             </a:r>
             <a:endParaRPr lang="en-US" dirty="0"/>
           </a:p>
@@ -1791,8 +1973,13 @@
           <a:p>
             <a:r>
               <a:rPr lang="en-US" dirty="0"/>
-              <a:t>Module Overview
-Record linkage and entity resolution help public health systems determine whether records refer to the same person, provider, facility, address, organization, event, or outbreak. AI tools often rely on linked data even when the linkage process is invisible to users. This module teaches learners how matching and deduplication affect AI outputs, surveillance quality, and equity.</a:t>
+              <a:t>Related Toolkit Resources
+Tool 3: Equity Impact Assessment Checklist (Checklist) - Use this tool to complete or strengthen the practical exercise for the module using fictional, de-identified, or generalized.
+Tool 4: AI Policy Landscape Scan (Worksheet) - Use AI Policy Landscape Scan to translate this lesson into a documented public health AI planning, governance, implementation,.
+Tool 5: AI Environmental and Resource Impact Review (Checklist) - Use AI Environmental and Resource Impact Review to translate this lesson into a documented public health AI planning,.
+Tool 6: Human-Centered AI Decision Rule Checklist (Checklist) - Use Human-Centered AI Decision Rule Checklist to translate this lesson into a documented public health AI planning, governance,.
+Tool 8: AI Project Charter (Planning) - Use AI Project Charter to translate this lesson into a documented public health AI planning, governance, implementation, or.
+Tool 9: Data Quality Assessment Checklist (Checklist) - Use this tool to complete or strengthen the practical exercise for the module using fictional, de-identified, or generalized.</a:t>
             </a:r>
             <a:endParaRPr lang="en-US" dirty="0"/>
           </a:p>
@@ -1880,10 +2067,12 @@
           <a:p>
             <a:r>
               <a:rPr lang="en-US" dirty="0"/>
-              <a:t>Why This Topic Matters for Public Health AI
-Record linkage matters because public health work often depends on combining information across systems. A surveillance system may need to associate a lab report with an existing case. An IIS may need to match vaccination records from multiple providers. A vital records linkage may support maternal and child health analysis. An AI tool using these linked records may summarize history, predict risk, classify cases, or identify duplicates. If linkage is wrong, the AI output may be wrong.
-False matches and missed matches have different consequences. A false match can combine information from different people or events, creating privacy, safety, and accuracy risks. A missed match can split one person or event into multiple records, leading to duplicate work, incomplete histories, or undercounting. Both errors can affect public health decisions.
-Linkage can also create equity risks. Names, addresses, phone numbers, language, housing status, migration patterns, and documentation practices vary across communities. Matching rules that work well for one population may perform poorly for another. AI workflows that rely on linked data should therefore include subgroup and equity review.</a:t>
+              <a:t>Learning Objectives
+Explain why record linkage matters for public health AI.
+Distinguish between deterministic matching, probabilistic matching, entity resolution, and deduplication.
+Identify risks from false matches and missed matches.
+Describe how thresholds, clerical review, and data quality affect matching.
+Produce a linkage risk review for an AI-supported workflow.</a:t>
             </a:r>
             <a:endParaRPr lang="en-US" dirty="0"/>
           </a:p>
@@ -1971,10 +2160,8 @@
           <a:p>
             <a:r>
               <a:rPr lang="en-US" dirty="0"/>
-              <a:t>Core Concepts
-Record linkage. Record linkage is the process of determining whether records from one or more sources refer to the same entity. The entity may be a person, provider, facility, address, organization, event, or outbreak.
-Entity resolution. Entity resolution is the broader process of identifying, matching, merging, separating, and managing records about the same entity. It includes matching rules, thresholds, review processes, and stewardship.
-Deterministic matching. Deterministic matching uses exact or rule-based agreement across selected fields. It is easier to explain but may miss matches when fields are incomplete or inconsistent.</a:t>
+              <a:t>Module Overview
+Record linkage and entity resolution help public health systems determine whether records refer to the same person, provider, facility, address, organization, event, or outbreak. AI tools often rely on linked data even when the linkage process is invisible to users. This module teaches learners how matching and deduplication affect AI outputs, surveillance quality, and equity.</a:t>
             </a:r>
             <a:endParaRPr lang="en-US" dirty="0"/>
           </a:p>
@@ -2062,9 +2249,10 @@
           <a:p>
             <a:r>
               <a:rPr lang="en-US" dirty="0"/>
-              <a:t>Core Concepts
-Probabilistic matching. Probabilistic matching estimates the likelihood that records refer to the same entity even when fields differ. It can improve recall but requires thresholds, validation, and review.
-Clerical review. Clerical review is human review of uncertain matches. It is essential when automatic matching is not reliable enough for the downstream use.</a:t>
+              <a:t>Why This Topic Matters for Public Health AI
+Record linkage matters because public health work often depends on combining information across systems. A surveillance system may need to associate a lab report with an existing case. An IIS may need to match vaccination records from multiple providers. A vital records linkage may support maternal and child health analysis. An AI tool using these linked records may summarize history, predict risk, classify cases, or identify duplicates. If linkage is wrong, the AI output may be wrong.
+False matches and missed matches have different consequences. A false match can combine information from different people or events, creating privacy, safety, and accuracy risks. A missed match can split one person or event into multiple records, leading to duplicate work, incomplete histories, or undercounting. Both errors can affect public health decisions.
+Linkage can also create equity risks. Names, addresses, phone numbers, language, housing status, migration patterns, and documentation practices vary across communities. Matching rules that work well for one population may perform poorly for another. AI workflows that rely on linked data should therefore include subgroup and equity review.</a:t>
             </a:r>
             <a:endParaRPr lang="en-US" dirty="0"/>
           </a:p>
@@ -2152,9 +2340,10 @@
           <a:p>
             <a:r>
               <a:rPr lang="en-US" dirty="0"/>
-              <a:t>Public Health Example
-An AI-supported case summary may pull together lab reports, case notes, hospitalization information, and prior reports for the same person. If the person matching process incorrectly combines two people, the summary may include information that belongs to someone else. If the process misses a prior record, the summary may omit important history. The investigator needs visibility into linkage confidence and source records.
-An outbreak detection workflow may link complaints, lab results, facility inspections, and geographic data. Entity resolution may be needed to identify whether different facility names refer to the same establishment. AI-generated cluster summaries can be misleading if the facility resolution process is weak.</a:t>
+              <a:t>Core Concepts
+Record linkage. Record linkage is the process of determining whether records from one or more sources refer to the same entity. The entity may be a person, provider, facility, address, organization, event, or outbreak.
+Entity resolution. Entity resolution is the broader process of identifying, matching, merging, separating, and managing records about the same entity. It includes matching rules, thresholds, review processes, and stewardship.
+Deterministic matching. Deterministic matching uses exact or rule-based agreement across selected fields. It is easier to explain but may miss matches when fields are incomplete or inconsistent.</a:t>
             </a:r>
             <a:endParaRPr lang="en-US" dirty="0"/>
           </a:p>
@@ -2242,10 +2431,9 @@
           <a:p>
             <a:r>
               <a:rPr lang="en-US" dirty="0"/>
-              <a:t>Technical Deep Dive
-Matching design begins with the entity being matched and the decision that depends on the match. Person matching may use name, date of birth, address, phone, medical record number, email, sex, or other identifiers. Facility matching may use name, address, license number, geocode, and ownership information. Event matching may use dates, locations, condition, exposure, and related records.
-Thresholds determine when records are automatically linked, automatically separated, or sent for review. Low thresholds may increase false matches. High thresholds may increase missed matches. The right balance depends on the use case. A workflow that affects individual services may need a different tolerance for error than an aggregate trend analysis.
-AI readiness requires documentation of matching methods, fields, thresholds, review processes, error rates, and known limitations. If an AI tool uses linked records, staff should know whether linkage is deterministic, probabilistic, manual, or hybrid. They should also know whether uncertain matches are visible to users and whether AI outputs indicate linkage uncertainty.</a:t>
+              <a:t>Core Concepts
+Probabilistic matching. Probabilistic matching estimates the likelihood that records refer to the same entity even when fields differ. It can improve recall but requires thresholds, validation, and review.
+Clerical review. Clerical review is human review of uncertain matches. It is essential when automatic matching is not reliable enough for the downstream use.</a:t>
             </a:r>
             <a:endParaRPr lang="en-US" dirty="0"/>
           </a:p>
@@ -2868,7 +3056,32 @@
       </p:sp>
       <p:sp>
         <p:nvSpPr>
-          <p:cNvPr id="3" name="Text 1"/>
+          <p:cNvPr id="3" name="Shape 1"/>
+          <p:cNvSpPr/>
+          <p:nvPr/>
+        </p:nvSpPr>
+        <p:spPr>
+          <a:xfrm>
+            <a:off x="0" y="164592"/>
+            <a:ext cx="146304" cy="6693408"/>
+          </a:xfrm>
+          <a:prstGeom prst="rect">
+            <a:avLst/>
+          </a:prstGeom>
+          <a:solidFill>
+            <a:srgbClr val="2F8A28"/>
+          </a:solidFill>
+          <a:ln w="12700">
+            <a:solidFill>
+              <a:srgbClr val="2F8A28"/>
+            </a:solidFill>
+            <a:prstDash val="solid"/>
+          </a:ln>
+        </p:spPr>
+      </p:sp>
+      <p:sp>
+        <p:nvSpPr>
+          <p:cNvPr id="4" name="Text 2"/>
           <p:cNvSpPr/>
           <p:nvPr/>
         </p:nvSpPr>
@@ -2907,7 +3120,7 @@
       </p:sp>
       <p:sp>
         <p:nvSpPr>
-          <p:cNvPr id="4" name="Text 2"/>
+          <p:cNvPr id="5" name="Text 3"/>
           <p:cNvSpPr/>
           <p:nvPr/>
         </p:nvSpPr>
@@ -2946,7 +3159,7 @@
       </p:sp>
       <p:sp>
         <p:nvSpPr>
-          <p:cNvPr id="5" name="Text 3"/>
+          <p:cNvPr id="6" name="Text 4"/>
           <p:cNvSpPr/>
           <p:nvPr/>
         </p:nvSpPr>
@@ -2985,13 +3198,77 @@
       </p:sp>
       <p:sp>
         <p:nvSpPr>
-          <p:cNvPr id="6" name="Text 4"/>
+          <p:cNvPr id="7" name="Shape 5"/>
           <p:cNvSpPr/>
           <p:nvPr/>
         </p:nvSpPr>
         <p:spPr>
           <a:xfrm>
             <a:off x="640080" y="658368"/>
+            <a:ext cx="420624" cy="420624"/>
+          </a:xfrm>
+          <a:prstGeom prst="ellipse">
+            <a:avLst/>
+          </a:prstGeom>
+          <a:solidFill>
+            <a:srgbClr val="0068B7"/>
+          </a:solidFill>
+          <a:ln w="12700">
+            <a:solidFill>
+              <a:srgbClr val="0068B7"/>
+            </a:solidFill>
+            <a:prstDash val="solid"/>
+          </a:ln>
+        </p:spPr>
+      </p:sp>
+      <p:sp>
+        <p:nvSpPr>
+          <p:cNvPr id="8" name="Text 6"/>
+          <p:cNvSpPr/>
+          <p:nvPr/>
+        </p:nvSpPr>
+        <p:spPr>
+          <a:xfrm>
+            <a:off x="640080" y="731520"/>
+            <a:ext cx="420624" cy="164592"/>
+          </a:xfrm>
+          <a:prstGeom prst="rect">
+            <a:avLst/>
+          </a:prstGeom>
+          <a:noFill/>
+          <a:ln/>
+        </p:spPr>
+        <p:txBody>
+          <a:bodyPr wrap="square" lIns="0" tIns="0" rIns="0" bIns="0" rtlCol="0" anchor="ctr"/>
+          <a:lstStyle/>
+          <a:p>
+            <a:pPr algn="ctr" indent="0" marL="0">
+              <a:buNone/>
+            </a:pPr>
+            <a:r>
+              <a:rPr lang="en-US" sz="1100" b="1" dirty="0">
+                <a:solidFill>
+                  <a:srgbClr val="FFFFFF"/>
+                </a:solidFill>
+                <a:latin typeface="Aptos" pitchFamily="34" charset="0"/>
+                <a:ea typeface="Aptos" pitchFamily="34" charset="-122"/>
+                <a:cs typeface="Aptos" pitchFamily="34" charset="-120"/>
+              </a:rPr>
+              <a:t>5</a:t>
+            </a:r>
+            <a:endParaRPr lang="en-US" sz="1100" dirty="0"/>
+          </a:p>
+        </p:txBody>
+      </p:sp>
+      <p:sp>
+        <p:nvSpPr>
+          <p:cNvPr id="9" name="Text 7"/>
+          <p:cNvSpPr/>
+          <p:nvPr/>
+        </p:nvSpPr>
+        <p:spPr>
+          <a:xfrm>
+            <a:off x="640080" y="621792"/>
             <a:ext cx="10881360" cy="566928"/>
           </a:xfrm>
           <a:prstGeom prst="rect">
@@ -3018,7 +3295,7 @@
                 <a:ea typeface="Aptos Display" pitchFamily="34" charset="-122"/>
                 <a:cs typeface="Aptos Display" pitchFamily="34" charset="-120"/>
               </a:rPr>
-              <a:t>Risks, Failure Modes, and Guardrails</a:t>
+              <a:t>Public Health Example</a:t>
             </a:r>
             <a:endParaRPr lang="en-US" sz="2700" dirty="0"/>
           </a:p>
@@ -3026,32 +3303,178 @@
       </p:sp>
       <p:sp>
         <p:nvSpPr>
-          <p:cNvPr id="7" name="Text 5"/>
-          <p:cNvSpPr/>
-          <p:nvPr/>
-        </p:nvSpPr>
-        <p:spPr>
-          <a:xfrm>
-            <a:off x="822960" y="1325880"/>
-            <a:ext cx="10378440" cy="4800600"/>
-          </a:xfrm>
-          <a:prstGeom prst="rect">
-            <a:avLst/>
-          </a:prstGeom>
-          <a:noFill/>
-          <a:ln/>
-        </p:spPr>
-        <p:txBody>
-          <a:bodyPr wrap="square" lIns="1016" tIns="1016" rIns="1016" bIns="1016" rtlCol="0" anchor="t">
+          <p:cNvPr id="10" name="Text 8"/>
+          <p:cNvSpPr/>
+          <p:nvPr/>
+        </p:nvSpPr>
+        <p:spPr>
+          <a:xfrm>
+            <a:off x="868680" y="1417320"/>
+            <a:ext cx="6675120" cy="4434840"/>
+          </a:xfrm>
+          <a:prstGeom prst="rect">
+            <a:avLst/>
+          </a:prstGeom>
+          <a:noFill/>
+          <a:ln/>
+        </p:spPr>
+        <p:txBody>
+          <a:bodyPr wrap="square" lIns="635" tIns="635" rIns="635" bIns="635" rtlCol="0" anchor="t">
             <a:normAutofit/>
           </a:bodyPr>
           <a:lstStyle/>
           <a:p>
+            <a:r>
+              <a:rPr lang="en-US" sz="1700" dirty="0">
+                <a:solidFill>
+                  <a:srgbClr val="17364A"/>
+                </a:solidFill>
+                <a:latin typeface="Aptos" pitchFamily="34" charset="0"/>
+                <a:ea typeface="Aptos" pitchFamily="34" charset="-122"/>
+                <a:cs typeface="Aptos" pitchFamily="34" charset="-120"/>
+              </a:rPr>
+              <a:t>An AI-supported case summary may pull together lab reports, case notes, hospitalization information, and prior reports for.</a:t>
+            </a:r>
+            <a:endParaRPr lang="en-US" sz="1700" dirty="0"/>
+          </a:p>
+          <a:p>
+            <a:r>
+              <a:rPr lang="en-US" sz="1700" dirty="0">
+                <a:solidFill>
+                  <a:srgbClr val="17364A"/>
+                </a:solidFill>
+                <a:latin typeface="Aptos" pitchFamily="34" charset="0"/>
+                <a:ea typeface="Aptos" pitchFamily="34" charset="-122"/>
+                <a:cs typeface="Aptos" pitchFamily="34" charset="-120"/>
+              </a:rPr>
+              <a:t>If the person matching process incorrectly combines two people, the summary may include information that belongs to someone.</a:t>
+            </a:r>
+            <a:endParaRPr lang="en-US" sz="1700" dirty="0"/>
+          </a:p>
+          <a:p>
+            <a:r>
+              <a:rPr lang="en-US" sz="1700" dirty="0">
+                <a:solidFill>
+                  <a:srgbClr val="17364A"/>
+                </a:solidFill>
+                <a:latin typeface="Aptos" pitchFamily="34" charset="0"/>
+                <a:ea typeface="Aptos" pitchFamily="34" charset="-122"/>
+                <a:cs typeface="Aptos" pitchFamily="34" charset="-120"/>
+              </a:rPr>
+              <a:t>If the process misses a prior record, the summary may omit important history.</a:t>
+            </a:r>
+            <a:endParaRPr lang="en-US" sz="1700" dirty="0"/>
+          </a:p>
+          <a:p>
+            <a:r>
+              <a:rPr lang="en-US" sz="1700" dirty="0">
+                <a:solidFill>
+                  <a:srgbClr val="17364A"/>
+                </a:solidFill>
+                <a:latin typeface="Aptos" pitchFamily="34" charset="0"/>
+                <a:ea typeface="Aptos" pitchFamily="34" charset="-122"/>
+                <a:cs typeface="Aptos" pitchFamily="34" charset="-120"/>
+              </a:rPr>
+              <a:t>The investigator needs visibility into linkage confidence and source records.</a:t>
+            </a:r>
+            <a:endParaRPr lang="en-US" sz="1700" dirty="0"/>
+          </a:p>
+        </p:txBody>
+      </p:sp>
+      <p:sp>
+        <p:nvSpPr>
+          <p:cNvPr id="11" name="Shape 9"/>
+          <p:cNvSpPr/>
+          <p:nvPr/>
+        </p:nvSpPr>
+        <p:spPr>
+          <a:xfrm>
+            <a:off x="7909560" y="1417320"/>
+            <a:ext cx="3154680" cy="1828800"/>
+          </a:xfrm>
+          <a:prstGeom prst="roundRect">
+            <a:avLst>
+              <a:gd name="adj" fmla="val 6000"/>
+            </a:avLst>
+          </a:prstGeom>
+          <a:solidFill>
+            <a:srgbClr val="EEF8ED"/>
+          </a:solidFill>
+          <a:ln w="12700">
+            <a:solidFill>
+              <a:srgbClr val="B9D7E6"/>
+            </a:solidFill>
+            <a:prstDash val="solid"/>
+          </a:ln>
+        </p:spPr>
+      </p:sp>
+      <p:sp>
+        <p:nvSpPr>
+          <p:cNvPr id="12" name="Text 10"/>
+          <p:cNvSpPr/>
+          <p:nvPr/>
+        </p:nvSpPr>
+        <p:spPr>
+          <a:xfrm>
+            <a:off x="8074152" y="1563624"/>
+            <a:ext cx="2825496" cy="201168"/>
+          </a:xfrm>
+          <a:prstGeom prst="rect">
+            <a:avLst/>
+          </a:prstGeom>
+          <a:noFill/>
+          <a:ln/>
+        </p:spPr>
+        <p:txBody>
+          <a:bodyPr wrap="square" lIns="0" tIns="0" rIns="0" bIns="0" rtlCol="0" anchor="ctr"/>
+          <a:lstStyle/>
+          <a:p>
             <a:pPr indent="0" marL="0">
               <a:buNone/>
             </a:pPr>
             <a:r>
-              <a:rPr lang="en-US" sz="1420" dirty="0">
+              <a:rPr lang="en-US" sz="950" b="1" dirty="0">
+                <a:solidFill>
+                  <a:srgbClr val="0068B7"/>
+                </a:solidFill>
+                <a:latin typeface="Aptos" pitchFamily="34" charset="0"/>
+                <a:ea typeface="Aptos" pitchFamily="34" charset="-122"/>
+                <a:cs typeface="Aptos" pitchFamily="34" charset="-120"/>
+              </a:rPr>
+              <a:t>Key idea</a:t>
+            </a:r>
+            <a:endParaRPr lang="en-US" sz="950" dirty="0"/>
+          </a:p>
+        </p:txBody>
+      </p:sp>
+      <p:sp>
+        <p:nvSpPr>
+          <p:cNvPr id="13" name="Text 11"/>
+          <p:cNvSpPr/>
+          <p:nvPr/>
+        </p:nvSpPr>
+        <p:spPr>
+          <a:xfrm>
+            <a:off x="8074152" y="1856232"/>
+            <a:ext cx="2825496" cy="1261872"/>
+          </a:xfrm>
+          <a:prstGeom prst="rect">
+            <a:avLst/>
+          </a:prstGeom>
+          <a:noFill/>
+          <a:ln/>
+        </p:spPr>
+        <p:txBody>
+          <a:bodyPr wrap="square" lIns="0" tIns="0" rIns="0" bIns="0" rtlCol="0" anchor="t">
+            <a:normAutofit/>
+          </a:bodyPr>
+          <a:lstStyle/>
+          <a:p>
+            <a:pPr indent="0" marL="0">
+              <a:buNone/>
+            </a:pPr>
+            <a:r>
+              <a:rPr lang="en-US" sz="1250" dirty="0">
                 <a:solidFill>
                   <a:srgbClr val="17364A"/>
                 </a:solidFill>
@@ -3059,9 +3482,116 @@
                 <a:ea typeface="Aptos" pitchFamily="34" charset="-122"/>
                 <a:cs typeface="Aptos" pitchFamily="34" charset="-120"/>
               </a:rPr>
-              <a:t>False matches. False matches can combine data from different people or entities. Guardrails include conservative thresholds for consequential uses, clerical review, and source display. Missed matches. Missed matches can fragment histories and create duplicate work. Guardrails include matching quality monitoring, feedback loops, and review queues. Equity variation. Matching may perform differently across populations. Guardrails include subgroup evaluation, alternative identifiers, and review of naming and address patterns.</a:t>
-            </a:r>
-            <a:endParaRPr lang="en-US" sz="1420" dirty="0"/>
+              <a:t>An AI-supported case summary may pull together lab reports, case notes, hospitalization information, and prior reports for.</a:t>
+            </a:r>
+            <a:endParaRPr lang="en-US" sz="1250" dirty="0"/>
+          </a:p>
+        </p:txBody>
+      </p:sp>
+      <p:sp>
+        <p:nvSpPr>
+          <p:cNvPr id="14" name="Shape 12"/>
+          <p:cNvSpPr/>
+          <p:nvPr/>
+        </p:nvSpPr>
+        <p:spPr>
+          <a:xfrm>
+            <a:off x="7909560" y="3520440"/>
+            <a:ext cx="3154680" cy="1737360"/>
+          </a:xfrm>
+          <a:prstGeom prst="roundRect">
+            <a:avLst>
+              <a:gd name="adj" fmla="val 6316"/>
+            </a:avLst>
+          </a:prstGeom>
+          <a:solidFill>
+            <a:srgbClr val="EAF6F8"/>
+          </a:solidFill>
+          <a:ln w="12700">
+            <a:solidFill>
+              <a:srgbClr val="B9D7E6"/>
+            </a:solidFill>
+            <a:prstDash val="solid"/>
+          </a:ln>
+        </p:spPr>
+      </p:sp>
+      <p:sp>
+        <p:nvSpPr>
+          <p:cNvPr id="15" name="Text 13"/>
+          <p:cNvSpPr/>
+          <p:nvPr/>
+        </p:nvSpPr>
+        <p:spPr>
+          <a:xfrm>
+            <a:off x="8074152" y="3666744"/>
+            <a:ext cx="2825496" cy="201168"/>
+          </a:xfrm>
+          <a:prstGeom prst="rect">
+            <a:avLst/>
+          </a:prstGeom>
+          <a:noFill/>
+          <a:ln/>
+        </p:spPr>
+        <p:txBody>
+          <a:bodyPr wrap="square" lIns="0" tIns="0" rIns="0" bIns="0" rtlCol="0" anchor="ctr"/>
+          <a:lstStyle/>
+          <a:p>
+            <a:pPr indent="0" marL="0">
+              <a:buNone/>
+            </a:pPr>
+            <a:r>
+              <a:rPr lang="en-US" sz="950" b="1" dirty="0">
+                <a:solidFill>
+                  <a:srgbClr val="0068B7"/>
+                </a:solidFill>
+                <a:latin typeface="Aptos" pitchFamily="34" charset="0"/>
+                <a:ea typeface="Aptos" pitchFamily="34" charset="-122"/>
+                <a:cs typeface="Aptos" pitchFamily="34" charset="-120"/>
+              </a:rPr>
+              <a:t>Use this for</a:t>
+            </a:r>
+            <a:endParaRPr lang="en-US" sz="950" dirty="0"/>
+          </a:p>
+        </p:txBody>
+      </p:sp>
+      <p:sp>
+        <p:nvSpPr>
+          <p:cNvPr id="16" name="Text 14"/>
+          <p:cNvSpPr/>
+          <p:nvPr/>
+        </p:nvSpPr>
+        <p:spPr>
+          <a:xfrm>
+            <a:off x="8074152" y="3959352"/>
+            <a:ext cx="2825496" cy="1170432"/>
+          </a:xfrm>
+          <a:prstGeom prst="rect">
+            <a:avLst/>
+          </a:prstGeom>
+          <a:noFill/>
+          <a:ln/>
+        </p:spPr>
+        <p:txBody>
+          <a:bodyPr wrap="square" lIns="0" tIns="0" rIns="0" bIns="0" rtlCol="0" anchor="t">
+            <a:normAutofit/>
+          </a:bodyPr>
+          <a:lstStyle/>
+          <a:p>
+            <a:pPr indent="0" marL="0">
+              <a:buNone/>
+            </a:pPr>
+            <a:r>
+              <a:rPr lang="en-US" sz="1250" dirty="0">
+                <a:solidFill>
+                  <a:srgbClr val="17364A"/>
+                </a:solidFill>
+                <a:latin typeface="Aptos" pitchFamily="34" charset="0"/>
+                <a:ea typeface="Aptos" pitchFamily="34" charset="-122"/>
+                <a:cs typeface="Aptos" pitchFamily="34" charset="-120"/>
+              </a:rPr>
+              <a:t>Connect the concept to public health decisions, safeguards, documentation, or implementation work.</a:t>
+            </a:r>
+            <a:endParaRPr lang="en-US" sz="1250" dirty="0"/>
           </a:p>
         </p:txBody>
       </p:sp>
@@ -3124,7 +3654,32 @@
       </p:sp>
       <p:sp>
         <p:nvSpPr>
-          <p:cNvPr id="3" name="Text 1"/>
+          <p:cNvPr id="3" name="Shape 1"/>
+          <p:cNvSpPr/>
+          <p:nvPr/>
+        </p:nvSpPr>
+        <p:spPr>
+          <a:xfrm>
+            <a:off x="0" y="164592"/>
+            <a:ext cx="146304" cy="6693408"/>
+          </a:xfrm>
+          <a:prstGeom prst="rect">
+            <a:avLst/>
+          </a:prstGeom>
+          <a:solidFill>
+            <a:srgbClr val="2F8A28"/>
+          </a:solidFill>
+          <a:ln w="12700">
+            <a:solidFill>
+              <a:srgbClr val="2F8A28"/>
+            </a:solidFill>
+            <a:prstDash val="solid"/>
+          </a:ln>
+        </p:spPr>
+      </p:sp>
+      <p:sp>
+        <p:nvSpPr>
+          <p:cNvPr id="4" name="Text 2"/>
           <p:cNvSpPr/>
           <p:nvPr/>
         </p:nvSpPr>
@@ -3163,7 +3718,7 @@
       </p:sp>
       <p:sp>
         <p:nvSpPr>
-          <p:cNvPr id="4" name="Text 2"/>
+          <p:cNvPr id="5" name="Text 3"/>
           <p:cNvSpPr/>
           <p:nvPr/>
         </p:nvSpPr>
@@ -3202,7 +3757,7 @@
       </p:sp>
       <p:sp>
         <p:nvSpPr>
-          <p:cNvPr id="5" name="Text 3"/>
+          <p:cNvPr id="6" name="Text 4"/>
           <p:cNvSpPr/>
           <p:nvPr/>
         </p:nvSpPr>
@@ -3241,13 +3796,77 @@
       </p:sp>
       <p:sp>
         <p:nvSpPr>
-          <p:cNvPr id="6" name="Text 4"/>
+          <p:cNvPr id="7" name="Shape 5"/>
           <p:cNvSpPr/>
           <p:nvPr/>
         </p:nvSpPr>
         <p:spPr>
           <a:xfrm>
             <a:off x="640080" y="658368"/>
+            <a:ext cx="420624" cy="420624"/>
+          </a:xfrm>
+          <a:prstGeom prst="ellipse">
+            <a:avLst/>
+          </a:prstGeom>
+          <a:solidFill>
+            <a:srgbClr val="0068B7"/>
+          </a:solidFill>
+          <a:ln w="12700">
+            <a:solidFill>
+              <a:srgbClr val="0068B7"/>
+            </a:solidFill>
+            <a:prstDash val="solid"/>
+          </a:ln>
+        </p:spPr>
+      </p:sp>
+      <p:sp>
+        <p:nvSpPr>
+          <p:cNvPr id="8" name="Text 6"/>
+          <p:cNvSpPr/>
+          <p:nvPr/>
+        </p:nvSpPr>
+        <p:spPr>
+          <a:xfrm>
+            <a:off x="640080" y="731520"/>
+            <a:ext cx="420624" cy="164592"/>
+          </a:xfrm>
+          <a:prstGeom prst="rect">
+            <a:avLst/>
+          </a:prstGeom>
+          <a:noFill/>
+          <a:ln/>
+        </p:spPr>
+        <p:txBody>
+          <a:bodyPr wrap="square" lIns="0" tIns="0" rIns="0" bIns="0" rtlCol="0" anchor="ctr"/>
+          <a:lstStyle/>
+          <a:p>
+            <a:pPr algn="ctr" indent="0" marL="0">
+              <a:buNone/>
+            </a:pPr>
+            <a:r>
+              <a:rPr lang="en-US" sz="1100" b="1" dirty="0">
+                <a:solidFill>
+                  <a:srgbClr val="FFFFFF"/>
+                </a:solidFill>
+                <a:latin typeface="Aptos" pitchFamily="34" charset="0"/>
+                <a:ea typeface="Aptos" pitchFamily="34" charset="-122"/>
+                <a:cs typeface="Aptos" pitchFamily="34" charset="-120"/>
+              </a:rPr>
+              <a:t>6</a:t>
+            </a:r>
+            <a:endParaRPr lang="en-US" sz="1100" dirty="0"/>
+          </a:p>
+        </p:txBody>
+      </p:sp>
+      <p:sp>
+        <p:nvSpPr>
+          <p:cNvPr id="9" name="Text 7"/>
+          <p:cNvSpPr/>
+          <p:nvPr/>
+        </p:nvSpPr>
+        <p:spPr>
+          <a:xfrm>
+            <a:off x="640080" y="621792"/>
             <a:ext cx="10881360" cy="566928"/>
           </a:xfrm>
           <a:prstGeom prst="rect">
@@ -3274,7 +3893,7 @@
                 <a:ea typeface="Aptos Display" pitchFamily="34" charset="-122"/>
                 <a:cs typeface="Aptos Display" pitchFamily="34" charset="-120"/>
               </a:rPr>
-              <a:t>Risks, Failure Modes, and Guardrails Continued</a:t>
+              <a:t>Technical Deep Dive</a:t>
             </a:r>
             <a:endParaRPr lang="en-US" sz="2700" dirty="0"/>
           </a:p>
@@ -3282,32 +3901,178 @@
       </p:sp>
       <p:sp>
         <p:nvSpPr>
-          <p:cNvPr id="7" name="Text 5"/>
-          <p:cNvSpPr/>
-          <p:nvPr/>
-        </p:nvSpPr>
-        <p:spPr>
-          <a:xfrm>
-            <a:off x="822960" y="1325880"/>
-            <a:ext cx="10378440" cy="4800600"/>
-          </a:xfrm>
-          <a:prstGeom prst="rect">
-            <a:avLst/>
-          </a:prstGeom>
-          <a:noFill/>
-          <a:ln/>
-        </p:spPr>
-        <p:txBody>
-          <a:bodyPr wrap="square" lIns="1016" tIns="1016" rIns="1016" bIns="1016" rtlCol="0" anchor="t">
+          <p:cNvPr id="10" name="Text 8"/>
+          <p:cNvSpPr/>
+          <p:nvPr/>
+        </p:nvSpPr>
+        <p:spPr>
+          <a:xfrm>
+            <a:off x="868680" y="1417320"/>
+            <a:ext cx="6675120" cy="4434840"/>
+          </a:xfrm>
+          <a:prstGeom prst="rect">
+            <a:avLst/>
+          </a:prstGeom>
+          <a:noFill/>
+          <a:ln/>
+        </p:spPr>
+        <p:txBody>
+          <a:bodyPr wrap="square" lIns="635" tIns="635" rIns="635" bIns="635" rtlCol="0" anchor="t">
             <a:normAutofit/>
           </a:bodyPr>
           <a:lstStyle/>
           <a:p>
+            <a:r>
+              <a:rPr lang="en-US" sz="1700" dirty="0">
+                <a:solidFill>
+                  <a:srgbClr val="17364A"/>
+                </a:solidFill>
+                <a:latin typeface="Aptos" pitchFamily="34" charset="0"/>
+                <a:ea typeface="Aptos" pitchFamily="34" charset="-122"/>
+                <a:cs typeface="Aptos" pitchFamily="34" charset="-120"/>
+              </a:rPr>
+              <a:t>Matching design begins with the entity being matched and the decision that depends on the match.</a:t>
+            </a:r>
+            <a:endParaRPr lang="en-US" sz="1700" dirty="0"/>
+          </a:p>
+          <a:p>
+            <a:r>
+              <a:rPr lang="en-US" sz="1700" dirty="0">
+                <a:solidFill>
+                  <a:srgbClr val="17364A"/>
+                </a:solidFill>
+                <a:latin typeface="Aptos" pitchFamily="34" charset="0"/>
+                <a:ea typeface="Aptos" pitchFamily="34" charset="-122"/>
+                <a:cs typeface="Aptos" pitchFamily="34" charset="-120"/>
+              </a:rPr>
+              <a:t>Person matching may use name, date of birth, address, phone, medical record number, email, sex, or other identifiers.</a:t>
+            </a:r>
+            <a:endParaRPr lang="en-US" sz="1700" dirty="0"/>
+          </a:p>
+          <a:p>
+            <a:r>
+              <a:rPr lang="en-US" sz="1700" dirty="0">
+                <a:solidFill>
+                  <a:srgbClr val="17364A"/>
+                </a:solidFill>
+                <a:latin typeface="Aptos" pitchFamily="34" charset="0"/>
+                <a:ea typeface="Aptos" pitchFamily="34" charset="-122"/>
+                <a:cs typeface="Aptos" pitchFamily="34" charset="-120"/>
+              </a:rPr>
+              <a:t>Facility matching may use name, address, license number, geocode, and ownership information.</a:t>
+            </a:r>
+            <a:endParaRPr lang="en-US" sz="1700" dirty="0"/>
+          </a:p>
+          <a:p>
+            <a:r>
+              <a:rPr lang="en-US" sz="1700" dirty="0">
+                <a:solidFill>
+                  <a:srgbClr val="17364A"/>
+                </a:solidFill>
+                <a:latin typeface="Aptos" pitchFamily="34" charset="0"/>
+                <a:ea typeface="Aptos" pitchFamily="34" charset="-122"/>
+                <a:cs typeface="Aptos" pitchFamily="34" charset="-120"/>
+              </a:rPr>
+              <a:t>Event matching may use dates, locations, condition, exposure, and related records.</a:t>
+            </a:r>
+            <a:endParaRPr lang="en-US" sz="1700" dirty="0"/>
+          </a:p>
+        </p:txBody>
+      </p:sp>
+      <p:sp>
+        <p:nvSpPr>
+          <p:cNvPr id="11" name="Shape 9"/>
+          <p:cNvSpPr/>
+          <p:nvPr/>
+        </p:nvSpPr>
+        <p:spPr>
+          <a:xfrm>
+            <a:off x="7909560" y="1417320"/>
+            <a:ext cx="3154680" cy="1828800"/>
+          </a:xfrm>
+          <a:prstGeom prst="roundRect">
+            <a:avLst>
+              <a:gd name="adj" fmla="val 6000"/>
+            </a:avLst>
+          </a:prstGeom>
+          <a:solidFill>
+            <a:srgbClr val="EEF8ED"/>
+          </a:solidFill>
+          <a:ln w="12700">
+            <a:solidFill>
+              <a:srgbClr val="B9D7E6"/>
+            </a:solidFill>
+            <a:prstDash val="solid"/>
+          </a:ln>
+        </p:spPr>
+      </p:sp>
+      <p:sp>
+        <p:nvSpPr>
+          <p:cNvPr id="12" name="Text 10"/>
+          <p:cNvSpPr/>
+          <p:nvPr/>
+        </p:nvSpPr>
+        <p:spPr>
+          <a:xfrm>
+            <a:off x="8074152" y="1563624"/>
+            <a:ext cx="2825496" cy="201168"/>
+          </a:xfrm>
+          <a:prstGeom prst="rect">
+            <a:avLst/>
+          </a:prstGeom>
+          <a:noFill/>
+          <a:ln/>
+        </p:spPr>
+        <p:txBody>
+          <a:bodyPr wrap="square" lIns="0" tIns="0" rIns="0" bIns="0" rtlCol="0" anchor="ctr"/>
+          <a:lstStyle/>
+          <a:p>
             <a:pPr indent="0" marL="0">
               <a:buNone/>
             </a:pPr>
             <a:r>
-              <a:rPr lang="en-US" sz="1420" dirty="0">
+              <a:rPr lang="en-US" sz="950" b="1" dirty="0">
+                <a:solidFill>
+                  <a:srgbClr val="0068B7"/>
+                </a:solidFill>
+                <a:latin typeface="Aptos" pitchFamily="34" charset="0"/>
+                <a:ea typeface="Aptos" pitchFamily="34" charset="-122"/>
+                <a:cs typeface="Aptos" pitchFamily="34" charset="-120"/>
+              </a:rPr>
+              <a:t>Key idea</a:t>
+            </a:r>
+            <a:endParaRPr lang="en-US" sz="950" dirty="0"/>
+          </a:p>
+        </p:txBody>
+      </p:sp>
+      <p:sp>
+        <p:nvSpPr>
+          <p:cNvPr id="13" name="Text 11"/>
+          <p:cNvSpPr/>
+          <p:nvPr/>
+        </p:nvSpPr>
+        <p:spPr>
+          <a:xfrm>
+            <a:off x="8074152" y="1856232"/>
+            <a:ext cx="2825496" cy="1261872"/>
+          </a:xfrm>
+          <a:prstGeom prst="rect">
+            <a:avLst/>
+          </a:prstGeom>
+          <a:noFill/>
+          <a:ln/>
+        </p:spPr>
+        <p:txBody>
+          <a:bodyPr wrap="square" lIns="0" tIns="0" rIns="0" bIns="0" rtlCol="0" anchor="t">
+            <a:normAutofit/>
+          </a:bodyPr>
+          <a:lstStyle/>
+          <a:p>
+            <a:pPr indent="0" marL="0">
+              <a:buNone/>
+            </a:pPr>
+            <a:r>
+              <a:rPr lang="en-US" sz="1250" dirty="0">
                 <a:solidFill>
                   <a:srgbClr val="17364A"/>
                 </a:solidFill>
@@ -3315,9 +4080,116 @@
                 <a:ea typeface="Aptos" pitchFamily="34" charset="-122"/>
                 <a:cs typeface="Aptos" pitchFamily="34" charset="-120"/>
               </a:rPr>
-              <a:t>Hidden linkage uncertainty. AI outputs may present linked data as certain. Guardrails include confidence indicators, source records, and user review of uncertain matches.</a:t>
-            </a:r>
-            <a:endParaRPr lang="en-US" sz="1420" dirty="0"/>
+              <a:t>Matching design begins with the entity being matched and the decision that depends on the match.</a:t>
+            </a:r>
+            <a:endParaRPr lang="en-US" sz="1250" dirty="0"/>
+          </a:p>
+        </p:txBody>
+      </p:sp>
+      <p:sp>
+        <p:nvSpPr>
+          <p:cNvPr id="14" name="Shape 12"/>
+          <p:cNvSpPr/>
+          <p:nvPr/>
+        </p:nvSpPr>
+        <p:spPr>
+          <a:xfrm>
+            <a:off x="7909560" y="3520440"/>
+            <a:ext cx="3154680" cy="1737360"/>
+          </a:xfrm>
+          <a:prstGeom prst="roundRect">
+            <a:avLst>
+              <a:gd name="adj" fmla="val 6316"/>
+            </a:avLst>
+          </a:prstGeom>
+          <a:solidFill>
+            <a:srgbClr val="EAF6F8"/>
+          </a:solidFill>
+          <a:ln w="12700">
+            <a:solidFill>
+              <a:srgbClr val="B9D7E6"/>
+            </a:solidFill>
+            <a:prstDash val="solid"/>
+          </a:ln>
+        </p:spPr>
+      </p:sp>
+      <p:sp>
+        <p:nvSpPr>
+          <p:cNvPr id="15" name="Text 13"/>
+          <p:cNvSpPr/>
+          <p:nvPr/>
+        </p:nvSpPr>
+        <p:spPr>
+          <a:xfrm>
+            <a:off x="8074152" y="3666744"/>
+            <a:ext cx="2825496" cy="201168"/>
+          </a:xfrm>
+          <a:prstGeom prst="rect">
+            <a:avLst/>
+          </a:prstGeom>
+          <a:noFill/>
+          <a:ln/>
+        </p:spPr>
+        <p:txBody>
+          <a:bodyPr wrap="square" lIns="0" tIns="0" rIns="0" bIns="0" rtlCol="0" anchor="ctr"/>
+          <a:lstStyle/>
+          <a:p>
+            <a:pPr indent="0" marL="0">
+              <a:buNone/>
+            </a:pPr>
+            <a:r>
+              <a:rPr lang="en-US" sz="950" b="1" dirty="0">
+                <a:solidFill>
+                  <a:srgbClr val="0068B7"/>
+                </a:solidFill>
+                <a:latin typeface="Aptos" pitchFamily="34" charset="0"/>
+                <a:ea typeface="Aptos" pitchFamily="34" charset="-122"/>
+                <a:cs typeface="Aptos" pitchFamily="34" charset="-120"/>
+              </a:rPr>
+              <a:t>Use this for</a:t>
+            </a:r>
+            <a:endParaRPr lang="en-US" sz="950" dirty="0"/>
+          </a:p>
+        </p:txBody>
+      </p:sp>
+      <p:sp>
+        <p:nvSpPr>
+          <p:cNvPr id="16" name="Text 14"/>
+          <p:cNvSpPr/>
+          <p:nvPr/>
+        </p:nvSpPr>
+        <p:spPr>
+          <a:xfrm>
+            <a:off x="8074152" y="3959352"/>
+            <a:ext cx="2825496" cy="1170432"/>
+          </a:xfrm>
+          <a:prstGeom prst="rect">
+            <a:avLst/>
+          </a:prstGeom>
+          <a:noFill/>
+          <a:ln/>
+        </p:spPr>
+        <p:txBody>
+          <a:bodyPr wrap="square" lIns="0" tIns="0" rIns="0" bIns="0" rtlCol="0" anchor="t">
+            <a:normAutofit/>
+          </a:bodyPr>
+          <a:lstStyle/>
+          <a:p>
+            <a:pPr indent="0" marL="0">
+              <a:buNone/>
+            </a:pPr>
+            <a:r>
+              <a:rPr lang="en-US" sz="1250" dirty="0">
+                <a:solidFill>
+                  <a:srgbClr val="17364A"/>
+                </a:solidFill>
+                <a:latin typeface="Aptos" pitchFamily="34" charset="0"/>
+                <a:ea typeface="Aptos" pitchFamily="34" charset="-122"/>
+                <a:cs typeface="Aptos" pitchFamily="34" charset="-120"/>
+              </a:rPr>
+              <a:t>Connect the concept to public health decisions, safeguards, documentation, or implementation work.</a:t>
+            </a:r>
+            <a:endParaRPr lang="en-US" sz="1250" dirty="0"/>
           </a:p>
         </p:txBody>
       </p:sp>
@@ -3380,7 +4252,32 @@
       </p:sp>
       <p:sp>
         <p:nvSpPr>
-          <p:cNvPr id="3" name="Text 1"/>
+          <p:cNvPr id="3" name="Shape 1"/>
+          <p:cNvSpPr/>
+          <p:nvPr/>
+        </p:nvSpPr>
+        <p:spPr>
+          <a:xfrm>
+            <a:off x="0" y="164592"/>
+            <a:ext cx="146304" cy="6693408"/>
+          </a:xfrm>
+          <a:prstGeom prst="rect">
+            <a:avLst/>
+          </a:prstGeom>
+          <a:solidFill>
+            <a:srgbClr val="2F8A28"/>
+          </a:solidFill>
+          <a:ln w="12700">
+            <a:solidFill>
+              <a:srgbClr val="2F8A28"/>
+            </a:solidFill>
+            <a:prstDash val="solid"/>
+          </a:ln>
+        </p:spPr>
+      </p:sp>
+      <p:sp>
+        <p:nvSpPr>
+          <p:cNvPr id="4" name="Text 2"/>
           <p:cNvSpPr/>
           <p:nvPr/>
         </p:nvSpPr>
@@ -3419,7 +4316,7 @@
       </p:sp>
       <p:sp>
         <p:nvSpPr>
-          <p:cNvPr id="4" name="Text 2"/>
+          <p:cNvPr id="5" name="Text 3"/>
           <p:cNvSpPr/>
           <p:nvPr/>
         </p:nvSpPr>
@@ -3458,7 +4355,7 @@
       </p:sp>
       <p:sp>
         <p:nvSpPr>
-          <p:cNvPr id="5" name="Text 3"/>
+          <p:cNvPr id="6" name="Text 4"/>
           <p:cNvSpPr/>
           <p:nvPr/>
         </p:nvSpPr>
@@ -3497,13 +4394,77 @@
       </p:sp>
       <p:sp>
         <p:nvSpPr>
-          <p:cNvPr id="6" name="Text 4"/>
+          <p:cNvPr id="7" name="Shape 5"/>
           <p:cNvSpPr/>
           <p:nvPr/>
         </p:nvSpPr>
         <p:spPr>
           <a:xfrm>
             <a:off x="640080" y="658368"/>
+            <a:ext cx="420624" cy="420624"/>
+          </a:xfrm>
+          <a:prstGeom prst="ellipse">
+            <a:avLst/>
+          </a:prstGeom>
+          <a:solidFill>
+            <a:srgbClr val="0068B7"/>
+          </a:solidFill>
+          <a:ln w="12700">
+            <a:solidFill>
+              <a:srgbClr val="0068B7"/>
+            </a:solidFill>
+            <a:prstDash val="solid"/>
+          </a:ln>
+        </p:spPr>
+      </p:sp>
+      <p:sp>
+        <p:nvSpPr>
+          <p:cNvPr id="8" name="Text 6"/>
+          <p:cNvSpPr/>
+          <p:nvPr/>
+        </p:nvSpPr>
+        <p:spPr>
+          <a:xfrm>
+            <a:off x="640080" y="731520"/>
+            <a:ext cx="420624" cy="164592"/>
+          </a:xfrm>
+          <a:prstGeom prst="rect">
+            <a:avLst/>
+          </a:prstGeom>
+          <a:noFill/>
+          <a:ln/>
+        </p:spPr>
+        <p:txBody>
+          <a:bodyPr wrap="square" lIns="0" tIns="0" rIns="0" bIns="0" rtlCol="0" anchor="ctr"/>
+          <a:lstStyle/>
+          <a:p>
+            <a:pPr algn="ctr" indent="0" marL="0">
+              <a:buNone/>
+            </a:pPr>
+            <a:r>
+              <a:rPr lang="en-US" sz="1100" b="1" dirty="0">
+                <a:solidFill>
+                  <a:srgbClr val="FFFFFF"/>
+                </a:solidFill>
+                <a:latin typeface="Aptos" pitchFamily="34" charset="0"/>
+                <a:ea typeface="Aptos" pitchFamily="34" charset="-122"/>
+                <a:cs typeface="Aptos" pitchFamily="34" charset="-120"/>
+              </a:rPr>
+              <a:t>7</a:t>
+            </a:r>
+            <a:endParaRPr lang="en-US" sz="1100" dirty="0"/>
+          </a:p>
+        </p:txBody>
+      </p:sp>
+      <p:sp>
+        <p:nvSpPr>
+          <p:cNvPr id="9" name="Text 7"/>
+          <p:cNvSpPr/>
+          <p:nvPr/>
+        </p:nvSpPr>
+        <p:spPr>
+          <a:xfrm>
+            <a:off x="640080" y="621792"/>
             <a:ext cx="10881360" cy="566928"/>
           </a:xfrm>
           <a:prstGeom prst="rect">
@@ -3530,7 +4491,7 @@
                 <a:ea typeface="Aptos Display" pitchFamily="34" charset="-122"/>
                 <a:cs typeface="Aptos Display" pitchFamily="34" charset="-120"/>
               </a:rPr>
-              <a:t>Application to AI-Supported Workflows</a:t>
+              <a:t>Risks, Failure Modes, and Guardrails</a:t>
             </a:r>
             <a:endParaRPr lang="en-US" sz="2700" dirty="0"/>
           </a:p>
@@ -3538,32 +4499,178 @@
       </p:sp>
       <p:sp>
         <p:nvSpPr>
-          <p:cNvPr id="7" name="Text 5"/>
-          <p:cNvSpPr/>
-          <p:nvPr/>
-        </p:nvSpPr>
-        <p:spPr>
-          <a:xfrm>
-            <a:off x="822960" y="1325880"/>
-            <a:ext cx="10378440" cy="4800600"/>
-          </a:xfrm>
-          <a:prstGeom prst="rect">
-            <a:avLst/>
-          </a:prstGeom>
-          <a:noFill/>
-          <a:ln/>
-        </p:spPr>
-        <p:txBody>
-          <a:bodyPr wrap="square" lIns="1016" tIns="1016" rIns="1016" bIns="1016" rtlCol="0" anchor="t">
+          <p:cNvPr id="10" name="Text 8"/>
+          <p:cNvSpPr/>
+          <p:nvPr/>
+        </p:nvSpPr>
+        <p:spPr>
+          <a:xfrm>
+            <a:off x="868680" y="1417320"/>
+            <a:ext cx="6675120" cy="4434840"/>
+          </a:xfrm>
+          <a:prstGeom prst="rect">
+            <a:avLst/>
+          </a:prstGeom>
+          <a:noFill/>
+          <a:ln/>
+        </p:spPr>
+        <p:txBody>
+          <a:bodyPr wrap="square" lIns="635" tIns="635" rIns="635" bIns="635" rtlCol="0" anchor="t">
             <a:normAutofit/>
           </a:bodyPr>
           <a:lstStyle/>
           <a:p>
+            <a:r>
+              <a:rPr lang="en-US" sz="1700" dirty="0">
+                <a:solidFill>
+                  <a:srgbClr val="17364A"/>
+                </a:solidFill>
+                <a:latin typeface="Aptos" pitchFamily="34" charset="0"/>
+                <a:ea typeface="Aptos" pitchFamily="34" charset="-122"/>
+                <a:cs typeface="Aptos" pitchFamily="34" charset="-120"/>
+              </a:rPr>
+              <a:t>False matches.</a:t>
+            </a:r>
+            <a:endParaRPr lang="en-US" sz="1700" dirty="0"/>
+          </a:p>
+          <a:p>
+            <a:r>
+              <a:rPr lang="en-US" sz="1700" dirty="0">
+                <a:solidFill>
+                  <a:srgbClr val="17364A"/>
+                </a:solidFill>
+                <a:latin typeface="Aptos" pitchFamily="34" charset="0"/>
+                <a:ea typeface="Aptos" pitchFamily="34" charset="-122"/>
+                <a:cs typeface="Aptos" pitchFamily="34" charset="-120"/>
+              </a:rPr>
+              <a:t>False matches can combine data from different people or entities.</a:t>
+            </a:r>
+            <a:endParaRPr lang="en-US" sz="1700" dirty="0"/>
+          </a:p>
+          <a:p>
+            <a:r>
+              <a:rPr lang="en-US" sz="1700" dirty="0">
+                <a:solidFill>
+                  <a:srgbClr val="17364A"/>
+                </a:solidFill>
+                <a:latin typeface="Aptos" pitchFamily="34" charset="0"/>
+                <a:ea typeface="Aptos" pitchFamily="34" charset="-122"/>
+                <a:cs typeface="Aptos" pitchFamily="34" charset="-120"/>
+              </a:rPr>
+              <a:t>Guardrails include conservative thresholds for consequential uses, clerical review, and source display.</a:t>
+            </a:r>
+            <a:endParaRPr lang="en-US" sz="1700" dirty="0"/>
+          </a:p>
+          <a:p>
+            <a:r>
+              <a:rPr lang="en-US" sz="1700" dirty="0">
+                <a:solidFill>
+                  <a:srgbClr val="17364A"/>
+                </a:solidFill>
+                <a:latin typeface="Aptos" pitchFamily="34" charset="0"/>
+                <a:ea typeface="Aptos" pitchFamily="34" charset="-122"/>
+                <a:cs typeface="Aptos" pitchFamily="34" charset="-120"/>
+              </a:rPr>
+              <a:t>Missed matches.</a:t>
+            </a:r>
+            <a:endParaRPr lang="en-US" sz="1700" dirty="0"/>
+          </a:p>
+        </p:txBody>
+      </p:sp>
+      <p:sp>
+        <p:nvSpPr>
+          <p:cNvPr id="11" name="Shape 9"/>
+          <p:cNvSpPr/>
+          <p:nvPr/>
+        </p:nvSpPr>
+        <p:spPr>
+          <a:xfrm>
+            <a:off x="7909560" y="1417320"/>
+            <a:ext cx="3154680" cy="1828800"/>
+          </a:xfrm>
+          <a:prstGeom prst="roundRect">
+            <a:avLst>
+              <a:gd name="adj" fmla="val 6000"/>
+            </a:avLst>
+          </a:prstGeom>
+          <a:solidFill>
+            <a:srgbClr val="EEF8ED"/>
+          </a:solidFill>
+          <a:ln w="12700">
+            <a:solidFill>
+              <a:srgbClr val="B9D7E6"/>
+            </a:solidFill>
+            <a:prstDash val="solid"/>
+          </a:ln>
+        </p:spPr>
+      </p:sp>
+      <p:sp>
+        <p:nvSpPr>
+          <p:cNvPr id="12" name="Text 10"/>
+          <p:cNvSpPr/>
+          <p:nvPr/>
+        </p:nvSpPr>
+        <p:spPr>
+          <a:xfrm>
+            <a:off x="8074152" y="1563624"/>
+            <a:ext cx="2825496" cy="201168"/>
+          </a:xfrm>
+          <a:prstGeom prst="rect">
+            <a:avLst/>
+          </a:prstGeom>
+          <a:noFill/>
+          <a:ln/>
+        </p:spPr>
+        <p:txBody>
+          <a:bodyPr wrap="square" lIns="0" tIns="0" rIns="0" bIns="0" rtlCol="0" anchor="ctr"/>
+          <a:lstStyle/>
+          <a:p>
             <a:pPr indent="0" marL="0">
               <a:buNone/>
             </a:pPr>
             <a:r>
-              <a:rPr lang="en-US" sz="1420" dirty="0">
+              <a:rPr lang="en-US" sz="950" b="1" dirty="0">
+                <a:solidFill>
+                  <a:srgbClr val="0068B7"/>
+                </a:solidFill>
+                <a:latin typeface="Aptos" pitchFamily="34" charset="0"/>
+                <a:ea typeface="Aptos" pitchFamily="34" charset="-122"/>
+                <a:cs typeface="Aptos" pitchFamily="34" charset="-120"/>
+              </a:rPr>
+              <a:t>Key idea</a:t>
+            </a:r>
+            <a:endParaRPr lang="en-US" sz="950" dirty="0"/>
+          </a:p>
+        </p:txBody>
+      </p:sp>
+      <p:sp>
+        <p:nvSpPr>
+          <p:cNvPr id="13" name="Text 11"/>
+          <p:cNvSpPr/>
+          <p:nvPr/>
+        </p:nvSpPr>
+        <p:spPr>
+          <a:xfrm>
+            <a:off x="8074152" y="1856232"/>
+            <a:ext cx="2825496" cy="1261872"/>
+          </a:xfrm>
+          <a:prstGeom prst="rect">
+            <a:avLst/>
+          </a:prstGeom>
+          <a:noFill/>
+          <a:ln/>
+        </p:spPr>
+        <p:txBody>
+          <a:bodyPr wrap="square" lIns="0" tIns="0" rIns="0" bIns="0" rtlCol="0" anchor="t">
+            <a:normAutofit/>
+          </a:bodyPr>
+          <a:lstStyle/>
+          <a:p>
+            <a:pPr indent="0" marL="0">
+              <a:buNone/>
+            </a:pPr>
+            <a:r>
+              <a:rPr lang="en-US" sz="1250" dirty="0">
                 <a:solidFill>
                   <a:srgbClr val="17364A"/>
                 </a:solidFill>
@@ -3571,9 +4678,116 @@
                 <a:ea typeface="Aptos" pitchFamily="34" charset="-122"/>
                 <a:cs typeface="Aptos" pitchFamily="34" charset="-120"/>
               </a:rPr>
-              <a:t>Generative AI may summarize linked records, so source attribution and linkage confidence should be visible. Predictive analytics may use features created from linked records, making match quality part of model validity. NLP may extract identifiers from text to support linkage, which requires privacy and accuracy review. Agentic AI should not automatically merge or update records without strong approval and rollback procedures.</a:t>
-            </a:r>
-            <a:endParaRPr lang="en-US" sz="1420" dirty="0"/>
+              <a:t>False matches.</a:t>
+            </a:r>
+            <a:endParaRPr lang="en-US" sz="1250" dirty="0"/>
+          </a:p>
+        </p:txBody>
+      </p:sp>
+      <p:sp>
+        <p:nvSpPr>
+          <p:cNvPr id="14" name="Shape 12"/>
+          <p:cNvSpPr/>
+          <p:nvPr/>
+        </p:nvSpPr>
+        <p:spPr>
+          <a:xfrm>
+            <a:off x="7909560" y="3520440"/>
+            <a:ext cx="3154680" cy="1737360"/>
+          </a:xfrm>
+          <a:prstGeom prst="roundRect">
+            <a:avLst>
+              <a:gd name="adj" fmla="val 6316"/>
+            </a:avLst>
+          </a:prstGeom>
+          <a:solidFill>
+            <a:srgbClr val="EAF6F8"/>
+          </a:solidFill>
+          <a:ln w="12700">
+            <a:solidFill>
+              <a:srgbClr val="B9D7E6"/>
+            </a:solidFill>
+            <a:prstDash val="solid"/>
+          </a:ln>
+        </p:spPr>
+      </p:sp>
+      <p:sp>
+        <p:nvSpPr>
+          <p:cNvPr id="15" name="Text 13"/>
+          <p:cNvSpPr/>
+          <p:nvPr/>
+        </p:nvSpPr>
+        <p:spPr>
+          <a:xfrm>
+            <a:off x="8074152" y="3666744"/>
+            <a:ext cx="2825496" cy="201168"/>
+          </a:xfrm>
+          <a:prstGeom prst="rect">
+            <a:avLst/>
+          </a:prstGeom>
+          <a:noFill/>
+          <a:ln/>
+        </p:spPr>
+        <p:txBody>
+          <a:bodyPr wrap="square" lIns="0" tIns="0" rIns="0" bIns="0" rtlCol="0" anchor="ctr"/>
+          <a:lstStyle/>
+          <a:p>
+            <a:pPr indent="0" marL="0">
+              <a:buNone/>
+            </a:pPr>
+            <a:r>
+              <a:rPr lang="en-US" sz="950" b="1" dirty="0">
+                <a:solidFill>
+                  <a:srgbClr val="0068B7"/>
+                </a:solidFill>
+                <a:latin typeface="Aptos" pitchFamily="34" charset="0"/>
+                <a:ea typeface="Aptos" pitchFamily="34" charset="-122"/>
+                <a:cs typeface="Aptos" pitchFamily="34" charset="-120"/>
+              </a:rPr>
+              <a:t>Use this for</a:t>
+            </a:r>
+            <a:endParaRPr lang="en-US" sz="950" dirty="0"/>
+          </a:p>
+        </p:txBody>
+      </p:sp>
+      <p:sp>
+        <p:nvSpPr>
+          <p:cNvPr id="16" name="Text 14"/>
+          <p:cNvSpPr/>
+          <p:nvPr/>
+        </p:nvSpPr>
+        <p:spPr>
+          <a:xfrm>
+            <a:off x="8074152" y="3959352"/>
+            <a:ext cx="2825496" cy="1170432"/>
+          </a:xfrm>
+          <a:prstGeom prst="rect">
+            <a:avLst/>
+          </a:prstGeom>
+          <a:noFill/>
+          <a:ln/>
+        </p:spPr>
+        <p:txBody>
+          <a:bodyPr wrap="square" lIns="0" tIns="0" rIns="0" bIns="0" rtlCol="0" anchor="t">
+            <a:normAutofit/>
+          </a:bodyPr>
+          <a:lstStyle/>
+          <a:p>
+            <a:pPr indent="0" marL="0">
+              <a:buNone/>
+            </a:pPr>
+            <a:r>
+              <a:rPr lang="en-US" sz="1250" dirty="0">
+                <a:solidFill>
+                  <a:srgbClr val="17364A"/>
+                </a:solidFill>
+                <a:latin typeface="Aptos" pitchFamily="34" charset="0"/>
+                <a:ea typeface="Aptos" pitchFamily="34" charset="-122"/>
+                <a:cs typeface="Aptos" pitchFamily="34" charset="-120"/>
+              </a:rPr>
+              <a:t>Connect the concept to public health decisions, safeguards, documentation, or implementation work.</a:t>
+            </a:r>
+            <a:endParaRPr lang="en-US" sz="1250" dirty="0"/>
           </a:p>
         </p:txBody>
       </p:sp>
@@ -3636,7 +4850,32 @@
       </p:sp>
       <p:sp>
         <p:nvSpPr>
-          <p:cNvPr id="3" name="Text 1"/>
+          <p:cNvPr id="3" name="Shape 1"/>
+          <p:cNvSpPr/>
+          <p:nvPr/>
+        </p:nvSpPr>
+        <p:spPr>
+          <a:xfrm>
+            <a:off x="0" y="164592"/>
+            <a:ext cx="146304" cy="6693408"/>
+          </a:xfrm>
+          <a:prstGeom prst="rect">
+            <a:avLst/>
+          </a:prstGeom>
+          <a:solidFill>
+            <a:srgbClr val="2F8A28"/>
+          </a:solidFill>
+          <a:ln w="12700">
+            <a:solidFill>
+              <a:srgbClr val="2F8A28"/>
+            </a:solidFill>
+            <a:prstDash val="solid"/>
+          </a:ln>
+        </p:spPr>
+      </p:sp>
+      <p:sp>
+        <p:nvSpPr>
+          <p:cNvPr id="4" name="Text 2"/>
           <p:cNvSpPr/>
           <p:nvPr/>
         </p:nvSpPr>
@@ -3675,7 +4914,7 @@
       </p:sp>
       <p:sp>
         <p:nvSpPr>
-          <p:cNvPr id="4" name="Text 2"/>
+          <p:cNvPr id="5" name="Text 3"/>
           <p:cNvSpPr/>
           <p:nvPr/>
         </p:nvSpPr>
@@ -3714,7 +4953,7 @@
       </p:sp>
       <p:sp>
         <p:nvSpPr>
-          <p:cNvPr id="5" name="Text 3"/>
+          <p:cNvPr id="6" name="Text 4"/>
           <p:cNvSpPr/>
           <p:nvPr/>
         </p:nvSpPr>
@@ -3753,7 +4992,7 @@
       </p:sp>
       <p:sp>
         <p:nvSpPr>
-          <p:cNvPr id="6" name="Text 4"/>
+          <p:cNvPr id="7" name="Text 5"/>
           <p:cNvSpPr/>
           <p:nvPr/>
         </p:nvSpPr>
@@ -3786,7 +5025,7 @@
                 <a:ea typeface="Aptos Display" pitchFamily="34" charset="-122"/>
                 <a:cs typeface="Aptos Display" pitchFamily="34" charset="-120"/>
               </a:rPr>
-              <a:t>Reflection Questions</a:t>
+              <a:t>Risks, Failure Modes, and Guardrails Continued</a:t>
             </a:r>
             <a:endParaRPr lang="en-US" sz="2700" dirty="0"/>
           </a:p>
@@ -3794,32 +5033,164 @@
       </p:sp>
       <p:sp>
         <p:nvSpPr>
-          <p:cNvPr id="7" name="Text 5"/>
-          <p:cNvSpPr/>
-          <p:nvPr/>
-        </p:nvSpPr>
-        <p:spPr>
-          <a:xfrm>
-            <a:off x="822960" y="1325880"/>
-            <a:ext cx="10378440" cy="4800600"/>
-          </a:xfrm>
-          <a:prstGeom prst="rect">
-            <a:avLst/>
-          </a:prstGeom>
-          <a:noFill/>
-          <a:ln/>
-        </p:spPr>
-        <p:txBody>
-          <a:bodyPr wrap="square" lIns="1016" tIns="1016" rIns="1016" bIns="1016" rtlCol="0" anchor="t">
+          <p:cNvPr id="8" name="Text 6"/>
+          <p:cNvSpPr/>
+          <p:nvPr/>
+        </p:nvSpPr>
+        <p:spPr>
+          <a:xfrm>
+            <a:off x="868680" y="1417320"/>
+            <a:ext cx="6675120" cy="4434840"/>
+          </a:xfrm>
+          <a:prstGeom prst="rect">
+            <a:avLst/>
+          </a:prstGeom>
+          <a:noFill/>
+          <a:ln/>
+        </p:spPr>
+        <p:txBody>
+          <a:bodyPr wrap="square" lIns="635" tIns="635" rIns="635" bIns="635" rtlCol="0" anchor="t">
             <a:normAutofit/>
           </a:bodyPr>
           <a:lstStyle/>
           <a:p>
+            <a:r>
+              <a:rPr lang="en-US" sz="1700" dirty="0">
+                <a:solidFill>
+                  <a:srgbClr val="17364A"/>
+                </a:solidFill>
+                <a:latin typeface="Aptos" pitchFamily="34" charset="0"/>
+                <a:ea typeface="Aptos" pitchFamily="34" charset="-122"/>
+                <a:cs typeface="Aptos" pitchFamily="34" charset="-120"/>
+              </a:rPr>
+              <a:t>Hidden linkage uncertainty.</a:t>
+            </a:r>
+            <a:endParaRPr lang="en-US" sz="1700" dirty="0"/>
+          </a:p>
+          <a:p>
+            <a:r>
+              <a:rPr lang="en-US" sz="1700" dirty="0">
+                <a:solidFill>
+                  <a:srgbClr val="17364A"/>
+                </a:solidFill>
+                <a:latin typeface="Aptos" pitchFamily="34" charset="0"/>
+                <a:ea typeface="Aptos" pitchFamily="34" charset="-122"/>
+                <a:cs typeface="Aptos" pitchFamily="34" charset="-120"/>
+              </a:rPr>
+              <a:t>AI outputs may present linked data as certain.</a:t>
+            </a:r>
+            <a:endParaRPr lang="en-US" sz="1700" dirty="0"/>
+          </a:p>
+          <a:p>
+            <a:r>
+              <a:rPr lang="en-US" sz="1700" dirty="0">
+                <a:solidFill>
+                  <a:srgbClr val="17364A"/>
+                </a:solidFill>
+                <a:latin typeface="Aptos" pitchFamily="34" charset="0"/>
+                <a:ea typeface="Aptos" pitchFamily="34" charset="-122"/>
+                <a:cs typeface="Aptos" pitchFamily="34" charset="-120"/>
+              </a:rPr>
+              <a:t>Guardrails include confidence indicators, source records, and user review of uncertain matches.</a:t>
+            </a:r>
+            <a:endParaRPr lang="en-US" sz="1700" dirty="0"/>
+          </a:p>
+        </p:txBody>
+      </p:sp>
+      <p:sp>
+        <p:nvSpPr>
+          <p:cNvPr id="9" name="Shape 7"/>
+          <p:cNvSpPr/>
+          <p:nvPr/>
+        </p:nvSpPr>
+        <p:spPr>
+          <a:xfrm>
+            <a:off x="7909560" y="1417320"/>
+            <a:ext cx="3154680" cy="1828800"/>
+          </a:xfrm>
+          <a:prstGeom prst="roundRect">
+            <a:avLst>
+              <a:gd name="adj" fmla="val 6000"/>
+            </a:avLst>
+          </a:prstGeom>
+          <a:solidFill>
+            <a:srgbClr val="EEF8ED"/>
+          </a:solidFill>
+          <a:ln w="12700">
+            <a:solidFill>
+              <a:srgbClr val="B9D7E6"/>
+            </a:solidFill>
+            <a:prstDash val="solid"/>
+          </a:ln>
+        </p:spPr>
+      </p:sp>
+      <p:sp>
+        <p:nvSpPr>
+          <p:cNvPr id="10" name="Text 8"/>
+          <p:cNvSpPr/>
+          <p:nvPr/>
+        </p:nvSpPr>
+        <p:spPr>
+          <a:xfrm>
+            <a:off x="8074152" y="1563624"/>
+            <a:ext cx="2825496" cy="201168"/>
+          </a:xfrm>
+          <a:prstGeom prst="rect">
+            <a:avLst/>
+          </a:prstGeom>
+          <a:noFill/>
+          <a:ln/>
+        </p:spPr>
+        <p:txBody>
+          <a:bodyPr wrap="square" lIns="0" tIns="0" rIns="0" bIns="0" rtlCol="0" anchor="ctr"/>
+          <a:lstStyle/>
+          <a:p>
             <a:pPr indent="0" marL="0">
               <a:buNone/>
             </a:pPr>
             <a:r>
-              <a:rPr lang="en-US" sz="1420" dirty="0">
+              <a:rPr lang="en-US" sz="950" b="1" dirty="0">
+                <a:solidFill>
+                  <a:srgbClr val="0068B7"/>
+                </a:solidFill>
+                <a:latin typeface="Aptos" pitchFamily="34" charset="0"/>
+                <a:ea typeface="Aptos" pitchFamily="34" charset="-122"/>
+                <a:cs typeface="Aptos" pitchFamily="34" charset="-120"/>
+              </a:rPr>
+              <a:t>Key idea</a:t>
+            </a:r>
+            <a:endParaRPr lang="en-US" sz="950" dirty="0"/>
+          </a:p>
+        </p:txBody>
+      </p:sp>
+      <p:sp>
+        <p:nvSpPr>
+          <p:cNvPr id="11" name="Text 9"/>
+          <p:cNvSpPr/>
+          <p:nvPr/>
+        </p:nvSpPr>
+        <p:spPr>
+          <a:xfrm>
+            <a:off x="8074152" y="1856232"/>
+            <a:ext cx="2825496" cy="1261872"/>
+          </a:xfrm>
+          <a:prstGeom prst="rect">
+            <a:avLst/>
+          </a:prstGeom>
+          <a:noFill/>
+          <a:ln/>
+        </p:spPr>
+        <p:txBody>
+          <a:bodyPr wrap="square" lIns="0" tIns="0" rIns="0" bIns="0" rtlCol="0" anchor="t">
+            <a:normAutofit/>
+          </a:bodyPr>
+          <a:lstStyle/>
+          <a:p>
+            <a:pPr indent="0" marL="0">
+              <a:buNone/>
+            </a:pPr>
+            <a:r>
+              <a:rPr lang="en-US" sz="1250" dirty="0">
                 <a:solidFill>
                   <a:srgbClr val="17364A"/>
                 </a:solidFill>
@@ -3827,9 +5198,116 @@
                 <a:ea typeface="Aptos" pitchFamily="34" charset="-122"/>
                 <a:cs typeface="Aptos" pitchFamily="34" charset="-120"/>
               </a:rPr>
-              <a:t>Which workflows in your agency depend on matching records across systems? What fields are used for matching, and how complete are they? Which populations may be more likely to experience missed or incorrect matches?</a:t>
-            </a:r>
-            <a:endParaRPr lang="en-US" sz="1420" dirty="0"/>
+              <a:t>Hidden linkage uncertainty.</a:t>
+            </a:r>
+            <a:endParaRPr lang="en-US" sz="1250" dirty="0"/>
+          </a:p>
+        </p:txBody>
+      </p:sp>
+      <p:sp>
+        <p:nvSpPr>
+          <p:cNvPr id="12" name="Shape 10"/>
+          <p:cNvSpPr/>
+          <p:nvPr/>
+        </p:nvSpPr>
+        <p:spPr>
+          <a:xfrm>
+            <a:off x="7909560" y="3520440"/>
+            <a:ext cx="3154680" cy="1737360"/>
+          </a:xfrm>
+          <a:prstGeom prst="roundRect">
+            <a:avLst>
+              <a:gd name="adj" fmla="val 6316"/>
+            </a:avLst>
+          </a:prstGeom>
+          <a:solidFill>
+            <a:srgbClr val="EAF6F8"/>
+          </a:solidFill>
+          <a:ln w="12700">
+            <a:solidFill>
+              <a:srgbClr val="B9D7E6"/>
+            </a:solidFill>
+            <a:prstDash val="solid"/>
+          </a:ln>
+        </p:spPr>
+      </p:sp>
+      <p:sp>
+        <p:nvSpPr>
+          <p:cNvPr id="13" name="Text 11"/>
+          <p:cNvSpPr/>
+          <p:nvPr/>
+        </p:nvSpPr>
+        <p:spPr>
+          <a:xfrm>
+            <a:off x="8074152" y="3666744"/>
+            <a:ext cx="2825496" cy="201168"/>
+          </a:xfrm>
+          <a:prstGeom prst="rect">
+            <a:avLst/>
+          </a:prstGeom>
+          <a:noFill/>
+          <a:ln/>
+        </p:spPr>
+        <p:txBody>
+          <a:bodyPr wrap="square" lIns="0" tIns="0" rIns="0" bIns="0" rtlCol="0" anchor="ctr"/>
+          <a:lstStyle/>
+          <a:p>
+            <a:pPr indent="0" marL="0">
+              <a:buNone/>
+            </a:pPr>
+            <a:r>
+              <a:rPr lang="en-US" sz="950" b="1" dirty="0">
+                <a:solidFill>
+                  <a:srgbClr val="0068B7"/>
+                </a:solidFill>
+                <a:latin typeface="Aptos" pitchFamily="34" charset="0"/>
+                <a:ea typeface="Aptos" pitchFamily="34" charset="-122"/>
+                <a:cs typeface="Aptos" pitchFamily="34" charset="-120"/>
+              </a:rPr>
+              <a:t>Use this for</a:t>
+            </a:r>
+            <a:endParaRPr lang="en-US" sz="950" dirty="0"/>
+          </a:p>
+        </p:txBody>
+      </p:sp>
+      <p:sp>
+        <p:nvSpPr>
+          <p:cNvPr id="14" name="Text 12"/>
+          <p:cNvSpPr/>
+          <p:nvPr/>
+        </p:nvSpPr>
+        <p:spPr>
+          <a:xfrm>
+            <a:off x="8074152" y="3959352"/>
+            <a:ext cx="2825496" cy="1170432"/>
+          </a:xfrm>
+          <a:prstGeom prst="rect">
+            <a:avLst/>
+          </a:prstGeom>
+          <a:noFill/>
+          <a:ln/>
+        </p:spPr>
+        <p:txBody>
+          <a:bodyPr wrap="square" lIns="0" tIns="0" rIns="0" bIns="0" rtlCol="0" anchor="t">
+            <a:normAutofit/>
+          </a:bodyPr>
+          <a:lstStyle/>
+          <a:p>
+            <a:pPr indent="0" marL="0">
+              <a:buNone/>
+            </a:pPr>
+            <a:r>
+              <a:rPr lang="en-US" sz="1250" dirty="0">
+                <a:solidFill>
+                  <a:srgbClr val="17364A"/>
+                </a:solidFill>
+                <a:latin typeface="Aptos" pitchFamily="34" charset="0"/>
+                <a:ea typeface="Aptos" pitchFamily="34" charset="-122"/>
+                <a:cs typeface="Aptos" pitchFamily="34" charset="-120"/>
+              </a:rPr>
+              <a:t>Connect the concept to public health decisions, safeguards, documentation, or implementation work.</a:t>
+            </a:r>
+            <a:endParaRPr lang="en-US" sz="1250" dirty="0"/>
           </a:p>
         </p:txBody>
       </p:sp>
@@ -3892,7 +5370,32 @@
       </p:sp>
       <p:sp>
         <p:nvSpPr>
-          <p:cNvPr id="3" name="Text 1"/>
+          <p:cNvPr id="3" name="Shape 1"/>
+          <p:cNvSpPr/>
+          <p:nvPr/>
+        </p:nvSpPr>
+        <p:spPr>
+          <a:xfrm>
+            <a:off x="0" y="164592"/>
+            <a:ext cx="146304" cy="6693408"/>
+          </a:xfrm>
+          <a:prstGeom prst="rect">
+            <a:avLst/>
+          </a:prstGeom>
+          <a:solidFill>
+            <a:srgbClr val="2F8A28"/>
+          </a:solidFill>
+          <a:ln w="12700">
+            <a:solidFill>
+              <a:srgbClr val="2F8A28"/>
+            </a:solidFill>
+            <a:prstDash val="solid"/>
+          </a:ln>
+        </p:spPr>
+      </p:sp>
+      <p:sp>
+        <p:nvSpPr>
+          <p:cNvPr id="4" name="Text 2"/>
           <p:cNvSpPr/>
           <p:nvPr/>
         </p:nvSpPr>
@@ -3931,7 +5434,7 @@
       </p:sp>
       <p:sp>
         <p:nvSpPr>
-          <p:cNvPr id="4" name="Text 2"/>
+          <p:cNvPr id="5" name="Text 3"/>
           <p:cNvSpPr/>
           <p:nvPr/>
         </p:nvSpPr>
@@ -3970,7 +5473,7 @@
       </p:sp>
       <p:sp>
         <p:nvSpPr>
-          <p:cNvPr id="5" name="Text 3"/>
+          <p:cNvPr id="6" name="Text 4"/>
           <p:cNvSpPr/>
           <p:nvPr/>
         </p:nvSpPr>
@@ -4009,13 +5512,77 @@
       </p:sp>
       <p:sp>
         <p:nvSpPr>
-          <p:cNvPr id="6" name="Text 4"/>
+          <p:cNvPr id="7" name="Shape 5"/>
           <p:cNvSpPr/>
           <p:nvPr/>
         </p:nvSpPr>
         <p:spPr>
           <a:xfrm>
             <a:off x="640080" y="658368"/>
+            <a:ext cx="420624" cy="420624"/>
+          </a:xfrm>
+          <a:prstGeom prst="ellipse">
+            <a:avLst/>
+          </a:prstGeom>
+          <a:solidFill>
+            <a:srgbClr val="0068B7"/>
+          </a:solidFill>
+          <a:ln w="12700">
+            <a:solidFill>
+              <a:srgbClr val="0068B7"/>
+            </a:solidFill>
+            <a:prstDash val="solid"/>
+          </a:ln>
+        </p:spPr>
+      </p:sp>
+      <p:sp>
+        <p:nvSpPr>
+          <p:cNvPr id="8" name="Text 6"/>
+          <p:cNvSpPr/>
+          <p:nvPr/>
+        </p:nvSpPr>
+        <p:spPr>
+          <a:xfrm>
+            <a:off x="640080" y="731520"/>
+            <a:ext cx="420624" cy="164592"/>
+          </a:xfrm>
+          <a:prstGeom prst="rect">
+            <a:avLst/>
+          </a:prstGeom>
+          <a:noFill/>
+          <a:ln/>
+        </p:spPr>
+        <p:txBody>
+          <a:bodyPr wrap="square" lIns="0" tIns="0" rIns="0" bIns="0" rtlCol="0" anchor="ctr"/>
+          <a:lstStyle/>
+          <a:p>
+            <a:pPr algn="ctr" indent="0" marL="0">
+              <a:buNone/>
+            </a:pPr>
+            <a:r>
+              <a:rPr lang="en-US" sz="1100" b="1" dirty="0">
+                <a:solidFill>
+                  <a:srgbClr val="FFFFFF"/>
+                </a:solidFill>
+                <a:latin typeface="Aptos" pitchFamily="34" charset="0"/>
+                <a:ea typeface="Aptos" pitchFamily="34" charset="-122"/>
+                <a:cs typeface="Aptos" pitchFamily="34" charset="-120"/>
+              </a:rPr>
+              <a:t>8</a:t>
+            </a:r>
+            <a:endParaRPr lang="en-US" sz="1100" dirty="0"/>
+          </a:p>
+        </p:txBody>
+      </p:sp>
+      <p:sp>
+        <p:nvSpPr>
+          <p:cNvPr id="9" name="Text 7"/>
+          <p:cNvSpPr/>
+          <p:nvPr/>
+        </p:nvSpPr>
+        <p:spPr>
+          <a:xfrm>
+            <a:off x="640080" y="621792"/>
             <a:ext cx="10881360" cy="566928"/>
           </a:xfrm>
           <a:prstGeom prst="rect">
@@ -4042,7 +5609,7 @@
                 <a:ea typeface="Aptos Display" pitchFamily="34" charset="-122"/>
                 <a:cs typeface="Aptos Display" pitchFamily="34" charset="-120"/>
               </a:rPr>
-              <a:t>Reflection Questions Continued</a:t>
+              <a:t>Application to AI-Supported Workflows</a:t>
             </a:r>
             <a:endParaRPr lang="en-US" sz="2700" dirty="0"/>
           </a:p>
@@ -4050,32 +5617,178 @@
       </p:sp>
       <p:sp>
         <p:nvSpPr>
-          <p:cNvPr id="7" name="Text 5"/>
-          <p:cNvSpPr/>
-          <p:nvPr/>
-        </p:nvSpPr>
-        <p:spPr>
-          <a:xfrm>
-            <a:off x="822960" y="1325880"/>
-            <a:ext cx="10378440" cy="4800600"/>
-          </a:xfrm>
-          <a:prstGeom prst="rect">
-            <a:avLst/>
-          </a:prstGeom>
-          <a:noFill/>
-          <a:ln/>
-        </p:spPr>
-        <p:txBody>
-          <a:bodyPr wrap="square" lIns="1016" tIns="1016" rIns="1016" bIns="1016" rtlCol="0" anchor="t">
+          <p:cNvPr id="10" name="Text 8"/>
+          <p:cNvSpPr/>
+          <p:nvPr/>
+        </p:nvSpPr>
+        <p:spPr>
+          <a:xfrm>
+            <a:off x="868680" y="1417320"/>
+            <a:ext cx="6675120" cy="4434840"/>
+          </a:xfrm>
+          <a:prstGeom prst="rect">
+            <a:avLst/>
+          </a:prstGeom>
+          <a:noFill/>
+          <a:ln/>
+        </p:spPr>
+        <p:txBody>
+          <a:bodyPr wrap="square" lIns="635" tIns="635" rIns="635" bIns="635" rtlCol="0" anchor="t">
             <a:normAutofit/>
           </a:bodyPr>
           <a:lstStyle/>
           <a:p>
+            <a:r>
+              <a:rPr lang="en-US" sz="1700" dirty="0">
+                <a:solidFill>
+                  <a:srgbClr val="17364A"/>
+                </a:solidFill>
+                <a:latin typeface="Aptos" pitchFamily="34" charset="0"/>
+                <a:ea typeface="Aptos" pitchFamily="34" charset="-122"/>
+                <a:cs typeface="Aptos" pitchFamily="34" charset="-120"/>
+              </a:rPr>
+              <a:t>Generative AI may summarize linked records, so source attribution and linkage confidence should be visible.</a:t>
+            </a:r>
+            <a:endParaRPr lang="en-US" sz="1700" dirty="0"/>
+          </a:p>
+          <a:p>
+            <a:r>
+              <a:rPr lang="en-US" sz="1700" dirty="0">
+                <a:solidFill>
+                  <a:srgbClr val="17364A"/>
+                </a:solidFill>
+                <a:latin typeface="Aptos" pitchFamily="34" charset="0"/>
+                <a:ea typeface="Aptos" pitchFamily="34" charset="-122"/>
+                <a:cs typeface="Aptos" pitchFamily="34" charset="-120"/>
+              </a:rPr>
+              <a:t>Predictive analytics may use features created from linked records, making match quality part of model validity.</a:t>
+            </a:r>
+            <a:endParaRPr lang="en-US" sz="1700" dirty="0"/>
+          </a:p>
+          <a:p>
+            <a:r>
+              <a:rPr lang="en-US" sz="1700" dirty="0">
+                <a:solidFill>
+                  <a:srgbClr val="17364A"/>
+                </a:solidFill>
+                <a:latin typeface="Aptos" pitchFamily="34" charset="0"/>
+                <a:ea typeface="Aptos" pitchFamily="34" charset="-122"/>
+                <a:cs typeface="Aptos" pitchFamily="34" charset="-120"/>
+              </a:rPr>
+              <a:t>NLP may extract identifiers from text to support linkage, which requires privacy and accuracy review.</a:t>
+            </a:r>
+            <a:endParaRPr lang="en-US" sz="1700" dirty="0"/>
+          </a:p>
+          <a:p>
+            <a:r>
+              <a:rPr lang="en-US" sz="1700" dirty="0">
+                <a:solidFill>
+                  <a:srgbClr val="17364A"/>
+                </a:solidFill>
+                <a:latin typeface="Aptos" pitchFamily="34" charset="0"/>
+                <a:ea typeface="Aptos" pitchFamily="34" charset="-122"/>
+                <a:cs typeface="Aptos" pitchFamily="34" charset="-120"/>
+              </a:rPr>
+              <a:t>Agentic AI should not automatically merge or update records without strong approval and rollback procedures.</a:t>
+            </a:r>
+            <a:endParaRPr lang="en-US" sz="1700" dirty="0"/>
+          </a:p>
+        </p:txBody>
+      </p:sp>
+      <p:sp>
+        <p:nvSpPr>
+          <p:cNvPr id="11" name="Shape 9"/>
+          <p:cNvSpPr/>
+          <p:nvPr/>
+        </p:nvSpPr>
+        <p:spPr>
+          <a:xfrm>
+            <a:off x="7909560" y="1417320"/>
+            <a:ext cx="3154680" cy="1828800"/>
+          </a:xfrm>
+          <a:prstGeom prst="roundRect">
+            <a:avLst>
+              <a:gd name="adj" fmla="val 6000"/>
+            </a:avLst>
+          </a:prstGeom>
+          <a:solidFill>
+            <a:srgbClr val="EEF8ED"/>
+          </a:solidFill>
+          <a:ln w="12700">
+            <a:solidFill>
+              <a:srgbClr val="B9D7E6"/>
+            </a:solidFill>
+            <a:prstDash val="solid"/>
+          </a:ln>
+        </p:spPr>
+      </p:sp>
+      <p:sp>
+        <p:nvSpPr>
+          <p:cNvPr id="12" name="Text 10"/>
+          <p:cNvSpPr/>
+          <p:nvPr/>
+        </p:nvSpPr>
+        <p:spPr>
+          <a:xfrm>
+            <a:off x="8074152" y="1563624"/>
+            <a:ext cx="2825496" cy="201168"/>
+          </a:xfrm>
+          <a:prstGeom prst="rect">
+            <a:avLst/>
+          </a:prstGeom>
+          <a:noFill/>
+          <a:ln/>
+        </p:spPr>
+        <p:txBody>
+          <a:bodyPr wrap="square" lIns="0" tIns="0" rIns="0" bIns="0" rtlCol="0" anchor="ctr"/>
+          <a:lstStyle/>
+          <a:p>
             <a:pPr indent="0" marL="0">
               <a:buNone/>
             </a:pPr>
             <a:r>
-              <a:rPr lang="en-US" sz="1420" dirty="0">
+              <a:rPr lang="en-US" sz="950" b="1" dirty="0">
+                <a:solidFill>
+                  <a:srgbClr val="0068B7"/>
+                </a:solidFill>
+                <a:latin typeface="Aptos" pitchFamily="34" charset="0"/>
+                <a:ea typeface="Aptos" pitchFamily="34" charset="-122"/>
+                <a:cs typeface="Aptos" pitchFamily="34" charset="-120"/>
+              </a:rPr>
+              <a:t>Key idea</a:t>
+            </a:r>
+            <a:endParaRPr lang="en-US" sz="950" dirty="0"/>
+          </a:p>
+        </p:txBody>
+      </p:sp>
+      <p:sp>
+        <p:nvSpPr>
+          <p:cNvPr id="13" name="Text 11"/>
+          <p:cNvSpPr/>
+          <p:nvPr/>
+        </p:nvSpPr>
+        <p:spPr>
+          <a:xfrm>
+            <a:off x="8074152" y="1856232"/>
+            <a:ext cx="2825496" cy="1261872"/>
+          </a:xfrm>
+          <a:prstGeom prst="rect">
+            <a:avLst/>
+          </a:prstGeom>
+          <a:noFill/>
+          <a:ln/>
+        </p:spPr>
+        <p:txBody>
+          <a:bodyPr wrap="square" lIns="0" tIns="0" rIns="0" bIns="0" rtlCol="0" anchor="t">
+            <a:normAutofit/>
+          </a:bodyPr>
+          <a:lstStyle/>
+          <a:p>
+            <a:pPr indent="0" marL="0">
+              <a:buNone/>
+            </a:pPr>
+            <a:r>
+              <a:rPr lang="en-US" sz="1250" dirty="0">
                 <a:solidFill>
                   <a:srgbClr val="17364A"/>
                 </a:solidFill>
@@ -4083,9 +5796,116 @@
                 <a:ea typeface="Aptos" pitchFamily="34" charset="-122"/>
                 <a:cs typeface="Aptos" pitchFamily="34" charset="-120"/>
               </a:rPr>
-              <a:t>What happens when records are incorrectly merged or not merged? Where should human review be required?</a:t>
-            </a:r>
-            <a:endParaRPr lang="en-US" sz="1420" dirty="0"/>
+              <a:t>Generative AI may summarize linked records, so source attribution and linkage confidence should be visible.</a:t>
+            </a:r>
+            <a:endParaRPr lang="en-US" sz="1250" dirty="0"/>
+          </a:p>
+        </p:txBody>
+      </p:sp>
+      <p:sp>
+        <p:nvSpPr>
+          <p:cNvPr id="14" name="Shape 12"/>
+          <p:cNvSpPr/>
+          <p:nvPr/>
+        </p:nvSpPr>
+        <p:spPr>
+          <a:xfrm>
+            <a:off x="7909560" y="3520440"/>
+            <a:ext cx="3154680" cy="1737360"/>
+          </a:xfrm>
+          <a:prstGeom prst="roundRect">
+            <a:avLst>
+              <a:gd name="adj" fmla="val 6316"/>
+            </a:avLst>
+          </a:prstGeom>
+          <a:solidFill>
+            <a:srgbClr val="EAF6F8"/>
+          </a:solidFill>
+          <a:ln w="12700">
+            <a:solidFill>
+              <a:srgbClr val="B9D7E6"/>
+            </a:solidFill>
+            <a:prstDash val="solid"/>
+          </a:ln>
+        </p:spPr>
+      </p:sp>
+      <p:sp>
+        <p:nvSpPr>
+          <p:cNvPr id="15" name="Text 13"/>
+          <p:cNvSpPr/>
+          <p:nvPr/>
+        </p:nvSpPr>
+        <p:spPr>
+          <a:xfrm>
+            <a:off x="8074152" y="3666744"/>
+            <a:ext cx="2825496" cy="201168"/>
+          </a:xfrm>
+          <a:prstGeom prst="rect">
+            <a:avLst/>
+          </a:prstGeom>
+          <a:noFill/>
+          <a:ln/>
+        </p:spPr>
+        <p:txBody>
+          <a:bodyPr wrap="square" lIns="0" tIns="0" rIns="0" bIns="0" rtlCol="0" anchor="ctr"/>
+          <a:lstStyle/>
+          <a:p>
+            <a:pPr indent="0" marL="0">
+              <a:buNone/>
+            </a:pPr>
+            <a:r>
+              <a:rPr lang="en-US" sz="950" b="1" dirty="0">
+                <a:solidFill>
+                  <a:srgbClr val="0068B7"/>
+                </a:solidFill>
+                <a:latin typeface="Aptos" pitchFamily="34" charset="0"/>
+                <a:ea typeface="Aptos" pitchFamily="34" charset="-122"/>
+                <a:cs typeface="Aptos" pitchFamily="34" charset="-120"/>
+              </a:rPr>
+              <a:t>Use this for</a:t>
+            </a:r>
+            <a:endParaRPr lang="en-US" sz="950" dirty="0"/>
+          </a:p>
+        </p:txBody>
+      </p:sp>
+      <p:sp>
+        <p:nvSpPr>
+          <p:cNvPr id="16" name="Text 14"/>
+          <p:cNvSpPr/>
+          <p:nvPr/>
+        </p:nvSpPr>
+        <p:spPr>
+          <a:xfrm>
+            <a:off x="8074152" y="3959352"/>
+            <a:ext cx="2825496" cy="1170432"/>
+          </a:xfrm>
+          <a:prstGeom prst="rect">
+            <a:avLst/>
+          </a:prstGeom>
+          <a:noFill/>
+          <a:ln/>
+        </p:spPr>
+        <p:txBody>
+          <a:bodyPr wrap="square" lIns="0" tIns="0" rIns="0" bIns="0" rtlCol="0" anchor="t">
+            <a:normAutofit/>
+          </a:bodyPr>
+          <a:lstStyle/>
+          <a:p>
+            <a:pPr indent="0" marL="0">
+              <a:buNone/>
+            </a:pPr>
+            <a:r>
+              <a:rPr lang="en-US" sz="1250" dirty="0">
+                <a:solidFill>
+                  <a:srgbClr val="17364A"/>
+                </a:solidFill>
+                <a:latin typeface="Aptos" pitchFamily="34" charset="0"/>
+                <a:ea typeface="Aptos" pitchFamily="34" charset="-122"/>
+                <a:cs typeface="Aptos" pitchFamily="34" charset="-120"/>
+              </a:rPr>
+              <a:t>Connect the concept to public health decisions, safeguards, documentation, or implementation work.</a:t>
+            </a:r>
+            <a:endParaRPr lang="en-US" sz="1250" dirty="0"/>
           </a:p>
         </p:txBody>
       </p:sp>
@@ -4148,7 +5968,32 @@
       </p:sp>
       <p:sp>
         <p:nvSpPr>
-          <p:cNvPr id="3" name="Text 1"/>
+          <p:cNvPr id="3" name="Shape 1"/>
+          <p:cNvSpPr/>
+          <p:nvPr/>
+        </p:nvSpPr>
+        <p:spPr>
+          <a:xfrm>
+            <a:off x="0" y="164592"/>
+            <a:ext cx="146304" cy="6693408"/>
+          </a:xfrm>
+          <a:prstGeom prst="rect">
+            <a:avLst/>
+          </a:prstGeom>
+          <a:solidFill>
+            <a:srgbClr val="2F8A28"/>
+          </a:solidFill>
+          <a:ln w="12700">
+            <a:solidFill>
+              <a:srgbClr val="2F8A28"/>
+            </a:solidFill>
+            <a:prstDash val="solid"/>
+          </a:ln>
+        </p:spPr>
+      </p:sp>
+      <p:sp>
+        <p:nvSpPr>
+          <p:cNvPr id="4" name="Text 2"/>
           <p:cNvSpPr/>
           <p:nvPr/>
         </p:nvSpPr>
@@ -4187,7 +6032,7 @@
       </p:sp>
       <p:sp>
         <p:nvSpPr>
-          <p:cNvPr id="4" name="Text 2"/>
+          <p:cNvPr id="5" name="Text 3"/>
           <p:cNvSpPr/>
           <p:nvPr/>
         </p:nvSpPr>
@@ -4226,7 +6071,7 @@
       </p:sp>
       <p:sp>
         <p:nvSpPr>
-          <p:cNvPr id="5" name="Text 3"/>
+          <p:cNvPr id="6" name="Text 4"/>
           <p:cNvSpPr/>
           <p:nvPr/>
         </p:nvSpPr>
@@ -4265,13 +6110,77 @@
       </p:sp>
       <p:sp>
         <p:nvSpPr>
-          <p:cNvPr id="6" name="Text 4"/>
+          <p:cNvPr id="7" name="Shape 5"/>
           <p:cNvSpPr/>
           <p:nvPr/>
         </p:nvSpPr>
         <p:spPr>
           <a:xfrm>
             <a:off x="640080" y="658368"/>
+            <a:ext cx="420624" cy="420624"/>
+          </a:xfrm>
+          <a:prstGeom prst="ellipse">
+            <a:avLst/>
+          </a:prstGeom>
+          <a:solidFill>
+            <a:srgbClr val="0068B7"/>
+          </a:solidFill>
+          <a:ln w="12700">
+            <a:solidFill>
+              <a:srgbClr val="0068B7"/>
+            </a:solidFill>
+            <a:prstDash val="solid"/>
+          </a:ln>
+        </p:spPr>
+      </p:sp>
+      <p:sp>
+        <p:nvSpPr>
+          <p:cNvPr id="8" name="Text 6"/>
+          <p:cNvSpPr/>
+          <p:nvPr/>
+        </p:nvSpPr>
+        <p:spPr>
+          <a:xfrm>
+            <a:off x="640080" y="731520"/>
+            <a:ext cx="420624" cy="164592"/>
+          </a:xfrm>
+          <a:prstGeom prst="rect">
+            <a:avLst/>
+          </a:prstGeom>
+          <a:noFill/>
+          <a:ln/>
+        </p:spPr>
+        <p:txBody>
+          <a:bodyPr wrap="square" lIns="0" tIns="0" rIns="0" bIns="0" rtlCol="0" anchor="ctr"/>
+          <a:lstStyle/>
+          <a:p>
+            <a:pPr algn="ctr" indent="0" marL="0">
+              <a:buNone/>
+            </a:pPr>
+            <a:r>
+              <a:rPr lang="en-US" sz="1100" b="1" dirty="0">
+                <a:solidFill>
+                  <a:srgbClr val="FFFFFF"/>
+                </a:solidFill>
+                <a:latin typeface="Aptos" pitchFamily="34" charset="0"/>
+                <a:ea typeface="Aptos" pitchFamily="34" charset="-122"/>
+                <a:cs typeface="Aptos" pitchFamily="34" charset="-120"/>
+              </a:rPr>
+              <a:t>9</a:t>
+            </a:r>
+            <a:endParaRPr lang="en-US" sz="1100" dirty="0"/>
+          </a:p>
+        </p:txBody>
+      </p:sp>
+      <p:sp>
+        <p:nvSpPr>
+          <p:cNvPr id="9" name="Text 7"/>
+          <p:cNvSpPr/>
+          <p:nvPr/>
+        </p:nvSpPr>
+        <p:spPr>
+          <a:xfrm>
+            <a:off x="640080" y="621792"/>
             <a:ext cx="10881360" cy="566928"/>
           </a:xfrm>
           <a:prstGeom prst="rect">
@@ -4298,7 +6207,7 @@
                 <a:ea typeface="Aptos Display" pitchFamily="34" charset="-122"/>
                 <a:cs typeface="Aptos Display" pitchFamily="34" charset="-120"/>
               </a:rPr>
-              <a:t>Practical Exercise</a:t>
+              <a:t>Reflection Questions</a:t>
             </a:r>
             <a:endParaRPr lang="en-US" sz="2700" dirty="0"/>
           </a:p>
@@ -4306,32 +6215,164 @@
       </p:sp>
       <p:sp>
         <p:nvSpPr>
-          <p:cNvPr id="7" name="Text 5"/>
-          <p:cNvSpPr/>
-          <p:nvPr/>
-        </p:nvSpPr>
-        <p:spPr>
-          <a:xfrm>
-            <a:off x="822960" y="1325880"/>
-            <a:ext cx="10378440" cy="4800600"/>
-          </a:xfrm>
-          <a:prstGeom prst="rect">
-            <a:avLst/>
-          </a:prstGeom>
-          <a:noFill/>
-          <a:ln/>
-        </p:spPr>
-        <p:txBody>
-          <a:bodyPr wrap="square" lIns="1016" tIns="1016" rIns="1016" bIns="1016" rtlCol="0" anchor="t">
+          <p:cNvPr id="10" name="Text 8"/>
+          <p:cNvSpPr/>
+          <p:nvPr/>
+        </p:nvSpPr>
+        <p:spPr>
+          <a:xfrm>
+            <a:off x="868680" y="1417320"/>
+            <a:ext cx="6675120" cy="4434840"/>
+          </a:xfrm>
+          <a:prstGeom prst="rect">
+            <a:avLst/>
+          </a:prstGeom>
+          <a:noFill/>
+          <a:ln/>
+        </p:spPr>
+        <p:txBody>
+          <a:bodyPr wrap="square" lIns="635" tIns="635" rIns="635" bIns="635" rtlCol="0" anchor="t">
             <a:normAutofit/>
           </a:bodyPr>
           <a:lstStyle/>
           <a:p>
+            <a:r>
+              <a:rPr lang="en-US" sz="1700" dirty="0">
+                <a:solidFill>
+                  <a:srgbClr val="17364A"/>
+                </a:solidFill>
+                <a:latin typeface="Aptos" pitchFamily="34" charset="0"/>
+                <a:ea typeface="Aptos" pitchFamily="34" charset="-122"/>
+                <a:cs typeface="Aptos" pitchFamily="34" charset="-120"/>
+              </a:rPr>
+              <a:t>Which workflows in your agency depend on matching records across systems?</a:t>
+            </a:r>
+            <a:endParaRPr lang="en-US" sz="1700" dirty="0"/>
+          </a:p>
+          <a:p>
+            <a:r>
+              <a:rPr lang="en-US" sz="1700" dirty="0">
+                <a:solidFill>
+                  <a:srgbClr val="17364A"/>
+                </a:solidFill>
+                <a:latin typeface="Aptos" pitchFamily="34" charset="0"/>
+                <a:ea typeface="Aptos" pitchFamily="34" charset="-122"/>
+                <a:cs typeface="Aptos" pitchFamily="34" charset="-120"/>
+              </a:rPr>
+              <a:t>What fields are used for matching, and how complete are they?</a:t>
+            </a:r>
+            <a:endParaRPr lang="en-US" sz="1700" dirty="0"/>
+          </a:p>
+          <a:p>
+            <a:r>
+              <a:rPr lang="en-US" sz="1700" dirty="0">
+                <a:solidFill>
+                  <a:srgbClr val="17364A"/>
+                </a:solidFill>
+                <a:latin typeface="Aptos" pitchFamily="34" charset="0"/>
+                <a:ea typeface="Aptos" pitchFamily="34" charset="-122"/>
+                <a:cs typeface="Aptos" pitchFamily="34" charset="-120"/>
+              </a:rPr>
+              <a:t>Which populations may be more likely to experience missed or incorrect matches?</a:t>
+            </a:r>
+            <a:endParaRPr lang="en-US" sz="1700" dirty="0"/>
+          </a:p>
+        </p:txBody>
+      </p:sp>
+      <p:sp>
+        <p:nvSpPr>
+          <p:cNvPr id="11" name="Shape 9"/>
+          <p:cNvSpPr/>
+          <p:nvPr/>
+        </p:nvSpPr>
+        <p:spPr>
+          <a:xfrm>
+            <a:off x="7909560" y="1417320"/>
+            <a:ext cx="3154680" cy="1828800"/>
+          </a:xfrm>
+          <a:prstGeom prst="roundRect">
+            <a:avLst>
+              <a:gd name="adj" fmla="val 6000"/>
+            </a:avLst>
+          </a:prstGeom>
+          <a:solidFill>
+            <a:srgbClr val="EEF8ED"/>
+          </a:solidFill>
+          <a:ln w="12700">
+            <a:solidFill>
+              <a:srgbClr val="B9D7E6"/>
+            </a:solidFill>
+            <a:prstDash val="solid"/>
+          </a:ln>
+        </p:spPr>
+      </p:sp>
+      <p:sp>
+        <p:nvSpPr>
+          <p:cNvPr id="12" name="Text 10"/>
+          <p:cNvSpPr/>
+          <p:nvPr/>
+        </p:nvSpPr>
+        <p:spPr>
+          <a:xfrm>
+            <a:off x="8074152" y="1563624"/>
+            <a:ext cx="2825496" cy="201168"/>
+          </a:xfrm>
+          <a:prstGeom prst="rect">
+            <a:avLst/>
+          </a:prstGeom>
+          <a:noFill/>
+          <a:ln/>
+        </p:spPr>
+        <p:txBody>
+          <a:bodyPr wrap="square" lIns="0" tIns="0" rIns="0" bIns="0" rtlCol="0" anchor="ctr"/>
+          <a:lstStyle/>
+          <a:p>
             <a:pPr indent="0" marL="0">
               <a:buNone/>
             </a:pPr>
             <a:r>
-              <a:rPr lang="en-US" sz="1420" dirty="0">
+              <a:rPr lang="en-US" sz="950" b="1" dirty="0">
+                <a:solidFill>
+                  <a:srgbClr val="0068B7"/>
+                </a:solidFill>
+                <a:latin typeface="Aptos" pitchFamily="34" charset="0"/>
+                <a:ea typeface="Aptos" pitchFamily="34" charset="-122"/>
+                <a:cs typeface="Aptos" pitchFamily="34" charset="-120"/>
+              </a:rPr>
+              <a:t>Key idea</a:t>
+            </a:r>
+            <a:endParaRPr lang="en-US" sz="950" dirty="0"/>
+          </a:p>
+        </p:txBody>
+      </p:sp>
+      <p:sp>
+        <p:nvSpPr>
+          <p:cNvPr id="13" name="Text 11"/>
+          <p:cNvSpPr/>
+          <p:nvPr/>
+        </p:nvSpPr>
+        <p:spPr>
+          <a:xfrm>
+            <a:off x="8074152" y="1856232"/>
+            <a:ext cx="2825496" cy="1261872"/>
+          </a:xfrm>
+          <a:prstGeom prst="rect">
+            <a:avLst/>
+          </a:prstGeom>
+          <a:noFill/>
+          <a:ln/>
+        </p:spPr>
+        <p:txBody>
+          <a:bodyPr wrap="square" lIns="0" tIns="0" rIns="0" bIns="0" rtlCol="0" anchor="t">
+            <a:normAutofit/>
+          </a:bodyPr>
+          <a:lstStyle/>
+          <a:p>
+            <a:pPr indent="0" marL="0">
+              <a:buNone/>
+            </a:pPr>
+            <a:r>
+              <a:rPr lang="en-US" sz="1250" dirty="0">
                 <a:solidFill>
                   <a:srgbClr val="17364A"/>
                 </a:solidFill>
@@ -4339,9 +6380,116 @@
                 <a:ea typeface="Aptos" pitchFamily="34" charset="-122"/>
                 <a:cs typeface="Aptos" pitchFamily="34" charset="-120"/>
               </a:rPr>
-              <a:t>Create a linkage risk review for one AI-supported public health workflow. Include the matching purpose, data sources, matching fields, known field quality issues, match method, thresholds, clerical review process, false match risks, missed match risks, equity considerations, and AI output affected.</a:t>
-            </a:r>
-            <a:endParaRPr lang="en-US" sz="1420" dirty="0"/>
+              <a:t>Which workflows in your agency depend on matching records across systems?</a:t>
+            </a:r>
+            <a:endParaRPr lang="en-US" sz="1250" dirty="0"/>
+          </a:p>
+        </p:txBody>
+      </p:sp>
+      <p:sp>
+        <p:nvSpPr>
+          <p:cNvPr id="14" name="Shape 12"/>
+          <p:cNvSpPr/>
+          <p:nvPr/>
+        </p:nvSpPr>
+        <p:spPr>
+          <a:xfrm>
+            <a:off x="7909560" y="3520440"/>
+            <a:ext cx="3154680" cy="1737360"/>
+          </a:xfrm>
+          <a:prstGeom prst="roundRect">
+            <a:avLst>
+              <a:gd name="adj" fmla="val 6316"/>
+            </a:avLst>
+          </a:prstGeom>
+          <a:solidFill>
+            <a:srgbClr val="EAF6F8"/>
+          </a:solidFill>
+          <a:ln w="12700">
+            <a:solidFill>
+              <a:srgbClr val="B9D7E6"/>
+            </a:solidFill>
+            <a:prstDash val="solid"/>
+          </a:ln>
+        </p:spPr>
+      </p:sp>
+      <p:sp>
+        <p:nvSpPr>
+          <p:cNvPr id="15" name="Text 13"/>
+          <p:cNvSpPr/>
+          <p:nvPr/>
+        </p:nvSpPr>
+        <p:spPr>
+          <a:xfrm>
+            <a:off x="8074152" y="3666744"/>
+            <a:ext cx="2825496" cy="201168"/>
+          </a:xfrm>
+          <a:prstGeom prst="rect">
+            <a:avLst/>
+          </a:prstGeom>
+          <a:noFill/>
+          <a:ln/>
+        </p:spPr>
+        <p:txBody>
+          <a:bodyPr wrap="square" lIns="0" tIns="0" rIns="0" bIns="0" rtlCol="0" anchor="ctr"/>
+          <a:lstStyle/>
+          <a:p>
+            <a:pPr indent="0" marL="0">
+              <a:buNone/>
+            </a:pPr>
+            <a:r>
+              <a:rPr lang="en-US" sz="950" b="1" dirty="0">
+                <a:solidFill>
+                  <a:srgbClr val="0068B7"/>
+                </a:solidFill>
+                <a:latin typeface="Aptos" pitchFamily="34" charset="0"/>
+                <a:ea typeface="Aptos" pitchFamily="34" charset="-122"/>
+                <a:cs typeface="Aptos" pitchFamily="34" charset="-120"/>
+              </a:rPr>
+              <a:t>Use this for</a:t>
+            </a:r>
+            <a:endParaRPr lang="en-US" sz="950" dirty="0"/>
+          </a:p>
+        </p:txBody>
+      </p:sp>
+      <p:sp>
+        <p:nvSpPr>
+          <p:cNvPr id="16" name="Text 14"/>
+          <p:cNvSpPr/>
+          <p:nvPr/>
+        </p:nvSpPr>
+        <p:spPr>
+          <a:xfrm>
+            <a:off x="8074152" y="3959352"/>
+            <a:ext cx="2825496" cy="1170432"/>
+          </a:xfrm>
+          <a:prstGeom prst="rect">
+            <a:avLst/>
+          </a:prstGeom>
+          <a:noFill/>
+          <a:ln/>
+        </p:spPr>
+        <p:txBody>
+          <a:bodyPr wrap="square" lIns="0" tIns="0" rIns="0" bIns="0" rtlCol="0" anchor="t">
+            <a:normAutofit/>
+          </a:bodyPr>
+          <a:lstStyle/>
+          <a:p>
+            <a:pPr indent="0" marL="0">
+              <a:buNone/>
+            </a:pPr>
+            <a:r>
+              <a:rPr lang="en-US" sz="1250" dirty="0">
+                <a:solidFill>
+                  <a:srgbClr val="17364A"/>
+                </a:solidFill>
+                <a:latin typeface="Aptos" pitchFamily="34" charset="0"/>
+                <a:ea typeface="Aptos" pitchFamily="34" charset="-122"/>
+                <a:cs typeface="Aptos" pitchFamily="34" charset="-120"/>
+              </a:rPr>
+              <a:t>Connect the concept to public health decisions, safeguards, documentation, or implementation work.</a:t>
+            </a:r>
+            <a:endParaRPr lang="en-US" sz="1250" dirty="0"/>
           </a:p>
         </p:txBody>
       </p:sp>
@@ -4404,7 +6552,32 @@
       </p:sp>
       <p:sp>
         <p:nvSpPr>
-          <p:cNvPr id="3" name="Text 1"/>
+          <p:cNvPr id="3" name="Shape 1"/>
+          <p:cNvSpPr/>
+          <p:nvPr/>
+        </p:nvSpPr>
+        <p:spPr>
+          <a:xfrm>
+            <a:off x="0" y="164592"/>
+            <a:ext cx="146304" cy="6693408"/>
+          </a:xfrm>
+          <a:prstGeom prst="rect">
+            <a:avLst/>
+          </a:prstGeom>
+          <a:solidFill>
+            <a:srgbClr val="2F8A28"/>
+          </a:solidFill>
+          <a:ln w="12700">
+            <a:solidFill>
+              <a:srgbClr val="2F8A28"/>
+            </a:solidFill>
+            <a:prstDash val="solid"/>
+          </a:ln>
+        </p:spPr>
+      </p:sp>
+      <p:sp>
+        <p:nvSpPr>
+          <p:cNvPr id="4" name="Text 2"/>
           <p:cNvSpPr/>
           <p:nvPr/>
         </p:nvSpPr>
@@ -4443,7 +6616,7 @@
       </p:sp>
       <p:sp>
         <p:nvSpPr>
-          <p:cNvPr id="4" name="Text 2"/>
+          <p:cNvPr id="5" name="Text 3"/>
           <p:cNvSpPr/>
           <p:nvPr/>
         </p:nvSpPr>
@@ -4482,7 +6655,7 @@
       </p:sp>
       <p:sp>
         <p:nvSpPr>
-          <p:cNvPr id="5" name="Text 3"/>
+          <p:cNvPr id="6" name="Text 4"/>
           <p:cNvSpPr/>
           <p:nvPr/>
         </p:nvSpPr>
@@ -4521,7 +6694,7 @@
       </p:sp>
       <p:sp>
         <p:nvSpPr>
-          <p:cNvPr id="6" name="Text 4"/>
+          <p:cNvPr id="7" name="Text 5"/>
           <p:cNvSpPr/>
           <p:nvPr/>
         </p:nvSpPr>
@@ -4554,7 +6727,7 @@
                 <a:ea typeface="Aptos Display" pitchFamily="34" charset="-122"/>
                 <a:cs typeface="Aptos Display" pitchFamily="34" charset="-120"/>
               </a:rPr>
-              <a:t>Expected Artifact or Evidence</a:t>
+              <a:t>Reflection Questions Continued</a:t>
             </a:r>
             <a:endParaRPr lang="en-US" sz="2700" dirty="0"/>
           </a:p>
@@ -4562,32 +6735,150 @@
       </p:sp>
       <p:sp>
         <p:nvSpPr>
-          <p:cNvPr id="7" name="Text 5"/>
-          <p:cNvSpPr/>
-          <p:nvPr/>
-        </p:nvSpPr>
-        <p:spPr>
-          <a:xfrm>
-            <a:off x="822960" y="1325880"/>
-            <a:ext cx="10378440" cy="4800600"/>
-          </a:xfrm>
-          <a:prstGeom prst="rect">
-            <a:avLst/>
-          </a:prstGeom>
-          <a:noFill/>
-          <a:ln/>
-        </p:spPr>
-        <p:txBody>
-          <a:bodyPr wrap="square" lIns="1016" tIns="1016" rIns="1016" bIns="1016" rtlCol="0" anchor="t">
+          <p:cNvPr id="8" name="Text 6"/>
+          <p:cNvSpPr/>
+          <p:nvPr/>
+        </p:nvSpPr>
+        <p:spPr>
+          <a:xfrm>
+            <a:off x="868680" y="1417320"/>
+            <a:ext cx="6675120" cy="4434840"/>
+          </a:xfrm>
+          <a:prstGeom prst="rect">
+            <a:avLst/>
+          </a:prstGeom>
+          <a:noFill/>
+          <a:ln/>
+        </p:spPr>
+        <p:txBody>
+          <a:bodyPr wrap="square" lIns="635" tIns="635" rIns="635" bIns="635" rtlCol="0" anchor="t">
             <a:normAutofit/>
           </a:bodyPr>
           <a:lstStyle/>
           <a:p>
+            <a:r>
+              <a:rPr lang="en-US" sz="1700" dirty="0">
+                <a:solidFill>
+                  <a:srgbClr val="17364A"/>
+                </a:solidFill>
+                <a:latin typeface="Aptos" pitchFamily="34" charset="0"/>
+                <a:ea typeface="Aptos" pitchFamily="34" charset="-122"/>
+                <a:cs typeface="Aptos" pitchFamily="34" charset="-120"/>
+              </a:rPr>
+              <a:t>What happens when records are incorrectly merged or not merged?</a:t>
+            </a:r>
+            <a:endParaRPr lang="en-US" sz="1700" dirty="0"/>
+          </a:p>
+          <a:p>
+            <a:r>
+              <a:rPr lang="en-US" sz="1700" dirty="0">
+                <a:solidFill>
+                  <a:srgbClr val="17364A"/>
+                </a:solidFill>
+                <a:latin typeface="Aptos" pitchFamily="34" charset="0"/>
+                <a:ea typeface="Aptos" pitchFamily="34" charset="-122"/>
+                <a:cs typeface="Aptos" pitchFamily="34" charset="-120"/>
+              </a:rPr>
+              <a:t>Where should human review be required?</a:t>
+            </a:r>
+            <a:endParaRPr lang="en-US" sz="1700" dirty="0"/>
+          </a:p>
+        </p:txBody>
+      </p:sp>
+      <p:sp>
+        <p:nvSpPr>
+          <p:cNvPr id="9" name="Shape 7"/>
+          <p:cNvSpPr/>
+          <p:nvPr/>
+        </p:nvSpPr>
+        <p:spPr>
+          <a:xfrm>
+            <a:off x="7909560" y="1417320"/>
+            <a:ext cx="3154680" cy="1828800"/>
+          </a:xfrm>
+          <a:prstGeom prst="roundRect">
+            <a:avLst>
+              <a:gd name="adj" fmla="val 6000"/>
+            </a:avLst>
+          </a:prstGeom>
+          <a:solidFill>
+            <a:srgbClr val="EEF8ED"/>
+          </a:solidFill>
+          <a:ln w="12700">
+            <a:solidFill>
+              <a:srgbClr val="B9D7E6"/>
+            </a:solidFill>
+            <a:prstDash val="solid"/>
+          </a:ln>
+        </p:spPr>
+      </p:sp>
+      <p:sp>
+        <p:nvSpPr>
+          <p:cNvPr id="10" name="Text 8"/>
+          <p:cNvSpPr/>
+          <p:nvPr/>
+        </p:nvSpPr>
+        <p:spPr>
+          <a:xfrm>
+            <a:off x="8074152" y="1563624"/>
+            <a:ext cx="2825496" cy="201168"/>
+          </a:xfrm>
+          <a:prstGeom prst="rect">
+            <a:avLst/>
+          </a:prstGeom>
+          <a:noFill/>
+          <a:ln/>
+        </p:spPr>
+        <p:txBody>
+          <a:bodyPr wrap="square" lIns="0" tIns="0" rIns="0" bIns="0" rtlCol="0" anchor="ctr"/>
+          <a:lstStyle/>
+          <a:p>
             <a:pPr indent="0" marL="0">
               <a:buNone/>
             </a:pPr>
             <a:r>
-              <a:rPr lang="en-US" sz="1420" dirty="0">
+              <a:rPr lang="en-US" sz="950" b="1" dirty="0">
+                <a:solidFill>
+                  <a:srgbClr val="0068B7"/>
+                </a:solidFill>
+                <a:latin typeface="Aptos" pitchFamily="34" charset="0"/>
+                <a:ea typeface="Aptos" pitchFamily="34" charset="-122"/>
+                <a:cs typeface="Aptos" pitchFamily="34" charset="-120"/>
+              </a:rPr>
+              <a:t>Key idea</a:t>
+            </a:r>
+            <a:endParaRPr lang="en-US" sz="950" dirty="0"/>
+          </a:p>
+        </p:txBody>
+      </p:sp>
+      <p:sp>
+        <p:nvSpPr>
+          <p:cNvPr id="11" name="Text 9"/>
+          <p:cNvSpPr/>
+          <p:nvPr/>
+        </p:nvSpPr>
+        <p:spPr>
+          <a:xfrm>
+            <a:off x="8074152" y="1856232"/>
+            <a:ext cx="2825496" cy="1261872"/>
+          </a:xfrm>
+          <a:prstGeom prst="rect">
+            <a:avLst/>
+          </a:prstGeom>
+          <a:noFill/>
+          <a:ln/>
+        </p:spPr>
+        <p:txBody>
+          <a:bodyPr wrap="square" lIns="0" tIns="0" rIns="0" bIns="0" rtlCol="0" anchor="t">
+            <a:normAutofit/>
+          </a:bodyPr>
+          <a:lstStyle/>
+          <a:p>
+            <a:pPr indent="0" marL="0">
+              <a:buNone/>
+            </a:pPr>
+            <a:r>
+              <a:rPr lang="en-US" sz="1250" dirty="0">
                 <a:solidFill>
                   <a:srgbClr val="17364A"/>
                 </a:solidFill>
@@ -4595,9 +6886,116 @@
                 <a:ea typeface="Aptos" pitchFamily="34" charset="-122"/>
                 <a:cs typeface="Aptos" pitchFamily="34" charset="-120"/>
               </a:rPr>
-              <a:t>Linkage risk review Deduplication workflow map Match review questions</a:t>
-            </a:r>
-            <a:endParaRPr lang="en-US" sz="1420" dirty="0"/>
+              <a:t>What happens when records are incorrectly merged or not merged?</a:t>
+            </a:r>
+            <a:endParaRPr lang="en-US" sz="1250" dirty="0"/>
+          </a:p>
+        </p:txBody>
+      </p:sp>
+      <p:sp>
+        <p:nvSpPr>
+          <p:cNvPr id="12" name="Shape 10"/>
+          <p:cNvSpPr/>
+          <p:nvPr/>
+        </p:nvSpPr>
+        <p:spPr>
+          <a:xfrm>
+            <a:off x="7909560" y="3520440"/>
+            <a:ext cx="3154680" cy="1737360"/>
+          </a:xfrm>
+          <a:prstGeom prst="roundRect">
+            <a:avLst>
+              <a:gd name="adj" fmla="val 6316"/>
+            </a:avLst>
+          </a:prstGeom>
+          <a:solidFill>
+            <a:srgbClr val="EAF6F8"/>
+          </a:solidFill>
+          <a:ln w="12700">
+            <a:solidFill>
+              <a:srgbClr val="B9D7E6"/>
+            </a:solidFill>
+            <a:prstDash val="solid"/>
+          </a:ln>
+        </p:spPr>
+      </p:sp>
+      <p:sp>
+        <p:nvSpPr>
+          <p:cNvPr id="13" name="Text 11"/>
+          <p:cNvSpPr/>
+          <p:nvPr/>
+        </p:nvSpPr>
+        <p:spPr>
+          <a:xfrm>
+            <a:off x="8074152" y="3666744"/>
+            <a:ext cx="2825496" cy="201168"/>
+          </a:xfrm>
+          <a:prstGeom prst="rect">
+            <a:avLst/>
+          </a:prstGeom>
+          <a:noFill/>
+          <a:ln/>
+        </p:spPr>
+        <p:txBody>
+          <a:bodyPr wrap="square" lIns="0" tIns="0" rIns="0" bIns="0" rtlCol="0" anchor="ctr"/>
+          <a:lstStyle/>
+          <a:p>
+            <a:pPr indent="0" marL="0">
+              <a:buNone/>
+            </a:pPr>
+            <a:r>
+              <a:rPr lang="en-US" sz="950" b="1" dirty="0">
+                <a:solidFill>
+                  <a:srgbClr val="0068B7"/>
+                </a:solidFill>
+                <a:latin typeface="Aptos" pitchFamily="34" charset="0"/>
+                <a:ea typeface="Aptos" pitchFamily="34" charset="-122"/>
+                <a:cs typeface="Aptos" pitchFamily="34" charset="-120"/>
+              </a:rPr>
+              <a:t>Use this for</a:t>
+            </a:r>
+            <a:endParaRPr lang="en-US" sz="950" dirty="0"/>
+          </a:p>
+        </p:txBody>
+      </p:sp>
+      <p:sp>
+        <p:nvSpPr>
+          <p:cNvPr id="14" name="Text 12"/>
+          <p:cNvSpPr/>
+          <p:nvPr/>
+        </p:nvSpPr>
+        <p:spPr>
+          <a:xfrm>
+            <a:off x="8074152" y="3959352"/>
+            <a:ext cx="2825496" cy="1170432"/>
+          </a:xfrm>
+          <a:prstGeom prst="rect">
+            <a:avLst/>
+          </a:prstGeom>
+          <a:noFill/>
+          <a:ln/>
+        </p:spPr>
+        <p:txBody>
+          <a:bodyPr wrap="square" lIns="0" tIns="0" rIns="0" bIns="0" rtlCol="0" anchor="t">
+            <a:normAutofit/>
+          </a:bodyPr>
+          <a:lstStyle/>
+          <a:p>
+            <a:pPr indent="0" marL="0">
+              <a:buNone/>
+            </a:pPr>
+            <a:r>
+              <a:rPr lang="en-US" sz="1250" dirty="0">
+                <a:solidFill>
+                  <a:srgbClr val="17364A"/>
+                </a:solidFill>
+                <a:latin typeface="Aptos" pitchFamily="34" charset="0"/>
+                <a:ea typeface="Aptos" pitchFamily="34" charset="-122"/>
+                <a:cs typeface="Aptos" pitchFamily="34" charset="-120"/>
+              </a:rPr>
+              <a:t>Connect the concept to public health decisions, safeguards, documentation, or implementation work.</a:t>
+            </a:r>
+            <a:endParaRPr lang="en-US" sz="1250" dirty="0"/>
           </a:p>
         </p:txBody>
       </p:sp>
@@ -4660,7 +7058,32 @@
       </p:sp>
       <p:sp>
         <p:nvSpPr>
-          <p:cNvPr id="3" name="Text 1"/>
+          <p:cNvPr id="3" name="Shape 1"/>
+          <p:cNvSpPr/>
+          <p:nvPr/>
+        </p:nvSpPr>
+        <p:spPr>
+          <a:xfrm>
+            <a:off x="0" y="164592"/>
+            <a:ext cx="146304" cy="6693408"/>
+          </a:xfrm>
+          <a:prstGeom prst="rect">
+            <a:avLst/>
+          </a:prstGeom>
+          <a:solidFill>
+            <a:srgbClr val="2F8A28"/>
+          </a:solidFill>
+          <a:ln w="12700">
+            <a:solidFill>
+              <a:srgbClr val="2F8A28"/>
+            </a:solidFill>
+            <a:prstDash val="solid"/>
+          </a:ln>
+        </p:spPr>
+      </p:sp>
+      <p:sp>
+        <p:nvSpPr>
+          <p:cNvPr id="4" name="Text 2"/>
           <p:cNvSpPr/>
           <p:nvPr/>
         </p:nvSpPr>
@@ -4699,7 +7122,7 @@
       </p:sp>
       <p:sp>
         <p:nvSpPr>
-          <p:cNvPr id="4" name="Text 2"/>
+          <p:cNvPr id="5" name="Text 3"/>
           <p:cNvSpPr/>
           <p:nvPr/>
         </p:nvSpPr>
@@ -4738,7 +7161,7 @@
       </p:sp>
       <p:sp>
         <p:nvSpPr>
-          <p:cNvPr id="5" name="Text 3"/>
+          <p:cNvPr id="6" name="Text 4"/>
           <p:cNvSpPr/>
           <p:nvPr/>
         </p:nvSpPr>
@@ -4777,13 +7200,77 @@
       </p:sp>
       <p:sp>
         <p:nvSpPr>
-          <p:cNvPr id="6" name="Text 4"/>
+          <p:cNvPr id="7" name="Shape 5"/>
           <p:cNvSpPr/>
           <p:nvPr/>
         </p:nvSpPr>
         <p:spPr>
           <a:xfrm>
             <a:off x="640080" y="658368"/>
+            <a:ext cx="420624" cy="420624"/>
+          </a:xfrm>
+          <a:prstGeom prst="ellipse">
+            <a:avLst/>
+          </a:prstGeom>
+          <a:solidFill>
+            <a:srgbClr val="0068B7"/>
+          </a:solidFill>
+          <a:ln w="12700">
+            <a:solidFill>
+              <a:srgbClr val="0068B7"/>
+            </a:solidFill>
+            <a:prstDash val="solid"/>
+          </a:ln>
+        </p:spPr>
+      </p:sp>
+      <p:sp>
+        <p:nvSpPr>
+          <p:cNvPr id="8" name="Text 6"/>
+          <p:cNvSpPr/>
+          <p:nvPr/>
+        </p:nvSpPr>
+        <p:spPr>
+          <a:xfrm>
+            <a:off x="640080" y="731520"/>
+            <a:ext cx="420624" cy="164592"/>
+          </a:xfrm>
+          <a:prstGeom prst="rect">
+            <a:avLst/>
+          </a:prstGeom>
+          <a:noFill/>
+          <a:ln/>
+        </p:spPr>
+        <p:txBody>
+          <a:bodyPr wrap="square" lIns="0" tIns="0" rIns="0" bIns="0" rtlCol="0" anchor="ctr"/>
+          <a:lstStyle/>
+          <a:p>
+            <a:pPr algn="ctr" indent="0" marL="0">
+              <a:buNone/>
+            </a:pPr>
+            <a:r>
+              <a:rPr lang="en-US" sz="1100" b="1" dirty="0">
+                <a:solidFill>
+                  <a:srgbClr val="FFFFFF"/>
+                </a:solidFill>
+                <a:latin typeface="Aptos" pitchFamily="34" charset="0"/>
+                <a:ea typeface="Aptos" pitchFamily="34" charset="-122"/>
+                <a:cs typeface="Aptos" pitchFamily="34" charset="-120"/>
+              </a:rPr>
+              <a:t>10</a:t>
+            </a:r>
+            <a:endParaRPr lang="en-US" sz="1100" dirty="0"/>
+          </a:p>
+        </p:txBody>
+      </p:sp>
+      <p:sp>
+        <p:nvSpPr>
+          <p:cNvPr id="9" name="Text 7"/>
+          <p:cNvSpPr/>
+          <p:nvPr/>
+        </p:nvSpPr>
+        <p:spPr>
+          <a:xfrm>
+            <a:off x="640080" y="621792"/>
             <a:ext cx="10881360" cy="566928"/>
           </a:xfrm>
           <a:prstGeom prst="rect">
@@ -4810,7 +7297,7 @@
                 <a:ea typeface="Aptos Display" pitchFamily="34" charset="-122"/>
                 <a:cs typeface="Aptos Display" pitchFamily="34" charset="-120"/>
               </a:rPr>
-              <a:t>Expected Artifact or Evidence Continued</a:t>
+              <a:t>Practical Exercise</a:t>
             </a:r>
             <a:endParaRPr lang="en-US" sz="2700" dirty="0"/>
           </a:p>
@@ -4818,32 +7305,150 @@
       </p:sp>
       <p:sp>
         <p:nvSpPr>
-          <p:cNvPr id="7" name="Text 5"/>
-          <p:cNvSpPr/>
-          <p:nvPr/>
-        </p:nvSpPr>
-        <p:spPr>
-          <a:xfrm>
-            <a:off x="822960" y="1325880"/>
-            <a:ext cx="10378440" cy="4800600"/>
-          </a:xfrm>
-          <a:prstGeom prst="rect">
-            <a:avLst/>
-          </a:prstGeom>
-          <a:noFill/>
-          <a:ln/>
-        </p:spPr>
-        <p:txBody>
-          <a:bodyPr wrap="square" lIns="1016" tIns="1016" rIns="1016" bIns="1016" rtlCol="0" anchor="t">
+          <p:cNvPr id="10" name="Text 8"/>
+          <p:cNvSpPr/>
+          <p:nvPr/>
+        </p:nvSpPr>
+        <p:spPr>
+          <a:xfrm>
+            <a:off x="868680" y="1417320"/>
+            <a:ext cx="6675120" cy="4434840"/>
+          </a:xfrm>
+          <a:prstGeom prst="rect">
+            <a:avLst/>
+          </a:prstGeom>
+          <a:noFill/>
+          <a:ln/>
+        </p:spPr>
+        <p:txBody>
+          <a:bodyPr wrap="square" lIns="635" tIns="635" rIns="635" bIns="635" rtlCol="0" anchor="t">
             <a:normAutofit/>
           </a:bodyPr>
           <a:lstStyle/>
           <a:p>
+            <a:r>
+              <a:rPr lang="en-US" sz="1700" dirty="0">
+                <a:solidFill>
+                  <a:srgbClr val="17364A"/>
+                </a:solidFill>
+                <a:latin typeface="Aptos" pitchFamily="34" charset="0"/>
+                <a:ea typeface="Aptos" pitchFamily="34" charset="-122"/>
+                <a:cs typeface="Aptos" pitchFamily="34" charset="-120"/>
+              </a:rPr>
+              <a:t>Create a linkage risk review for one AI-supported public health workflow.</a:t>
+            </a:r>
+            <a:endParaRPr lang="en-US" sz="1700" dirty="0"/>
+          </a:p>
+          <a:p>
+            <a:r>
+              <a:rPr lang="en-US" sz="1700" dirty="0">
+                <a:solidFill>
+                  <a:srgbClr val="17364A"/>
+                </a:solidFill>
+                <a:latin typeface="Aptos" pitchFamily="34" charset="0"/>
+                <a:ea typeface="Aptos" pitchFamily="34" charset="-122"/>
+                <a:cs typeface="Aptos" pitchFamily="34" charset="-120"/>
+              </a:rPr>
+              <a:t>Include the matching purpose, data sources, matching fields, known field quality issues, match method, thresholds, clerical.</a:t>
+            </a:r>
+            <a:endParaRPr lang="en-US" sz="1700" dirty="0"/>
+          </a:p>
+        </p:txBody>
+      </p:sp>
+      <p:sp>
+        <p:nvSpPr>
+          <p:cNvPr id="11" name="Shape 9"/>
+          <p:cNvSpPr/>
+          <p:nvPr/>
+        </p:nvSpPr>
+        <p:spPr>
+          <a:xfrm>
+            <a:off x="7909560" y="1417320"/>
+            <a:ext cx="3154680" cy="1828800"/>
+          </a:xfrm>
+          <a:prstGeom prst="roundRect">
+            <a:avLst>
+              <a:gd name="adj" fmla="val 6000"/>
+            </a:avLst>
+          </a:prstGeom>
+          <a:solidFill>
+            <a:srgbClr val="EEF8ED"/>
+          </a:solidFill>
+          <a:ln w="12700">
+            <a:solidFill>
+              <a:srgbClr val="B9D7E6"/>
+            </a:solidFill>
+            <a:prstDash val="solid"/>
+          </a:ln>
+        </p:spPr>
+      </p:sp>
+      <p:sp>
+        <p:nvSpPr>
+          <p:cNvPr id="12" name="Text 10"/>
+          <p:cNvSpPr/>
+          <p:nvPr/>
+        </p:nvSpPr>
+        <p:spPr>
+          <a:xfrm>
+            <a:off x="8074152" y="1563624"/>
+            <a:ext cx="2825496" cy="201168"/>
+          </a:xfrm>
+          <a:prstGeom prst="rect">
+            <a:avLst/>
+          </a:prstGeom>
+          <a:noFill/>
+          <a:ln/>
+        </p:spPr>
+        <p:txBody>
+          <a:bodyPr wrap="square" lIns="0" tIns="0" rIns="0" bIns="0" rtlCol="0" anchor="ctr"/>
+          <a:lstStyle/>
+          <a:p>
             <a:pPr indent="0" marL="0">
               <a:buNone/>
             </a:pPr>
             <a:r>
-              <a:rPr lang="en-US" sz="1420" dirty="0">
+              <a:rPr lang="en-US" sz="950" b="1" dirty="0">
+                <a:solidFill>
+                  <a:srgbClr val="0068B7"/>
+                </a:solidFill>
+                <a:latin typeface="Aptos" pitchFamily="34" charset="0"/>
+                <a:ea typeface="Aptos" pitchFamily="34" charset="-122"/>
+                <a:cs typeface="Aptos" pitchFamily="34" charset="-120"/>
+              </a:rPr>
+              <a:t>Key idea</a:t>
+            </a:r>
+            <a:endParaRPr lang="en-US" sz="950" dirty="0"/>
+          </a:p>
+        </p:txBody>
+      </p:sp>
+      <p:sp>
+        <p:nvSpPr>
+          <p:cNvPr id="13" name="Text 11"/>
+          <p:cNvSpPr/>
+          <p:nvPr/>
+        </p:nvSpPr>
+        <p:spPr>
+          <a:xfrm>
+            <a:off x="8074152" y="1856232"/>
+            <a:ext cx="2825496" cy="1261872"/>
+          </a:xfrm>
+          <a:prstGeom prst="rect">
+            <a:avLst/>
+          </a:prstGeom>
+          <a:noFill/>
+          <a:ln/>
+        </p:spPr>
+        <p:txBody>
+          <a:bodyPr wrap="square" lIns="0" tIns="0" rIns="0" bIns="0" rtlCol="0" anchor="t">
+            <a:normAutofit/>
+          </a:bodyPr>
+          <a:lstStyle/>
+          <a:p>
+            <a:pPr indent="0" marL="0">
+              <a:buNone/>
+            </a:pPr>
+            <a:r>
+              <a:rPr lang="en-US" sz="1250" dirty="0">
                 <a:solidFill>
                   <a:srgbClr val="17364A"/>
                 </a:solidFill>
@@ -4851,9 +7456,116 @@
                 <a:ea typeface="Aptos" pitchFamily="34" charset="-122"/>
                 <a:cs typeface="Aptos" pitchFamily="34" charset="-120"/>
               </a:rPr>
-              <a:t>Equity and escalation notes</a:t>
-            </a:r>
-            <a:endParaRPr lang="en-US" sz="1420" dirty="0"/>
+              <a:t>Create a linkage risk review for one AI-supported public health workflow.</a:t>
+            </a:r>
+            <a:endParaRPr lang="en-US" sz="1250" dirty="0"/>
+          </a:p>
+        </p:txBody>
+      </p:sp>
+      <p:sp>
+        <p:nvSpPr>
+          <p:cNvPr id="14" name="Shape 12"/>
+          <p:cNvSpPr/>
+          <p:nvPr/>
+        </p:nvSpPr>
+        <p:spPr>
+          <a:xfrm>
+            <a:off x="7909560" y="3520440"/>
+            <a:ext cx="3154680" cy="1737360"/>
+          </a:xfrm>
+          <a:prstGeom prst="roundRect">
+            <a:avLst>
+              <a:gd name="adj" fmla="val 6316"/>
+            </a:avLst>
+          </a:prstGeom>
+          <a:solidFill>
+            <a:srgbClr val="EAF6F8"/>
+          </a:solidFill>
+          <a:ln w="12700">
+            <a:solidFill>
+              <a:srgbClr val="B9D7E6"/>
+            </a:solidFill>
+            <a:prstDash val="solid"/>
+          </a:ln>
+        </p:spPr>
+      </p:sp>
+      <p:sp>
+        <p:nvSpPr>
+          <p:cNvPr id="15" name="Text 13"/>
+          <p:cNvSpPr/>
+          <p:nvPr/>
+        </p:nvSpPr>
+        <p:spPr>
+          <a:xfrm>
+            <a:off x="8074152" y="3666744"/>
+            <a:ext cx="2825496" cy="201168"/>
+          </a:xfrm>
+          <a:prstGeom prst="rect">
+            <a:avLst/>
+          </a:prstGeom>
+          <a:noFill/>
+          <a:ln/>
+        </p:spPr>
+        <p:txBody>
+          <a:bodyPr wrap="square" lIns="0" tIns="0" rIns="0" bIns="0" rtlCol="0" anchor="ctr"/>
+          <a:lstStyle/>
+          <a:p>
+            <a:pPr indent="0" marL="0">
+              <a:buNone/>
+            </a:pPr>
+            <a:r>
+              <a:rPr lang="en-US" sz="950" b="1" dirty="0">
+                <a:solidFill>
+                  <a:srgbClr val="0068B7"/>
+                </a:solidFill>
+                <a:latin typeface="Aptos" pitchFamily="34" charset="0"/>
+                <a:ea typeface="Aptos" pitchFamily="34" charset="-122"/>
+                <a:cs typeface="Aptos" pitchFamily="34" charset="-120"/>
+              </a:rPr>
+              <a:t>Use this for</a:t>
+            </a:r>
+            <a:endParaRPr lang="en-US" sz="950" dirty="0"/>
+          </a:p>
+        </p:txBody>
+      </p:sp>
+      <p:sp>
+        <p:nvSpPr>
+          <p:cNvPr id="16" name="Text 14"/>
+          <p:cNvSpPr/>
+          <p:nvPr/>
+        </p:nvSpPr>
+        <p:spPr>
+          <a:xfrm>
+            <a:off x="8074152" y="3959352"/>
+            <a:ext cx="2825496" cy="1170432"/>
+          </a:xfrm>
+          <a:prstGeom prst="rect">
+            <a:avLst/>
+          </a:prstGeom>
+          <a:noFill/>
+          <a:ln/>
+        </p:spPr>
+        <p:txBody>
+          <a:bodyPr wrap="square" lIns="0" tIns="0" rIns="0" bIns="0" rtlCol="0" anchor="t">
+            <a:normAutofit/>
+          </a:bodyPr>
+          <a:lstStyle/>
+          <a:p>
+            <a:pPr indent="0" marL="0">
+              <a:buNone/>
+            </a:pPr>
+            <a:r>
+              <a:rPr lang="en-US" sz="1250" dirty="0">
+                <a:solidFill>
+                  <a:srgbClr val="17364A"/>
+                </a:solidFill>
+                <a:latin typeface="Aptos" pitchFamily="34" charset="0"/>
+                <a:ea typeface="Aptos" pitchFamily="34" charset="-122"/>
+                <a:cs typeface="Aptos" pitchFamily="34" charset="-120"/>
+              </a:rPr>
+              <a:t>Connect the concept to public health decisions, safeguards, documentation, or implementation work.</a:t>
+            </a:r>
+            <a:endParaRPr lang="en-US" sz="1250" dirty="0"/>
           </a:p>
         </p:txBody>
       </p:sp>
@@ -4916,7 +7628,32 @@
       </p:sp>
       <p:sp>
         <p:nvSpPr>
-          <p:cNvPr id="3" name="Text 1"/>
+          <p:cNvPr id="3" name="Shape 1"/>
+          <p:cNvSpPr/>
+          <p:nvPr/>
+        </p:nvSpPr>
+        <p:spPr>
+          <a:xfrm>
+            <a:off x="0" y="164592"/>
+            <a:ext cx="146304" cy="6693408"/>
+          </a:xfrm>
+          <a:prstGeom prst="rect">
+            <a:avLst/>
+          </a:prstGeom>
+          <a:solidFill>
+            <a:srgbClr val="2F8A28"/>
+          </a:solidFill>
+          <a:ln w="12700">
+            <a:solidFill>
+              <a:srgbClr val="2F8A28"/>
+            </a:solidFill>
+            <a:prstDash val="solid"/>
+          </a:ln>
+        </p:spPr>
+      </p:sp>
+      <p:sp>
+        <p:nvSpPr>
+          <p:cNvPr id="4" name="Text 2"/>
           <p:cNvSpPr/>
           <p:nvPr/>
         </p:nvSpPr>
@@ -4955,7 +7692,7 @@
       </p:sp>
       <p:sp>
         <p:nvSpPr>
-          <p:cNvPr id="4" name="Text 2"/>
+          <p:cNvPr id="5" name="Text 3"/>
           <p:cNvSpPr/>
           <p:nvPr/>
         </p:nvSpPr>
@@ -4994,7 +7731,7 @@
       </p:sp>
       <p:sp>
         <p:nvSpPr>
-          <p:cNvPr id="5" name="Text 3"/>
+          <p:cNvPr id="6" name="Text 4"/>
           <p:cNvSpPr/>
           <p:nvPr/>
         </p:nvSpPr>
@@ -5033,13 +7770,77 @@
       </p:sp>
       <p:sp>
         <p:nvSpPr>
-          <p:cNvPr id="6" name="Text 4"/>
+          <p:cNvPr id="7" name="Shape 5"/>
           <p:cNvSpPr/>
           <p:nvPr/>
         </p:nvSpPr>
         <p:spPr>
           <a:xfrm>
             <a:off x="640080" y="658368"/>
+            <a:ext cx="420624" cy="420624"/>
+          </a:xfrm>
+          <a:prstGeom prst="ellipse">
+            <a:avLst/>
+          </a:prstGeom>
+          <a:solidFill>
+            <a:srgbClr val="0068B7"/>
+          </a:solidFill>
+          <a:ln w="12700">
+            <a:solidFill>
+              <a:srgbClr val="0068B7"/>
+            </a:solidFill>
+            <a:prstDash val="solid"/>
+          </a:ln>
+        </p:spPr>
+      </p:sp>
+      <p:sp>
+        <p:nvSpPr>
+          <p:cNvPr id="8" name="Text 6"/>
+          <p:cNvSpPr/>
+          <p:nvPr/>
+        </p:nvSpPr>
+        <p:spPr>
+          <a:xfrm>
+            <a:off x="640080" y="731520"/>
+            <a:ext cx="420624" cy="164592"/>
+          </a:xfrm>
+          <a:prstGeom prst="rect">
+            <a:avLst/>
+          </a:prstGeom>
+          <a:noFill/>
+          <a:ln/>
+        </p:spPr>
+        <p:txBody>
+          <a:bodyPr wrap="square" lIns="0" tIns="0" rIns="0" bIns="0" rtlCol="0" anchor="ctr"/>
+          <a:lstStyle/>
+          <a:p>
+            <a:pPr algn="ctr" indent="0" marL="0">
+              <a:buNone/>
+            </a:pPr>
+            <a:r>
+              <a:rPr lang="en-US" sz="1100" b="1" dirty="0">
+                <a:solidFill>
+                  <a:srgbClr val="FFFFFF"/>
+                </a:solidFill>
+                <a:latin typeface="Aptos" pitchFamily="34" charset="0"/>
+                <a:ea typeface="Aptos" pitchFamily="34" charset="-122"/>
+                <a:cs typeface="Aptos" pitchFamily="34" charset="-120"/>
+              </a:rPr>
+              <a:t>11</a:t>
+            </a:r>
+            <a:endParaRPr lang="en-US" sz="1100" dirty="0"/>
+          </a:p>
+        </p:txBody>
+      </p:sp>
+      <p:sp>
+        <p:nvSpPr>
+          <p:cNvPr id="9" name="Text 7"/>
+          <p:cNvSpPr/>
+          <p:nvPr/>
+        </p:nvSpPr>
+        <p:spPr>
+          <a:xfrm>
+            <a:off x="640080" y="621792"/>
             <a:ext cx="10881360" cy="566928"/>
           </a:xfrm>
           <a:prstGeom prst="rect">
@@ -5066,7 +7867,7 @@
                 <a:ea typeface="Aptos Display" pitchFamily="34" charset="-122"/>
                 <a:cs typeface="Aptos Display" pitchFamily="34" charset="-120"/>
               </a:rPr>
-              <a:t>Expected Assignment</a:t>
+              <a:t>Expected Artifact or Evidence</a:t>
             </a:r>
             <a:endParaRPr lang="en-US" sz="2700" dirty="0"/>
           </a:p>
@@ -5074,14 +7875,14 @@
       </p:sp>
       <p:sp>
         <p:nvSpPr>
-          <p:cNvPr id="7" name="Text 5"/>
-          <p:cNvSpPr/>
-          <p:nvPr/>
-        </p:nvSpPr>
-        <p:spPr>
-          <a:xfrm>
-            <a:off x="822960" y="1325880"/>
-            <a:ext cx="10378440" cy="4800600"/>
+          <p:cNvPr id="10" name="Text 8"/>
+          <p:cNvSpPr/>
+          <p:nvPr/>
+        </p:nvSpPr>
+        <p:spPr>
+          <a:xfrm>
+            <a:off x="868680" y="1417320"/>
+            <a:ext cx="6675120" cy="4434840"/>
           </a:xfrm>
           <a:prstGeom prst="rect">
             <a:avLst/>
@@ -5096,7 +7897,7 @@
           <a:lstStyle/>
           <a:p>
             <a:r>
-              <a:rPr lang="en-US" sz="1450" dirty="0">
+              <a:rPr lang="en-US" sz="1700" dirty="0">
                 <a:solidFill>
                   <a:srgbClr val="17364A"/>
                 </a:solidFill>
@@ -5106,11 +7907,11 @@
               </a:rPr>
               <a:t>Linkage risk review</a:t>
             </a:r>
-            <a:endParaRPr lang="en-US" sz="1450" dirty="0"/>
-          </a:p>
-          <a:p>
-            <a:r>
-              <a:rPr lang="en-US" sz="1450" dirty="0">
+            <a:endParaRPr lang="en-US" sz="1700" dirty="0"/>
+          </a:p>
+          <a:p>
+            <a:r>
+              <a:rPr lang="en-US" sz="1700" dirty="0">
                 <a:solidFill>
                   <a:srgbClr val="17364A"/>
                 </a:solidFill>
@@ -5120,11 +7921,11 @@
               </a:rPr>
               <a:t>Deduplication workflow map</a:t>
             </a:r>
-            <a:endParaRPr lang="en-US" sz="1450" dirty="0"/>
-          </a:p>
-          <a:p>
-            <a:r>
-              <a:rPr lang="en-US" sz="1450" dirty="0">
+            <a:endParaRPr lang="en-US" sz="1700" dirty="0"/>
+          </a:p>
+          <a:p>
+            <a:r>
+              <a:rPr lang="en-US" sz="1700" dirty="0">
                 <a:solidFill>
                   <a:srgbClr val="17364A"/>
                 </a:solidFill>
@@ -5134,11 +7935,104 @@
               </a:rPr>
               <a:t>Match review questions</a:t>
             </a:r>
-            <a:endParaRPr lang="en-US" sz="1450" dirty="0"/>
-          </a:p>
-          <a:p>
-            <a:r>
-              <a:rPr lang="en-US" sz="1450" dirty="0">
+            <a:endParaRPr lang="en-US" sz="1700" dirty="0"/>
+          </a:p>
+        </p:txBody>
+      </p:sp>
+      <p:sp>
+        <p:nvSpPr>
+          <p:cNvPr id="11" name="Shape 9"/>
+          <p:cNvSpPr/>
+          <p:nvPr/>
+        </p:nvSpPr>
+        <p:spPr>
+          <a:xfrm>
+            <a:off x="7909560" y="1417320"/>
+            <a:ext cx="3154680" cy="1828800"/>
+          </a:xfrm>
+          <a:prstGeom prst="roundRect">
+            <a:avLst>
+              <a:gd name="adj" fmla="val 6000"/>
+            </a:avLst>
+          </a:prstGeom>
+          <a:solidFill>
+            <a:srgbClr val="EEF8ED"/>
+          </a:solidFill>
+          <a:ln w="12700">
+            <a:solidFill>
+              <a:srgbClr val="B9D7E6"/>
+            </a:solidFill>
+            <a:prstDash val="solid"/>
+          </a:ln>
+        </p:spPr>
+      </p:sp>
+      <p:sp>
+        <p:nvSpPr>
+          <p:cNvPr id="12" name="Text 10"/>
+          <p:cNvSpPr/>
+          <p:nvPr/>
+        </p:nvSpPr>
+        <p:spPr>
+          <a:xfrm>
+            <a:off x="8074152" y="1563624"/>
+            <a:ext cx="2825496" cy="201168"/>
+          </a:xfrm>
+          <a:prstGeom prst="rect">
+            <a:avLst/>
+          </a:prstGeom>
+          <a:noFill/>
+          <a:ln/>
+        </p:spPr>
+        <p:txBody>
+          <a:bodyPr wrap="square" lIns="0" tIns="0" rIns="0" bIns="0" rtlCol="0" anchor="ctr"/>
+          <a:lstStyle/>
+          <a:p>
+            <a:pPr indent="0" marL="0">
+              <a:buNone/>
+            </a:pPr>
+            <a:r>
+              <a:rPr lang="en-US" sz="950" b="1" dirty="0">
+                <a:solidFill>
+                  <a:srgbClr val="0068B7"/>
+                </a:solidFill>
+                <a:latin typeface="Aptos" pitchFamily="34" charset="0"/>
+                <a:ea typeface="Aptos" pitchFamily="34" charset="-122"/>
+                <a:cs typeface="Aptos" pitchFamily="34" charset="-120"/>
+              </a:rPr>
+              <a:t>Key idea</a:t>
+            </a:r>
+            <a:endParaRPr lang="en-US" sz="950" dirty="0"/>
+          </a:p>
+        </p:txBody>
+      </p:sp>
+      <p:sp>
+        <p:nvSpPr>
+          <p:cNvPr id="13" name="Text 11"/>
+          <p:cNvSpPr/>
+          <p:nvPr/>
+        </p:nvSpPr>
+        <p:spPr>
+          <a:xfrm>
+            <a:off x="8074152" y="1856232"/>
+            <a:ext cx="2825496" cy="1261872"/>
+          </a:xfrm>
+          <a:prstGeom prst="rect">
+            <a:avLst/>
+          </a:prstGeom>
+          <a:noFill/>
+          <a:ln/>
+        </p:spPr>
+        <p:txBody>
+          <a:bodyPr wrap="square" lIns="0" tIns="0" rIns="0" bIns="0" rtlCol="0" anchor="t">
+            <a:normAutofit/>
+          </a:bodyPr>
+          <a:lstStyle/>
+          <a:p>
+            <a:pPr indent="0" marL="0">
+              <a:buNone/>
+            </a:pPr>
+            <a:r>
+              <a:rPr lang="en-US" sz="1250" dirty="0">
                 <a:solidFill>
                   <a:srgbClr val="17364A"/>
                 </a:solidFill>
@@ -5146,9 +8040,116 @@
                 <a:ea typeface="Aptos" pitchFamily="34" charset="-122"/>
                 <a:cs typeface="Aptos" pitchFamily="34" charset="-120"/>
               </a:rPr>
-              <a:t>Equity and escalation notes</a:t>
-            </a:r>
-            <a:endParaRPr lang="en-US" sz="1450" dirty="0"/>
+              <a:t>Linkage risk review</a:t>
+            </a:r>
+            <a:endParaRPr lang="en-US" sz="1250" dirty="0"/>
+          </a:p>
+        </p:txBody>
+      </p:sp>
+      <p:sp>
+        <p:nvSpPr>
+          <p:cNvPr id="14" name="Shape 12"/>
+          <p:cNvSpPr/>
+          <p:nvPr/>
+        </p:nvSpPr>
+        <p:spPr>
+          <a:xfrm>
+            <a:off x="7909560" y="3520440"/>
+            <a:ext cx="3154680" cy="1737360"/>
+          </a:xfrm>
+          <a:prstGeom prst="roundRect">
+            <a:avLst>
+              <a:gd name="adj" fmla="val 6316"/>
+            </a:avLst>
+          </a:prstGeom>
+          <a:solidFill>
+            <a:srgbClr val="EAF6F8"/>
+          </a:solidFill>
+          <a:ln w="12700">
+            <a:solidFill>
+              <a:srgbClr val="B9D7E6"/>
+            </a:solidFill>
+            <a:prstDash val="solid"/>
+          </a:ln>
+        </p:spPr>
+      </p:sp>
+      <p:sp>
+        <p:nvSpPr>
+          <p:cNvPr id="15" name="Text 13"/>
+          <p:cNvSpPr/>
+          <p:nvPr/>
+        </p:nvSpPr>
+        <p:spPr>
+          <a:xfrm>
+            <a:off x="8074152" y="3666744"/>
+            <a:ext cx="2825496" cy="201168"/>
+          </a:xfrm>
+          <a:prstGeom prst="rect">
+            <a:avLst/>
+          </a:prstGeom>
+          <a:noFill/>
+          <a:ln/>
+        </p:spPr>
+        <p:txBody>
+          <a:bodyPr wrap="square" lIns="0" tIns="0" rIns="0" bIns="0" rtlCol="0" anchor="ctr"/>
+          <a:lstStyle/>
+          <a:p>
+            <a:pPr indent="0" marL="0">
+              <a:buNone/>
+            </a:pPr>
+            <a:r>
+              <a:rPr lang="en-US" sz="950" b="1" dirty="0">
+                <a:solidFill>
+                  <a:srgbClr val="0068B7"/>
+                </a:solidFill>
+                <a:latin typeface="Aptos" pitchFamily="34" charset="0"/>
+                <a:ea typeface="Aptos" pitchFamily="34" charset="-122"/>
+                <a:cs typeface="Aptos" pitchFamily="34" charset="-120"/>
+              </a:rPr>
+              <a:t>Use this for</a:t>
+            </a:r>
+            <a:endParaRPr lang="en-US" sz="950" dirty="0"/>
+          </a:p>
+        </p:txBody>
+      </p:sp>
+      <p:sp>
+        <p:nvSpPr>
+          <p:cNvPr id="16" name="Text 14"/>
+          <p:cNvSpPr/>
+          <p:nvPr/>
+        </p:nvSpPr>
+        <p:spPr>
+          <a:xfrm>
+            <a:off x="8074152" y="3959352"/>
+            <a:ext cx="2825496" cy="1170432"/>
+          </a:xfrm>
+          <a:prstGeom prst="rect">
+            <a:avLst/>
+          </a:prstGeom>
+          <a:noFill/>
+          <a:ln/>
+        </p:spPr>
+        <p:txBody>
+          <a:bodyPr wrap="square" lIns="0" tIns="0" rIns="0" bIns="0" rtlCol="0" anchor="t">
+            <a:normAutofit/>
+          </a:bodyPr>
+          <a:lstStyle/>
+          <a:p>
+            <a:pPr indent="0" marL="0">
+              <a:buNone/>
+            </a:pPr>
+            <a:r>
+              <a:rPr lang="en-US" sz="1250" dirty="0">
+                <a:solidFill>
+                  <a:srgbClr val="17364A"/>
+                </a:solidFill>
+                <a:latin typeface="Aptos" pitchFamily="34" charset="0"/>
+                <a:ea typeface="Aptos" pitchFamily="34" charset="-122"/>
+                <a:cs typeface="Aptos" pitchFamily="34" charset="-120"/>
+              </a:rPr>
+              <a:t>Connect the concept to public health decisions, safeguards, documentation, or implementation work.</a:t>
+            </a:r>
+            <a:endParaRPr lang="en-US" sz="1250" dirty="0"/>
           </a:p>
         </p:txBody>
       </p:sp>
@@ -5211,7 +8212,32 @@
       </p:sp>
       <p:sp>
         <p:nvSpPr>
-          <p:cNvPr id="3" name="Text 1"/>
+          <p:cNvPr id="3" name="Shape 1"/>
+          <p:cNvSpPr/>
+          <p:nvPr/>
+        </p:nvSpPr>
+        <p:spPr>
+          <a:xfrm>
+            <a:off x="0" y="164592"/>
+            <a:ext cx="146304" cy="6693408"/>
+          </a:xfrm>
+          <a:prstGeom prst="rect">
+            <a:avLst/>
+          </a:prstGeom>
+          <a:solidFill>
+            <a:srgbClr val="2F8A28"/>
+          </a:solidFill>
+          <a:ln w="12700">
+            <a:solidFill>
+              <a:srgbClr val="2F8A28"/>
+            </a:solidFill>
+            <a:prstDash val="solid"/>
+          </a:ln>
+        </p:spPr>
+      </p:sp>
+      <p:sp>
+        <p:nvSpPr>
+          <p:cNvPr id="4" name="Text 2"/>
           <p:cNvSpPr/>
           <p:nvPr/>
         </p:nvSpPr>
@@ -5250,7 +8276,7 @@
       </p:sp>
       <p:sp>
         <p:nvSpPr>
-          <p:cNvPr id="4" name="Text 2"/>
+          <p:cNvPr id="5" name="Text 3"/>
           <p:cNvSpPr/>
           <p:nvPr/>
         </p:nvSpPr>
@@ -5289,7 +8315,7 @@
       </p:sp>
       <p:sp>
         <p:nvSpPr>
-          <p:cNvPr id="5" name="Text 3"/>
+          <p:cNvPr id="6" name="Text 4"/>
           <p:cNvSpPr/>
           <p:nvPr/>
         </p:nvSpPr>
@@ -5328,7 +8354,7 @@
       </p:sp>
       <p:sp>
         <p:nvSpPr>
-          <p:cNvPr id="6" name="Text 4"/>
+          <p:cNvPr id="7" name="Text 5"/>
           <p:cNvSpPr/>
           <p:nvPr/>
         </p:nvSpPr>
@@ -5361,7 +8387,7 @@
                 <a:ea typeface="Aptos Display" pitchFamily="34" charset="-122"/>
                 <a:cs typeface="Aptos Display" pitchFamily="34" charset="-120"/>
               </a:rPr>
-              <a:t>Knowledge Check</a:t>
+              <a:t>Expected Artifact or Evidence Continued</a:t>
             </a:r>
             <a:endParaRPr lang="en-US" sz="2700" dirty="0"/>
           </a:p>
@@ -5369,14 +8395,14 @@
       </p:sp>
       <p:sp>
         <p:nvSpPr>
-          <p:cNvPr id="7" name="Text 5"/>
-          <p:cNvSpPr/>
-          <p:nvPr/>
-        </p:nvSpPr>
-        <p:spPr>
-          <a:xfrm>
-            <a:off x="822960" y="1325880"/>
-            <a:ext cx="10378440" cy="4800600"/>
+          <p:cNvPr id="8" name="Text 6"/>
+          <p:cNvSpPr/>
+          <p:nvPr/>
+        </p:nvSpPr>
+        <p:spPr>
+          <a:xfrm>
+            <a:off x="868680" y="1417320"/>
+            <a:ext cx="6675120" cy="4434840"/>
           </a:xfrm>
           <a:prstGeom prst="rect">
             <a:avLst/>
@@ -5391,7 +8417,7 @@
           <a:lstStyle/>
           <a:p>
             <a:r>
-              <a:rPr lang="en-US" sz="1450" dirty="0">
+              <a:rPr lang="en-US" sz="1700" dirty="0">
                 <a:solidFill>
                   <a:srgbClr val="17364A"/>
                 </a:solidFill>
@@ -5399,13 +8425,106 @@
                 <a:ea typeface="Aptos" pitchFamily="34" charset="-122"/>
                 <a:cs typeface="Aptos" pitchFamily="34" charset="-120"/>
               </a:rPr>
-              <a:t>1. What is a false match?</a:t>
-            </a:r>
-            <a:endParaRPr lang="en-US" sz="1450" dirty="0"/>
-          </a:p>
-          <a:p>
-            <a:r>
-              <a:rPr lang="en-US" sz="1450" dirty="0">
+              <a:t>Equity and escalation notes</a:t>
+            </a:r>
+            <a:endParaRPr lang="en-US" sz="1700" dirty="0"/>
+          </a:p>
+        </p:txBody>
+      </p:sp>
+      <p:sp>
+        <p:nvSpPr>
+          <p:cNvPr id="9" name="Shape 7"/>
+          <p:cNvSpPr/>
+          <p:nvPr/>
+        </p:nvSpPr>
+        <p:spPr>
+          <a:xfrm>
+            <a:off x="7909560" y="1417320"/>
+            <a:ext cx="3154680" cy="1828800"/>
+          </a:xfrm>
+          <a:prstGeom prst="roundRect">
+            <a:avLst>
+              <a:gd name="adj" fmla="val 6000"/>
+            </a:avLst>
+          </a:prstGeom>
+          <a:solidFill>
+            <a:srgbClr val="EEF8ED"/>
+          </a:solidFill>
+          <a:ln w="12700">
+            <a:solidFill>
+              <a:srgbClr val="B9D7E6"/>
+            </a:solidFill>
+            <a:prstDash val="solid"/>
+          </a:ln>
+        </p:spPr>
+      </p:sp>
+      <p:sp>
+        <p:nvSpPr>
+          <p:cNvPr id="10" name="Text 8"/>
+          <p:cNvSpPr/>
+          <p:nvPr/>
+        </p:nvSpPr>
+        <p:spPr>
+          <a:xfrm>
+            <a:off x="8074152" y="1563624"/>
+            <a:ext cx="2825496" cy="201168"/>
+          </a:xfrm>
+          <a:prstGeom prst="rect">
+            <a:avLst/>
+          </a:prstGeom>
+          <a:noFill/>
+          <a:ln/>
+        </p:spPr>
+        <p:txBody>
+          <a:bodyPr wrap="square" lIns="0" tIns="0" rIns="0" bIns="0" rtlCol="0" anchor="ctr"/>
+          <a:lstStyle/>
+          <a:p>
+            <a:pPr indent="0" marL="0">
+              <a:buNone/>
+            </a:pPr>
+            <a:r>
+              <a:rPr lang="en-US" sz="950" b="1" dirty="0">
+                <a:solidFill>
+                  <a:srgbClr val="0068B7"/>
+                </a:solidFill>
+                <a:latin typeface="Aptos" pitchFamily="34" charset="0"/>
+                <a:ea typeface="Aptos" pitchFamily="34" charset="-122"/>
+                <a:cs typeface="Aptos" pitchFamily="34" charset="-120"/>
+              </a:rPr>
+              <a:t>Key idea</a:t>
+            </a:r>
+            <a:endParaRPr lang="en-US" sz="950" dirty="0"/>
+          </a:p>
+        </p:txBody>
+      </p:sp>
+      <p:sp>
+        <p:nvSpPr>
+          <p:cNvPr id="11" name="Text 9"/>
+          <p:cNvSpPr/>
+          <p:nvPr/>
+        </p:nvSpPr>
+        <p:spPr>
+          <a:xfrm>
+            <a:off x="8074152" y="1856232"/>
+            <a:ext cx="2825496" cy="1261872"/>
+          </a:xfrm>
+          <a:prstGeom prst="rect">
+            <a:avLst/>
+          </a:prstGeom>
+          <a:noFill/>
+          <a:ln/>
+        </p:spPr>
+        <p:txBody>
+          <a:bodyPr wrap="square" lIns="0" tIns="0" rIns="0" bIns="0" rtlCol="0" anchor="t">
+            <a:normAutofit/>
+          </a:bodyPr>
+          <a:lstStyle/>
+          <a:p>
+            <a:pPr indent="0" marL="0">
+              <a:buNone/>
+            </a:pPr>
+            <a:r>
+              <a:rPr lang="en-US" sz="1250" dirty="0">
                 <a:solidFill>
                   <a:srgbClr val="17364A"/>
                 </a:solidFill>
@@ -5413,13 +8532,106 @@
                 <a:ea typeface="Aptos" pitchFamily="34" charset="-122"/>
                 <a:cs typeface="Aptos" pitchFamily="34" charset="-120"/>
               </a:rPr>
-              <a:t>2. What is a missed match?</a:t>
-            </a:r>
-            <a:endParaRPr lang="en-US" sz="1450" dirty="0"/>
-          </a:p>
-          <a:p>
-            <a:r>
-              <a:rPr lang="en-US" sz="1450" dirty="0">
+              <a:t>Equity and escalation notes</a:t>
+            </a:r>
+            <a:endParaRPr lang="en-US" sz="1250" dirty="0"/>
+          </a:p>
+        </p:txBody>
+      </p:sp>
+      <p:sp>
+        <p:nvSpPr>
+          <p:cNvPr id="12" name="Shape 10"/>
+          <p:cNvSpPr/>
+          <p:nvPr/>
+        </p:nvSpPr>
+        <p:spPr>
+          <a:xfrm>
+            <a:off x="7909560" y="3520440"/>
+            <a:ext cx="3154680" cy="1737360"/>
+          </a:xfrm>
+          <a:prstGeom prst="roundRect">
+            <a:avLst>
+              <a:gd name="adj" fmla="val 6316"/>
+            </a:avLst>
+          </a:prstGeom>
+          <a:solidFill>
+            <a:srgbClr val="EAF6F8"/>
+          </a:solidFill>
+          <a:ln w="12700">
+            <a:solidFill>
+              <a:srgbClr val="B9D7E6"/>
+            </a:solidFill>
+            <a:prstDash val="solid"/>
+          </a:ln>
+        </p:spPr>
+      </p:sp>
+      <p:sp>
+        <p:nvSpPr>
+          <p:cNvPr id="13" name="Text 11"/>
+          <p:cNvSpPr/>
+          <p:nvPr/>
+        </p:nvSpPr>
+        <p:spPr>
+          <a:xfrm>
+            <a:off x="8074152" y="3666744"/>
+            <a:ext cx="2825496" cy="201168"/>
+          </a:xfrm>
+          <a:prstGeom prst="rect">
+            <a:avLst/>
+          </a:prstGeom>
+          <a:noFill/>
+          <a:ln/>
+        </p:spPr>
+        <p:txBody>
+          <a:bodyPr wrap="square" lIns="0" tIns="0" rIns="0" bIns="0" rtlCol="0" anchor="ctr"/>
+          <a:lstStyle/>
+          <a:p>
+            <a:pPr indent="0" marL="0">
+              <a:buNone/>
+            </a:pPr>
+            <a:r>
+              <a:rPr lang="en-US" sz="950" b="1" dirty="0">
+                <a:solidFill>
+                  <a:srgbClr val="0068B7"/>
+                </a:solidFill>
+                <a:latin typeface="Aptos" pitchFamily="34" charset="0"/>
+                <a:ea typeface="Aptos" pitchFamily="34" charset="-122"/>
+                <a:cs typeface="Aptos" pitchFamily="34" charset="-120"/>
+              </a:rPr>
+              <a:t>Use this for</a:t>
+            </a:r>
+            <a:endParaRPr lang="en-US" sz="950" dirty="0"/>
+          </a:p>
+        </p:txBody>
+      </p:sp>
+      <p:sp>
+        <p:nvSpPr>
+          <p:cNvPr id="14" name="Text 12"/>
+          <p:cNvSpPr/>
+          <p:nvPr/>
+        </p:nvSpPr>
+        <p:spPr>
+          <a:xfrm>
+            <a:off x="8074152" y="3959352"/>
+            <a:ext cx="2825496" cy="1170432"/>
+          </a:xfrm>
+          <a:prstGeom prst="rect">
+            <a:avLst/>
+          </a:prstGeom>
+          <a:noFill/>
+          <a:ln/>
+        </p:spPr>
+        <p:txBody>
+          <a:bodyPr wrap="square" lIns="0" tIns="0" rIns="0" bIns="0" rtlCol="0" anchor="t">
+            <a:normAutofit/>
+          </a:bodyPr>
+          <a:lstStyle/>
+          <a:p>
+            <a:pPr indent="0" marL="0">
+              <a:buNone/>
+            </a:pPr>
+            <a:r>
+              <a:rPr lang="en-US" sz="1250" dirty="0">
                 <a:solidFill>
                   <a:srgbClr val="17364A"/>
                 </a:solidFill>
@@ -5427,37 +8639,9 @@
                 <a:ea typeface="Aptos" pitchFamily="34" charset="-122"/>
                 <a:cs typeface="Aptos" pitchFamily="34" charset="-120"/>
               </a:rPr>
-              <a:t>3. Why does record linkage matter for AI?</a:t>
-            </a:r>
-            <a:endParaRPr lang="en-US" sz="1450" dirty="0"/>
-          </a:p>
-          <a:p>
-            <a:r>
-              <a:rPr lang="en-US" sz="1450" dirty="0">
-                <a:solidFill>
-                  <a:srgbClr val="17364A"/>
-                </a:solidFill>
-                <a:latin typeface="Aptos" pitchFamily="34" charset="0"/>
-                <a:ea typeface="Aptos" pitchFamily="34" charset="-122"/>
-                <a:cs typeface="Aptos" pitchFamily="34" charset="-120"/>
-              </a:rPr>
-              <a:t>4. Who may need to review uncertain matches?</a:t>
-            </a:r>
-            <a:endParaRPr lang="en-US" sz="1450" dirty="0"/>
-          </a:p>
-          <a:p>
-            <a:r>
-              <a:rPr lang="en-US" sz="1450" dirty="0">
-                <a:solidFill>
-                  <a:srgbClr val="17364A"/>
-                </a:solidFill>
-                <a:latin typeface="Aptos" pitchFamily="34" charset="0"/>
-                <a:ea typeface="Aptos" pitchFamily="34" charset="-122"/>
-                <a:cs typeface="Aptos" pitchFamily="34" charset="-120"/>
-              </a:rPr>
-              <a:t>5. What is strong completion evidence for this module?</a:t>
-            </a:r>
-            <a:endParaRPr lang="en-US" sz="1450" dirty="0"/>
+              <a:t>Connect the concept to public health decisions, safeguards, documentation, or implementation work.</a:t>
+            </a:r>
+            <a:endParaRPr lang="en-US" sz="1250" dirty="0"/>
           </a:p>
         </p:txBody>
       </p:sp>
@@ -5520,7 +8704,32 @@
       </p:sp>
       <p:sp>
         <p:nvSpPr>
-          <p:cNvPr id="3" name="Text 1"/>
+          <p:cNvPr id="3" name="Shape 1"/>
+          <p:cNvSpPr/>
+          <p:nvPr/>
+        </p:nvSpPr>
+        <p:spPr>
+          <a:xfrm>
+            <a:off x="0" y="164592"/>
+            <a:ext cx="146304" cy="6693408"/>
+          </a:xfrm>
+          <a:prstGeom prst="rect">
+            <a:avLst/>
+          </a:prstGeom>
+          <a:solidFill>
+            <a:srgbClr val="2F8A28"/>
+          </a:solidFill>
+          <a:ln w="12700">
+            <a:solidFill>
+              <a:srgbClr val="2F8A28"/>
+            </a:solidFill>
+            <a:prstDash val="solid"/>
+          </a:ln>
+        </p:spPr>
+      </p:sp>
+      <p:sp>
+        <p:nvSpPr>
+          <p:cNvPr id="4" name="Text 2"/>
           <p:cNvSpPr/>
           <p:nvPr/>
         </p:nvSpPr>
@@ -5559,7 +8768,7 @@
       </p:sp>
       <p:sp>
         <p:nvSpPr>
-          <p:cNvPr id="4" name="Text 2"/>
+          <p:cNvPr id="5" name="Text 3"/>
           <p:cNvSpPr/>
           <p:nvPr/>
         </p:nvSpPr>
@@ -5598,7 +8807,7 @@
       </p:sp>
       <p:sp>
         <p:nvSpPr>
-          <p:cNvPr id="5" name="Text 3"/>
+          <p:cNvPr id="6" name="Text 4"/>
           <p:cNvSpPr/>
           <p:nvPr/>
         </p:nvSpPr>
@@ -5637,7 +8846,7 @@
       </p:sp>
       <p:sp>
         <p:nvSpPr>
-          <p:cNvPr id="6" name="Text 4"/>
+          <p:cNvPr id="7" name="Text 5"/>
           <p:cNvSpPr/>
           <p:nvPr/>
         </p:nvSpPr>
@@ -5670,7 +8879,7 @@
                 <a:ea typeface="Aptos Display" pitchFamily="34" charset="-122"/>
                 <a:cs typeface="Aptos Display" pitchFamily="34" charset="-120"/>
               </a:rPr>
-              <a:t>Module Context</a:t>
+              <a:t>What this module helps you do</a:t>
             </a:r>
             <a:endParaRPr lang="en-US" sz="2700" dirty="0"/>
           </a:p>
@@ -5678,14 +8887,14 @@
       </p:sp>
       <p:sp>
         <p:nvSpPr>
-          <p:cNvPr id="7" name="Text 5"/>
-          <p:cNvSpPr/>
-          <p:nvPr/>
-        </p:nvSpPr>
-        <p:spPr>
-          <a:xfrm>
-            <a:off x="822960" y="1325880"/>
-            <a:ext cx="10378440" cy="1371600"/>
+          <p:cNvPr id="8" name="Text 6"/>
+          <p:cNvSpPr/>
+          <p:nvPr/>
+        </p:nvSpPr>
+        <p:spPr>
+          <a:xfrm>
+            <a:off x="868680" y="1417320"/>
+            <a:ext cx="6675120" cy="3291840"/>
           </a:xfrm>
           <a:prstGeom prst="rect">
             <a:avLst/>
@@ -5700,7 +8909,7 @@
           <a:lstStyle/>
           <a:p>
             <a:r>
-              <a:rPr lang="en-US" sz="1600" dirty="0">
+              <a:rPr lang="en-US" sz="1700" dirty="0">
                 <a:solidFill>
                   <a:srgbClr val="17364A"/>
                 </a:solidFill>
@@ -5708,13 +8917,13 @@
                 <a:ea typeface="Aptos" pitchFamily="34" charset="-122"/>
                 <a:cs typeface="Aptos" pitchFamily="34" charset="-120"/>
               </a:rPr>
-              <a:t>Level: applied/foundational</a:t>
-            </a:r>
-            <a:endParaRPr lang="en-US" sz="1600" dirty="0"/>
-          </a:p>
-          <a:p>
-            <a:r>
-              <a:rPr lang="en-US" sz="1600" dirty="0">
+              <a:t>Record linkage and entity resolution help public health systems determine whether records refer to the same person, provider, facility, address,.</a:t>
+            </a:r>
+            <a:endParaRPr lang="en-US" sz="1700" dirty="0"/>
+          </a:p>
+          <a:p>
+            <a:r>
+              <a:rPr lang="en-US" sz="1700" dirty="0">
                 <a:solidFill>
                   <a:srgbClr val="17364A"/>
                 </a:solidFill>
@@ -5722,13 +8931,13 @@
                 <a:ea typeface="Aptos" pitchFamily="34" charset="-122"/>
                 <a:cs typeface="Aptos" pitchFamily="34" charset="-120"/>
               </a:rPr>
-              <a:t>Primary track: Operations and Data Quality Track</a:t>
-            </a:r>
-            <a:endParaRPr lang="en-US" sz="1600" dirty="0"/>
-          </a:p>
-          <a:p>
-            <a:r>
-              <a:rPr lang="en-US" sz="1600" dirty="0">
+              <a:t>AI tools often rely on linked data even when the linkage process is invisible to users.</a:t>
+            </a:r>
+            <a:endParaRPr lang="en-US" sz="1700" dirty="0"/>
+          </a:p>
+          <a:p>
+            <a:r>
+              <a:rPr lang="en-US" sz="1700" dirty="0">
                 <a:solidFill>
                   <a:srgbClr val="17364A"/>
                 </a:solidFill>
@@ -5736,31 +8945,97 @@
                 <a:ea typeface="Aptos" pitchFamily="34" charset="-122"/>
                 <a:cs typeface="Aptos" pitchFamily="34" charset="-120"/>
               </a:rPr>
-              <a:t>Appears in tracks: technical-architecture</a:t>
-            </a:r>
-            <a:endParaRPr lang="en-US" sz="1600" dirty="0"/>
-          </a:p>
-        </p:txBody>
-      </p:sp>
-      <p:sp>
-        <p:nvSpPr>
-          <p:cNvPr id="8" name="Text 6"/>
-          <p:cNvSpPr/>
-          <p:nvPr/>
-        </p:nvSpPr>
-        <p:spPr>
-          <a:xfrm>
-            <a:off x="822960" y="2743200"/>
-            <a:ext cx="10378440" cy="2834640"/>
-          </a:xfrm>
-          <a:prstGeom prst="rect">
-            <a:avLst/>
-          </a:prstGeom>
-          <a:noFill/>
-          <a:ln/>
-        </p:spPr>
-        <p:txBody>
-          <a:bodyPr wrap="square" lIns="1016" tIns="1016" rIns="1016" bIns="1016" rtlCol="0" anchor="t">
+              <a:t>This module teaches learners how matching and deduplication affect AI outputs, surveillance quality, and equity.</a:t>
+            </a:r>
+            <a:endParaRPr lang="en-US" sz="1700" dirty="0"/>
+          </a:p>
+        </p:txBody>
+      </p:sp>
+      <p:sp>
+        <p:nvSpPr>
+          <p:cNvPr id="9" name="Shape 7"/>
+          <p:cNvSpPr/>
+          <p:nvPr/>
+        </p:nvSpPr>
+        <p:spPr>
+          <a:xfrm>
+            <a:off x="7909560" y="1417320"/>
+            <a:ext cx="3154680" cy="1920240"/>
+          </a:xfrm>
+          <a:prstGeom prst="roundRect">
+            <a:avLst>
+              <a:gd name="adj" fmla="val 5714"/>
+            </a:avLst>
+          </a:prstGeom>
+          <a:solidFill>
+            <a:srgbClr val="EAF6F8"/>
+          </a:solidFill>
+          <a:ln w="12700">
+            <a:solidFill>
+              <a:srgbClr val="B9D7E6"/>
+            </a:solidFill>
+            <a:prstDash val="solid"/>
+          </a:ln>
+        </p:spPr>
+      </p:sp>
+      <p:sp>
+        <p:nvSpPr>
+          <p:cNvPr id="10" name="Text 8"/>
+          <p:cNvSpPr/>
+          <p:nvPr/>
+        </p:nvSpPr>
+        <p:spPr>
+          <a:xfrm>
+            <a:off x="8074152" y="1563624"/>
+            <a:ext cx="2825496" cy="201168"/>
+          </a:xfrm>
+          <a:prstGeom prst="rect">
+            <a:avLst/>
+          </a:prstGeom>
+          <a:noFill/>
+          <a:ln/>
+        </p:spPr>
+        <p:txBody>
+          <a:bodyPr wrap="square" lIns="0" tIns="0" rIns="0" bIns="0" rtlCol="0" anchor="ctr"/>
+          <a:lstStyle/>
+          <a:p>
+            <a:pPr indent="0" marL="0">
+              <a:buNone/>
+            </a:pPr>
+            <a:r>
+              <a:rPr lang="en-US" sz="950" b="1" dirty="0">
+                <a:solidFill>
+                  <a:srgbClr val="0068B7"/>
+                </a:solidFill>
+                <a:latin typeface="Aptos" pitchFamily="34" charset="0"/>
+                <a:ea typeface="Aptos" pitchFamily="34" charset="-122"/>
+                <a:cs typeface="Aptos" pitchFamily="34" charset="-120"/>
+              </a:rPr>
+              <a:t>Module details</a:t>
+            </a:r>
+            <a:endParaRPr lang="en-US" sz="950" dirty="0"/>
+          </a:p>
+        </p:txBody>
+      </p:sp>
+      <p:sp>
+        <p:nvSpPr>
+          <p:cNvPr id="11" name="Text 9"/>
+          <p:cNvSpPr/>
+          <p:nvPr/>
+        </p:nvSpPr>
+        <p:spPr>
+          <a:xfrm>
+            <a:off x="8074152" y="1856232"/>
+            <a:ext cx="2825496" cy="1353312"/>
+          </a:xfrm>
+          <a:prstGeom prst="rect">
+            <a:avLst/>
+          </a:prstGeom>
+          <a:noFill/>
+          <a:ln/>
+        </p:spPr>
+        <p:txBody>
+          <a:bodyPr wrap="square" lIns="0" tIns="0" rIns="0" bIns="0" rtlCol="0" anchor="t">
             <a:normAutofit/>
           </a:bodyPr>
           <a:lstStyle/>
@@ -5769,7 +9044,7 @@
               <a:buNone/>
             </a:pPr>
             <a:r>
-              <a:rPr lang="en-US" sz="1400" dirty="0">
+              <a:rPr lang="en-US" sz="1250" dirty="0">
                 <a:solidFill>
                   <a:srgbClr val="17364A"/>
                 </a:solidFill>
@@ -5777,9 +9052,150 @@
                 <a:ea typeface="Aptos" pitchFamily="34" charset="-122"/>
                 <a:cs typeface="Aptos" pitchFamily="34" charset="-120"/>
               </a:rPr>
-              <a:t>Record linkage and entity resolution help public health systems determine whether records refer to the same person, provider, facility, address, organization, event, or outbreak. AI tools often rely on linked data even when the linkage process is invisible to users. This module teaches learners how matching and deduplication affect AI outputs, surveillance quality, and equity.</a:t>
-            </a:r>
-            <a:endParaRPr lang="en-US" sz="1400" dirty="0"/>
+              <a:t>Level: applied/foundational</a:t>
+            </a:r>
+            <a:endParaRPr lang="en-US" sz="1250" dirty="0"/>
+          </a:p>
+          <a:p>
+            <a:pPr indent="0" marL="0">
+              <a:buNone/>
+            </a:pPr>
+            <a:r>
+              <a:rPr lang="en-US" sz="1250" dirty="0">
+                <a:solidFill>
+                  <a:srgbClr val="17364A"/>
+                </a:solidFill>
+                <a:latin typeface="Aptos" pitchFamily="34" charset="0"/>
+                <a:ea typeface="Aptos" pitchFamily="34" charset="-122"/>
+                <a:cs typeface="Aptos" pitchFamily="34" charset="-120"/>
+              </a:rPr>
+              <a:t>Primary track: Operations and Data Quality Track</a:t>
+            </a:r>
+            <a:endParaRPr lang="en-US" sz="1250" dirty="0"/>
+          </a:p>
+          <a:p>
+            <a:pPr indent="0" marL="0">
+              <a:buNone/>
+            </a:pPr>
+            <a:r>
+              <a:rPr lang="en-US" sz="1250" dirty="0">
+                <a:solidFill>
+                  <a:srgbClr val="17364A"/>
+                </a:solidFill>
+                <a:latin typeface="Aptos" pitchFamily="34" charset="0"/>
+                <a:ea typeface="Aptos" pitchFamily="34" charset="-122"/>
+                <a:cs typeface="Aptos" pitchFamily="34" charset="-120"/>
+              </a:rPr>
+              <a:t>Appears in tracks: technical-architecture</a:t>
+            </a:r>
+            <a:endParaRPr lang="en-US" sz="1250" dirty="0"/>
+          </a:p>
+        </p:txBody>
+      </p:sp>
+      <p:sp>
+        <p:nvSpPr>
+          <p:cNvPr id="12" name="Shape 10"/>
+          <p:cNvSpPr/>
+          <p:nvPr/>
+        </p:nvSpPr>
+        <p:spPr>
+          <a:xfrm>
+            <a:off x="7909560" y="3611880"/>
+            <a:ext cx="3154680" cy="1783080"/>
+          </a:xfrm>
+          <a:prstGeom prst="roundRect">
+            <a:avLst>
+              <a:gd name="adj" fmla="val 6154"/>
+            </a:avLst>
+          </a:prstGeom>
+          <a:solidFill>
+            <a:srgbClr val="EEF8ED"/>
+          </a:solidFill>
+          <a:ln w="12700">
+            <a:solidFill>
+              <a:srgbClr val="B9D7E6"/>
+            </a:solidFill>
+            <a:prstDash val="solid"/>
+          </a:ln>
+        </p:spPr>
+      </p:sp>
+      <p:sp>
+        <p:nvSpPr>
+          <p:cNvPr id="13" name="Text 11"/>
+          <p:cNvSpPr/>
+          <p:nvPr/>
+        </p:nvSpPr>
+        <p:spPr>
+          <a:xfrm>
+            <a:off x="8074152" y="3758184"/>
+            <a:ext cx="2825496" cy="201168"/>
+          </a:xfrm>
+          <a:prstGeom prst="rect">
+            <a:avLst/>
+          </a:prstGeom>
+          <a:noFill/>
+          <a:ln/>
+        </p:spPr>
+        <p:txBody>
+          <a:bodyPr wrap="square" lIns="0" tIns="0" rIns="0" bIns="0" rtlCol="0" anchor="ctr"/>
+          <a:lstStyle/>
+          <a:p>
+            <a:pPr indent="0" marL="0">
+              <a:buNone/>
+            </a:pPr>
+            <a:r>
+              <a:rPr lang="en-US" sz="950" b="1" dirty="0">
+                <a:solidFill>
+                  <a:srgbClr val="0068B7"/>
+                </a:solidFill>
+                <a:latin typeface="Aptos" pitchFamily="34" charset="0"/>
+                <a:ea typeface="Aptos" pitchFamily="34" charset="-122"/>
+                <a:cs typeface="Aptos" pitchFamily="34" charset="-120"/>
+              </a:rPr>
+              <a:t>Learning approach</a:t>
+            </a:r>
+            <a:endParaRPr lang="en-US" sz="950" dirty="0"/>
+          </a:p>
+        </p:txBody>
+      </p:sp>
+      <p:sp>
+        <p:nvSpPr>
+          <p:cNvPr id="14" name="Text 12"/>
+          <p:cNvSpPr/>
+          <p:nvPr/>
+        </p:nvSpPr>
+        <p:spPr>
+          <a:xfrm>
+            <a:off x="8074152" y="4050792"/>
+            <a:ext cx="2825496" cy="1216152"/>
+          </a:xfrm>
+          <a:prstGeom prst="rect">
+            <a:avLst/>
+          </a:prstGeom>
+          <a:noFill/>
+          <a:ln/>
+        </p:spPr>
+        <p:txBody>
+          <a:bodyPr wrap="square" lIns="0" tIns="0" rIns="0" bIns="0" rtlCol="0" anchor="t">
+            <a:normAutofit/>
+          </a:bodyPr>
+          <a:lstStyle/>
+          <a:p>
+            <a:pPr indent="0" marL="0">
+              <a:buNone/>
+            </a:pPr>
+            <a:r>
+              <a:rPr lang="en-US" sz="1250" dirty="0">
+                <a:solidFill>
+                  <a:srgbClr val="17364A"/>
+                </a:solidFill>
+                <a:latin typeface="Aptos" pitchFamily="34" charset="0"/>
+                <a:ea typeface="Aptos" pitchFamily="34" charset="-122"/>
+                <a:cs typeface="Aptos" pitchFamily="34" charset="-120"/>
+              </a:rPr>
+              <a:t>Review the core ideas, complete the practical exercise, check your understanding, and use the related plays and tools to apply the lesson.</a:t>
+            </a:r>
+            <a:endParaRPr lang="en-US" sz="1250" dirty="0"/>
           </a:p>
         </p:txBody>
       </p:sp>
@@ -5842,7 +9258,32 @@
       </p:sp>
       <p:sp>
         <p:nvSpPr>
-          <p:cNvPr id="3" name="Text 1"/>
+          <p:cNvPr id="3" name="Shape 1"/>
+          <p:cNvSpPr/>
+          <p:nvPr/>
+        </p:nvSpPr>
+        <p:spPr>
+          <a:xfrm>
+            <a:off x="0" y="164592"/>
+            <a:ext cx="146304" cy="6693408"/>
+          </a:xfrm>
+          <a:prstGeom prst="rect">
+            <a:avLst/>
+          </a:prstGeom>
+          <a:solidFill>
+            <a:srgbClr val="2F8A28"/>
+          </a:solidFill>
+          <a:ln w="12700">
+            <a:solidFill>
+              <a:srgbClr val="2F8A28"/>
+            </a:solidFill>
+            <a:prstDash val="solid"/>
+          </a:ln>
+        </p:spPr>
+      </p:sp>
+      <p:sp>
+        <p:nvSpPr>
+          <p:cNvPr id="4" name="Text 2"/>
           <p:cNvSpPr/>
           <p:nvPr/>
         </p:nvSpPr>
@@ -5881,7 +9322,7 @@
       </p:sp>
       <p:sp>
         <p:nvSpPr>
-          <p:cNvPr id="4" name="Text 2"/>
+          <p:cNvPr id="5" name="Text 3"/>
           <p:cNvSpPr/>
           <p:nvPr/>
         </p:nvSpPr>
@@ -5920,7 +9361,7 @@
       </p:sp>
       <p:sp>
         <p:nvSpPr>
-          <p:cNvPr id="5" name="Text 3"/>
+          <p:cNvPr id="6" name="Text 4"/>
           <p:cNvSpPr/>
           <p:nvPr/>
         </p:nvSpPr>
@@ -5959,13 +9400,77 @@
       </p:sp>
       <p:sp>
         <p:nvSpPr>
-          <p:cNvPr id="6" name="Text 4"/>
+          <p:cNvPr id="7" name="Shape 5"/>
           <p:cNvSpPr/>
           <p:nvPr/>
         </p:nvSpPr>
         <p:spPr>
           <a:xfrm>
             <a:off x="640080" y="658368"/>
+            <a:ext cx="420624" cy="420624"/>
+          </a:xfrm>
+          <a:prstGeom prst="ellipse">
+            <a:avLst/>
+          </a:prstGeom>
+          <a:solidFill>
+            <a:srgbClr val="0068B7"/>
+          </a:solidFill>
+          <a:ln w="12700">
+            <a:solidFill>
+              <a:srgbClr val="0068B7"/>
+            </a:solidFill>
+            <a:prstDash val="solid"/>
+          </a:ln>
+        </p:spPr>
+      </p:sp>
+      <p:sp>
+        <p:nvSpPr>
+          <p:cNvPr id="8" name="Text 6"/>
+          <p:cNvSpPr/>
+          <p:nvPr/>
+        </p:nvSpPr>
+        <p:spPr>
+          <a:xfrm>
+            <a:off x="640080" y="731520"/>
+            <a:ext cx="420624" cy="164592"/>
+          </a:xfrm>
+          <a:prstGeom prst="rect">
+            <a:avLst/>
+          </a:prstGeom>
+          <a:noFill/>
+          <a:ln/>
+        </p:spPr>
+        <p:txBody>
+          <a:bodyPr wrap="square" lIns="0" tIns="0" rIns="0" bIns="0" rtlCol="0" anchor="ctr"/>
+          <a:lstStyle/>
+          <a:p>
+            <a:pPr algn="ctr" indent="0" marL="0">
+              <a:buNone/>
+            </a:pPr>
+            <a:r>
+              <a:rPr lang="en-US" sz="1100" b="1" dirty="0">
+                <a:solidFill>
+                  <a:srgbClr val="FFFFFF"/>
+                </a:solidFill>
+                <a:latin typeface="Aptos" pitchFamily="34" charset="0"/>
+                <a:ea typeface="Aptos" pitchFamily="34" charset="-122"/>
+                <a:cs typeface="Aptos" pitchFamily="34" charset="-120"/>
+              </a:rPr>
+              <a:t>12</a:t>
+            </a:r>
+            <a:endParaRPr lang="en-US" sz="1100" dirty="0"/>
+          </a:p>
+        </p:txBody>
+      </p:sp>
+      <p:sp>
+        <p:nvSpPr>
+          <p:cNvPr id="9" name="Text 7"/>
+          <p:cNvSpPr/>
+          <p:nvPr/>
+        </p:nvSpPr>
+        <p:spPr>
+          <a:xfrm>
+            <a:off x="640080" y="621792"/>
             <a:ext cx="10881360" cy="566928"/>
           </a:xfrm>
           <a:prstGeom prst="rect">
@@ -5992,7 +9497,7 @@
                 <a:ea typeface="Aptos Display" pitchFamily="34" charset="-122"/>
                 <a:cs typeface="Aptos Display" pitchFamily="34" charset="-120"/>
               </a:rPr>
-              <a:t>References and Resources</a:t>
+              <a:t>Expected Assignment</a:t>
             </a:r>
             <a:endParaRPr lang="en-US" sz="2700" dirty="0"/>
           </a:p>
@@ -6000,14 +9505,14 @@
       </p:sp>
       <p:sp>
         <p:nvSpPr>
-          <p:cNvPr id="7" name="Text 5"/>
-          <p:cNvSpPr/>
-          <p:nvPr/>
-        </p:nvSpPr>
-        <p:spPr>
-          <a:xfrm>
-            <a:off x="822960" y="1325880"/>
-            <a:ext cx="10378440" cy="4800600"/>
+          <p:cNvPr id="10" name="Text 8"/>
+          <p:cNvSpPr/>
+          <p:nvPr/>
+        </p:nvSpPr>
+        <p:spPr>
+          <a:xfrm>
+            <a:off x="868680" y="1417320"/>
+            <a:ext cx="6675120" cy="4434840"/>
           </a:xfrm>
           <a:prstGeom prst="rect">
             <a:avLst/>
@@ -6022,7 +9527,7 @@
           <a:lstStyle/>
           <a:p>
             <a:r>
-              <a:rPr lang="en-US" sz="1450" dirty="0">
+              <a:rPr lang="en-US" sz="1700" dirty="0">
                 <a:solidFill>
                   <a:srgbClr val="17364A"/>
                 </a:solidFill>
@@ -6030,13 +9535,1209 @@
                 <a:ea typeface="Aptos" pitchFamily="34" charset="-122"/>
                 <a:cs typeface="Aptos" pitchFamily="34" charset="-120"/>
               </a:rPr>
+              <a:t>Linkage risk review</a:t>
+            </a:r>
+            <a:endParaRPr lang="en-US" sz="1700" dirty="0"/>
+          </a:p>
+          <a:p>
+            <a:r>
+              <a:rPr lang="en-US" sz="1700" dirty="0">
+                <a:solidFill>
+                  <a:srgbClr val="17364A"/>
+                </a:solidFill>
+                <a:latin typeface="Aptos" pitchFamily="34" charset="0"/>
+                <a:ea typeface="Aptos" pitchFamily="34" charset="-122"/>
+                <a:cs typeface="Aptos" pitchFamily="34" charset="-120"/>
+              </a:rPr>
+              <a:t>Deduplication workflow map</a:t>
+            </a:r>
+            <a:endParaRPr lang="en-US" sz="1700" dirty="0"/>
+          </a:p>
+          <a:p>
+            <a:r>
+              <a:rPr lang="en-US" sz="1700" dirty="0">
+                <a:solidFill>
+                  <a:srgbClr val="17364A"/>
+                </a:solidFill>
+                <a:latin typeface="Aptos" pitchFamily="34" charset="0"/>
+                <a:ea typeface="Aptos" pitchFamily="34" charset="-122"/>
+                <a:cs typeface="Aptos" pitchFamily="34" charset="-120"/>
+              </a:rPr>
+              <a:t>Match review questions</a:t>
+            </a:r>
+            <a:endParaRPr lang="en-US" sz="1700" dirty="0"/>
+          </a:p>
+          <a:p>
+            <a:r>
+              <a:rPr lang="en-US" sz="1700" dirty="0">
+                <a:solidFill>
+                  <a:srgbClr val="17364A"/>
+                </a:solidFill>
+                <a:latin typeface="Aptos" pitchFamily="34" charset="0"/>
+                <a:ea typeface="Aptos" pitchFamily="34" charset="-122"/>
+                <a:cs typeface="Aptos" pitchFamily="34" charset="-120"/>
+              </a:rPr>
+              <a:t>Equity and escalation notes</a:t>
+            </a:r>
+            <a:endParaRPr lang="en-US" sz="1700" dirty="0"/>
+          </a:p>
+        </p:txBody>
+      </p:sp>
+      <p:sp>
+        <p:nvSpPr>
+          <p:cNvPr id="11" name="Shape 9"/>
+          <p:cNvSpPr/>
+          <p:nvPr/>
+        </p:nvSpPr>
+        <p:spPr>
+          <a:xfrm>
+            <a:off x="7909560" y="1417320"/>
+            <a:ext cx="3154680" cy="1828800"/>
+          </a:xfrm>
+          <a:prstGeom prst="roundRect">
+            <a:avLst>
+              <a:gd name="adj" fmla="val 6000"/>
+            </a:avLst>
+          </a:prstGeom>
+          <a:solidFill>
+            <a:srgbClr val="EEF8ED"/>
+          </a:solidFill>
+          <a:ln w="12700">
+            <a:solidFill>
+              <a:srgbClr val="B9D7E6"/>
+            </a:solidFill>
+            <a:prstDash val="solid"/>
+          </a:ln>
+        </p:spPr>
+      </p:sp>
+      <p:sp>
+        <p:nvSpPr>
+          <p:cNvPr id="12" name="Text 10"/>
+          <p:cNvSpPr/>
+          <p:nvPr/>
+        </p:nvSpPr>
+        <p:spPr>
+          <a:xfrm>
+            <a:off x="8074152" y="1563624"/>
+            <a:ext cx="2825496" cy="201168"/>
+          </a:xfrm>
+          <a:prstGeom prst="rect">
+            <a:avLst/>
+          </a:prstGeom>
+          <a:noFill/>
+          <a:ln/>
+        </p:spPr>
+        <p:txBody>
+          <a:bodyPr wrap="square" lIns="0" tIns="0" rIns="0" bIns="0" rtlCol="0" anchor="ctr"/>
+          <a:lstStyle/>
+          <a:p>
+            <a:pPr indent="0" marL="0">
+              <a:buNone/>
+            </a:pPr>
+            <a:r>
+              <a:rPr lang="en-US" sz="950" b="1" dirty="0">
+                <a:solidFill>
+                  <a:srgbClr val="0068B7"/>
+                </a:solidFill>
+                <a:latin typeface="Aptos" pitchFamily="34" charset="0"/>
+                <a:ea typeface="Aptos" pitchFamily="34" charset="-122"/>
+                <a:cs typeface="Aptos" pitchFamily="34" charset="-120"/>
+              </a:rPr>
+              <a:t>Key idea</a:t>
+            </a:r>
+            <a:endParaRPr lang="en-US" sz="950" dirty="0"/>
+          </a:p>
+        </p:txBody>
+      </p:sp>
+      <p:sp>
+        <p:nvSpPr>
+          <p:cNvPr id="13" name="Text 11"/>
+          <p:cNvSpPr/>
+          <p:nvPr/>
+        </p:nvSpPr>
+        <p:spPr>
+          <a:xfrm>
+            <a:off x="8074152" y="1856232"/>
+            <a:ext cx="2825496" cy="1261872"/>
+          </a:xfrm>
+          <a:prstGeom prst="rect">
+            <a:avLst/>
+          </a:prstGeom>
+          <a:noFill/>
+          <a:ln/>
+        </p:spPr>
+        <p:txBody>
+          <a:bodyPr wrap="square" lIns="0" tIns="0" rIns="0" bIns="0" rtlCol="0" anchor="t">
+            <a:normAutofit/>
+          </a:bodyPr>
+          <a:lstStyle/>
+          <a:p>
+            <a:pPr indent="0" marL="0">
+              <a:buNone/>
+            </a:pPr>
+            <a:r>
+              <a:rPr lang="en-US" sz="1250" dirty="0">
+                <a:solidFill>
+                  <a:srgbClr val="17364A"/>
+                </a:solidFill>
+                <a:latin typeface="Aptos" pitchFamily="34" charset="0"/>
+                <a:ea typeface="Aptos" pitchFamily="34" charset="-122"/>
+                <a:cs typeface="Aptos" pitchFamily="34" charset="-120"/>
+              </a:rPr>
+              <a:t>Linkage risk review</a:t>
+            </a:r>
+            <a:endParaRPr lang="en-US" sz="1250" dirty="0"/>
+          </a:p>
+        </p:txBody>
+      </p:sp>
+      <p:sp>
+        <p:nvSpPr>
+          <p:cNvPr id="14" name="Shape 12"/>
+          <p:cNvSpPr/>
+          <p:nvPr/>
+        </p:nvSpPr>
+        <p:spPr>
+          <a:xfrm>
+            <a:off x="7909560" y="3520440"/>
+            <a:ext cx="3154680" cy="1737360"/>
+          </a:xfrm>
+          <a:prstGeom prst="roundRect">
+            <a:avLst>
+              <a:gd name="adj" fmla="val 6316"/>
+            </a:avLst>
+          </a:prstGeom>
+          <a:solidFill>
+            <a:srgbClr val="EAF6F8"/>
+          </a:solidFill>
+          <a:ln w="12700">
+            <a:solidFill>
+              <a:srgbClr val="B9D7E6"/>
+            </a:solidFill>
+            <a:prstDash val="solid"/>
+          </a:ln>
+        </p:spPr>
+      </p:sp>
+      <p:sp>
+        <p:nvSpPr>
+          <p:cNvPr id="15" name="Text 13"/>
+          <p:cNvSpPr/>
+          <p:nvPr/>
+        </p:nvSpPr>
+        <p:spPr>
+          <a:xfrm>
+            <a:off x="8074152" y="3666744"/>
+            <a:ext cx="2825496" cy="201168"/>
+          </a:xfrm>
+          <a:prstGeom prst="rect">
+            <a:avLst/>
+          </a:prstGeom>
+          <a:noFill/>
+          <a:ln/>
+        </p:spPr>
+        <p:txBody>
+          <a:bodyPr wrap="square" lIns="0" tIns="0" rIns="0" bIns="0" rtlCol="0" anchor="ctr"/>
+          <a:lstStyle/>
+          <a:p>
+            <a:pPr indent="0" marL="0">
+              <a:buNone/>
+            </a:pPr>
+            <a:r>
+              <a:rPr lang="en-US" sz="950" b="1" dirty="0">
+                <a:solidFill>
+                  <a:srgbClr val="0068B7"/>
+                </a:solidFill>
+                <a:latin typeface="Aptos" pitchFamily="34" charset="0"/>
+                <a:ea typeface="Aptos" pitchFamily="34" charset="-122"/>
+                <a:cs typeface="Aptos" pitchFamily="34" charset="-120"/>
+              </a:rPr>
+              <a:t>Use this for</a:t>
+            </a:r>
+            <a:endParaRPr lang="en-US" sz="950" dirty="0"/>
+          </a:p>
+        </p:txBody>
+      </p:sp>
+      <p:sp>
+        <p:nvSpPr>
+          <p:cNvPr id="16" name="Text 14"/>
+          <p:cNvSpPr/>
+          <p:nvPr/>
+        </p:nvSpPr>
+        <p:spPr>
+          <a:xfrm>
+            <a:off x="8074152" y="3959352"/>
+            <a:ext cx="2825496" cy="1170432"/>
+          </a:xfrm>
+          <a:prstGeom prst="rect">
+            <a:avLst/>
+          </a:prstGeom>
+          <a:noFill/>
+          <a:ln/>
+        </p:spPr>
+        <p:txBody>
+          <a:bodyPr wrap="square" lIns="0" tIns="0" rIns="0" bIns="0" rtlCol="0" anchor="t">
+            <a:normAutofit/>
+          </a:bodyPr>
+          <a:lstStyle/>
+          <a:p>
+            <a:pPr indent="0" marL="0">
+              <a:buNone/>
+            </a:pPr>
+            <a:r>
+              <a:rPr lang="en-US" sz="1250" dirty="0">
+                <a:solidFill>
+                  <a:srgbClr val="17364A"/>
+                </a:solidFill>
+                <a:latin typeface="Aptos" pitchFamily="34" charset="0"/>
+                <a:ea typeface="Aptos" pitchFamily="34" charset="-122"/>
+                <a:cs typeface="Aptos" pitchFamily="34" charset="-120"/>
+              </a:rPr>
+              <a:t>Connect the concept to public health decisions, safeguards, documentation, or implementation work.</a:t>
+            </a:r>
+            <a:endParaRPr lang="en-US" sz="1250" dirty="0"/>
+          </a:p>
+        </p:txBody>
+      </p:sp>
+    </p:spTree>
+  </p:cSld>
+  <p:clrMapOvr>
+    <a:masterClrMapping/>
+  </p:clrMapOvr>
+</p:sld>
+</file>
+
+<file path=ppt/slides/slide21.xml><?xml version="1.0" encoding="utf-8"?>
+<p:sld xmlns:a="http://schemas.openxmlformats.org/drawingml/2006/main" xmlns:r="http://schemas.openxmlformats.org/officeDocument/2006/relationships" xmlns:p="http://schemas.openxmlformats.org/presentationml/2006/main">
+  <p:cSld name="Slide 21">
+    <p:bg>
+      <p:bgPr>
+        <a:solidFill>
+          <a:srgbClr val="F7FBFD"/>
+        </a:solidFill>
+      </p:bgPr>
+    </p:bg>
+    <p:spTree>
+      <p:nvGrpSpPr>
+        <p:cNvPr id="1" name=""/>
+        <p:cNvGrpSpPr/>
+        <p:nvPr/>
+      </p:nvGrpSpPr>
+      <p:grpSpPr>
+        <a:xfrm>
+          <a:off x="0" y="0"/>
+          <a:ext cx="0" cy="0"/>
+          <a:chOff x="0" y="0"/>
+          <a:chExt cx="0" cy="0"/>
+        </a:xfrm>
+      </p:grpSpPr>
+      <p:sp>
+        <p:nvSpPr>
+          <p:cNvPr id="2" name="Shape 0"/>
+          <p:cNvSpPr/>
+          <p:nvPr/>
+        </p:nvSpPr>
+        <p:spPr>
+          <a:xfrm>
+            <a:off x="0" y="0"/>
+            <a:ext cx="12191695" cy="164592"/>
+          </a:xfrm>
+          <a:prstGeom prst="rect">
+            <a:avLst/>
+          </a:prstGeom>
+          <a:solidFill>
+            <a:srgbClr val="0068B7"/>
+          </a:solidFill>
+          <a:ln w="12700">
+            <a:solidFill>
+              <a:srgbClr val="0068B7"/>
+            </a:solidFill>
+            <a:prstDash val="solid"/>
+          </a:ln>
+        </p:spPr>
+      </p:sp>
+      <p:sp>
+        <p:nvSpPr>
+          <p:cNvPr id="3" name="Shape 1"/>
+          <p:cNvSpPr/>
+          <p:nvPr/>
+        </p:nvSpPr>
+        <p:spPr>
+          <a:xfrm>
+            <a:off x="0" y="164592"/>
+            <a:ext cx="146304" cy="6693408"/>
+          </a:xfrm>
+          <a:prstGeom prst="rect">
+            <a:avLst/>
+          </a:prstGeom>
+          <a:solidFill>
+            <a:srgbClr val="2F8A28"/>
+          </a:solidFill>
+          <a:ln w="12700">
+            <a:solidFill>
+              <a:srgbClr val="2F8A28"/>
+            </a:solidFill>
+            <a:prstDash val="solid"/>
+          </a:ln>
+        </p:spPr>
+      </p:sp>
+      <p:sp>
+        <p:nvSpPr>
+          <p:cNvPr id="4" name="Text 2"/>
+          <p:cNvSpPr/>
+          <p:nvPr/>
+        </p:nvSpPr>
+        <p:spPr>
+          <a:xfrm>
+            <a:off x="502920" y="292608"/>
+            <a:ext cx="10149840" cy="256032"/>
+          </a:xfrm>
+          <a:prstGeom prst="rect">
+            <a:avLst/>
+          </a:prstGeom>
+          <a:noFill/>
+          <a:ln/>
+        </p:spPr>
+        <p:txBody>
+          <a:bodyPr wrap="square" lIns="0" tIns="0" rIns="0" bIns="0" rtlCol="0" anchor="ctr"/>
+          <a:lstStyle/>
+          <a:p>
+            <a:pPr indent="0" marL="0">
+              <a:buNone/>
+            </a:pPr>
+            <a:r>
+              <a:rPr lang="en-US" sz="900" b="1" dirty="0">
+                <a:solidFill>
+                  <a:srgbClr val="5F7181"/>
+                </a:solidFill>
+                <a:latin typeface="Aptos" pitchFamily="34" charset="0"/>
+                <a:ea typeface="Aptos" pitchFamily="34" charset="-122"/>
+                <a:cs typeface="Aptos" pitchFamily="34" charset="-120"/>
+              </a:rPr>
+              <a:t>Record Linkage, Entity Resolution, and Deduplication</a:t>
+            </a:r>
+            <a:endParaRPr lang="en-US" sz="900" dirty="0"/>
+          </a:p>
+        </p:txBody>
+      </p:sp>
+      <p:sp>
+        <p:nvSpPr>
+          <p:cNvPr id="5" name="Text 3"/>
+          <p:cNvSpPr/>
+          <p:nvPr/>
+        </p:nvSpPr>
+        <p:spPr>
+          <a:xfrm>
+            <a:off x="502920" y="6537960"/>
+            <a:ext cx="7772400" cy="201168"/>
+          </a:xfrm>
+          <a:prstGeom prst="rect">
+            <a:avLst/>
+          </a:prstGeom>
+          <a:noFill/>
+          <a:ln/>
+        </p:spPr>
+        <p:txBody>
+          <a:bodyPr wrap="square" lIns="0" tIns="0" rIns="0" bIns="0" rtlCol="0" anchor="ctr"/>
+          <a:lstStyle/>
+          <a:p>
+            <a:pPr indent="0" marL="0">
+              <a:buNone/>
+            </a:pPr>
+            <a:r>
+              <a:rPr lang="en-US" sz="800" dirty="0">
+                <a:solidFill>
+                  <a:srgbClr val="5F7181"/>
+                </a:solidFill>
+                <a:latin typeface="Aptos" pitchFamily="34" charset="0"/>
+                <a:ea typeface="Aptos" pitchFamily="34" charset="-122"/>
+                <a:cs typeface="Aptos" pitchFamily="34" charset="-120"/>
+              </a:rPr>
+              <a:t>AI Playbook and Toolkit for Public Health Departments</a:t>
+            </a:r>
+            <a:endParaRPr lang="en-US" sz="800" dirty="0"/>
+          </a:p>
+        </p:txBody>
+      </p:sp>
+      <p:sp>
+        <p:nvSpPr>
+          <p:cNvPr id="6" name="Text 4"/>
+          <p:cNvSpPr/>
+          <p:nvPr/>
+        </p:nvSpPr>
+        <p:spPr>
+          <a:xfrm>
+            <a:off x="9966960" y="6537960"/>
+            <a:ext cx="1645920" cy="201168"/>
+          </a:xfrm>
+          <a:prstGeom prst="rect">
+            <a:avLst/>
+          </a:prstGeom>
+          <a:noFill/>
+          <a:ln/>
+        </p:spPr>
+        <p:txBody>
+          <a:bodyPr wrap="square" lIns="0" tIns="0" rIns="0" bIns="0" rtlCol="0" anchor="ctr"/>
+          <a:lstStyle/>
+          <a:p>
+            <a:pPr algn="r" indent="0" marL="0">
+              <a:buNone/>
+            </a:pPr>
+            <a:r>
+              <a:rPr lang="en-US" sz="800" dirty="0">
+                <a:solidFill>
+                  <a:srgbClr val="5F7181"/>
+                </a:solidFill>
+                <a:latin typeface="Aptos" pitchFamily="34" charset="0"/>
+                <a:ea typeface="Aptos" pitchFamily="34" charset="-122"/>
+                <a:cs typeface="Aptos" pitchFamily="34" charset="-120"/>
+              </a:rPr>
+              <a:t>© Paula Soper</a:t>
+            </a:r>
+            <a:endParaRPr lang="en-US" sz="800" dirty="0"/>
+          </a:p>
+        </p:txBody>
+      </p:sp>
+      <p:sp>
+        <p:nvSpPr>
+          <p:cNvPr id="7" name="Shape 5"/>
+          <p:cNvSpPr/>
+          <p:nvPr/>
+        </p:nvSpPr>
+        <p:spPr>
+          <a:xfrm>
+            <a:off x="640080" y="658368"/>
+            <a:ext cx="420624" cy="420624"/>
+          </a:xfrm>
+          <a:prstGeom prst="ellipse">
+            <a:avLst/>
+          </a:prstGeom>
+          <a:solidFill>
+            <a:srgbClr val="0068B7"/>
+          </a:solidFill>
+          <a:ln w="12700">
+            <a:solidFill>
+              <a:srgbClr val="0068B7"/>
+            </a:solidFill>
+            <a:prstDash val="solid"/>
+          </a:ln>
+        </p:spPr>
+      </p:sp>
+      <p:sp>
+        <p:nvSpPr>
+          <p:cNvPr id="8" name="Text 6"/>
+          <p:cNvSpPr/>
+          <p:nvPr/>
+        </p:nvSpPr>
+        <p:spPr>
+          <a:xfrm>
+            <a:off x="640080" y="731520"/>
+            <a:ext cx="420624" cy="164592"/>
+          </a:xfrm>
+          <a:prstGeom prst="rect">
+            <a:avLst/>
+          </a:prstGeom>
+          <a:noFill/>
+          <a:ln/>
+        </p:spPr>
+        <p:txBody>
+          <a:bodyPr wrap="square" lIns="0" tIns="0" rIns="0" bIns="0" rtlCol="0" anchor="ctr"/>
+          <a:lstStyle/>
+          <a:p>
+            <a:pPr algn="ctr" indent="0" marL="0">
+              <a:buNone/>
+            </a:pPr>
+            <a:r>
+              <a:rPr lang="en-US" sz="1100" b="1" dirty="0">
+                <a:solidFill>
+                  <a:srgbClr val="FFFFFF"/>
+                </a:solidFill>
+                <a:latin typeface="Aptos" pitchFamily="34" charset="0"/>
+                <a:ea typeface="Aptos" pitchFamily="34" charset="-122"/>
+                <a:cs typeface="Aptos" pitchFamily="34" charset="-120"/>
+              </a:rPr>
+              <a:t>13</a:t>
+            </a:r>
+            <a:endParaRPr lang="en-US" sz="1100" dirty="0"/>
+          </a:p>
+        </p:txBody>
+      </p:sp>
+      <p:sp>
+        <p:nvSpPr>
+          <p:cNvPr id="9" name="Text 7"/>
+          <p:cNvSpPr/>
+          <p:nvPr/>
+        </p:nvSpPr>
+        <p:spPr>
+          <a:xfrm>
+            <a:off x="640080" y="621792"/>
+            <a:ext cx="10881360" cy="566928"/>
+          </a:xfrm>
+          <a:prstGeom prst="rect">
+            <a:avLst/>
+          </a:prstGeom>
+          <a:noFill/>
+          <a:ln/>
+        </p:spPr>
+        <p:txBody>
+          <a:bodyPr wrap="square" lIns="0" tIns="0" rIns="0" bIns="0" rtlCol="0" anchor="ctr">
+            <a:normAutofit/>
+          </a:bodyPr>
+          <a:lstStyle/>
+          <a:p>
+            <a:pPr indent="0" marL="0">
+              <a:buNone/>
+            </a:pPr>
+            <a:r>
+              <a:rPr lang="en-US" sz="2700" b="1" dirty="0">
+                <a:solidFill>
+                  <a:srgbClr val="003A63"/>
+                </a:solidFill>
+                <a:latin typeface="Aptos Display" pitchFamily="34" charset="0"/>
+                <a:ea typeface="Aptos Display" pitchFamily="34" charset="-122"/>
+                <a:cs typeface="Aptos Display" pitchFamily="34" charset="-120"/>
+              </a:rPr>
+              <a:t>Knowledge Check</a:t>
+            </a:r>
+            <a:endParaRPr lang="en-US" sz="2700" dirty="0"/>
+          </a:p>
+        </p:txBody>
+      </p:sp>
+      <p:sp>
+        <p:nvSpPr>
+          <p:cNvPr id="10" name="Text 8"/>
+          <p:cNvSpPr/>
+          <p:nvPr/>
+        </p:nvSpPr>
+        <p:spPr>
+          <a:xfrm>
+            <a:off x="868680" y="1417320"/>
+            <a:ext cx="6675120" cy="4434840"/>
+          </a:xfrm>
+          <a:prstGeom prst="rect">
+            <a:avLst/>
+          </a:prstGeom>
+          <a:noFill/>
+          <a:ln/>
+        </p:spPr>
+        <p:txBody>
+          <a:bodyPr wrap="square" lIns="635" tIns="635" rIns="635" bIns="635" rtlCol="0" anchor="t">
+            <a:normAutofit/>
+          </a:bodyPr>
+          <a:lstStyle/>
+          <a:p>
+            <a:r>
+              <a:rPr lang="en-US" sz="1700" dirty="0">
+                <a:solidFill>
+                  <a:srgbClr val="17364A"/>
+                </a:solidFill>
+                <a:latin typeface="Aptos" pitchFamily="34" charset="0"/>
+                <a:ea typeface="Aptos" pitchFamily="34" charset="-122"/>
+                <a:cs typeface="Aptos" pitchFamily="34" charset="-120"/>
+              </a:rPr>
+              <a:t>1. What is a false match?</a:t>
+            </a:r>
+            <a:endParaRPr lang="en-US" sz="1700" dirty="0"/>
+          </a:p>
+          <a:p>
+            <a:r>
+              <a:rPr lang="en-US" sz="1700" dirty="0">
+                <a:solidFill>
+                  <a:srgbClr val="17364A"/>
+                </a:solidFill>
+                <a:latin typeface="Aptos" pitchFamily="34" charset="0"/>
+                <a:ea typeface="Aptos" pitchFamily="34" charset="-122"/>
+                <a:cs typeface="Aptos" pitchFamily="34" charset="-120"/>
+              </a:rPr>
+              <a:t>2. What is a missed match?</a:t>
+            </a:r>
+            <a:endParaRPr lang="en-US" sz="1700" dirty="0"/>
+          </a:p>
+          <a:p>
+            <a:r>
+              <a:rPr lang="en-US" sz="1700" dirty="0">
+                <a:solidFill>
+                  <a:srgbClr val="17364A"/>
+                </a:solidFill>
+                <a:latin typeface="Aptos" pitchFamily="34" charset="0"/>
+                <a:ea typeface="Aptos" pitchFamily="34" charset="-122"/>
+                <a:cs typeface="Aptos" pitchFamily="34" charset="-120"/>
+              </a:rPr>
+              <a:t>3. Why does record linkage matter for AI?</a:t>
+            </a:r>
+            <a:endParaRPr lang="en-US" sz="1700" dirty="0"/>
+          </a:p>
+          <a:p>
+            <a:r>
+              <a:rPr lang="en-US" sz="1700" dirty="0">
+                <a:solidFill>
+                  <a:srgbClr val="17364A"/>
+                </a:solidFill>
+                <a:latin typeface="Aptos" pitchFamily="34" charset="0"/>
+                <a:ea typeface="Aptos" pitchFamily="34" charset="-122"/>
+                <a:cs typeface="Aptos" pitchFamily="34" charset="-120"/>
+              </a:rPr>
+              <a:t>4. Who may need to review uncertain matches?</a:t>
+            </a:r>
+            <a:endParaRPr lang="en-US" sz="1700" dirty="0"/>
+          </a:p>
+        </p:txBody>
+      </p:sp>
+      <p:sp>
+        <p:nvSpPr>
+          <p:cNvPr id="11" name="Shape 9"/>
+          <p:cNvSpPr/>
+          <p:nvPr/>
+        </p:nvSpPr>
+        <p:spPr>
+          <a:xfrm>
+            <a:off x="7909560" y="1417320"/>
+            <a:ext cx="3154680" cy="1828800"/>
+          </a:xfrm>
+          <a:prstGeom prst="roundRect">
+            <a:avLst>
+              <a:gd name="adj" fmla="val 6000"/>
+            </a:avLst>
+          </a:prstGeom>
+          <a:solidFill>
+            <a:srgbClr val="EEF8ED"/>
+          </a:solidFill>
+          <a:ln w="12700">
+            <a:solidFill>
+              <a:srgbClr val="B9D7E6"/>
+            </a:solidFill>
+            <a:prstDash val="solid"/>
+          </a:ln>
+        </p:spPr>
+      </p:sp>
+      <p:sp>
+        <p:nvSpPr>
+          <p:cNvPr id="12" name="Text 10"/>
+          <p:cNvSpPr/>
+          <p:nvPr/>
+        </p:nvSpPr>
+        <p:spPr>
+          <a:xfrm>
+            <a:off x="8074152" y="1563624"/>
+            <a:ext cx="2825496" cy="201168"/>
+          </a:xfrm>
+          <a:prstGeom prst="rect">
+            <a:avLst/>
+          </a:prstGeom>
+          <a:noFill/>
+          <a:ln/>
+        </p:spPr>
+        <p:txBody>
+          <a:bodyPr wrap="square" lIns="0" tIns="0" rIns="0" bIns="0" rtlCol="0" anchor="ctr"/>
+          <a:lstStyle/>
+          <a:p>
+            <a:pPr indent="0" marL="0">
+              <a:buNone/>
+            </a:pPr>
+            <a:r>
+              <a:rPr lang="en-US" sz="950" b="1" dirty="0">
+                <a:solidFill>
+                  <a:srgbClr val="0068B7"/>
+                </a:solidFill>
+                <a:latin typeface="Aptos" pitchFamily="34" charset="0"/>
+                <a:ea typeface="Aptos" pitchFamily="34" charset="-122"/>
+                <a:cs typeface="Aptos" pitchFamily="34" charset="-120"/>
+              </a:rPr>
+              <a:t>Key idea</a:t>
+            </a:r>
+            <a:endParaRPr lang="en-US" sz="950" dirty="0"/>
+          </a:p>
+        </p:txBody>
+      </p:sp>
+      <p:sp>
+        <p:nvSpPr>
+          <p:cNvPr id="13" name="Text 11"/>
+          <p:cNvSpPr/>
+          <p:nvPr/>
+        </p:nvSpPr>
+        <p:spPr>
+          <a:xfrm>
+            <a:off x="8074152" y="1856232"/>
+            <a:ext cx="2825496" cy="1261872"/>
+          </a:xfrm>
+          <a:prstGeom prst="rect">
+            <a:avLst/>
+          </a:prstGeom>
+          <a:noFill/>
+          <a:ln/>
+        </p:spPr>
+        <p:txBody>
+          <a:bodyPr wrap="square" lIns="0" tIns="0" rIns="0" bIns="0" rtlCol="0" anchor="t">
+            <a:normAutofit/>
+          </a:bodyPr>
+          <a:lstStyle/>
+          <a:p>
+            <a:pPr indent="0" marL="0">
+              <a:buNone/>
+            </a:pPr>
+            <a:r>
+              <a:rPr lang="en-US" sz="1250" dirty="0">
+                <a:solidFill>
+                  <a:srgbClr val="17364A"/>
+                </a:solidFill>
+                <a:latin typeface="Aptos" pitchFamily="34" charset="0"/>
+                <a:ea typeface="Aptos" pitchFamily="34" charset="-122"/>
+                <a:cs typeface="Aptos" pitchFamily="34" charset="-120"/>
+              </a:rPr>
+              <a:t>1. What is a false match?</a:t>
+            </a:r>
+            <a:endParaRPr lang="en-US" sz="1250" dirty="0"/>
+          </a:p>
+        </p:txBody>
+      </p:sp>
+      <p:sp>
+        <p:nvSpPr>
+          <p:cNvPr id="14" name="Shape 12"/>
+          <p:cNvSpPr/>
+          <p:nvPr/>
+        </p:nvSpPr>
+        <p:spPr>
+          <a:xfrm>
+            <a:off x="7909560" y="3520440"/>
+            <a:ext cx="3154680" cy="1737360"/>
+          </a:xfrm>
+          <a:prstGeom prst="roundRect">
+            <a:avLst>
+              <a:gd name="adj" fmla="val 6316"/>
+            </a:avLst>
+          </a:prstGeom>
+          <a:solidFill>
+            <a:srgbClr val="EAF6F8"/>
+          </a:solidFill>
+          <a:ln w="12700">
+            <a:solidFill>
+              <a:srgbClr val="B9D7E6"/>
+            </a:solidFill>
+            <a:prstDash val="solid"/>
+          </a:ln>
+        </p:spPr>
+      </p:sp>
+      <p:sp>
+        <p:nvSpPr>
+          <p:cNvPr id="15" name="Text 13"/>
+          <p:cNvSpPr/>
+          <p:nvPr/>
+        </p:nvSpPr>
+        <p:spPr>
+          <a:xfrm>
+            <a:off x="8074152" y="3666744"/>
+            <a:ext cx="2825496" cy="201168"/>
+          </a:xfrm>
+          <a:prstGeom prst="rect">
+            <a:avLst/>
+          </a:prstGeom>
+          <a:noFill/>
+          <a:ln/>
+        </p:spPr>
+        <p:txBody>
+          <a:bodyPr wrap="square" lIns="0" tIns="0" rIns="0" bIns="0" rtlCol="0" anchor="ctr"/>
+          <a:lstStyle/>
+          <a:p>
+            <a:pPr indent="0" marL="0">
+              <a:buNone/>
+            </a:pPr>
+            <a:r>
+              <a:rPr lang="en-US" sz="950" b="1" dirty="0">
+                <a:solidFill>
+                  <a:srgbClr val="0068B7"/>
+                </a:solidFill>
+                <a:latin typeface="Aptos" pitchFamily="34" charset="0"/>
+                <a:ea typeface="Aptos" pitchFamily="34" charset="-122"/>
+                <a:cs typeface="Aptos" pitchFamily="34" charset="-120"/>
+              </a:rPr>
+              <a:t>Use this for</a:t>
+            </a:r>
+            <a:endParaRPr lang="en-US" sz="950" dirty="0"/>
+          </a:p>
+        </p:txBody>
+      </p:sp>
+      <p:sp>
+        <p:nvSpPr>
+          <p:cNvPr id="16" name="Text 14"/>
+          <p:cNvSpPr/>
+          <p:nvPr/>
+        </p:nvSpPr>
+        <p:spPr>
+          <a:xfrm>
+            <a:off x="8074152" y="3959352"/>
+            <a:ext cx="2825496" cy="1170432"/>
+          </a:xfrm>
+          <a:prstGeom prst="rect">
+            <a:avLst/>
+          </a:prstGeom>
+          <a:noFill/>
+          <a:ln/>
+        </p:spPr>
+        <p:txBody>
+          <a:bodyPr wrap="square" lIns="0" tIns="0" rIns="0" bIns="0" rtlCol="0" anchor="t">
+            <a:normAutofit/>
+          </a:bodyPr>
+          <a:lstStyle/>
+          <a:p>
+            <a:pPr indent="0" marL="0">
+              <a:buNone/>
+            </a:pPr>
+            <a:r>
+              <a:rPr lang="en-US" sz="1250" dirty="0">
+                <a:solidFill>
+                  <a:srgbClr val="17364A"/>
+                </a:solidFill>
+                <a:latin typeface="Aptos" pitchFamily="34" charset="0"/>
+                <a:ea typeface="Aptos" pitchFamily="34" charset="-122"/>
+                <a:cs typeface="Aptos" pitchFamily="34" charset="-120"/>
+              </a:rPr>
+              <a:t>Connect the concept to public health decisions, safeguards, documentation, or implementation work.</a:t>
+            </a:r>
+            <a:endParaRPr lang="en-US" sz="1250" dirty="0"/>
+          </a:p>
+        </p:txBody>
+      </p:sp>
+    </p:spTree>
+  </p:cSld>
+  <p:clrMapOvr>
+    <a:masterClrMapping/>
+  </p:clrMapOvr>
+</p:sld>
+</file>
+
+<file path=ppt/slides/slide22.xml><?xml version="1.0" encoding="utf-8"?>
+<p:sld xmlns:a="http://schemas.openxmlformats.org/drawingml/2006/main" xmlns:r="http://schemas.openxmlformats.org/officeDocument/2006/relationships" xmlns:p="http://schemas.openxmlformats.org/presentationml/2006/main">
+  <p:cSld name="Slide 22">
+    <p:bg>
+      <p:bgPr>
+        <a:solidFill>
+          <a:srgbClr val="F7FBFD"/>
+        </a:solidFill>
+      </p:bgPr>
+    </p:bg>
+    <p:spTree>
+      <p:nvGrpSpPr>
+        <p:cNvPr id="1" name=""/>
+        <p:cNvGrpSpPr/>
+        <p:nvPr/>
+      </p:nvGrpSpPr>
+      <p:grpSpPr>
+        <a:xfrm>
+          <a:off x="0" y="0"/>
+          <a:ext cx="0" cy="0"/>
+          <a:chOff x="0" y="0"/>
+          <a:chExt cx="0" cy="0"/>
+        </a:xfrm>
+      </p:grpSpPr>
+      <p:sp>
+        <p:nvSpPr>
+          <p:cNvPr id="2" name="Shape 0"/>
+          <p:cNvSpPr/>
+          <p:nvPr/>
+        </p:nvSpPr>
+        <p:spPr>
+          <a:xfrm>
+            <a:off x="0" y="0"/>
+            <a:ext cx="12191695" cy="164592"/>
+          </a:xfrm>
+          <a:prstGeom prst="rect">
+            <a:avLst/>
+          </a:prstGeom>
+          <a:solidFill>
+            <a:srgbClr val="0068B7"/>
+          </a:solidFill>
+          <a:ln w="12700">
+            <a:solidFill>
+              <a:srgbClr val="0068B7"/>
+            </a:solidFill>
+            <a:prstDash val="solid"/>
+          </a:ln>
+        </p:spPr>
+      </p:sp>
+      <p:sp>
+        <p:nvSpPr>
+          <p:cNvPr id="3" name="Shape 1"/>
+          <p:cNvSpPr/>
+          <p:nvPr/>
+        </p:nvSpPr>
+        <p:spPr>
+          <a:xfrm>
+            <a:off x="0" y="164592"/>
+            <a:ext cx="146304" cy="6693408"/>
+          </a:xfrm>
+          <a:prstGeom prst="rect">
+            <a:avLst/>
+          </a:prstGeom>
+          <a:solidFill>
+            <a:srgbClr val="2F8A28"/>
+          </a:solidFill>
+          <a:ln w="12700">
+            <a:solidFill>
+              <a:srgbClr val="2F8A28"/>
+            </a:solidFill>
+            <a:prstDash val="solid"/>
+          </a:ln>
+        </p:spPr>
+      </p:sp>
+      <p:sp>
+        <p:nvSpPr>
+          <p:cNvPr id="4" name="Text 2"/>
+          <p:cNvSpPr/>
+          <p:nvPr/>
+        </p:nvSpPr>
+        <p:spPr>
+          <a:xfrm>
+            <a:off x="502920" y="292608"/>
+            <a:ext cx="10149840" cy="256032"/>
+          </a:xfrm>
+          <a:prstGeom prst="rect">
+            <a:avLst/>
+          </a:prstGeom>
+          <a:noFill/>
+          <a:ln/>
+        </p:spPr>
+        <p:txBody>
+          <a:bodyPr wrap="square" lIns="0" tIns="0" rIns="0" bIns="0" rtlCol="0" anchor="ctr"/>
+          <a:lstStyle/>
+          <a:p>
+            <a:pPr indent="0" marL="0">
+              <a:buNone/>
+            </a:pPr>
+            <a:r>
+              <a:rPr lang="en-US" sz="900" b="1" dirty="0">
+                <a:solidFill>
+                  <a:srgbClr val="5F7181"/>
+                </a:solidFill>
+                <a:latin typeface="Aptos" pitchFamily="34" charset="0"/>
+                <a:ea typeface="Aptos" pitchFamily="34" charset="-122"/>
+                <a:cs typeface="Aptos" pitchFamily="34" charset="-120"/>
+              </a:rPr>
+              <a:t>Record Linkage, Entity Resolution, and Deduplication</a:t>
+            </a:r>
+            <a:endParaRPr lang="en-US" sz="900" dirty="0"/>
+          </a:p>
+        </p:txBody>
+      </p:sp>
+      <p:sp>
+        <p:nvSpPr>
+          <p:cNvPr id="5" name="Text 3"/>
+          <p:cNvSpPr/>
+          <p:nvPr/>
+        </p:nvSpPr>
+        <p:spPr>
+          <a:xfrm>
+            <a:off x="502920" y="6537960"/>
+            <a:ext cx="7772400" cy="201168"/>
+          </a:xfrm>
+          <a:prstGeom prst="rect">
+            <a:avLst/>
+          </a:prstGeom>
+          <a:noFill/>
+          <a:ln/>
+        </p:spPr>
+        <p:txBody>
+          <a:bodyPr wrap="square" lIns="0" tIns="0" rIns="0" bIns="0" rtlCol="0" anchor="ctr"/>
+          <a:lstStyle/>
+          <a:p>
+            <a:pPr indent="0" marL="0">
+              <a:buNone/>
+            </a:pPr>
+            <a:r>
+              <a:rPr lang="en-US" sz="800" dirty="0">
+                <a:solidFill>
+                  <a:srgbClr val="5F7181"/>
+                </a:solidFill>
+                <a:latin typeface="Aptos" pitchFamily="34" charset="0"/>
+                <a:ea typeface="Aptos" pitchFamily="34" charset="-122"/>
+                <a:cs typeface="Aptos" pitchFamily="34" charset="-120"/>
+              </a:rPr>
+              <a:t>AI Playbook and Toolkit for Public Health Departments</a:t>
+            </a:r>
+            <a:endParaRPr lang="en-US" sz="800" dirty="0"/>
+          </a:p>
+        </p:txBody>
+      </p:sp>
+      <p:sp>
+        <p:nvSpPr>
+          <p:cNvPr id="6" name="Text 4"/>
+          <p:cNvSpPr/>
+          <p:nvPr/>
+        </p:nvSpPr>
+        <p:spPr>
+          <a:xfrm>
+            <a:off x="9966960" y="6537960"/>
+            <a:ext cx="1645920" cy="201168"/>
+          </a:xfrm>
+          <a:prstGeom prst="rect">
+            <a:avLst/>
+          </a:prstGeom>
+          <a:noFill/>
+          <a:ln/>
+        </p:spPr>
+        <p:txBody>
+          <a:bodyPr wrap="square" lIns="0" tIns="0" rIns="0" bIns="0" rtlCol="0" anchor="ctr"/>
+          <a:lstStyle/>
+          <a:p>
+            <a:pPr algn="r" indent="0" marL="0">
+              <a:buNone/>
+            </a:pPr>
+            <a:r>
+              <a:rPr lang="en-US" sz="800" dirty="0">
+                <a:solidFill>
+                  <a:srgbClr val="5F7181"/>
+                </a:solidFill>
+                <a:latin typeface="Aptos" pitchFamily="34" charset="0"/>
+                <a:ea typeface="Aptos" pitchFamily="34" charset="-122"/>
+                <a:cs typeface="Aptos" pitchFamily="34" charset="-120"/>
+              </a:rPr>
+              <a:t>© Paula Soper</a:t>
+            </a:r>
+            <a:endParaRPr lang="en-US" sz="800" dirty="0"/>
+          </a:p>
+        </p:txBody>
+      </p:sp>
+      <p:sp>
+        <p:nvSpPr>
+          <p:cNvPr id="7" name="Shape 5"/>
+          <p:cNvSpPr/>
+          <p:nvPr/>
+        </p:nvSpPr>
+        <p:spPr>
+          <a:xfrm>
+            <a:off x="640080" y="658368"/>
+            <a:ext cx="420624" cy="420624"/>
+          </a:xfrm>
+          <a:prstGeom prst="ellipse">
+            <a:avLst/>
+          </a:prstGeom>
+          <a:solidFill>
+            <a:srgbClr val="0068B7"/>
+          </a:solidFill>
+          <a:ln w="12700">
+            <a:solidFill>
+              <a:srgbClr val="0068B7"/>
+            </a:solidFill>
+            <a:prstDash val="solid"/>
+          </a:ln>
+        </p:spPr>
+      </p:sp>
+      <p:sp>
+        <p:nvSpPr>
+          <p:cNvPr id="8" name="Text 6"/>
+          <p:cNvSpPr/>
+          <p:nvPr/>
+        </p:nvSpPr>
+        <p:spPr>
+          <a:xfrm>
+            <a:off x="640080" y="731520"/>
+            <a:ext cx="420624" cy="164592"/>
+          </a:xfrm>
+          <a:prstGeom prst="rect">
+            <a:avLst/>
+          </a:prstGeom>
+          <a:noFill/>
+          <a:ln/>
+        </p:spPr>
+        <p:txBody>
+          <a:bodyPr wrap="square" lIns="0" tIns="0" rIns="0" bIns="0" rtlCol="0" anchor="ctr"/>
+          <a:lstStyle/>
+          <a:p>
+            <a:pPr algn="ctr" indent="0" marL="0">
+              <a:buNone/>
+            </a:pPr>
+            <a:r>
+              <a:rPr lang="en-US" sz="1100" b="1" dirty="0">
+                <a:solidFill>
+                  <a:srgbClr val="FFFFFF"/>
+                </a:solidFill>
+                <a:latin typeface="Aptos" pitchFamily="34" charset="0"/>
+                <a:ea typeface="Aptos" pitchFamily="34" charset="-122"/>
+                <a:cs typeface="Aptos" pitchFamily="34" charset="-120"/>
+              </a:rPr>
+              <a:t>14</a:t>
+            </a:r>
+            <a:endParaRPr lang="en-US" sz="1100" dirty="0"/>
+          </a:p>
+        </p:txBody>
+      </p:sp>
+      <p:sp>
+        <p:nvSpPr>
+          <p:cNvPr id="9" name="Text 7"/>
+          <p:cNvSpPr/>
+          <p:nvPr/>
+        </p:nvSpPr>
+        <p:spPr>
+          <a:xfrm>
+            <a:off x="640080" y="621792"/>
+            <a:ext cx="10881360" cy="566928"/>
+          </a:xfrm>
+          <a:prstGeom prst="rect">
+            <a:avLst/>
+          </a:prstGeom>
+          <a:noFill/>
+          <a:ln/>
+        </p:spPr>
+        <p:txBody>
+          <a:bodyPr wrap="square" lIns="0" tIns="0" rIns="0" bIns="0" rtlCol="0" anchor="ctr">
+            <a:normAutofit/>
+          </a:bodyPr>
+          <a:lstStyle/>
+          <a:p>
+            <a:pPr indent="0" marL="0">
+              <a:buNone/>
+            </a:pPr>
+            <a:r>
+              <a:rPr lang="en-US" sz="2700" b="1" dirty="0">
+                <a:solidFill>
+                  <a:srgbClr val="003A63"/>
+                </a:solidFill>
+                <a:latin typeface="Aptos Display" pitchFamily="34" charset="0"/>
+                <a:ea typeface="Aptos Display" pitchFamily="34" charset="-122"/>
+                <a:cs typeface="Aptos Display" pitchFamily="34" charset="-120"/>
+              </a:rPr>
+              <a:t>References and Resources</a:t>
+            </a:r>
+            <a:endParaRPr lang="en-US" sz="2700" dirty="0"/>
+          </a:p>
+        </p:txBody>
+      </p:sp>
+      <p:sp>
+        <p:nvSpPr>
+          <p:cNvPr id="10" name="Text 8"/>
+          <p:cNvSpPr/>
+          <p:nvPr/>
+        </p:nvSpPr>
+        <p:spPr>
+          <a:xfrm>
+            <a:off x="868680" y="1417320"/>
+            <a:ext cx="6675120" cy="4434840"/>
+          </a:xfrm>
+          <a:prstGeom prst="rect">
+            <a:avLst/>
+          </a:prstGeom>
+          <a:noFill/>
+          <a:ln/>
+        </p:spPr>
+        <p:txBody>
+          <a:bodyPr wrap="square" lIns="635" tIns="635" rIns="635" bIns="635" rtlCol="0" anchor="t">
+            <a:normAutofit/>
+          </a:bodyPr>
+          <a:lstStyle/>
+          <a:p>
+            <a:r>
+              <a:rPr lang="en-US" sz="1700" dirty="0">
+                <a:solidFill>
+                  <a:srgbClr val="17364A"/>
+                </a:solidFill>
+                <a:latin typeface="Aptos" pitchFamily="34" charset="0"/>
+                <a:ea typeface="Aptos" pitchFamily="34" charset="-122"/>
+                <a:cs typeface="Aptos" pitchFamily="34" charset="-120"/>
+              </a:rPr>
               <a:t>Public health IIS and surveillance data quality resources</a:t>
             </a:r>
-            <a:endParaRPr lang="en-US" sz="1450" dirty="0"/>
-          </a:p>
-          <a:p>
-            <a:r>
-              <a:rPr lang="en-US" sz="1450" dirty="0">
+            <a:endParaRPr lang="en-US" sz="1700" dirty="0"/>
+          </a:p>
+          <a:p>
+            <a:r>
+              <a:rPr lang="en-US" sz="1700" dirty="0">
                 <a:solidFill>
                   <a:srgbClr val="17364A"/>
                 </a:solidFill>
@@ -6046,11 +10747,11 @@
               </a:rPr>
               <a:t>CDC data modernization resources</a:t>
             </a:r>
-            <a:endParaRPr lang="en-US" sz="1450" dirty="0"/>
-          </a:p>
-          <a:p>
-            <a:r>
-              <a:rPr lang="en-US" sz="1450" dirty="0">
+            <a:endParaRPr lang="en-US" sz="1700" dirty="0"/>
+          </a:p>
+          <a:p>
+            <a:r>
+              <a:rPr lang="en-US" sz="1700" dirty="0">
                 <a:solidFill>
                   <a:srgbClr val="17364A"/>
                 </a:solidFill>
@@ -6060,11 +10761,11 @@
               </a:rPr>
               <a:t>Health information exchange data quality materials</a:t>
             </a:r>
-            <a:endParaRPr lang="en-US" sz="1450" dirty="0"/>
-          </a:p>
-          <a:p>
-            <a:r>
-              <a:rPr lang="en-US" sz="1450" dirty="0">
+            <a:endParaRPr lang="en-US" sz="1700" dirty="0"/>
+          </a:p>
+          <a:p>
+            <a:r>
+              <a:rPr lang="en-US" sz="1700" dirty="0">
                 <a:solidFill>
                   <a:srgbClr val="17364A"/>
                 </a:solidFill>
@@ -6074,7 +10775,221 @@
               </a:rPr>
               <a:t>Agency matching and deduplication procedures</a:t>
             </a:r>
-            <a:endParaRPr lang="en-US" sz="1450" dirty="0"/>
+            <a:endParaRPr lang="en-US" sz="1700" dirty="0"/>
+          </a:p>
+        </p:txBody>
+      </p:sp>
+      <p:sp>
+        <p:nvSpPr>
+          <p:cNvPr id="11" name="Shape 9"/>
+          <p:cNvSpPr/>
+          <p:nvPr/>
+        </p:nvSpPr>
+        <p:spPr>
+          <a:xfrm>
+            <a:off x="7909560" y="1417320"/>
+            <a:ext cx="3154680" cy="1828800"/>
+          </a:xfrm>
+          <a:prstGeom prst="roundRect">
+            <a:avLst>
+              <a:gd name="adj" fmla="val 6000"/>
+            </a:avLst>
+          </a:prstGeom>
+          <a:solidFill>
+            <a:srgbClr val="EEF8ED"/>
+          </a:solidFill>
+          <a:ln w="12700">
+            <a:solidFill>
+              <a:srgbClr val="B9D7E6"/>
+            </a:solidFill>
+            <a:prstDash val="solid"/>
+          </a:ln>
+        </p:spPr>
+      </p:sp>
+      <p:sp>
+        <p:nvSpPr>
+          <p:cNvPr id="12" name="Text 10"/>
+          <p:cNvSpPr/>
+          <p:nvPr/>
+        </p:nvSpPr>
+        <p:spPr>
+          <a:xfrm>
+            <a:off x="8074152" y="1563624"/>
+            <a:ext cx="2825496" cy="201168"/>
+          </a:xfrm>
+          <a:prstGeom prst="rect">
+            <a:avLst/>
+          </a:prstGeom>
+          <a:noFill/>
+          <a:ln/>
+        </p:spPr>
+        <p:txBody>
+          <a:bodyPr wrap="square" lIns="0" tIns="0" rIns="0" bIns="0" rtlCol="0" anchor="ctr"/>
+          <a:lstStyle/>
+          <a:p>
+            <a:pPr indent="0" marL="0">
+              <a:buNone/>
+            </a:pPr>
+            <a:r>
+              <a:rPr lang="en-US" sz="950" b="1" dirty="0">
+                <a:solidFill>
+                  <a:srgbClr val="0068B7"/>
+                </a:solidFill>
+                <a:latin typeface="Aptos" pitchFamily="34" charset="0"/>
+                <a:ea typeface="Aptos" pitchFamily="34" charset="-122"/>
+                <a:cs typeface="Aptos" pitchFamily="34" charset="-120"/>
+              </a:rPr>
+              <a:t>Key idea</a:t>
+            </a:r>
+            <a:endParaRPr lang="en-US" sz="950" dirty="0"/>
+          </a:p>
+        </p:txBody>
+      </p:sp>
+      <p:sp>
+        <p:nvSpPr>
+          <p:cNvPr id="13" name="Text 11"/>
+          <p:cNvSpPr/>
+          <p:nvPr/>
+        </p:nvSpPr>
+        <p:spPr>
+          <a:xfrm>
+            <a:off x="8074152" y="1856232"/>
+            <a:ext cx="2825496" cy="1261872"/>
+          </a:xfrm>
+          <a:prstGeom prst="rect">
+            <a:avLst/>
+          </a:prstGeom>
+          <a:noFill/>
+          <a:ln/>
+        </p:spPr>
+        <p:txBody>
+          <a:bodyPr wrap="square" lIns="0" tIns="0" rIns="0" bIns="0" rtlCol="0" anchor="t">
+            <a:normAutofit/>
+          </a:bodyPr>
+          <a:lstStyle/>
+          <a:p>
+            <a:pPr indent="0" marL="0">
+              <a:buNone/>
+            </a:pPr>
+            <a:r>
+              <a:rPr lang="en-US" sz="1250" dirty="0">
+                <a:solidFill>
+                  <a:srgbClr val="17364A"/>
+                </a:solidFill>
+                <a:latin typeface="Aptos" pitchFamily="34" charset="0"/>
+                <a:ea typeface="Aptos" pitchFamily="34" charset="-122"/>
+                <a:cs typeface="Aptos" pitchFamily="34" charset="-120"/>
+              </a:rPr>
+              <a:t>Public health IIS and surveillance data quality resources</a:t>
+            </a:r>
+            <a:endParaRPr lang="en-US" sz="1250" dirty="0"/>
+          </a:p>
+        </p:txBody>
+      </p:sp>
+      <p:sp>
+        <p:nvSpPr>
+          <p:cNvPr id="14" name="Shape 12"/>
+          <p:cNvSpPr/>
+          <p:nvPr/>
+        </p:nvSpPr>
+        <p:spPr>
+          <a:xfrm>
+            <a:off x="7909560" y="3520440"/>
+            <a:ext cx="3154680" cy="1737360"/>
+          </a:xfrm>
+          <a:prstGeom prst="roundRect">
+            <a:avLst>
+              <a:gd name="adj" fmla="val 6316"/>
+            </a:avLst>
+          </a:prstGeom>
+          <a:solidFill>
+            <a:srgbClr val="EAF6F8"/>
+          </a:solidFill>
+          <a:ln w="12700">
+            <a:solidFill>
+              <a:srgbClr val="B9D7E6"/>
+            </a:solidFill>
+            <a:prstDash val="solid"/>
+          </a:ln>
+        </p:spPr>
+      </p:sp>
+      <p:sp>
+        <p:nvSpPr>
+          <p:cNvPr id="15" name="Text 13"/>
+          <p:cNvSpPr/>
+          <p:nvPr/>
+        </p:nvSpPr>
+        <p:spPr>
+          <a:xfrm>
+            <a:off x="8074152" y="3666744"/>
+            <a:ext cx="2825496" cy="201168"/>
+          </a:xfrm>
+          <a:prstGeom prst="rect">
+            <a:avLst/>
+          </a:prstGeom>
+          <a:noFill/>
+          <a:ln/>
+        </p:spPr>
+        <p:txBody>
+          <a:bodyPr wrap="square" lIns="0" tIns="0" rIns="0" bIns="0" rtlCol="0" anchor="ctr"/>
+          <a:lstStyle/>
+          <a:p>
+            <a:pPr indent="0" marL="0">
+              <a:buNone/>
+            </a:pPr>
+            <a:r>
+              <a:rPr lang="en-US" sz="950" b="1" dirty="0">
+                <a:solidFill>
+                  <a:srgbClr val="0068B7"/>
+                </a:solidFill>
+                <a:latin typeface="Aptos" pitchFamily="34" charset="0"/>
+                <a:ea typeface="Aptos" pitchFamily="34" charset="-122"/>
+                <a:cs typeface="Aptos" pitchFamily="34" charset="-120"/>
+              </a:rPr>
+              <a:t>Use this for</a:t>
+            </a:r>
+            <a:endParaRPr lang="en-US" sz="950" dirty="0"/>
+          </a:p>
+        </p:txBody>
+      </p:sp>
+      <p:sp>
+        <p:nvSpPr>
+          <p:cNvPr id="16" name="Text 14"/>
+          <p:cNvSpPr/>
+          <p:nvPr/>
+        </p:nvSpPr>
+        <p:spPr>
+          <a:xfrm>
+            <a:off x="8074152" y="3959352"/>
+            <a:ext cx="2825496" cy="1170432"/>
+          </a:xfrm>
+          <a:prstGeom prst="rect">
+            <a:avLst/>
+          </a:prstGeom>
+          <a:noFill/>
+          <a:ln/>
+        </p:spPr>
+        <p:txBody>
+          <a:bodyPr wrap="square" lIns="0" tIns="0" rIns="0" bIns="0" rtlCol="0" anchor="t">
+            <a:normAutofit/>
+          </a:bodyPr>
+          <a:lstStyle/>
+          <a:p>
+            <a:pPr indent="0" marL="0">
+              <a:buNone/>
+            </a:pPr>
+            <a:r>
+              <a:rPr lang="en-US" sz="1250" dirty="0">
+                <a:solidFill>
+                  <a:srgbClr val="17364A"/>
+                </a:solidFill>
+                <a:latin typeface="Aptos" pitchFamily="34" charset="0"/>
+                <a:ea typeface="Aptos" pitchFamily="34" charset="-122"/>
+                <a:cs typeface="Aptos" pitchFamily="34" charset="-120"/>
+              </a:rPr>
+              <a:t>Connect the concept to public health decisions, safeguards, documentation, or implementation work.</a:t>
+            </a:r>
+            <a:endParaRPr lang="en-US" sz="1250" dirty="0"/>
           </a:p>
         </p:txBody>
       </p:sp>
@@ -6137,7 +11052,32 @@
       </p:sp>
       <p:sp>
         <p:nvSpPr>
-          <p:cNvPr id="3" name="Text 1"/>
+          <p:cNvPr id="3" name="Shape 1"/>
+          <p:cNvSpPr/>
+          <p:nvPr/>
+        </p:nvSpPr>
+        <p:spPr>
+          <a:xfrm>
+            <a:off x="0" y="164592"/>
+            <a:ext cx="146304" cy="6693408"/>
+          </a:xfrm>
+          <a:prstGeom prst="rect">
+            <a:avLst/>
+          </a:prstGeom>
+          <a:solidFill>
+            <a:srgbClr val="2F8A28"/>
+          </a:solidFill>
+          <a:ln w="12700">
+            <a:solidFill>
+              <a:srgbClr val="2F8A28"/>
+            </a:solidFill>
+            <a:prstDash val="solid"/>
+          </a:ln>
+        </p:spPr>
+      </p:sp>
+      <p:sp>
+        <p:nvSpPr>
+          <p:cNvPr id="4" name="Text 2"/>
           <p:cNvSpPr/>
           <p:nvPr/>
         </p:nvSpPr>
@@ -6176,7 +11116,7 @@
       </p:sp>
       <p:sp>
         <p:nvSpPr>
-          <p:cNvPr id="4" name="Text 2"/>
+          <p:cNvPr id="5" name="Text 3"/>
           <p:cNvSpPr/>
           <p:nvPr/>
         </p:nvSpPr>
@@ -6215,7 +11155,7 @@
       </p:sp>
       <p:sp>
         <p:nvSpPr>
-          <p:cNvPr id="5" name="Text 3"/>
+          <p:cNvPr id="6" name="Text 4"/>
           <p:cNvSpPr/>
           <p:nvPr/>
         </p:nvSpPr>
@@ -6254,7 +11194,7 @@
       </p:sp>
       <p:sp>
         <p:nvSpPr>
-          <p:cNvPr id="6" name="Text 4"/>
+          <p:cNvPr id="7" name="Text 5"/>
           <p:cNvSpPr/>
           <p:nvPr/>
         </p:nvSpPr>
@@ -6287,7 +11227,7 @@
                 <a:ea typeface="Aptos Display" pitchFamily="34" charset="-122"/>
                 <a:cs typeface="Aptos Display" pitchFamily="34" charset="-120"/>
               </a:rPr>
-              <a:t>Learning Objectives</a:t>
+              <a:t>How this module connects to the playbook</a:t>
             </a:r>
             <a:endParaRPr lang="en-US" sz="2700" dirty="0"/>
           </a:p>
@@ -6295,14 +11235,14 @@
       </p:sp>
       <p:sp>
         <p:nvSpPr>
-          <p:cNvPr id="7" name="Text 5"/>
-          <p:cNvSpPr/>
-          <p:nvPr/>
-        </p:nvSpPr>
-        <p:spPr>
-          <a:xfrm>
-            <a:off x="822960" y="1325880"/>
-            <a:ext cx="10378440" cy="4800600"/>
+          <p:cNvPr id="8" name="Text 6"/>
+          <p:cNvSpPr/>
+          <p:nvPr/>
+        </p:nvSpPr>
+        <p:spPr>
+          <a:xfrm>
+            <a:off x="868680" y="1417320"/>
+            <a:ext cx="6903720" cy="4480560"/>
           </a:xfrm>
           <a:prstGeom prst="rect">
             <a:avLst/>
@@ -6317,7 +11257,7 @@
           <a:lstStyle/>
           <a:p>
             <a:r>
-              <a:rPr lang="en-US" sz="1450" dirty="0">
+              <a:rPr lang="en-US" sz="1540" dirty="0">
                 <a:solidFill>
                   <a:srgbClr val="17364A"/>
                 </a:solidFill>
@@ -6325,13 +11265,13 @@
                 <a:ea typeface="Aptos" pitchFamily="34" charset="-122"/>
                 <a:cs typeface="Aptos" pitchFamily="34" charset="-120"/>
               </a:rPr>
-              <a:t>Explain why record linkage matters for public health AI.</a:t>
-            </a:r>
-            <a:endParaRPr lang="en-US" sz="1450" dirty="0"/>
-          </a:p>
-          <a:p>
-            <a:r>
-              <a:rPr lang="en-US" sz="1450" dirty="0">
+              <a:t>Play 7: Prioritize Use Cases - This lesson informs Play 7 by helping learners connect the lesson topic to prioritize use cases work.</a:t>
+            </a:r>
+            <a:endParaRPr lang="en-US" sz="1540" dirty="0"/>
+          </a:p>
+          <a:p>
+            <a:r>
+              <a:rPr lang="en-US" sz="1540" dirty="0">
                 <a:solidFill>
                   <a:srgbClr val="17364A"/>
                 </a:solidFill>
@@ -6339,13 +11279,13 @@
                 <a:ea typeface="Aptos" pitchFamily="34" charset="-122"/>
                 <a:cs typeface="Aptos" pitchFamily="34" charset="-120"/>
               </a:rPr>
-              <a:t>Distinguish between deterministic matching, probabilistic matching, entity resolution, and deduplication.</a:t>
-            </a:r>
-            <a:endParaRPr lang="en-US" sz="1450" dirty="0"/>
-          </a:p>
-          <a:p>
-            <a:r>
-              <a:rPr lang="en-US" sz="1450" dirty="0">
+              <a:t>Play 11: Build and Deploy AI Solutions - This lesson informs Play 11 by helping learners connect the lesson topic to build and deploy.</a:t>
+            </a:r>
+            <a:endParaRPr lang="en-US" sz="1540" dirty="0"/>
+          </a:p>
+          <a:p>
+            <a:r>
+              <a:rPr lang="en-US" sz="1540" dirty="0">
                 <a:solidFill>
                   <a:srgbClr val="17364A"/>
                 </a:solidFill>
@@ -6353,13 +11293,13 @@
                 <a:ea typeface="Aptos" pitchFamily="34" charset="-122"/>
                 <a:cs typeface="Aptos" pitchFamily="34" charset="-120"/>
               </a:rPr>
-              <a:t>Identify risks from false matches and missed matches.</a:t>
-            </a:r>
-            <a:endParaRPr lang="en-US" sz="1450" dirty="0"/>
-          </a:p>
-          <a:p>
-            <a:r>
-              <a:rPr lang="en-US" sz="1450" dirty="0">
+              <a:t>Play 1: Vision &amp; Guardrails - This lesson informs Play 1 by helping learners connect the lesson topic to vision &amp; guardrails work in.</a:t>
+            </a:r>
+            <a:endParaRPr lang="en-US" sz="1540" dirty="0"/>
+          </a:p>
+          <a:p>
+            <a:r>
+              <a:rPr lang="en-US" sz="1540" dirty="0">
                 <a:solidFill>
                   <a:srgbClr val="17364A"/>
                 </a:solidFill>
@@ -6367,13 +11307,106 @@
                 <a:ea typeface="Aptos" pitchFamily="34" charset="-122"/>
                 <a:cs typeface="Aptos" pitchFamily="34" charset="-120"/>
               </a:rPr>
-              <a:t>Describe how thresholds, clerical review, and data quality affect matching.</a:t>
-            </a:r>
-            <a:endParaRPr lang="en-US" sz="1450" dirty="0"/>
-          </a:p>
-          <a:p>
-            <a:r>
-              <a:rPr lang="en-US" sz="1450" dirty="0">
+              <a:t>Play 2: Readiness Assessment - This lesson informs Play 2 by helping learners connect the lesson topic to readiness assessment work.</a:t>
+            </a:r>
+            <a:endParaRPr lang="en-US" sz="1540" dirty="0"/>
+          </a:p>
+        </p:txBody>
+      </p:sp>
+      <p:sp>
+        <p:nvSpPr>
+          <p:cNvPr id="9" name="Shape 7"/>
+          <p:cNvSpPr/>
+          <p:nvPr/>
+        </p:nvSpPr>
+        <p:spPr>
+          <a:xfrm>
+            <a:off x="8046720" y="1417320"/>
+            <a:ext cx="3063240" cy="2103120"/>
+          </a:xfrm>
+          <a:prstGeom prst="roundRect">
+            <a:avLst>
+              <a:gd name="adj" fmla="val 5217"/>
+            </a:avLst>
+          </a:prstGeom>
+          <a:solidFill>
+            <a:srgbClr val="EEF8ED"/>
+          </a:solidFill>
+          <a:ln w="12700">
+            <a:solidFill>
+              <a:srgbClr val="B9D7E6"/>
+            </a:solidFill>
+            <a:prstDash val="solid"/>
+          </a:ln>
+        </p:spPr>
+      </p:sp>
+      <p:sp>
+        <p:nvSpPr>
+          <p:cNvPr id="10" name="Text 8"/>
+          <p:cNvSpPr/>
+          <p:nvPr/>
+        </p:nvSpPr>
+        <p:spPr>
+          <a:xfrm>
+            <a:off x="8211312" y="1563624"/>
+            <a:ext cx="2734056" cy="201168"/>
+          </a:xfrm>
+          <a:prstGeom prst="rect">
+            <a:avLst/>
+          </a:prstGeom>
+          <a:noFill/>
+          <a:ln/>
+        </p:spPr>
+        <p:txBody>
+          <a:bodyPr wrap="square" lIns="0" tIns="0" rIns="0" bIns="0" rtlCol="0" anchor="ctr"/>
+          <a:lstStyle/>
+          <a:p>
+            <a:pPr indent="0" marL="0">
+              <a:buNone/>
+            </a:pPr>
+            <a:r>
+              <a:rPr lang="en-US" sz="950" b="1" dirty="0">
+                <a:solidFill>
+                  <a:srgbClr val="0068B7"/>
+                </a:solidFill>
+                <a:latin typeface="Aptos" pitchFamily="34" charset="0"/>
+                <a:ea typeface="Aptos" pitchFamily="34" charset="-122"/>
+                <a:cs typeface="Aptos" pitchFamily="34" charset="-120"/>
+              </a:rPr>
+              <a:t>Apply the lesson</a:t>
+            </a:r>
+            <a:endParaRPr lang="en-US" sz="950" dirty="0"/>
+          </a:p>
+        </p:txBody>
+      </p:sp>
+      <p:sp>
+        <p:nvSpPr>
+          <p:cNvPr id="11" name="Text 9"/>
+          <p:cNvSpPr/>
+          <p:nvPr/>
+        </p:nvSpPr>
+        <p:spPr>
+          <a:xfrm>
+            <a:off x="8211312" y="1856232"/>
+            <a:ext cx="2734056" cy="1536192"/>
+          </a:xfrm>
+          <a:prstGeom prst="rect">
+            <a:avLst/>
+          </a:prstGeom>
+          <a:noFill/>
+          <a:ln/>
+        </p:spPr>
+        <p:txBody>
+          <a:bodyPr wrap="square" lIns="0" tIns="0" rIns="0" bIns="0" rtlCol="0" anchor="t">
+            <a:normAutofit/>
+          </a:bodyPr>
+          <a:lstStyle/>
+          <a:p>
+            <a:pPr indent="0" marL="0">
+              <a:buNone/>
+            </a:pPr>
+            <a:r>
+              <a:rPr lang="en-US" sz="1250" dirty="0">
                 <a:solidFill>
                   <a:srgbClr val="17364A"/>
                 </a:solidFill>
@@ -6381,9 +11414,116 @@
                 <a:ea typeface="Aptos" pitchFamily="34" charset="-122"/>
                 <a:cs typeface="Aptos" pitchFamily="34" charset="-120"/>
               </a:rPr>
-              <a:t>Produce a linkage risk review for an AI-supported workflow.</a:t>
-            </a:r>
-            <a:endParaRPr lang="en-US" sz="1450" dirty="0"/>
+              <a:t>Use the related plays to identify decisions, participants, timing, approvals, and documentation needed for responsible implementation.</a:t>
+            </a:r>
+            <a:endParaRPr lang="en-US" sz="1250" dirty="0"/>
+          </a:p>
+        </p:txBody>
+      </p:sp>
+      <p:sp>
+        <p:nvSpPr>
+          <p:cNvPr id="12" name="Shape 10"/>
+          <p:cNvSpPr/>
+          <p:nvPr/>
+        </p:nvSpPr>
+        <p:spPr>
+          <a:xfrm>
+            <a:off x="8046720" y="3794760"/>
+            <a:ext cx="3063240" cy="1508760"/>
+          </a:xfrm>
+          <a:prstGeom prst="roundRect">
+            <a:avLst>
+              <a:gd name="adj" fmla="val 7273"/>
+            </a:avLst>
+          </a:prstGeom>
+          <a:solidFill>
+            <a:srgbClr val="FFF4D9"/>
+          </a:solidFill>
+          <a:ln w="12700">
+            <a:solidFill>
+              <a:srgbClr val="B9D7E6"/>
+            </a:solidFill>
+            <a:prstDash val="solid"/>
+          </a:ln>
+        </p:spPr>
+      </p:sp>
+      <p:sp>
+        <p:nvSpPr>
+          <p:cNvPr id="13" name="Text 11"/>
+          <p:cNvSpPr/>
+          <p:nvPr/>
+        </p:nvSpPr>
+        <p:spPr>
+          <a:xfrm>
+            <a:off x="8211312" y="3941064"/>
+            <a:ext cx="2734056" cy="201168"/>
+          </a:xfrm>
+          <a:prstGeom prst="rect">
+            <a:avLst/>
+          </a:prstGeom>
+          <a:noFill/>
+          <a:ln/>
+        </p:spPr>
+        <p:txBody>
+          <a:bodyPr wrap="square" lIns="0" tIns="0" rIns="0" bIns="0" rtlCol="0" anchor="ctr"/>
+          <a:lstStyle/>
+          <a:p>
+            <a:pPr indent="0" marL="0">
+              <a:buNone/>
+            </a:pPr>
+            <a:r>
+              <a:rPr lang="en-US" sz="950" b="1" dirty="0">
+                <a:solidFill>
+                  <a:srgbClr val="0068B7"/>
+                </a:solidFill>
+                <a:latin typeface="Aptos" pitchFamily="34" charset="0"/>
+                <a:ea typeface="Aptos" pitchFamily="34" charset="-122"/>
+                <a:cs typeface="Aptos" pitchFamily="34" charset="-120"/>
+              </a:rPr>
+              <a:t>Keep in mind</a:t>
+            </a:r>
+            <a:endParaRPr lang="en-US" sz="950" dirty="0"/>
+          </a:p>
+        </p:txBody>
+      </p:sp>
+      <p:sp>
+        <p:nvSpPr>
+          <p:cNvPr id="14" name="Text 12"/>
+          <p:cNvSpPr/>
+          <p:nvPr/>
+        </p:nvSpPr>
+        <p:spPr>
+          <a:xfrm>
+            <a:off x="8211312" y="4233672"/>
+            <a:ext cx="2734056" cy="941832"/>
+          </a:xfrm>
+          <a:prstGeom prst="rect">
+            <a:avLst/>
+          </a:prstGeom>
+          <a:noFill/>
+          <a:ln/>
+        </p:spPr>
+        <p:txBody>
+          <a:bodyPr wrap="square" lIns="0" tIns="0" rIns="0" bIns="0" rtlCol="0" anchor="t">
+            <a:normAutofit/>
+          </a:bodyPr>
+          <a:lstStyle/>
+          <a:p>
+            <a:pPr indent="0" marL="0">
+              <a:buNone/>
+            </a:pPr>
+            <a:r>
+              <a:rPr lang="en-US" sz="1250" dirty="0">
+                <a:solidFill>
+                  <a:srgbClr val="17364A"/>
+                </a:solidFill>
+                <a:latin typeface="Aptos" pitchFamily="34" charset="0"/>
+                <a:ea typeface="Aptos" pitchFamily="34" charset="-122"/>
+                <a:cs typeface="Aptos" pitchFamily="34" charset="-120"/>
+              </a:rPr>
+              <a:t>The playbook connection helps turn training into agency work, not just individual knowledge.</a:t>
+            </a:r>
+            <a:endParaRPr lang="en-US" sz="1250" dirty="0"/>
           </a:p>
         </p:txBody>
       </p:sp>
@@ -6446,7 +11586,32 @@
       </p:sp>
       <p:sp>
         <p:nvSpPr>
-          <p:cNvPr id="3" name="Text 1"/>
+          <p:cNvPr id="3" name="Shape 1"/>
+          <p:cNvSpPr/>
+          <p:nvPr/>
+        </p:nvSpPr>
+        <p:spPr>
+          <a:xfrm>
+            <a:off x="0" y="164592"/>
+            <a:ext cx="146304" cy="6693408"/>
+          </a:xfrm>
+          <a:prstGeom prst="rect">
+            <a:avLst/>
+          </a:prstGeom>
+          <a:solidFill>
+            <a:srgbClr val="2F8A28"/>
+          </a:solidFill>
+          <a:ln w="12700">
+            <a:solidFill>
+              <a:srgbClr val="2F8A28"/>
+            </a:solidFill>
+            <a:prstDash val="solid"/>
+          </a:ln>
+        </p:spPr>
+      </p:sp>
+      <p:sp>
+        <p:nvSpPr>
+          <p:cNvPr id="4" name="Text 2"/>
           <p:cNvSpPr/>
           <p:nvPr/>
         </p:nvSpPr>
@@ -6485,7 +11650,7 @@
       </p:sp>
       <p:sp>
         <p:nvSpPr>
-          <p:cNvPr id="4" name="Text 2"/>
+          <p:cNvPr id="5" name="Text 3"/>
           <p:cNvSpPr/>
           <p:nvPr/>
         </p:nvSpPr>
@@ -6524,7 +11689,7 @@
       </p:sp>
       <p:sp>
         <p:nvSpPr>
-          <p:cNvPr id="5" name="Text 3"/>
+          <p:cNvPr id="6" name="Text 4"/>
           <p:cNvSpPr/>
           <p:nvPr/>
         </p:nvSpPr>
@@ -6563,7 +11728,7 @@
       </p:sp>
       <p:sp>
         <p:nvSpPr>
-          <p:cNvPr id="6" name="Text 4"/>
+          <p:cNvPr id="7" name="Text 5"/>
           <p:cNvSpPr/>
           <p:nvPr/>
         </p:nvSpPr>
@@ -6596,7 +11761,7 @@
                 <a:ea typeface="Aptos Display" pitchFamily="34" charset="-122"/>
                 <a:cs typeface="Aptos Display" pitchFamily="34" charset="-120"/>
               </a:rPr>
-              <a:t>Module Overview</a:t>
+              <a:t>Related toolkit resources</a:t>
             </a:r>
             <a:endParaRPr lang="en-US" sz="2700" dirty="0"/>
           </a:p>
@@ -6604,32 +11769,192 @@
       </p:sp>
       <p:sp>
         <p:nvSpPr>
-          <p:cNvPr id="7" name="Text 5"/>
-          <p:cNvSpPr/>
-          <p:nvPr/>
-        </p:nvSpPr>
-        <p:spPr>
-          <a:xfrm>
-            <a:off x="822960" y="1325880"/>
-            <a:ext cx="10378440" cy="4800600"/>
-          </a:xfrm>
-          <a:prstGeom prst="rect">
-            <a:avLst/>
-          </a:prstGeom>
-          <a:noFill/>
-          <a:ln/>
-        </p:spPr>
-        <p:txBody>
-          <a:bodyPr wrap="square" lIns="1016" tIns="1016" rIns="1016" bIns="1016" rtlCol="0" anchor="t">
+          <p:cNvPr id="8" name="Text 6"/>
+          <p:cNvSpPr/>
+          <p:nvPr/>
+        </p:nvSpPr>
+        <p:spPr>
+          <a:xfrm>
+            <a:off x="868680" y="1417320"/>
+            <a:ext cx="6903720" cy="4480560"/>
+          </a:xfrm>
+          <a:prstGeom prst="rect">
+            <a:avLst/>
+          </a:prstGeom>
+          <a:noFill/>
+          <a:ln/>
+        </p:spPr>
+        <p:txBody>
+          <a:bodyPr wrap="square" lIns="635" tIns="635" rIns="635" bIns="635" rtlCol="0" anchor="t">
             <a:normAutofit/>
           </a:bodyPr>
           <a:lstStyle/>
           <a:p>
+            <a:r>
+              <a:rPr lang="en-US" sz="1460" dirty="0">
+                <a:solidFill>
+                  <a:srgbClr val="17364A"/>
+                </a:solidFill>
+                <a:latin typeface="Aptos" pitchFamily="34" charset="0"/>
+                <a:ea typeface="Aptos" pitchFamily="34" charset="-122"/>
+                <a:cs typeface="Aptos" pitchFamily="34" charset="-120"/>
+              </a:rPr>
+              <a:t>Tool 3: Equity Impact Assessment Checklist (Checklist) - Use this tool to complete or strengthen the practical exercise for the.</a:t>
+            </a:r>
+            <a:endParaRPr lang="en-US" sz="1460" dirty="0"/>
+          </a:p>
+          <a:p>
+            <a:r>
+              <a:rPr lang="en-US" sz="1460" dirty="0">
+                <a:solidFill>
+                  <a:srgbClr val="17364A"/>
+                </a:solidFill>
+                <a:latin typeface="Aptos" pitchFamily="34" charset="0"/>
+                <a:ea typeface="Aptos" pitchFamily="34" charset="-122"/>
+                <a:cs typeface="Aptos" pitchFamily="34" charset="-120"/>
+              </a:rPr>
+              <a:t>Tool 4: AI Policy Landscape Scan (Worksheet) - Use AI Policy Landscape Scan to translate this lesson into a documented public health.</a:t>
+            </a:r>
+            <a:endParaRPr lang="en-US" sz="1460" dirty="0"/>
+          </a:p>
+          <a:p>
+            <a:r>
+              <a:rPr lang="en-US" sz="1460" dirty="0">
+                <a:solidFill>
+                  <a:srgbClr val="17364A"/>
+                </a:solidFill>
+                <a:latin typeface="Aptos" pitchFamily="34" charset="0"/>
+                <a:ea typeface="Aptos" pitchFamily="34" charset="-122"/>
+                <a:cs typeface="Aptos" pitchFamily="34" charset="-120"/>
+              </a:rPr>
+              <a:t>Tool 5: AI Environmental and Resource Impact Review (Checklist) - Use AI Environmental and Resource Impact Review to translate this.</a:t>
+            </a:r>
+            <a:endParaRPr lang="en-US" sz="1460" dirty="0"/>
+          </a:p>
+          <a:p>
+            <a:r>
+              <a:rPr lang="en-US" sz="1460" dirty="0">
+                <a:solidFill>
+                  <a:srgbClr val="17364A"/>
+                </a:solidFill>
+                <a:latin typeface="Aptos" pitchFamily="34" charset="0"/>
+                <a:ea typeface="Aptos" pitchFamily="34" charset="-122"/>
+                <a:cs typeface="Aptos" pitchFamily="34" charset="-120"/>
+              </a:rPr>
+              <a:t>Tool 6: Human-Centered AI Decision Rule Checklist (Checklist) - Use Human-Centered AI Decision Rule Checklist to translate this.</a:t>
+            </a:r>
+            <a:endParaRPr lang="en-US" sz="1460" dirty="0"/>
+          </a:p>
+          <a:p>
+            <a:r>
+              <a:rPr lang="en-US" sz="1460" dirty="0">
+                <a:solidFill>
+                  <a:srgbClr val="17364A"/>
+                </a:solidFill>
+                <a:latin typeface="Aptos" pitchFamily="34" charset="0"/>
+                <a:ea typeface="Aptos" pitchFamily="34" charset="-122"/>
+                <a:cs typeface="Aptos" pitchFamily="34" charset="-120"/>
+              </a:rPr>
+              <a:t>Tool 8: AI Project Charter (Planning) - Use AI Project Charter to translate this lesson into a documented public health AI planning,.</a:t>
+            </a:r>
+            <a:endParaRPr lang="en-US" sz="1460" dirty="0"/>
+          </a:p>
+        </p:txBody>
+      </p:sp>
+      <p:sp>
+        <p:nvSpPr>
+          <p:cNvPr id="9" name="Shape 7"/>
+          <p:cNvSpPr/>
+          <p:nvPr/>
+        </p:nvSpPr>
+        <p:spPr>
+          <a:xfrm>
+            <a:off x="8046720" y="1417320"/>
+            <a:ext cx="3063240" cy="2103120"/>
+          </a:xfrm>
+          <a:prstGeom prst="roundRect">
+            <a:avLst>
+              <a:gd name="adj" fmla="val 5217"/>
+            </a:avLst>
+          </a:prstGeom>
+          <a:solidFill>
+            <a:srgbClr val="EAF6F8"/>
+          </a:solidFill>
+          <a:ln w="12700">
+            <a:solidFill>
+              <a:srgbClr val="B9D7E6"/>
+            </a:solidFill>
+            <a:prstDash val="solid"/>
+          </a:ln>
+        </p:spPr>
+      </p:sp>
+      <p:sp>
+        <p:nvSpPr>
+          <p:cNvPr id="10" name="Text 8"/>
+          <p:cNvSpPr/>
+          <p:nvPr/>
+        </p:nvSpPr>
+        <p:spPr>
+          <a:xfrm>
+            <a:off x="8211312" y="1563624"/>
+            <a:ext cx="2734056" cy="201168"/>
+          </a:xfrm>
+          <a:prstGeom prst="rect">
+            <a:avLst/>
+          </a:prstGeom>
+          <a:noFill/>
+          <a:ln/>
+        </p:spPr>
+        <p:txBody>
+          <a:bodyPr wrap="square" lIns="0" tIns="0" rIns="0" bIns="0" rtlCol="0" anchor="ctr"/>
+          <a:lstStyle/>
+          <a:p>
             <a:pPr indent="0" marL="0">
               <a:buNone/>
             </a:pPr>
             <a:r>
-              <a:rPr lang="en-US" sz="1420" dirty="0">
+              <a:rPr lang="en-US" sz="950" b="1" dirty="0">
+                <a:solidFill>
+                  <a:srgbClr val="0068B7"/>
+                </a:solidFill>
+                <a:latin typeface="Aptos" pitchFamily="34" charset="0"/>
+                <a:ea typeface="Aptos" pitchFamily="34" charset="-122"/>
+                <a:cs typeface="Aptos" pitchFamily="34" charset="-120"/>
+              </a:rPr>
+              <a:t>Use the tools</a:t>
+            </a:r>
+            <a:endParaRPr lang="en-US" sz="950" dirty="0"/>
+          </a:p>
+        </p:txBody>
+      </p:sp>
+      <p:sp>
+        <p:nvSpPr>
+          <p:cNvPr id="11" name="Text 9"/>
+          <p:cNvSpPr/>
+          <p:nvPr/>
+        </p:nvSpPr>
+        <p:spPr>
+          <a:xfrm>
+            <a:off x="8211312" y="1856232"/>
+            <a:ext cx="2734056" cy="1536192"/>
+          </a:xfrm>
+          <a:prstGeom prst="rect">
+            <a:avLst/>
+          </a:prstGeom>
+          <a:noFill/>
+          <a:ln/>
+        </p:spPr>
+        <p:txBody>
+          <a:bodyPr wrap="square" lIns="0" tIns="0" rIns="0" bIns="0" rtlCol="0" anchor="t">
+            <a:normAutofit/>
+          </a:bodyPr>
+          <a:lstStyle/>
+          <a:p>
+            <a:pPr indent="0" marL="0">
+              <a:buNone/>
+            </a:pPr>
+            <a:r>
+              <a:rPr lang="en-US" sz="1250" dirty="0">
                 <a:solidFill>
                   <a:srgbClr val="17364A"/>
                 </a:solidFill>
@@ -6637,9 +11962,116 @@
                 <a:ea typeface="Aptos" pitchFamily="34" charset="-122"/>
                 <a:cs typeface="Aptos" pitchFamily="34" charset="-120"/>
               </a:rPr>
-              <a:t>Record linkage and entity resolution help public health systems determine whether records refer to the same person, provider, facility, address, organization, event, or outbreak. AI tools often rely on linked data even when the linkage process is invisible to users. This module teaches learners how matching and deduplication affect AI outputs, surveillance quality, and equity.</a:t>
-            </a:r>
-            <a:endParaRPr lang="en-US" sz="1420" dirty="0"/>
+              <a:t>Use linked tools when your department needs a structured worksheet, template, checklist, review process, or documentation artifact.</a:t>
+            </a:r>
+            <a:endParaRPr lang="en-US" sz="1250" dirty="0"/>
+          </a:p>
+        </p:txBody>
+      </p:sp>
+      <p:sp>
+        <p:nvSpPr>
+          <p:cNvPr id="12" name="Shape 10"/>
+          <p:cNvSpPr/>
+          <p:nvPr/>
+        </p:nvSpPr>
+        <p:spPr>
+          <a:xfrm>
+            <a:off x="8046720" y="3794760"/>
+            <a:ext cx="3063240" cy="1508760"/>
+          </a:xfrm>
+          <a:prstGeom prst="roundRect">
+            <a:avLst>
+              <a:gd name="adj" fmla="val 7273"/>
+            </a:avLst>
+          </a:prstGeom>
+          <a:solidFill>
+            <a:srgbClr val="EEF8ED"/>
+          </a:solidFill>
+          <a:ln w="12700">
+            <a:solidFill>
+              <a:srgbClr val="B9D7E6"/>
+            </a:solidFill>
+            <a:prstDash val="solid"/>
+          </a:ln>
+        </p:spPr>
+      </p:sp>
+      <p:sp>
+        <p:nvSpPr>
+          <p:cNvPr id="13" name="Text 11"/>
+          <p:cNvSpPr/>
+          <p:nvPr/>
+        </p:nvSpPr>
+        <p:spPr>
+          <a:xfrm>
+            <a:off x="8211312" y="3941064"/>
+            <a:ext cx="2734056" cy="201168"/>
+          </a:xfrm>
+          <a:prstGeom prst="rect">
+            <a:avLst/>
+          </a:prstGeom>
+          <a:noFill/>
+          <a:ln/>
+        </p:spPr>
+        <p:txBody>
+          <a:bodyPr wrap="square" lIns="0" tIns="0" rIns="0" bIns="0" rtlCol="0" anchor="ctr"/>
+          <a:lstStyle/>
+          <a:p>
+            <a:pPr indent="0" marL="0">
+              <a:buNone/>
+            </a:pPr>
+            <a:r>
+              <a:rPr lang="en-US" sz="950" b="1" dirty="0">
+                <a:solidFill>
+                  <a:srgbClr val="0068B7"/>
+                </a:solidFill>
+                <a:latin typeface="Aptos" pitchFamily="34" charset="0"/>
+                <a:ea typeface="Aptos" pitchFamily="34" charset="-122"/>
+                <a:cs typeface="Aptos" pitchFamily="34" charset="-120"/>
+              </a:rPr>
+              <a:t>Avoid duplication</a:t>
+            </a:r>
+            <a:endParaRPr lang="en-US" sz="950" dirty="0"/>
+          </a:p>
+        </p:txBody>
+      </p:sp>
+      <p:sp>
+        <p:nvSpPr>
+          <p:cNvPr id="14" name="Text 12"/>
+          <p:cNvSpPr/>
+          <p:nvPr/>
+        </p:nvSpPr>
+        <p:spPr>
+          <a:xfrm>
+            <a:off x="8211312" y="4233672"/>
+            <a:ext cx="2734056" cy="941832"/>
+          </a:xfrm>
+          <a:prstGeom prst="rect">
+            <a:avLst/>
+          </a:prstGeom>
+          <a:noFill/>
+          <a:ln/>
+        </p:spPr>
+        <p:txBody>
+          <a:bodyPr wrap="square" lIns="0" tIns="0" rIns="0" bIns="0" rtlCol="0" anchor="t">
+            <a:normAutofit/>
+          </a:bodyPr>
+          <a:lstStyle/>
+          <a:p>
+            <a:pPr indent="0" marL="0">
+              <a:buNone/>
+            </a:pPr>
+            <a:r>
+              <a:rPr lang="en-US" sz="1250" dirty="0">
+                <a:solidFill>
+                  <a:srgbClr val="17364A"/>
+                </a:solidFill>
+                <a:latin typeface="Aptos" pitchFamily="34" charset="0"/>
+                <a:ea typeface="Aptos" pitchFamily="34" charset="-122"/>
+                <a:cs typeface="Aptos" pitchFamily="34" charset="-120"/>
+              </a:rPr>
+              <a:t>If your department already has a strong equivalent tool, adapt or use the existing process instead of recreating it.</a:t>
+            </a:r>
+            <a:endParaRPr lang="en-US" sz="1250" dirty="0"/>
           </a:p>
         </p:txBody>
       </p:sp>
@@ -6702,7 +12134,32 @@
       </p:sp>
       <p:sp>
         <p:nvSpPr>
-          <p:cNvPr id="3" name="Text 1"/>
+          <p:cNvPr id="3" name="Shape 1"/>
+          <p:cNvSpPr/>
+          <p:nvPr/>
+        </p:nvSpPr>
+        <p:spPr>
+          <a:xfrm>
+            <a:off x="0" y="164592"/>
+            <a:ext cx="146304" cy="6693408"/>
+          </a:xfrm>
+          <a:prstGeom prst="rect">
+            <a:avLst/>
+          </a:prstGeom>
+          <a:solidFill>
+            <a:srgbClr val="2F8A28"/>
+          </a:solidFill>
+          <a:ln w="12700">
+            <a:solidFill>
+              <a:srgbClr val="2F8A28"/>
+            </a:solidFill>
+            <a:prstDash val="solid"/>
+          </a:ln>
+        </p:spPr>
+      </p:sp>
+      <p:sp>
+        <p:nvSpPr>
+          <p:cNvPr id="4" name="Text 2"/>
           <p:cNvSpPr/>
           <p:nvPr/>
         </p:nvSpPr>
@@ -6741,7 +12198,7 @@
       </p:sp>
       <p:sp>
         <p:nvSpPr>
-          <p:cNvPr id="4" name="Text 2"/>
+          <p:cNvPr id="5" name="Text 3"/>
           <p:cNvSpPr/>
           <p:nvPr/>
         </p:nvSpPr>
@@ -6780,7 +12237,7 @@
       </p:sp>
       <p:sp>
         <p:nvSpPr>
-          <p:cNvPr id="5" name="Text 3"/>
+          <p:cNvPr id="6" name="Text 4"/>
           <p:cNvSpPr/>
           <p:nvPr/>
         </p:nvSpPr>
@@ -6819,13 +12276,77 @@
       </p:sp>
       <p:sp>
         <p:nvSpPr>
-          <p:cNvPr id="6" name="Text 4"/>
+          <p:cNvPr id="7" name="Shape 5"/>
           <p:cNvSpPr/>
           <p:nvPr/>
         </p:nvSpPr>
         <p:spPr>
           <a:xfrm>
             <a:off x="640080" y="658368"/>
+            <a:ext cx="420624" cy="420624"/>
+          </a:xfrm>
+          <a:prstGeom prst="ellipse">
+            <a:avLst/>
+          </a:prstGeom>
+          <a:solidFill>
+            <a:srgbClr val="0068B7"/>
+          </a:solidFill>
+          <a:ln w="12700">
+            <a:solidFill>
+              <a:srgbClr val="0068B7"/>
+            </a:solidFill>
+            <a:prstDash val="solid"/>
+          </a:ln>
+        </p:spPr>
+      </p:sp>
+      <p:sp>
+        <p:nvSpPr>
+          <p:cNvPr id="8" name="Text 6"/>
+          <p:cNvSpPr/>
+          <p:nvPr/>
+        </p:nvSpPr>
+        <p:spPr>
+          <a:xfrm>
+            <a:off x="640080" y="731520"/>
+            <a:ext cx="420624" cy="164592"/>
+          </a:xfrm>
+          <a:prstGeom prst="rect">
+            <a:avLst/>
+          </a:prstGeom>
+          <a:noFill/>
+          <a:ln/>
+        </p:spPr>
+        <p:txBody>
+          <a:bodyPr wrap="square" lIns="0" tIns="0" rIns="0" bIns="0" rtlCol="0" anchor="ctr"/>
+          <a:lstStyle/>
+          <a:p>
+            <a:pPr algn="ctr" indent="0" marL="0">
+              <a:buNone/>
+            </a:pPr>
+            <a:r>
+              <a:rPr lang="en-US" sz="1100" b="1" dirty="0">
+                <a:solidFill>
+                  <a:srgbClr val="FFFFFF"/>
+                </a:solidFill>
+                <a:latin typeface="Aptos" pitchFamily="34" charset="0"/>
+                <a:ea typeface="Aptos" pitchFamily="34" charset="-122"/>
+                <a:cs typeface="Aptos" pitchFamily="34" charset="-120"/>
+              </a:rPr>
+              <a:t>1</a:t>
+            </a:r>
+            <a:endParaRPr lang="en-US" sz="1100" dirty="0"/>
+          </a:p>
+        </p:txBody>
+      </p:sp>
+      <p:sp>
+        <p:nvSpPr>
+          <p:cNvPr id="9" name="Text 7"/>
+          <p:cNvSpPr/>
+          <p:nvPr/>
+        </p:nvSpPr>
+        <p:spPr>
+          <a:xfrm>
+            <a:off x="640080" y="621792"/>
             <a:ext cx="10881360" cy="566928"/>
           </a:xfrm>
           <a:prstGeom prst="rect">
@@ -6852,7 +12373,7 @@
                 <a:ea typeface="Aptos Display" pitchFamily="34" charset="-122"/>
                 <a:cs typeface="Aptos Display" pitchFamily="34" charset="-120"/>
               </a:rPr>
-              <a:t>Why This Topic Matters for Public Health AI</a:t>
+              <a:t>Learning Objectives</a:t>
             </a:r>
             <a:endParaRPr lang="en-US" sz="2700" dirty="0"/>
           </a:p>
@@ -6860,32 +12381,178 @@
       </p:sp>
       <p:sp>
         <p:nvSpPr>
-          <p:cNvPr id="7" name="Text 5"/>
-          <p:cNvSpPr/>
-          <p:nvPr/>
-        </p:nvSpPr>
-        <p:spPr>
-          <a:xfrm>
-            <a:off x="822960" y="1325880"/>
-            <a:ext cx="10378440" cy="4800600"/>
-          </a:xfrm>
-          <a:prstGeom prst="rect">
-            <a:avLst/>
-          </a:prstGeom>
-          <a:noFill/>
-          <a:ln/>
-        </p:spPr>
-        <p:txBody>
-          <a:bodyPr wrap="square" lIns="1016" tIns="1016" rIns="1016" bIns="1016" rtlCol="0" anchor="t">
+          <p:cNvPr id="10" name="Text 8"/>
+          <p:cNvSpPr/>
+          <p:nvPr/>
+        </p:nvSpPr>
+        <p:spPr>
+          <a:xfrm>
+            <a:off x="868680" y="1417320"/>
+            <a:ext cx="6675120" cy="4434840"/>
+          </a:xfrm>
+          <a:prstGeom prst="rect">
+            <a:avLst/>
+          </a:prstGeom>
+          <a:noFill/>
+          <a:ln/>
+        </p:spPr>
+        <p:txBody>
+          <a:bodyPr wrap="square" lIns="635" tIns="635" rIns="635" bIns="635" rtlCol="0" anchor="t">
             <a:normAutofit/>
           </a:bodyPr>
           <a:lstStyle/>
           <a:p>
+            <a:r>
+              <a:rPr lang="en-US" sz="1700" dirty="0">
+                <a:solidFill>
+                  <a:srgbClr val="17364A"/>
+                </a:solidFill>
+                <a:latin typeface="Aptos" pitchFamily="34" charset="0"/>
+                <a:ea typeface="Aptos" pitchFamily="34" charset="-122"/>
+                <a:cs typeface="Aptos" pitchFamily="34" charset="-120"/>
+              </a:rPr>
+              <a:t>Explain why record linkage matters for public health AI.</a:t>
+            </a:r>
+            <a:endParaRPr lang="en-US" sz="1700" dirty="0"/>
+          </a:p>
+          <a:p>
+            <a:r>
+              <a:rPr lang="en-US" sz="1700" dirty="0">
+                <a:solidFill>
+                  <a:srgbClr val="17364A"/>
+                </a:solidFill>
+                <a:latin typeface="Aptos" pitchFamily="34" charset="0"/>
+                <a:ea typeface="Aptos" pitchFamily="34" charset="-122"/>
+                <a:cs typeface="Aptos" pitchFamily="34" charset="-120"/>
+              </a:rPr>
+              <a:t>Distinguish between deterministic matching, probabilistic matching, entity resolution, and deduplication.</a:t>
+            </a:r>
+            <a:endParaRPr lang="en-US" sz="1700" dirty="0"/>
+          </a:p>
+          <a:p>
+            <a:r>
+              <a:rPr lang="en-US" sz="1700" dirty="0">
+                <a:solidFill>
+                  <a:srgbClr val="17364A"/>
+                </a:solidFill>
+                <a:latin typeface="Aptos" pitchFamily="34" charset="0"/>
+                <a:ea typeface="Aptos" pitchFamily="34" charset="-122"/>
+                <a:cs typeface="Aptos" pitchFamily="34" charset="-120"/>
+              </a:rPr>
+              <a:t>Identify risks from false matches and missed matches.</a:t>
+            </a:r>
+            <a:endParaRPr lang="en-US" sz="1700" dirty="0"/>
+          </a:p>
+          <a:p>
+            <a:r>
+              <a:rPr lang="en-US" sz="1700" dirty="0">
+                <a:solidFill>
+                  <a:srgbClr val="17364A"/>
+                </a:solidFill>
+                <a:latin typeface="Aptos" pitchFamily="34" charset="0"/>
+                <a:ea typeface="Aptos" pitchFamily="34" charset="-122"/>
+                <a:cs typeface="Aptos" pitchFamily="34" charset="-120"/>
+              </a:rPr>
+              <a:t>Describe how thresholds, clerical review, and data quality affect matching.</a:t>
+            </a:r>
+            <a:endParaRPr lang="en-US" sz="1700" dirty="0"/>
+          </a:p>
+        </p:txBody>
+      </p:sp>
+      <p:sp>
+        <p:nvSpPr>
+          <p:cNvPr id="11" name="Shape 9"/>
+          <p:cNvSpPr/>
+          <p:nvPr/>
+        </p:nvSpPr>
+        <p:spPr>
+          <a:xfrm>
+            <a:off x="7909560" y="1417320"/>
+            <a:ext cx="3154680" cy="1828800"/>
+          </a:xfrm>
+          <a:prstGeom prst="roundRect">
+            <a:avLst>
+              <a:gd name="adj" fmla="val 6000"/>
+            </a:avLst>
+          </a:prstGeom>
+          <a:solidFill>
+            <a:srgbClr val="EEF8ED"/>
+          </a:solidFill>
+          <a:ln w="12700">
+            <a:solidFill>
+              <a:srgbClr val="B9D7E6"/>
+            </a:solidFill>
+            <a:prstDash val="solid"/>
+          </a:ln>
+        </p:spPr>
+      </p:sp>
+      <p:sp>
+        <p:nvSpPr>
+          <p:cNvPr id="12" name="Text 10"/>
+          <p:cNvSpPr/>
+          <p:nvPr/>
+        </p:nvSpPr>
+        <p:spPr>
+          <a:xfrm>
+            <a:off x="8074152" y="1563624"/>
+            <a:ext cx="2825496" cy="201168"/>
+          </a:xfrm>
+          <a:prstGeom prst="rect">
+            <a:avLst/>
+          </a:prstGeom>
+          <a:noFill/>
+          <a:ln/>
+        </p:spPr>
+        <p:txBody>
+          <a:bodyPr wrap="square" lIns="0" tIns="0" rIns="0" bIns="0" rtlCol="0" anchor="ctr"/>
+          <a:lstStyle/>
+          <a:p>
             <a:pPr indent="0" marL="0">
               <a:buNone/>
             </a:pPr>
             <a:r>
-              <a:rPr lang="en-US" sz="1420" dirty="0">
+              <a:rPr lang="en-US" sz="950" b="1" dirty="0">
+                <a:solidFill>
+                  <a:srgbClr val="0068B7"/>
+                </a:solidFill>
+                <a:latin typeface="Aptos" pitchFamily="34" charset="0"/>
+                <a:ea typeface="Aptos" pitchFamily="34" charset="-122"/>
+                <a:cs typeface="Aptos" pitchFamily="34" charset="-120"/>
+              </a:rPr>
+              <a:t>Key idea</a:t>
+            </a:r>
+            <a:endParaRPr lang="en-US" sz="950" dirty="0"/>
+          </a:p>
+        </p:txBody>
+      </p:sp>
+      <p:sp>
+        <p:nvSpPr>
+          <p:cNvPr id="13" name="Text 11"/>
+          <p:cNvSpPr/>
+          <p:nvPr/>
+        </p:nvSpPr>
+        <p:spPr>
+          <a:xfrm>
+            <a:off x="8074152" y="1856232"/>
+            <a:ext cx="2825496" cy="1261872"/>
+          </a:xfrm>
+          <a:prstGeom prst="rect">
+            <a:avLst/>
+          </a:prstGeom>
+          <a:noFill/>
+          <a:ln/>
+        </p:spPr>
+        <p:txBody>
+          <a:bodyPr wrap="square" lIns="0" tIns="0" rIns="0" bIns="0" rtlCol="0" anchor="t">
+            <a:normAutofit/>
+          </a:bodyPr>
+          <a:lstStyle/>
+          <a:p>
+            <a:pPr indent="0" marL="0">
+              <a:buNone/>
+            </a:pPr>
+            <a:r>
+              <a:rPr lang="en-US" sz="1250" dirty="0">
                 <a:solidFill>
                   <a:srgbClr val="17364A"/>
                 </a:solidFill>
@@ -6893,9 +12560,116 @@
                 <a:ea typeface="Aptos" pitchFamily="34" charset="-122"/>
                 <a:cs typeface="Aptos" pitchFamily="34" charset="-120"/>
               </a:rPr>
-              <a:t>Record linkage matters because public health work often depends on combining information across systems. A surveillance system may need to associate a lab report with an existing case. An IIS may need to match vaccination records from multiple providers. A vital records linkage may support maternal and child health analysis. An AI tool using these linked records may summarize history, predict risk, classify cases, or identify duplicates. If linkage is wrong, the AI output may be wrong. False matches and missed matches have different consequences. A false match can combine information from different people or events, creating privacy, safety, and accuracy risks. A missed match can split one person or event into multiple records, leading to duplicate work, incomplete histories, or undercounting. Both errors can affect public health decisions. Linkage can also create equity risks. Names, addresses, phone numbers, language, housing status, migration patterns, and documentation practices vary across communities. Matching rules that work well for one population may perform poorly for another. AI workflows that rely on linked data should therefore include subgroup and equity review.</a:t>
-            </a:r>
-            <a:endParaRPr lang="en-US" sz="1420" dirty="0"/>
+              <a:t>Explain why record linkage matters for public health AI.</a:t>
+            </a:r>
+            <a:endParaRPr lang="en-US" sz="1250" dirty="0"/>
+          </a:p>
+        </p:txBody>
+      </p:sp>
+      <p:sp>
+        <p:nvSpPr>
+          <p:cNvPr id="14" name="Shape 12"/>
+          <p:cNvSpPr/>
+          <p:nvPr/>
+        </p:nvSpPr>
+        <p:spPr>
+          <a:xfrm>
+            <a:off x="7909560" y="3520440"/>
+            <a:ext cx="3154680" cy="1737360"/>
+          </a:xfrm>
+          <a:prstGeom prst="roundRect">
+            <a:avLst>
+              <a:gd name="adj" fmla="val 6316"/>
+            </a:avLst>
+          </a:prstGeom>
+          <a:solidFill>
+            <a:srgbClr val="EAF6F8"/>
+          </a:solidFill>
+          <a:ln w="12700">
+            <a:solidFill>
+              <a:srgbClr val="B9D7E6"/>
+            </a:solidFill>
+            <a:prstDash val="solid"/>
+          </a:ln>
+        </p:spPr>
+      </p:sp>
+      <p:sp>
+        <p:nvSpPr>
+          <p:cNvPr id="15" name="Text 13"/>
+          <p:cNvSpPr/>
+          <p:nvPr/>
+        </p:nvSpPr>
+        <p:spPr>
+          <a:xfrm>
+            <a:off x="8074152" y="3666744"/>
+            <a:ext cx="2825496" cy="201168"/>
+          </a:xfrm>
+          <a:prstGeom prst="rect">
+            <a:avLst/>
+          </a:prstGeom>
+          <a:noFill/>
+          <a:ln/>
+        </p:spPr>
+        <p:txBody>
+          <a:bodyPr wrap="square" lIns="0" tIns="0" rIns="0" bIns="0" rtlCol="0" anchor="ctr"/>
+          <a:lstStyle/>
+          <a:p>
+            <a:pPr indent="0" marL="0">
+              <a:buNone/>
+            </a:pPr>
+            <a:r>
+              <a:rPr lang="en-US" sz="950" b="1" dirty="0">
+                <a:solidFill>
+                  <a:srgbClr val="0068B7"/>
+                </a:solidFill>
+                <a:latin typeface="Aptos" pitchFamily="34" charset="0"/>
+                <a:ea typeface="Aptos" pitchFamily="34" charset="-122"/>
+                <a:cs typeface="Aptos" pitchFamily="34" charset="-120"/>
+              </a:rPr>
+              <a:t>Use this for</a:t>
+            </a:r>
+            <a:endParaRPr lang="en-US" sz="950" dirty="0"/>
+          </a:p>
+        </p:txBody>
+      </p:sp>
+      <p:sp>
+        <p:nvSpPr>
+          <p:cNvPr id="16" name="Text 14"/>
+          <p:cNvSpPr/>
+          <p:nvPr/>
+        </p:nvSpPr>
+        <p:spPr>
+          <a:xfrm>
+            <a:off x="8074152" y="3959352"/>
+            <a:ext cx="2825496" cy="1170432"/>
+          </a:xfrm>
+          <a:prstGeom prst="rect">
+            <a:avLst/>
+          </a:prstGeom>
+          <a:noFill/>
+          <a:ln/>
+        </p:spPr>
+        <p:txBody>
+          <a:bodyPr wrap="square" lIns="0" tIns="0" rIns="0" bIns="0" rtlCol="0" anchor="t">
+            <a:normAutofit/>
+          </a:bodyPr>
+          <a:lstStyle/>
+          <a:p>
+            <a:pPr indent="0" marL="0">
+              <a:buNone/>
+            </a:pPr>
+            <a:r>
+              <a:rPr lang="en-US" sz="1250" dirty="0">
+                <a:solidFill>
+                  <a:srgbClr val="17364A"/>
+                </a:solidFill>
+                <a:latin typeface="Aptos" pitchFamily="34" charset="0"/>
+                <a:ea typeface="Aptos" pitchFamily="34" charset="-122"/>
+                <a:cs typeface="Aptos" pitchFamily="34" charset="-120"/>
+              </a:rPr>
+              <a:t>Connect the concept to public health decisions, safeguards, documentation, or implementation work.</a:t>
+            </a:r>
+            <a:endParaRPr lang="en-US" sz="1250" dirty="0"/>
           </a:p>
         </p:txBody>
       </p:sp>
@@ -6958,7 +12732,32 @@
       </p:sp>
       <p:sp>
         <p:nvSpPr>
-          <p:cNvPr id="3" name="Text 1"/>
+          <p:cNvPr id="3" name="Shape 1"/>
+          <p:cNvSpPr/>
+          <p:nvPr/>
+        </p:nvSpPr>
+        <p:spPr>
+          <a:xfrm>
+            <a:off x="0" y="164592"/>
+            <a:ext cx="146304" cy="6693408"/>
+          </a:xfrm>
+          <a:prstGeom prst="rect">
+            <a:avLst/>
+          </a:prstGeom>
+          <a:solidFill>
+            <a:srgbClr val="2F8A28"/>
+          </a:solidFill>
+          <a:ln w="12700">
+            <a:solidFill>
+              <a:srgbClr val="2F8A28"/>
+            </a:solidFill>
+            <a:prstDash val="solid"/>
+          </a:ln>
+        </p:spPr>
+      </p:sp>
+      <p:sp>
+        <p:nvSpPr>
+          <p:cNvPr id="4" name="Text 2"/>
           <p:cNvSpPr/>
           <p:nvPr/>
         </p:nvSpPr>
@@ -6997,7 +12796,7 @@
       </p:sp>
       <p:sp>
         <p:nvSpPr>
-          <p:cNvPr id="4" name="Text 2"/>
+          <p:cNvPr id="5" name="Text 3"/>
           <p:cNvSpPr/>
           <p:nvPr/>
         </p:nvSpPr>
@@ -7036,7 +12835,7 @@
       </p:sp>
       <p:sp>
         <p:nvSpPr>
-          <p:cNvPr id="5" name="Text 3"/>
+          <p:cNvPr id="6" name="Text 4"/>
           <p:cNvSpPr/>
           <p:nvPr/>
         </p:nvSpPr>
@@ -7075,13 +12874,77 @@
       </p:sp>
       <p:sp>
         <p:nvSpPr>
-          <p:cNvPr id="6" name="Text 4"/>
+          <p:cNvPr id="7" name="Shape 5"/>
           <p:cNvSpPr/>
           <p:nvPr/>
         </p:nvSpPr>
         <p:spPr>
           <a:xfrm>
             <a:off x="640080" y="658368"/>
+            <a:ext cx="420624" cy="420624"/>
+          </a:xfrm>
+          <a:prstGeom prst="ellipse">
+            <a:avLst/>
+          </a:prstGeom>
+          <a:solidFill>
+            <a:srgbClr val="0068B7"/>
+          </a:solidFill>
+          <a:ln w="12700">
+            <a:solidFill>
+              <a:srgbClr val="0068B7"/>
+            </a:solidFill>
+            <a:prstDash val="solid"/>
+          </a:ln>
+        </p:spPr>
+      </p:sp>
+      <p:sp>
+        <p:nvSpPr>
+          <p:cNvPr id="8" name="Text 6"/>
+          <p:cNvSpPr/>
+          <p:nvPr/>
+        </p:nvSpPr>
+        <p:spPr>
+          <a:xfrm>
+            <a:off x="640080" y="731520"/>
+            <a:ext cx="420624" cy="164592"/>
+          </a:xfrm>
+          <a:prstGeom prst="rect">
+            <a:avLst/>
+          </a:prstGeom>
+          <a:noFill/>
+          <a:ln/>
+        </p:spPr>
+        <p:txBody>
+          <a:bodyPr wrap="square" lIns="0" tIns="0" rIns="0" bIns="0" rtlCol="0" anchor="ctr"/>
+          <a:lstStyle/>
+          <a:p>
+            <a:pPr algn="ctr" indent="0" marL="0">
+              <a:buNone/>
+            </a:pPr>
+            <a:r>
+              <a:rPr lang="en-US" sz="1100" b="1" dirty="0">
+                <a:solidFill>
+                  <a:srgbClr val="FFFFFF"/>
+                </a:solidFill>
+                <a:latin typeface="Aptos" pitchFamily="34" charset="0"/>
+                <a:ea typeface="Aptos" pitchFamily="34" charset="-122"/>
+                <a:cs typeface="Aptos" pitchFamily="34" charset="-120"/>
+              </a:rPr>
+              <a:t>2</a:t>
+            </a:r>
+            <a:endParaRPr lang="en-US" sz="1100" dirty="0"/>
+          </a:p>
+        </p:txBody>
+      </p:sp>
+      <p:sp>
+        <p:nvSpPr>
+          <p:cNvPr id="9" name="Text 7"/>
+          <p:cNvSpPr/>
+          <p:nvPr/>
+        </p:nvSpPr>
+        <p:spPr>
+          <a:xfrm>
+            <a:off x="640080" y="621792"/>
             <a:ext cx="10881360" cy="566928"/>
           </a:xfrm>
           <a:prstGeom prst="rect">
@@ -7108,7 +12971,7 @@
                 <a:ea typeface="Aptos Display" pitchFamily="34" charset="-122"/>
                 <a:cs typeface="Aptos Display" pitchFamily="34" charset="-120"/>
               </a:rPr>
-              <a:t>Core Concepts</a:t>
+              <a:t>Module Overview</a:t>
             </a:r>
             <a:endParaRPr lang="en-US" sz="2700" dirty="0"/>
           </a:p>
@@ -7116,32 +12979,164 @@
       </p:sp>
       <p:sp>
         <p:nvSpPr>
-          <p:cNvPr id="7" name="Text 5"/>
-          <p:cNvSpPr/>
-          <p:nvPr/>
-        </p:nvSpPr>
-        <p:spPr>
-          <a:xfrm>
-            <a:off x="822960" y="1325880"/>
-            <a:ext cx="10378440" cy="4800600"/>
-          </a:xfrm>
-          <a:prstGeom prst="rect">
-            <a:avLst/>
-          </a:prstGeom>
-          <a:noFill/>
-          <a:ln/>
-        </p:spPr>
-        <p:txBody>
-          <a:bodyPr wrap="square" lIns="1016" tIns="1016" rIns="1016" bIns="1016" rtlCol="0" anchor="t">
+          <p:cNvPr id="10" name="Text 8"/>
+          <p:cNvSpPr/>
+          <p:nvPr/>
+        </p:nvSpPr>
+        <p:spPr>
+          <a:xfrm>
+            <a:off x="868680" y="1417320"/>
+            <a:ext cx="6675120" cy="4434840"/>
+          </a:xfrm>
+          <a:prstGeom prst="rect">
+            <a:avLst/>
+          </a:prstGeom>
+          <a:noFill/>
+          <a:ln/>
+        </p:spPr>
+        <p:txBody>
+          <a:bodyPr wrap="square" lIns="635" tIns="635" rIns="635" bIns="635" rtlCol="0" anchor="t">
             <a:normAutofit/>
           </a:bodyPr>
           <a:lstStyle/>
           <a:p>
+            <a:r>
+              <a:rPr lang="en-US" sz="1700" dirty="0">
+                <a:solidFill>
+                  <a:srgbClr val="17364A"/>
+                </a:solidFill>
+                <a:latin typeface="Aptos" pitchFamily="34" charset="0"/>
+                <a:ea typeface="Aptos" pitchFamily="34" charset="-122"/>
+                <a:cs typeface="Aptos" pitchFamily="34" charset="-120"/>
+              </a:rPr>
+              <a:t>Record linkage and entity resolution help public health systems determine whether records refer to the same person,.</a:t>
+            </a:r>
+            <a:endParaRPr lang="en-US" sz="1700" dirty="0"/>
+          </a:p>
+          <a:p>
+            <a:r>
+              <a:rPr lang="en-US" sz="1700" dirty="0">
+                <a:solidFill>
+                  <a:srgbClr val="17364A"/>
+                </a:solidFill>
+                <a:latin typeface="Aptos" pitchFamily="34" charset="0"/>
+                <a:ea typeface="Aptos" pitchFamily="34" charset="-122"/>
+                <a:cs typeface="Aptos" pitchFamily="34" charset="-120"/>
+              </a:rPr>
+              <a:t>AI tools often rely on linked data even when the linkage process is invisible to users.</a:t>
+            </a:r>
+            <a:endParaRPr lang="en-US" sz="1700" dirty="0"/>
+          </a:p>
+          <a:p>
+            <a:r>
+              <a:rPr lang="en-US" sz="1700" dirty="0">
+                <a:solidFill>
+                  <a:srgbClr val="17364A"/>
+                </a:solidFill>
+                <a:latin typeface="Aptos" pitchFamily="34" charset="0"/>
+                <a:ea typeface="Aptos" pitchFamily="34" charset="-122"/>
+                <a:cs typeface="Aptos" pitchFamily="34" charset="-120"/>
+              </a:rPr>
+              <a:t>This module teaches learners how matching and deduplication affect AI outputs, surveillance quality, and equity.</a:t>
+            </a:r>
+            <a:endParaRPr lang="en-US" sz="1700" dirty="0"/>
+          </a:p>
+        </p:txBody>
+      </p:sp>
+      <p:sp>
+        <p:nvSpPr>
+          <p:cNvPr id="11" name="Shape 9"/>
+          <p:cNvSpPr/>
+          <p:nvPr/>
+        </p:nvSpPr>
+        <p:spPr>
+          <a:xfrm>
+            <a:off x="7909560" y="1417320"/>
+            <a:ext cx="3154680" cy="1828800"/>
+          </a:xfrm>
+          <a:prstGeom prst="roundRect">
+            <a:avLst>
+              <a:gd name="adj" fmla="val 6000"/>
+            </a:avLst>
+          </a:prstGeom>
+          <a:solidFill>
+            <a:srgbClr val="EEF8ED"/>
+          </a:solidFill>
+          <a:ln w="12700">
+            <a:solidFill>
+              <a:srgbClr val="B9D7E6"/>
+            </a:solidFill>
+            <a:prstDash val="solid"/>
+          </a:ln>
+        </p:spPr>
+      </p:sp>
+      <p:sp>
+        <p:nvSpPr>
+          <p:cNvPr id="12" name="Text 10"/>
+          <p:cNvSpPr/>
+          <p:nvPr/>
+        </p:nvSpPr>
+        <p:spPr>
+          <a:xfrm>
+            <a:off x="8074152" y="1563624"/>
+            <a:ext cx="2825496" cy="201168"/>
+          </a:xfrm>
+          <a:prstGeom prst="rect">
+            <a:avLst/>
+          </a:prstGeom>
+          <a:noFill/>
+          <a:ln/>
+        </p:spPr>
+        <p:txBody>
+          <a:bodyPr wrap="square" lIns="0" tIns="0" rIns="0" bIns="0" rtlCol="0" anchor="ctr"/>
+          <a:lstStyle/>
+          <a:p>
             <a:pPr indent="0" marL="0">
               <a:buNone/>
             </a:pPr>
             <a:r>
-              <a:rPr lang="en-US" sz="1420" dirty="0">
+              <a:rPr lang="en-US" sz="950" b="1" dirty="0">
+                <a:solidFill>
+                  <a:srgbClr val="0068B7"/>
+                </a:solidFill>
+                <a:latin typeface="Aptos" pitchFamily="34" charset="0"/>
+                <a:ea typeface="Aptos" pitchFamily="34" charset="-122"/>
+                <a:cs typeface="Aptos" pitchFamily="34" charset="-120"/>
+              </a:rPr>
+              <a:t>Key idea</a:t>
+            </a:r>
+            <a:endParaRPr lang="en-US" sz="950" dirty="0"/>
+          </a:p>
+        </p:txBody>
+      </p:sp>
+      <p:sp>
+        <p:nvSpPr>
+          <p:cNvPr id="13" name="Text 11"/>
+          <p:cNvSpPr/>
+          <p:nvPr/>
+        </p:nvSpPr>
+        <p:spPr>
+          <a:xfrm>
+            <a:off x="8074152" y="1856232"/>
+            <a:ext cx="2825496" cy="1261872"/>
+          </a:xfrm>
+          <a:prstGeom prst="rect">
+            <a:avLst/>
+          </a:prstGeom>
+          <a:noFill/>
+          <a:ln/>
+        </p:spPr>
+        <p:txBody>
+          <a:bodyPr wrap="square" lIns="0" tIns="0" rIns="0" bIns="0" rtlCol="0" anchor="t">
+            <a:normAutofit/>
+          </a:bodyPr>
+          <a:lstStyle/>
+          <a:p>
+            <a:pPr indent="0" marL="0">
+              <a:buNone/>
+            </a:pPr>
+            <a:r>
+              <a:rPr lang="en-US" sz="1250" dirty="0">
                 <a:solidFill>
                   <a:srgbClr val="17364A"/>
                 </a:solidFill>
@@ -7149,9 +13144,116 @@
                 <a:ea typeface="Aptos" pitchFamily="34" charset="-122"/>
                 <a:cs typeface="Aptos" pitchFamily="34" charset="-120"/>
               </a:rPr>
-              <a:t>Record linkage. Record linkage is the process of determining whether records from one or more sources refer to the same entity. The entity may be a person, provider, facility, address, organization, event, or outbreak. Entity resolution. Entity resolution is the broader process of identifying, matching, merging, separating, and managing records about the same entity. It includes matching rules, thresholds, review processes, and stewardship. Deterministic matching. Deterministic matching uses exact or rule-based agreement across selected fields. It is easier to explain but may miss matches when fields are incomplete or inconsistent.</a:t>
-            </a:r>
-            <a:endParaRPr lang="en-US" sz="1420" dirty="0"/>
+              <a:t>Record linkage and entity resolution help public health systems determine whether records refer to the same person,.</a:t>
+            </a:r>
+            <a:endParaRPr lang="en-US" sz="1250" dirty="0"/>
+          </a:p>
+        </p:txBody>
+      </p:sp>
+      <p:sp>
+        <p:nvSpPr>
+          <p:cNvPr id="14" name="Shape 12"/>
+          <p:cNvSpPr/>
+          <p:nvPr/>
+        </p:nvSpPr>
+        <p:spPr>
+          <a:xfrm>
+            <a:off x="7909560" y="3520440"/>
+            <a:ext cx="3154680" cy="1737360"/>
+          </a:xfrm>
+          <a:prstGeom prst="roundRect">
+            <a:avLst>
+              <a:gd name="adj" fmla="val 6316"/>
+            </a:avLst>
+          </a:prstGeom>
+          <a:solidFill>
+            <a:srgbClr val="EAF6F8"/>
+          </a:solidFill>
+          <a:ln w="12700">
+            <a:solidFill>
+              <a:srgbClr val="B9D7E6"/>
+            </a:solidFill>
+            <a:prstDash val="solid"/>
+          </a:ln>
+        </p:spPr>
+      </p:sp>
+      <p:sp>
+        <p:nvSpPr>
+          <p:cNvPr id="15" name="Text 13"/>
+          <p:cNvSpPr/>
+          <p:nvPr/>
+        </p:nvSpPr>
+        <p:spPr>
+          <a:xfrm>
+            <a:off x="8074152" y="3666744"/>
+            <a:ext cx="2825496" cy="201168"/>
+          </a:xfrm>
+          <a:prstGeom prst="rect">
+            <a:avLst/>
+          </a:prstGeom>
+          <a:noFill/>
+          <a:ln/>
+        </p:spPr>
+        <p:txBody>
+          <a:bodyPr wrap="square" lIns="0" tIns="0" rIns="0" bIns="0" rtlCol="0" anchor="ctr"/>
+          <a:lstStyle/>
+          <a:p>
+            <a:pPr indent="0" marL="0">
+              <a:buNone/>
+            </a:pPr>
+            <a:r>
+              <a:rPr lang="en-US" sz="950" b="1" dirty="0">
+                <a:solidFill>
+                  <a:srgbClr val="0068B7"/>
+                </a:solidFill>
+                <a:latin typeface="Aptos" pitchFamily="34" charset="0"/>
+                <a:ea typeface="Aptos" pitchFamily="34" charset="-122"/>
+                <a:cs typeface="Aptos" pitchFamily="34" charset="-120"/>
+              </a:rPr>
+              <a:t>Use this for</a:t>
+            </a:r>
+            <a:endParaRPr lang="en-US" sz="950" dirty="0"/>
+          </a:p>
+        </p:txBody>
+      </p:sp>
+      <p:sp>
+        <p:nvSpPr>
+          <p:cNvPr id="16" name="Text 14"/>
+          <p:cNvSpPr/>
+          <p:nvPr/>
+        </p:nvSpPr>
+        <p:spPr>
+          <a:xfrm>
+            <a:off x="8074152" y="3959352"/>
+            <a:ext cx="2825496" cy="1170432"/>
+          </a:xfrm>
+          <a:prstGeom prst="rect">
+            <a:avLst/>
+          </a:prstGeom>
+          <a:noFill/>
+          <a:ln/>
+        </p:spPr>
+        <p:txBody>
+          <a:bodyPr wrap="square" lIns="0" tIns="0" rIns="0" bIns="0" rtlCol="0" anchor="t">
+            <a:normAutofit/>
+          </a:bodyPr>
+          <a:lstStyle/>
+          <a:p>
+            <a:pPr indent="0" marL="0">
+              <a:buNone/>
+            </a:pPr>
+            <a:r>
+              <a:rPr lang="en-US" sz="1250" dirty="0">
+                <a:solidFill>
+                  <a:srgbClr val="17364A"/>
+                </a:solidFill>
+                <a:latin typeface="Aptos" pitchFamily="34" charset="0"/>
+                <a:ea typeface="Aptos" pitchFamily="34" charset="-122"/>
+                <a:cs typeface="Aptos" pitchFamily="34" charset="-120"/>
+              </a:rPr>
+              <a:t>Connect the concept to public health decisions, safeguards, documentation, or implementation work.</a:t>
+            </a:r>
+            <a:endParaRPr lang="en-US" sz="1250" dirty="0"/>
           </a:p>
         </p:txBody>
       </p:sp>
@@ -7214,7 +13316,32 @@
       </p:sp>
       <p:sp>
         <p:nvSpPr>
-          <p:cNvPr id="3" name="Text 1"/>
+          <p:cNvPr id="3" name="Shape 1"/>
+          <p:cNvSpPr/>
+          <p:nvPr/>
+        </p:nvSpPr>
+        <p:spPr>
+          <a:xfrm>
+            <a:off x="0" y="164592"/>
+            <a:ext cx="146304" cy="6693408"/>
+          </a:xfrm>
+          <a:prstGeom prst="rect">
+            <a:avLst/>
+          </a:prstGeom>
+          <a:solidFill>
+            <a:srgbClr val="2F8A28"/>
+          </a:solidFill>
+          <a:ln w="12700">
+            <a:solidFill>
+              <a:srgbClr val="2F8A28"/>
+            </a:solidFill>
+            <a:prstDash val="solid"/>
+          </a:ln>
+        </p:spPr>
+      </p:sp>
+      <p:sp>
+        <p:nvSpPr>
+          <p:cNvPr id="4" name="Text 2"/>
           <p:cNvSpPr/>
           <p:nvPr/>
         </p:nvSpPr>
@@ -7253,7 +13380,7 @@
       </p:sp>
       <p:sp>
         <p:nvSpPr>
-          <p:cNvPr id="4" name="Text 2"/>
+          <p:cNvPr id="5" name="Text 3"/>
           <p:cNvSpPr/>
           <p:nvPr/>
         </p:nvSpPr>
@@ -7292,7 +13419,7 @@
       </p:sp>
       <p:sp>
         <p:nvSpPr>
-          <p:cNvPr id="5" name="Text 3"/>
+          <p:cNvPr id="6" name="Text 4"/>
           <p:cNvSpPr/>
           <p:nvPr/>
         </p:nvSpPr>
@@ -7331,13 +13458,77 @@
       </p:sp>
       <p:sp>
         <p:nvSpPr>
-          <p:cNvPr id="6" name="Text 4"/>
+          <p:cNvPr id="7" name="Shape 5"/>
           <p:cNvSpPr/>
           <p:nvPr/>
         </p:nvSpPr>
         <p:spPr>
           <a:xfrm>
             <a:off x="640080" y="658368"/>
+            <a:ext cx="420624" cy="420624"/>
+          </a:xfrm>
+          <a:prstGeom prst="ellipse">
+            <a:avLst/>
+          </a:prstGeom>
+          <a:solidFill>
+            <a:srgbClr val="0068B7"/>
+          </a:solidFill>
+          <a:ln w="12700">
+            <a:solidFill>
+              <a:srgbClr val="0068B7"/>
+            </a:solidFill>
+            <a:prstDash val="solid"/>
+          </a:ln>
+        </p:spPr>
+      </p:sp>
+      <p:sp>
+        <p:nvSpPr>
+          <p:cNvPr id="8" name="Text 6"/>
+          <p:cNvSpPr/>
+          <p:nvPr/>
+        </p:nvSpPr>
+        <p:spPr>
+          <a:xfrm>
+            <a:off x="640080" y="731520"/>
+            <a:ext cx="420624" cy="164592"/>
+          </a:xfrm>
+          <a:prstGeom prst="rect">
+            <a:avLst/>
+          </a:prstGeom>
+          <a:noFill/>
+          <a:ln/>
+        </p:spPr>
+        <p:txBody>
+          <a:bodyPr wrap="square" lIns="0" tIns="0" rIns="0" bIns="0" rtlCol="0" anchor="ctr"/>
+          <a:lstStyle/>
+          <a:p>
+            <a:pPr algn="ctr" indent="0" marL="0">
+              <a:buNone/>
+            </a:pPr>
+            <a:r>
+              <a:rPr lang="en-US" sz="1100" b="1" dirty="0">
+                <a:solidFill>
+                  <a:srgbClr val="FFFFFF"/>
+                </a:solidFill>
+                <a:latin typeface="Aptos" pitchFamily="34" charset="0"/>
+                <a:ea typeface="Aptos" pitchFamily="34" charset="-122"/>
+                <a:cs typeface="Aptos" pitchFamily="34" charset="-120"/>
+              </a:rPr>
+              <a:t>3</a:t>
+            </a:r>
+            <a:endParaRPr lang="en-US" sz="1100" dirty="0"/>
+          </a:p>
+        </p:txBody>
+      </p:sp>
+      <p:sp>
+        <p:nvSpPr>
+          <p:cNvPr id="9" name="Text 7"/>
+          <p:cNvSpPr/>
+          <p:nvPr/>
+        </p:nvSpPr>
+        <p:spPr>
+          <a:xfrm>
+            <a:off x="640080" y="621792"/>
             <a:ext cx="10881360" cy="566928"/>
           </a:xfrm>
           <a:prstGeom prst="rect">
@@ -7364,7 +13555,7 @@
                 <a:ea typeface="Aptos Display" pitchFamily="34" charset="-122"/>
                 <a:cs typeface="Aptos Display" pitchFamily="34" charset="-120"/>
               </a:rPr>
-              <a:t>Core Concepts Continued</a:t>
+              <a:t>Why This Topic Matters for Public Health AI</a:t>
             </a:r>
             <a:endParaRPr lang="en-US" sz="2700" dirty="0"/>
           </a:p>
@@ -7372,32 +13563,178 @@
       </p:sp>
       <p:sp>
         <p:nvSpPr>
-          <p:cNvPr id="7" name="Text 5"/>
-          <p:cNvSpPr/>
-          <p:nvPr/>
-        </p:nvSpPr>
-        <p:spPr>
-          <a:xfrm>
-            <a:off x="822960" y="1325880"/>
-            <a:ext cx="10378440" cy="4800600"/>
-          </a:xfrm>
-          <a:prstGeom prst="rect">
-            <a:avLst/>
-          </a:prstGeom>
-          <a:noFill/>
-          <a:ln/>
-        </p:spPr>
-        <p:txBody>
-          <a:bodyPr wrap="square" lIns="1016" tIns="1016" rIns="1016" bIns="1016" rtlCol="0" anchor="t">
+          <p:cNvPr id="10" name="Text 8"/>
+          <p:cNvSpPr/>
+          <p:nvPr/>
+        </p:nvSpPr>
+        <p:spPr>
+          <a:xfrm>
+            <a:off x="868680" y="1417320"/>
+            <a:ext cx="6675120" cy="4434840"/>
+          </a:xfrm>
+          <a:prstGeom prst="rect">
+            <a:avLst/>
+          </a:prstGeom>
+          <a:noFill/>
+          <a:ln/>
+        </p:spPr>
+        <p:txBody>
+          <a:bodyPr wrap="square" lIns="635" tIns="635" rIns="635" bIns="635" rtlCol="0" anchor="t">
             <a:normAutofit/>
           </a:bodyPr>
           <a:lstStyle/>
           <a:p>
+            <a:r>
+              <a:rPr lang="en-US" sz="1700" dirty="0">
+                <a:solidFill>
+                  <a:srgbClr val="17364A"/>
+                </a:solidFill>
+                <a:latin typeface="Aptos" pitchFamily="34" charset="0"/>
+                <a:ea typeface="Aptos" pitchFamily="34" charset="-122"/>
+                <a:cs typeface="Aptos" pitchFamily="34" charset="-120"/>
+              </a:rPr>
+              <a:t>Record linkage matters because public health work often depends on combining information across systems.</a:t>
+            </a:r>
+            <a:endParaRPr lang="en-US" sz="1700" dirty="0"/>
+          </a:p>
+          <a:p>
+            <a:r>
+              <a:rPr lang="en-US" sz="1700" dirty="0">
+                <a:solidFill>
+                  <a:srgbClr val="17364A"/>
+                </a:solidFill>
+                <a:latin typeface="Aptos" pitchFamily="34" charset="0"/>
+                <a:ea typeface="Aptos" pitchFamily="34" charset="-122"/>
+                <a:cs typeface="Aptos" pitchFamily="34" charset="-120"/>
+              </a:rPr>
+              <a:t>A surveillance system may need to associate a lab report with an existing case.</a:t>
+            </a:r>
+            <a:endParaRPr lang="en-US" sz="1700" dirty="0"/>
+          </a:p>
+          <a:p>
+            <a:r>
+              <a:rPr lang="en-US" sz="1700" dirty="0">
+                <a:solidFill>
+                  <a:srgbClr val="17364A"/>
+                </a:solidFill>
+                <a:latin typeface="Aptos" pitchFamily="34" charset="0"/>
+                <a:ea typeface="Aptos" pitchFamily="34" charset="-122"/>
+                <a:cs typeface="Aptos" pitchFamily="34" charset="-120"/>
+              </a:rPr>
+              <a:t>An IIS may need to match vaccination records from multiple providers.</a:t>
+            </a:r>
+            <a:endParaRPr lang="en-US" sz="1700" dirty="0"/>
+          </a:p>
+          <a:p>
+            <a:r>
+              <a:rPr lang="en-US" sz="1700" dirty="0">
+                <a:solidFill>
+                  <a:srgbClr val="17364A"/>
+                </a:solidFill>
+                <a:latin typeface="Aptos" pitchFamily="34" charset="0"/>
+                <a:ea typeface="Aptos" pitchFamily="34" charset="-122"/>
+                <a:cs typeface="Aptos" pitchFamily="34" charset="-120"/>
+              </a:rPr>
+              <a:t>A vital records linkage may support maternal and child health analysis.</a:t>
+            </a:r>
+            <a:endParaRPr lang="en-US" sz="1700" dirty="0"/>
+          </a:p>
+        </p:txBody>
+      </p:sp>
+      <p:sp>
+        <p:nvSpPr>
+          <p:cNvPr id="11" name="Shape 9"/>
+          <p:cNvSpPr/>
+          <p:nvPr/>
+        </p:nvSpPr>
+        <p:spPr>
+          <a:xfrm>
+            <a:off x="7909560" y="1417320"/>
+            <a:ext cx="3154680" cy="1828800"/>
+          </a:xfrm>
+          <a:prstGeom prst="roundRect">
+            <a:avLst>
+              <a:gd name="adj" fmla="val 6000"/>
+            </a:avLst>
+          </a:prstGeom>
+          <a:solidFill>
+            <a:srgbClr val="EEF8ED"/>
+          </a:solidFill>
+          <a:ln w="12700">
+            <a:solidFill>
+              <a:srgbClr val="B9D7E6"/>
+            </a:solidFill>
+            <a:prstDash val="solid"/>
+          </a:ln>
+        </p:spPr>
+      </p:sp>
+      <p:sp>
+        <p:nvSpPr>
+          <p:cNvPr id="12" name="Text 10"/>
+          <p:cNvSpPr/>
+          <p:nvPr/>
+        </p:nvSpPr>
+        <p:spPr>
+          <a:xfrm>
+            <a:off x="8074152" y="1563624"/>
+            <a:ext cx="2825496" cy="201168"/>
+          </a:xfrm>
+          <a:prstGeom prst="rect">
+            <a:avLst/>
+          </a:prstGeom>
+          <a:noFill/>
+          <a:ln/>
+        </p:spPr>
+        <p:txBody>
+          <a:bodyPr wrap="square" lIns="0" tIns="0" rIns="0" bIns="0" rtlCol="0" anchor="ctr"/>
+          <a:lstStyle/>
+          <a:p>
             <a:pPr indent="0" marL="0">
               <a:buNone/>
             </a:pPr>
             <a:r>
-              <a:rPr lang="en-US" sz="1420" dirty="0">
+              <a:rPr lang="en-US" sz="950" b="1" dirty="0">
+                <a:solidFill>
+                  <a:srgbClr val="0068B7"/>
+                </a:solidFill>
+                <a:latin typeface="Aptos" pitchFamily="34" charset="0"/>
+                <a:ea typeface="Aptos" pitchFamily="34" charset="-122"/>
+                <a:cs typeface="Aptos" pitchFamily="34" charset="-120"/>
+              </a:rPr>
+              <a:t>Key idea</a:t>
+            </a:r>
+            <a:endParaRPr lang="en-US" sz="950" dirty="0"/>
+          </a:p>
+        </p:txBody>
+      </p:sp>
+      <p:sp>
+        <p:nvSpPr>
+          <p:cNvPr id="13" name="Text 11"/>
+          <p:cNvSpPr/>
+          <p:nvPr/>
+        </p:nvSpPr>
+        <p:spPr>
+          <a:xfrm>
+            <a:off x="8074152" y="1856232"/>
+            <a:ext cx="2825496" cy="1261872"/>
+          </a:xfrm>
+          <a:prstGeom prst="rect">
+            <a:avLst/>
+          </a:prstGeom>
+          <a:noFill/>
+          <a:ln/>
+        </p:spPr>
+        <p:txBody>
+          <a:bodyPr wrap="square" lIns="0" tIns="0" rIns="0" bIns="0" rtlCol="0" anchor="t">
+            <a:normAutofit/>
+          </a:bodyPr>
+          <a:lstStyle/>
+          <a:p>
+            <a:pPr indent="0" marL="0">
+              <a:buNone/>
+            </a:pPr>
+            <a:r>
+              <a:rPr lang="en-US" sz="1250" dirty="0">
                 <a:solidFill>
                   <a:srgbClr val="17364A"/>
                 </a:solidFill>
@@ -7405,9 +13742,116 @@
                 <a:ea typeface="Aptos" pitchFamily="34" charset="-122"/>
                 <a:cs typeface="Aptos" pitchFamily="34" charset="-120"/>
               </a:rPr>
-              <a:t>Probabilistic matching. Probabilistic matching estimates the likelihood that records refer to the same entity even when fields differ. It can improve recall but requires thresholds, validation, and review. Clerical review. Clerical review is human review of uncertain matches. It is essential when automatic matching is not reliable enough for the downstream use.</a:t>
-            </a:r>
-            <a:endParaRPr lang="en-US" sz="1420" dirty="0"/>
+              <a:t>Record linkage matters because public health work often depends on combining information across systems.</a:t>
+            </a:r>
+            <a:endParaRPr lang="en-US" sz="1250" dirty="0"/>
+          </a:p>
+        </p:txBody>
+      </p:sp>
+      <p:sp>
+        <p:nvSpPr>
+          <p:cNvPr id="14" name="Shape 12"/>
+          <p:cNvSpPr/>
+          <p:nvPr/>
+        </p:nvSpPr>
+        <p:spPr>
+          <a:xfrm>
+            <a:off x="7909560" y="3520440"/>
+            <a:ext cx="3154680" cy="1737360"/>
+          </a:xfrm>
+          <a:prstGeom prst="roundRect">
+            <a:avLst>
+              <a:gd name="adj" fmla="val 6316"/>
+            </a:avLst>
+          </a:prstGeom>
+          <a:solidFill>
+            <a:srgbClr val="EAF6F8"/>
+          </a:solidFill>
+          <a:ln w="12700">
+            <a:solidFill>
+              <a:srgbClr val="B9D7E6"/>
+            </a:solidFill>
+            <a:prstDash val="solid"/>
+          </a:ln>
+        </p:spPr>
+      </p:sp>
+      <p:sp>
+        <p:nvSpPr>
+          <p:cNvPr id="15" name="Text 13"/>
+          <p:cNvSpPr/>
+          <p:nvPr/>
+        </p:nvSpPr>
+        <p:spPr>
+          <a:xfrm>
+            <a:off x="8074152" y="3666744"/>
+            <a:ext cx="2825496" cy="201168"/>
+          </a:xfrm>
+          <a:prstGeom prst="rect">
+            <a:avLst/>
+          </a:prstGeom>
+          <a:noFill/>
+          <a:ln/>
+        </p:spPr>
+        <p:txBody>
+          <a:bodyPr wrap="square" lIns="0" tIns="0" rIns="0" bIns="0" rtlCol="0" anchor="ctr"/>
+          <a:lstStyle/>
+          <a:p>
+            <a:pPr indent="0" marL="0">
+              <a:buNone/>
+            </a:pPr>
+            <a:r>
+              <a:rPr lang="en-US" sz="950" b="1" dirty="0">
+                <a:solidFill>
+                  <a:srgbClr val="0068B7"/>
+                </a:solidFill>
+                <a:latin typeface="Aptos" pitchFamily="34" charset="0"/>
+                <a:ea typeface="Aptos" pitchFamily="34" charset="-122"/>
+                <a:cs typeface="Aptos" pitchFamily="34" charset="-120"/>
+              </a:rPr>
+              <a:t>Use this for</a:t>
+            </a:r>
+            <a:endParaRPr lang="en-US" sz="950" dirty="0"/>
+          </a:p>
+        </p:txBody>
+      </p:sp>
+      <p:sp>
+        <p:nvSpPr>
+          <p:cNvPr id="16" name="Text 14"/>
+          <p:cNvSpPr/>
+          <p:nvPr/>
+        </p:nvSpPr>
+        <p:spPr>
+          <a:xfrm>
+            <a:off x="8074152" y="3959352"/>
+            <a:ext cx="2825496" cy="1170432"/>
+          </a:xfrm>
+          <a:prstGeom prst="rect">
+            <a:avLst/>
+          </a:prstGeom>
+          <a:noFill/>
+          <a:ln/>
+        </p:spPr>
+        <p:txBody>
+          <a:bodyPr wrap="square" lIns="0" tIns="0" rIns="0" bIns="0" rtlCol="0" anchor="t">
+            <a:normAutofit/>
+          </a:bodyPr>
+          <a:lstStyle/>
+          <a:p>
+            <a:pPr indent="0" marL="0">
+              <a:buNone/>
+            </a:pPr>
+            <a:r>
+              <a:rPr lang="en-US" sz="1250" dirty="0">
+                <a:solidFill>
+                  <a:srgbClr val="17364A"/>
+                </a:solidFill>
+                <a:latin typeface="Aptos" pitchFamily="34" charset="0"/>
+                <a:ea typeface="Aptos" pitchFamily="34" charset="-122"/>
+                <a:cs typeface="Aptos" pitchFamily="34" charset="-120"/>
+              </a:rPr>
+              <a:t>Connect the concept to public health decisions, safeguards, documentation, or implementation work.</a:t>
+            </a:r>
+            <a:endParaRPr lang="en-US" sz="1250" dirty="0"/>
           </a:p>
         </p:txBody>
       </p:sp>
@@ -7470,7 +13914,32 @@
       </p:sp>
       <p:sp>
         <p:nvSpPr>
-          <p:cNvPr id="3" name="Text 1"/>
+          <p:cNvPr id="3" name="Shape 1"/>
+          <p:cNvSpPr/>
+          <p:nvPr/>
+        </p:nvSpPr>
+        <p:spPr>
+          <a:xfrm>
+            <a:off x="0" y="164592"/>
+            <a:ext cx="146304" cy="6693408"/>
+          </a:xfrm>
+          <a:prstGeom prst="rect">
+            <a:avLst/>
+          </a:prstGeom>
+          <a:solidFill>
+            <a:srgbClr val="2F8A28"/>
+          </a:solidFill>
+          <a:ln w="12700">
+            <a:solidFill>
+              <a:srgbClr val="2F8A28"/>
+            </a:solidFill>
+            <a:prstDash val="solid"/>
+          </a:ln>
+        </p:spPr>
+      </p:sp>
+      <p:sp>
+        <p:nvSpPr>
+          <p:cNvPr id="4" name="Text 2"/>
           <p:cNvSpPr/>
           <p:nvPr/>
         </p:nvSpPr>
@@ -7509,7 +13978,7 @@
       </p:sp>
       <p:sp>
         <p:nvSpPr>
-          <p:cNvPr id="4" name="Text 2"/>
+          <p:cNvPr id="5" name="Text 3"/>
           <p:cNvSpPr/>
           <p:nvPr/>
         </p:nvSpPr>
@@ -7548,7 +14017,7 @@
       </p:sp>
       <p:sp>
         <p:nvSpPr>
-          <p:cNvPr id="5" name="Text 3"/>
+          <p:cNvPr id="6" name="Text 4"/>
           <p:cNvSpPr/>
           <p:nvPr/>
         </p:nvSpPr>
@@ -7587,13 +14056,77 @@
       </p:sp>
       <p:sp>
         <p:nvSpPr>
-          <p:cNvPr id="6" name="Text 4"/>
+          <p:cNvPr id="7" name="Shape 5"/>
           <p:cNvSpPr/>
           <p:nvPr/>
         </p:nvSpPr>
         <p:spPr>
           <a:xfrm>
             <a:off x="640080" y="658368"/>
+            <a:ext cx="420624" cy="420624"/>
+          </a:xfrm>
+          <a:prstGeom prst="ellipse">
+            <a:avLst/>
+          </a:prstGeom>
+          <a:solidFill>
+            <a:srgbClr val="0068B7"/>
+          </a:solidFill>
+          <a:ln w="12700">
+            <a:solidFill>
+              <a:srgbClr val="0068B7"/>
+            </a:solidFill>
+            <a:prstDash val="solid"/>
+          </a:ln>
+        </p:spPr>
+      </p:sp>
+      <p:sp>
+        <p:nvSpPr>
+          <p:cNvPr id="8" name="Text 6"/>
+          <p:cNvSpPr/>
+          <p:nvPr/>
+        </p:nvSpPr>
+        <p:spPr>
+          <a:xfrm>
+            <a:off x="640080" y="731520"/>
+            <a:ext cx="420624" cy="164592"/>
+          </a:xfrm>
+          <a:prstGeom prst="rect">
+            <a:avLst/>
+          </a:prstGeom>
+          <a:noFill/>
+          <a:ln/>
+        </p:spPr>
+        <p:txBody>
+          <a:bodyPr wrap="square" lIns="0" tIns="0" rIns="0" bIns="0" rtlCol="0" anchor="ctr"/>
+          <a:lstStyle/>
+          <a:p>
+            <a:pPr algn="ctr" indent="0" marL="0">
+              <a:buNone/>
+            </a:pPr>
+            <a:r>
+              <a:rPr lang="en-US" sz="1100" b="1" dirty="0">
+                <a:solidFill>
+                  <a:srgbClr val="FFFFFF"/>
+                </a:solidFill>
+                <a:latin typeface="Aptos" pitchFamily="34" charset="0"/>
+                <a:ea typeface="Aptos" pitchFamily="34" charset="-122"/>
+                <a:cs typeface="Aptos" pitchFamily="34" charset="-120"/>
+              </a:rPr>
+              <a:t>4</a:t>
+            </a:r>
+            <a:endParaRPr lang="en-US" sz="1100" dirty="0"/>
+          </a:p>
+        </p:txBody>
+      </p:sp>
+      <p:sp>
+        <p:nvSpPr>
+          <p:cNvPr id="9" name="Text 7"/>
+          <p:cNvSpPr/>
+          <p:nvPr/>
+        </p:nvSpPr>
+        <p:spPr>
+          <a:xfrm>
+            <a:off x="640080" y="621792"/>
             <a:ext cx="10881360" cy="566928"/>
           </a:xfrm>
           <a:prstGeom prst="rect">
@@ -7620,7 +14153,7 @@
                 <a:ea typeface="Aptos Display" pitchFamily="34" charset="-122"/>
                 <a:cs typeface="Aptos Display" pitchFamily="34" charset="-120"/>
               </a:rPr>
-              <a:t>Public Health Example</a:t>
+              <a:t>Core Concepts</a:t>
             </a:r>
             <a:endParaRPr lang="en-US" sz="2700" dirty="0"/>
           </a:p>
@@ -7628,32 +14161,178 @@
       </p:sp>
       <p:sp>
         <p:nvSpPr>
-          <p:cNvPr id="7" name="Text 5"/>
-          <p:cNvSpPr/>
-          <p:nvPr/>
-        </p:nvSpPr>
-        <p:spPr>
-          <a:xfrm>
-            <a:off x="822960" y="1325880"/>
-            <a:ext cx="10378440" cy="4800600"/>
-          </a:xfrm>
-          <a:prstGeom prst="rect">
-            <a:avLst/>
-          </a:prstGeom>
-          <a:noFill/>
-          <a:ln/>
-        </p:spPr>
-        <p:txBody>
-          <a:bodyPr wrap="square" lIns="1016" tIns="1016" rIns="1016" bIns="1016" rtlCol="0" anchor="t">
+          <p:cNvPr id="10" name="Text 8"/>
+          <p:cNvSpPr/>
+          <p:nvPr/>
+        </p:nvSpPr>
+        <p:spPr>
+          <a:xfrm>
+            <a:off x="868680" y="1417320"/>
+            <a:ext cx="6675120" cy="4434840"/>
+          </a:xfrm>
+          <a:prstGeom prst="rect">
+            <a:avLst/>
+          </a:prstGeom>
+          <a:noFill/>
+          <a:ln/>
+        </p:spPr>
+        <p:txBody>
+          <a:bodyPr wrap="square" lIns="635" tIns="635" rIns="635" bIns="635" rtlCol="0" anchor="t">
             <a:normAutofit/>
           </a:bodyPr>
           <a:lstStyle/>
           <a:p>
+            <a:r>
+              <a:rPr lang="en-US" sz="1700" dirty="0">
+                <a:solidFill>
+                  <a:srgbClr val="17364A"/>
+                </a:solidFill>
+                <a:latin typeface="Aptos" pitchFamily="34" charset="0"/>
+                <a:ea typeface="Aptos" pitchFamily="34" charset="-122"/>
+                <a:cs typeface="Aptos" pitchFamily="34" charset="-120"/>
+              </a:rPr>
+              <a:t>Record linkage.</a:t>
+            </a:r>
+            <a:endParaRPr lang="en-US" sz="1700" dirty="0"/>
+          </a:p>
+          <a:p>
+            <a:r>
+              <a:rPr lang="en-US" sz="1700" dirty="0">
+                <a:solidFill>
+                  <a:srgbClr val="17364A"/>
+                </a:solidFill>
+                <a:latin typeface="Aptos" pitchFamily="34" charset="0"/>
+                <a:ea typeface="Aptos" pitchFamily="34" charset="-122"/>
+                <a:cs typeface="Aptos" pitchFamily="34" charset="-120"/>
+              </a:rPr>
+              <a:t>Record linkage is the process of determining whether records from one or more sources refer to the same entity.</a:t>
+            </a:r>
+            <a:endParaRPr lang="en-US" sz="1700" dirty="0"/>
+          </a:p>
+          <a:p>
+            <a:r>
+              <a:rPr lang="en-US" sz="1700" dirty="0">
+                <a:solidFill>
+                  <a:srgbClr val="17364A"/>
+                </a:solidFill>
+                <a:latin typeface="Aptos" pitchFamily="34" charset="0"/>
+                <a:ea typeface="Aptos" pitchFamily="34" charset="-122"/>
+                <a:cs typeface="Aptos" pitchFamily="34" charset="-120"/>
+              </a:rPr>
+              <a:t>The entity may be a person, provider, facility, address, organization, event, or outbreak.</a:t>
+            </a:r>
+            <a:endParaRPr lang="en-US" sz="1700" dirty="0"/>
+          </a:p>
+          <a:p>
+            <a:r>
+              <a:rPr lang="en-US" sz="1700" dirty="0">
+                <a:solidFill>
+                  <a:srgbClr val="17364A"/>
+                </a:solidFill>
+                <a:latin typeface="Aptos" pitchFamily="34" charset="0"/>
+                <a:ea typeface="Aptos" pitchFamily="34" charset="-122"/>
+                <a:cs typeface="Aptos" pitchFamily="34" charset="-120"/>
+              </a:rPr>
+              <a:t>Entity resolution.</a:t>
+            </a:r>
+            <a:endParaRPr lang="en-US" sz="1700" dirty="0"/>
+          </a:p>
+        </p:txBody>
+      </p:sp>
+      <p:sp>
+        <p:nvSpPr>
+          <p:cNvPr id="11" name="Shape 9"/>
+          <p:cNvSpPr/>
+          <p:nvPr/>
+        </p:nvSpPr>
+        <p:spPr>
+          <a:xfrm>
+            <a:off x="7909560" y="1417320"/>
+            <a:ext cx="3154680" cy="1828800"/>
+          </a:xfrm>
+          <a:prstGeom prst="roundRect">
+            <a:avLst>
+              <a:gd name="adj" fmla="val 6000"/>
+            </a:avLst>
+          </a:prstGeom>
+          <a:solidFill>
+            <a:srgbClr val="EEF8ED"/>
+          </a:solidFill>
+          <a:ln w="12700">
+            <a:solidFill>
+              <a:srgbClr val="B9D7E6"/>
+            </a:solidFill>
+            <a:prstDash val="solid"/>
+          </a:ln>
+        </p:spPr>
+      </p:sp>
+      <p:sp>
+        <p:nvSpPr>
+          <p:cNvPr id="12" name="Text 10"/>
+          <p:cNvSpPr/>
+          <p:nvPr/>
+        </p:nvSpPr>
+        <p:spPr>
+          <a:xfrm>
+            <a:off x="8074152" y="1563624"/>
+            <a:ext cx="2825496" cy="201168"/>
+          </a:xfrm>
+          <a:prstGeom prst="rect">
+            <a:avLst/>
+          </a:prstGeom>
+          <a:noFill/>
+          <a:ln/>
+        </p:spPr>
+        <p:txBody>
+          <a:bodyPr wrap="square" lIns="0" tIns="0" rIns="0" bIns="0" rtlCol="0" anchor="ctr"/>
+          <a:lstStyle/>
+          <a:p>
             <a:pPr indent="0" marL="0">
               <a:buNone/>
             </a:pPr>
             <a:r>
-              <a:rPr lang="en-US" sz="1420" dirty="0">
+              <a:rPr lang="en-US" sz="950" b="1" dirty="0">
+                <a:solidFill>
+                  <a:srgbClr val="0068B7"/>
+                </a:solidFill>
+                <a:latin typeface="Aptos" pitchFamily="34" charset="0"/>
+                <a:ea typeface="Aptos" pitchFamily="34" charset="-122"/>
+                <a:cs typeface="Aptos" pitchFamily="34" charset="-120"/>
+              </a:rPr>
+              <a:t>Key idea</a:t>
+            </a:r>
+            <a:endParaRPr lang="en-US" sz="950" dirty="0"/>
+          </a:p>
+        </p:txBody>
+      </p:sp>
+      <p:sp>
+        <p:nvSpPr>
+          <p:cNvPr id="13" name="Text 11"/>
+          <p:cNvSpPr/>
+          <p:nvPr/>
+        </p:nvSpPr>
+        <p:spPr>
+          <a:xfrm>
+            <a:off x="8074152" y="1856232"/>
+            <a:ext cx="2825496" cy="1261872"/>
+          </a:xfrm>
+          <a:prstGeom prst="rect">
+            <a:avLst/>
+          </a:prstGeom>
+          <a:noFill/>
+          <a:ln/>
+        </p:spPr>
+        <p:txBody>
+          <a:bodyPr wrap="square" lIns="0" tIns="0" rIns="0" bIns="0" rtlCol="0" anchor="t">
+            <a:normAutofit/>
+          </a:bodyPr>
+          <a:lstStyle/>
+          <a:p>
+            <a:pPr indent="0" marL="0">
+              <a:buNone/>
+            </a:pPr>
+            <a:r>
+              <a:rPr lang="en-US" sz="1250" dirty="0">
                 <a:solidFill>
                   <a:srgbClr val="17364A"/>
                 </a:solidFill>
@@ -7661,9 +14340,116 @@
                 <a:ea typeface="Aptos" pitchFamily="34" charset="-122"/>
                 <a:cs typeface="Aptos" pitchFamily="34" charset="-120"/>
               </a:rPr>
-              <a:t>An AI-supported case summary may pull together lab reports, case notes, hospitalization information, and prior reports for the same person. If the person matching process incorrectly combines two people, the summary may include information that belongs to someone else. If the process misses a prior record, the summary may omit important history. The investigator needs visibility into linkage confidence and source records. An outbreak detection workflow may link complaints, lab results, facility inspections, and geographic data. Entity resolution may be needed to identify whether different facility names refer to the same establishment. AI-generated cluster summaries can be misleading if the facility resolution process is weak.</a:t>
-            </a:r>
-            <a:endParaRPr lang="en-US" sz="1420" dirty="0"/>
+              <a:t>Record linkage.</a:t>
+            </a:r>
+            <a:endParaRPr lang="en-US" sz="1250" dirty="0"/>
+          </a:p>
+        </p:txBody>
+      </p:sp>
+      <p:sp>
+        <p:nvSpPr>
+          <p:cNvPr id="14" name="Shape 12"/>
+          <p:cNvSpPr/>
+          <p:nvPr/>
+        </p:nvSpPr>
+        <p:spPr>
+          <a:xfrm>
+            <a:off x="7909560" y="3520440"/>
+            <a:ext cx="3154680" cy="1737360"/>
+          </a:xfrm>
+          <a:prstGeom prst="roundRect">
+            <a:avLst>
+              <a:gd name="adj" fmla="val 6316"/>
+            </a:avLst>
+          </a:prstGeom>
+          <a:solidFill>
+            <a:srgbClr val="EAF6F8"/>
+          </a:solidFill>
+          <a:ln w="12700">
+            <a:solidFill>
+              <a:srgbClr val="B9D7E6"/>
+            </a:solidFill>
+            <a:prstDash val="solid"/>
+          </a:ln>
+        </p:spPr>
+      </p:sp>
+      <p:sp>
+        <p:nvSpPr>
+          <p:cNvPr id="15" name="Text 13"/>
+          <p:cNvSpPr/>
+          <p:nvPr/>
+        </p:nvSpPr>
+        <p:spPr>
+          <a:xfrm>
+            <a:off x="8074152" y="3666744"/>
+            <a:ext cx="2825496" cy="201168"/>
+          </a:xfrm>
+          <a:prstGeom prst="rect">
+            <a:avLst/>
+          </a:prstGeom>
+          <a:noFill/>
+          <a:ln/>
+        </p:spPr>
+        <p:txBody>
+          <a:bodyPr wrap="square" lIns="0" tIns="0" rIns="0" bIns="0" rtlCol="0" anchor="ctr"/>
+          <a:lstStyle/>
+          <a:p>
+            <a:pPr indent="0" marL="0">
+              <a:buNone/>
+            </a:pPr>
+            <a:r>
+              <a:rPr lang="en-US" sz="950" b="1" dirty="0">
+                <a:solidFill>
+                  <a:srgbClr val="0068B7"/>
+                </a:solidFill>
+                <a:latin typeface="Aptos" pitchFamily="34" charset="0"/>
+                <a:ea typeface="Aptos" pitchFamily="34" charset="-122"/>
+                <a:cs typeface="Aptos" pitchFamily="34" charset="-120"/>
+              </a:rPr>
+              <a:t>Use this for</a:t>
+            </a:r>
+            <a:endParaRPr lang="en-US" sz="950" dirty="0"/>
+          </a:p>
+        </p:txBody>
+      </p:sp>
+      <p:sp>
+        <p:nvSpPr>
+          <p:cNvPr id="16" name="Text 14"/>
+          <p:cNvSpPr/>
+          <p:nvPr/>
+        </p:nvSpPr>
+        <p:spPr>
+          <a:xfrm>
+            <a:off x="8074152" y="3959352"/>
+            <a:ext cx="2825496" cy="1170432"/>
+          </a:xfrm>
+          <a:prstGeom prst="rect">
+            <a:avLst/>
+          </a:prstGeom>
+          <a:noFill/>
+          <a:ln/>
+        </p:spPr>
+        <p:txBody>
+          <a:bodyPr wrap="square" lIns="0" tIns="0" rIns="0" bIns="0" rtlCol="0" anchor="t">
+            <a:normAutofit/>
+          </a:bodyPr>
+          <a:lstStyle/>
+          <a:p>
+            <a:pPr indent="0" marL="0">
+              <a:buNone/>
+            </a:pPr>
+            <a:r>
+              <a:rPr lang="en-US" sz="1250" dirty="0">
+                <a:solidFill>
+                  <a:srgbClr val="17364A"/>
+                </a:solidFill>
+                <a:latin typeface="Aptos" pitchFamily="34" charset="0"/>
+                <a:ea typeface="Aptos" pitchFamily="34" charset="-122"/>
+                <a:cs typeface="Aptos" pitchFamily="34" charset="-120"/>
+              </a:rPr>
+              <a:t>Connect the concept to public health decisions, safeguards, documentation, or implementation work.</a:t>
+            </a:r>
+            <a:endParaRPr lang="en-US" sz="1250" dirty="0"/>
           </a:p>
         </p:txBody>
       </p:sp>
@@ -7726,7 +14512,32 @@
       </p:sp>
       <p:sp>
         <p:nvSpPr>
-          <p:cNvPr id="3" name="Text 1"/>
+          <p:cNvPr id="3" name="Shape 1"/>
+          <p:cNvSpPr/>
+          <p:nvPr/>
+        </p:nvSpPr>
+        <p:spPr>
+          <a:xfrm>
+            <a:off x="0" y="164592"/>
+            <a:ext cx="146304" cy="6693408"/>
+          </a:xfrm>
+          <a:prstGeom prst="rect">
+            <a:avLst/>
+          </a:prstGeom>
+          <a:solidFill>
+            <a:srgbClr val="2F8A28"/>
+          </a:solidFill>
+          <a:ln w="12700">
+            <a:solidFill>
+              <a:srgbClr val="2F8A28"/>
+            </a:solidFill>
+            <a:prstDash val="solid"/>
+          </a:ln>
+        </p:spPr>
+      </p:sp>
+      <p:sp>
+        <p:nvSpPr>
+          <p:cNvPr id="4" name="Text 2"/>
           <p:cNvSpPr/>
           <p:nvPr/>
         </p:nvSpPr>
@@ -7765,7 +14576,7 @@
       </p:sp>
       <p:sp>
         <p:nvSpPr>
-          <p:cNvPr id="4" name="Text 2"/>
+          <p:cNvPr id="5" name="Text 3"/>
           <p:cNvSpPr/>
           <p:nvPr/>
         </p:nvSpPr>
@@ -7804,7 +14615,7 @@
       </p:sp>
       <p:sp>
         <p:nvSpPr>
-          <p:cNvPr id="5" name="Text 3"/>
+          <p:cNvPr id="6" name="Text 4"/>
           <p:cNvSpPr/>
           <p:nvPr/>
         </p:nvSpPr>
@@ -7843,7 +14654,7 @@
       </p:sp>
       <p:sp>
         <p:nvSpPr>
-          <p:cNvPr id="6" name="Text 4"/>
+          <p:cNvPr id="7" name="Text 5"/>
           <p:cNvSpPr/>
           <p:nvPr/>
         </p:nvSpPr>
@@ -7876,7 +14687,7 @@
                 <a:ea typeface="Aptos Display" pitchFamily="34" charset="-122"/>
                 <a:cs typeface="Aptos Display" pitchFamily="34" charset="-120"/>
               </a:rPr>
-              <a:t>Technical Deep Dive</a:t>
+              <a:t>Core Concepts Continued</a:t>
             </a:r>
             <a:endParaRPr lang="en-US" sz="2700" dirty="0"/>
           </a:p>
@@ -7884,32 +14695,178 @@
       </p:sp>
       <p:sp>
         <p:nvSpPr>
-          <p:cNvPr id="7" name="Text 5"/>
-          <p:cNvSpPr/>
-          <p:nvPr/>
-        </p:nvSpPr>
-        <p:spPr>
-          <a:xfrm>
-            <a:off x="822960" y="1325880"/>
-            <a:ext cx="10378440" cy="4800600"/>
-          </a:xfrm>
-          <a:prstGeom prst="rect">
-            <a:avLst/>
-          </a:prstGeom>
-          <a:noFill/>
-          <a:ln/>
-        </p:spPr>
-        <p:txBody>
-          <a:bodyPr wrap="square" lIns="1016" tIns="1016" rIns="1016" bIns="1016" rtlCol="0" anchor="t">
+          <p:cNvPr id="8" name="Text 6"/>
+          <p:cNvSpPr/>
+          <p:nvPr/>
+        </p:nvSpPr>
+        <p:spPr>
+          <a:xfrm>
+            <a:off x="868680" y="1417320"/>
+            <a:ext cx="6675120" cy="4434840"/>
+          </a:xfrm>
+          <a:prstGeom prst="rect">
+            <a:avLst/>
+          </a:prstGeom>
+          <a:noFill/>
+          <a:ln/>
+        </p:spPr>
+        <p:txBody>
+          <a:bodyPr wrap="square" lIns="635" tIns="635" rIns="635" bIns="635" rtlCol="0" anchor="t">
             <a:normAutofit/>
           </a:bodyPr>
           <a:lstStyle/>
           <a:p>
+            <a:r>
+              <a:rPr lang="en-US" sz="1700" dirty="0">
+                <a:solidFill>
+                  <a:srgbClr val="17364A"/>
+                </a:solidFill>
+                <a:latin typeface="Aptos" pitchFamily="34" charset="0"/>
+                <a:ea typeface="Aptos" pitchFamily="34" charset="-122"/>
+                <a:cs typeface="Aptos" pitchFamily="34" charset="-120"/>
+              </a:rPr>
+              <a:t>Probabilistic matching.</a:t>
+            </a:r>
+            <a:endParaRPr lang="en-US" sz="1700" dirty="0"/>
+          </a:p>
+          <a:p>
+            <a:r>
+              <a:rPr lang="en-US" sz="1700" dirty="0">
+                <a:solidFill>
+                  <a:srgbClr val="17364A"/>
+                </a:solidFill>
+                <a:latin typeface="Aptos" pitchFamily="34" charset="0"/>
+                <a:ea typeface="Aptos" pitchFamily="34" charset="-122"/>
+                <a:cs typeface="Aptos" pitchFamily="34" charset="-120"/>
+              </a:rPr>
+              <a:t>Probabilistic matching estimates the likelihood that records refer to the same entity even when fields differ.</a:t>
+            </a:r>
+            <a:endParaRPr lang="en-US" sz="1700" dirty="0"/>
+          </a:p>
+          <a:p>
+            <a:r>
+              <a:rPr lang="en-US" sz="1700" dirty="0">
+                <a:solidFill>
+                  <a:srgbClr val="17364A"/>
+                </a:solidFill>
+                <a:latin typeface="Aptos" pitchFamily="34" charset="0"/>
+                <a:ea typeface="Aptos" pitchFamily="34" charset="-122"/>
+                <a:cs typeface="Aptos" pitchFamily="34" charset="-120"/>
+              </a:rPr>
+              <a:t>It can improve recall but requires thresholds, validation, and review.</a:t>
+            </a:r>
+            <a:endParaRPr lang="en-US" sz="1700" dirty="0"/>
+          </a:p>
+          <a:p>
+            <a:r>
+              <a:rPr lang="en-US" sz="1700" dirty="0">
+                <a:solidFill>
+                  <a:srgbClr val="17364A"/>
+                </a:solidFill>
+                <a:latin typeface="Aptos" pitchFamily="34" charset="0"/>
+                <a:ea typeface="Aptos" pitchFamily="34" charset="-122"/>
+                <a:cs typeface="Aptos" pitchFamily="34" charset="-120"/>
+              </a:rPr>
+              <a:t>Clerical review.</a:t>
+            </a:r>
+            <a:endParaRPr lang="en-US" sz="1700" dirty="0"/>
+          </a:p>
+        </p:txBody>
+      </p:sp>
+      <p:sp>
+        <p:nvSpPr>
+          <p:cNvPr id="9" name="Shape 7"/>
+          <p:cNvSpPr/>
+          <p:nvPr/>
+        </p:nvSpPr>
+        <p:spPr>
+          <a:xfrm>
+            <a:off x="7909560" y="1417320"/>
+            <a:ext cx="3154680" cy="1828800"/>
+          </a:xfrm>
+          <a:prstGeom prst="roundRect">
+            <a:avLst>
+              <a:gd name="adj" fmla="val 6000"/>
+            </a:avLst>
+          </a:prstGeom>
+          <a:solidFill>
+            <a:srgbClr val="EEF8ED"/>
+          </a:solidFill>
+          <a:ln w="12700">
+            <a:solidFill>
+              <a:srgbClr val="B9D7E6"/>
+            </a:solidFill>
+            <a:prstDash val="solid"/>
+          </a:ln>
+        </p:spPr>
+      </p:sp>
+      <p:sp>
+        <p:nvSpPr>
+          <p:cNvPr id="10" name="Text 8"/>
+          <p:cNvSpPr/>
+          <p:nvPr/>
+        </p:nvSpPr>
+        <p:spPr>
+          <a:xfrm>
+            <a:off x="8074152" y="1563624"/>
+            <a:ext cx="2825496" cy="201168"/>
+          </a:xfrm>
+          <a:prstGeom prst="rect">
+            <a:avLst/>
+          </a:prstGeom>
+          <a:noFill/>
+          <a:ln/>
+        </p:spPr>
+        <p:txBody>
+          <a:bodyPr wrap="square" lIns="0" tIns="0" rIns="0" bIns="0" rtlCol="0" anchor="ctr"/>
+          <a:lstStyle/>
+          <a:p>
             <a:pPr indent="0" marL="0">
               <a:buNone/>
             </a:pPr>
             <a:r>
-              <a:rPr lang="en-US" sz="1420" dirty="0">
+              <a:rPr lang="en-US" sz="950" b="1" dirty="0">
+                <a:solidFill>
+                  <a:srgbClr val="0068B7"/>
+                </a:solidFill>
+                <a:latin typeface="Aptos" pitchFamily="34" charset="0"/>
+                <a:ea typeface="Aptos" pitchFamily="34" charset="-122"/>
+                <a:cs typeface="Aptos" pitchFamily="34" charset="-120"/>
+              </a:rPr>
+              <a:t>Key idea</a:t>
+            </a:r>
+            <a:endParaRPr lang="en-US" sz="950" dirty="0"/>
+          </a:p>
+        </p:txBody>
+      </p:sp>
+      <p:sp>
+        <p:nvSpPr>
+          <p:cNvPr id="11" name="Text 9"/>
+          <p:cNvSpPr/>
+          <p:nvPr/>
+        </p:nvSpPr>
+        <p:spPr>
+          <a:xfrm>
+            <a:off x="8074152" y="1856232"/>
+            <a:ext cx="2825496" cy="1261872"/>
+          </a:xfrm>
+          <a:prstGeom prst="rect">
+            <a:avLst/>
+          </a:prstGeom>
+          <a:noFill/>
+          <a:ln/>
+        </p:spPr>
+        <p:txBody>
+          <a:bodyPr wrap="square" lIns="0" tIns="0" rIns="0" bIns="0" rtlCol="0" anchor="t">
+            <a:normAutofit/>
+          </a:bodyPr>
+          <a:lstStyle/>
+          <a:p>
+            <a:pPr indent="0" marL="0">
+              <a:buNone/>
+            </a:pPr>
+            <a:r>
+              <a:rPr lang="en-US" sz="1250" dirty="0">
                 <a:solidFill>
                   <a:srgbClr val="17364A"/>
                 </a:solidFill>
@@ -7917,9 +14874,116 @@
                 <a:ea typeface="Aptos" pitchFamily="34" charset="-122"/>
                 <a:cs typeface="Aptos" pitchFamily="34" charset="-120"/>
               </a:rPr>
-              <a:t>Matching design begins with the entity being matched and the decision that depends on the match. Person matching may use name, date of birth, address, phone, medical record number, email, sex, or other identifiers. Facility matching may use name, address, license number, geocode, and ownership information. Event matching may use dates, locations, condition, exposure, and related records. Thresholds determine when records are automatically linked, automatically separated, or sent for review. Low thresholds may increase false matches. High thresholds may increase missed matches. The right balance depends on the use case. A workflow that affects individual services may need a different tolerance for error than an aggregate trend analysis. AI readiness requires documentation of matching methods, fields, thresholds, review processes, error rates, and known limitations. If an AI tool uses linked records, staff should know whether linkage is deterministic, probabilistic, manual, or hybrid. They should also know whether uncertain matches are visible to users and whether AI outputs indicate linkage uncertainty.</a:t>
-            </a:r>
-            <a:endParaRPr lang="en-US" sz="1420" dirty="0"/>
+              <a:t>Probabilistic matching.</a:t>
+            </a:r>
+            <a:endParaRPr lang="en-US" sz="1250" dirty="0"/>
+          </a:p>
+        </p:txBody>
+      </p:sp>
+      <p:sp>
+        <p:nvSpPr>
+          <p:cNvPr id="12" name="Shape 10"/>
+          <p:cNvSpPr/>
+          <p:nvPr/>
+        </p:nvSpPr>
+        <p:spPr>
+          <a:xfrm>
+            <a:off x="7909560" y="3520440"/>
+            <a:ext cx="3154680" cy="1737360"/>
+          </a:xfrm>
+          <a:prstGeom prst="roundRect">
+            <a:avLst>
+              <a:gd name="adj" fmla="val 6316"/>
+            </a:avLst>
+          </a:prstGeom>
+          <a:solidFill>
+            <a:srgbClr val="EAF6F8"/>
+          </a:solidFill>
+          <a:ln w="12700">
+            <a:solidFill>
+              <a:srgbClr val="B9D7E6"/>
+            </a:solidFill>
+            <a:prstDash val="solid"/>
+          </a:ln>
+        </p:spPr>
+      </p:sp>
+      <p:sp>
+        <p:nvSpPr>
+          <p:cNvPr id="13" name="Text 11"/>
+          <p:cNvSpPr/>
+          <p:nvPr/>
+        </p:nvSpPr>
+        <p:spPr>
+          <a:xfrm>
+            <a:off x="8074152" y="3666744"/>
+            <a:ext cx="2825496" cy="201168"/>
+          </a:xfrm>
+          <a:prstGeom prst="rect">
+            <a:avLst/>
+          </a:prstGeom>
+          <a:noFill/>
+          <a:ln/>
+        </p:spPr>
+        <p:txBody>
+          <a:bodyPr wrap="square" lIns="0" tIns="0" rIns="0" bIns="0" rtlCol="0" anchor="ctr"/>
+          <a:lstStyle/>
+          <a:p>
+            <a:pPr indent="0" marL="0">
+              <a:buNone/>
+            </a:pPr>
+            <a:r>
+              <a:rPr lang="en-US" sz="950" b="1" dirty="0">
+                <a:solidFill>
+                  <a:srgbClr val="0068B7"/>
+                </a:solidFill>
+                <a:latin typeface="Aptos" pitchFamily="34" charset="0"/>
+                <a:ea typeface="Aptos" pitchFamily="34" charset="-122"/>
+                <a:cs typeface="Aptos" pitchFamily="34" charset="-120"/>
+              </a:rPr>
+              <a:t>Use this for</a:t>
+            </a:r>
+            <a:endParaRPr lang="en-US" sz="950" dirty="0"/>
+          </a:p>
+        </p:txBody>
+      </p:sp>
+      <p:sp>
+        <p:nvSpPr>
+          <p:cNvPr id="14" name="Text 12"/>
+          <p:cNvSpPr/>
+          <p:nvPr/>
+        </p:nvSpPr>
+        <p:spPr>
+          <a:xfrm>
+            <a:off x="8074152" y="3959352"/>
+            <a:ext cx="2825496" cy="1170432"/>
+          </a:xfrm>
+          <a:prstGeom prst="rect">
+            <a:avLst/>
+          </a:prstGeom>
+          <a:noFill/>
+          <a:ln/>
+        </p:spPr>
+        <p:txBody>
+          <a:bodyPr wrap="square" lIns="0" tIns="0" rIns="0" bIns="0" rtlCol="0" anchor="t">
+            <a:normAutofit/>
+          </a:bodyPr>
+          <a:lstStyle/>
+          <a:p>
+            <a:pPr indent="0" marL="0">
+              <a:buNone/>
+            </a:pPr>
+            <a:r>
+              <a:rPr lang="en-US" sz="1250" dirty="0">
+                <a:solidFill>
+                  <a:srgbClr val="17364A"/>
+                </a:solidFill>
+                <a:latin typeface="Aptos" pitchFamily="34" charset="0"/>
+                <a:ea typeface="Aptos" pitchFamily="34" charset="-122"/>
+                <a:cs typeface="Aptos" pitchFamily="34" charset="-120"/>
+              </a:rPr>
+              <a:t>Connect the concept to public health decisions, safeguards, documentation, or implementation work.</a:t>
+            </a:r>
+            <a:endParaRPr lang="en-US" sz="1250" dirty="0"/>
           </a:p>
         </p:txBody>
       </p:sp>

--- a/downloads/presentations/modules/lesson-54-record-linkage-entity-resolution-and-deduplication.pptx
+++ b/downloads/presentations/modules/lesson-54-record-linkage-entity-resolution-and-deduplication.pptx
@@ -2997,6 +2997,45 @@
           </a:p>
         </p:txBody>
       </p:sp>
+      <p:sp>
+        <p:nvSpPr>
+          <p:cNvPr id="8" name="Text 5"/>
+          <p:cNvSpPr/>
+          <p:nvPr/>
+        </p:nvSpPr>
+        <p:spPr>
+          <a:xfrm>
+            <a:off x="11137392" y="6510528"/>
+            <a:ext cx="411480" cy="201168"/>
+          </a:xfrm>
+          <a:prstGeom prst="rect">
+            <a:avLst/>
+          </a:prstGeom>
+          <a:noFill/>
+          <a:ln/>
+        </p:spPr>
+        <p:txBody>
+          <a:bodyPr wrap="square" lIns="0" tIns="0" rIns="0" bIns="0" rtlCol="0" anchor="ctr"/>
+          <a:lstStyle/>
+          <a:p>
+            <a:pPr algn="r" indent="0" marL="0">
+              <a:buNone/>
+            </a:pPr>
+            <a:r>
+              <a:rPr lang="en-US" sz="900" dirty="0">
+                <a:solidFill>
+                  <a:srgbClr val="5F7181"/>
+                </a:solidFill>
+                <a:latin typeface="Aptos" pitchFamily="34" charset="0"/>
+                <a:ea typeface="Aptos" pitchFamily="34" charset="-122"/>
+                <a:cs typeface="Aptos" pitchFamily="34" charset="-120"/>
+              </a:rPr>
+              <a:t>1</a:t>
+            </a:r>
+            <a:endParaRPr lang="en-US" sz="900" dirty="0"/>
+          </a:p>
+        </p:txBody>
+      </p:sp>
     </p:spTree>
   </p:cSld>
   <p:clrMapOvr>
@@ -3190,7 +3229,7 @@
                 <a:ea typeface="Aptos" pitchFamily="34" charset="-122"/>
                 <a:cs typeface="Aptos" pitchFamily="34" charset="-120"/>
               </a:rPr>
-              <a:t>© Paula Soper</a:t>
+              <a:t>Â© Paula Soper</a:t>
             </a:r>
             <a:endParaRPr lang="en-US" sz="800" dirty="0"/>
           </a:p>
@@ -3198,7 +3237,46 @@
       </p:sp>
       <p:sp>
         <p:nvSpPr>
-          <p:cNvPr id="7" name="Shape 5"/>
+          <p:cNvPr id="7" name="Text 5"/>
+          <p:cNvSpPr/>
+          <p:nvPr/>
+        </p:nvSpPr>
+        <p:spPr>
+          <a:xfrm>
+            <a:off x="11137392" y="6510528"/>
+            <a:ext cx="411480" cy="201168"/>
+          </a:xfrm>
+          <a:prstGeom prst="rect">
+            <a:avLst/>
+          </a:prstGeom>
+          <a:noFill/>
+          <a:ln/>
+        </p:spPr>
+        <p:txBody>
+          <a:bodyPr wrap="square" lIns="0" tIns="0" rIns="0" bIns="0" rtlCol="0" anchor="ctr"/>
+          <a:lstStyle/>
+          <a:p>
+            <a:pPr algn="r" indent="0" marL="0">
+              <a:buNone/>
+            </a:pPr>
+            <a:r>
+              <a:rPr lang="en-US" sz="900" dirty="0">
+                <a:solidFill>
+                  <a:srgbClr val="5F7181"/>
+                </a:solidFill>
+                <a:latin typeface="Aptos" pitchFamily="34" charset="0"/>
+                <a:ea typeface="Aptos" pitchFamily="34" charset="-122"/>
+                <a:cs typeface="Aptos" pitchFamily="34" charset="-120"/>
+              </a:rPr>
+              <a:t>10</a:t>
+            </a:r>
+            <a:endParaRPr lang="en-US" sz="900" dirty="0"/>
+          </a:p>
+        </p:txBody>
+      </p:sp>
+      <p:sp>
+        <p:nvSpPr>
+          <p:cNvPr id="8" name="Shape 6"/>
           <p:cNvSpPr/>
           <p:nvPr/>
         </p:nvSpPr>
@@ -3223,7 +3301,7 @@
       </p:sp>
       <p:sp>
         <p:nvSpPr>
-          <p:cNvPr id="8" name="Text 6"/>
+          <p:cNvPr id="9" name="Text 7"/>
           <p:cNvSpPr/>
           <p:nvPr/>
         </p:nvSpPr>
@@ -3262,14 +3340,14 @@
       </p:sp>
       <p:sp>
         <p:nvSpPr>
-          <p:cNvPr id="9" name="Text 7"/>
+          <p:cNvPr id="10" name="Text 8"/>
           <p:cNvSpPr/>
           <p:nvPr/>
         </p:nvSpPr>
         <p:spPr>
           <a:xfrm>
             <a:off x="640080" y="621792"/>
-            <a:ext cx="10881360" cy="566928"/>
+            <a:ext cx="10881360" cy="713232"/>
           </a:xfrm>
           <a:prstGeom prst="rect">
             <a:avLst/>
@@ -3287,7 +3365,7 @@
               <a:buNone/>
             </a:pPr>
             <a:r>
-              <a:rPr lang="en-US" sz="2700" b="1" dirty="0">
+              <a:rPr lang="en-US" sz="3400" b="1" dirty="0">
                 <a:solidFill>
                   <a:srgbClr val="003A63"/>
                 </a:solidFill>
@@ -3297,20 +3375,20 @@
               </a:rPr>
               <a:t>Public Health Example</a:t>
             </a:r>
-            <a:endParaRPr lang="en-US" sz="2700" dirty="0"/>
-          </a:p>
-        </p:txBody>
-      </p:sp>
-      <p:sp>
-        <p:nvSpPr>
-          <p:cNvPr id="10" name="Text 8"/>
-          <p:cNvSpPr/>
-          <p:nvPr/>
-        </p:nvSpPr>
-        <p:spPr>
-          <a:xfrm>
-            <a:off x="868680" y="1417320"/>
-            <a:ext cx="6675120" cy="4434840"/>
+            <a:endParaRPr lang="en-US" sz="3400" dirty="0"/>
+          </a:p>
+        </p:txBody>
+      </p:sp>
+      <p:sp>
+        <p:nvSpPr>
+          <p:cNvPr id="11" name="Text 9"/>
+          <p:cNvSpPr/>
+          <p:nvPr/>
+        </p:nvSpPr>
+        <p:spPr>
+          <a:xfrm>
+            <a:off x="868680" y="1508760"/>
+            <a:ext cx="6537960" cy="4160520"/>
           </a:xfrm>
           <a:prstGeom prst="rect">
             <a:avLst/>
@@ -3325,7 +3403,7 @@
           <a:lstStyle/>
           <a:p>
             <a:r>
-              <a:rPr lang="en-US" sz="1700" dirty="0">
+              <a:rPr lang="en-US" sz="2100" dirty="0">
                 <a:solidFill>
                   <a:srgbClr val="17364A"/>
                 </a:solidFill>
@@ -3333,13 +3411,13 @@
                 <a:ea typeface="Aptos" pitchFamily="34" charset="-122"/>
                 <a:cs typeface="Aptos" pitchFamily="34" charset="-120"/>
               </a:rPr>
-              <a:t>An AI-supported case summary may pull together lab reports, case notes, hospitalization information, and prior reports for.</a:t>
-            </a:r>
-            <a:endParaRPr lang="en-US" sz="1700" dirty="0"/>
-          </a:p>
-          <a:p>
-            <a:r>
-              <a:rPr lang="en-US" sz="1700" dirty="0">
+              <a:t>An AI-supported case summary may pull together lab reports, case notes, hospitalization information,.</a:t>
+            </a:r>
+            <a:endParaRPr lang="en-US" sz="2100" dirty="0"/>
+          </a:p>
+          <a:p>
+            <a:r>
+              <a:rPr lang="en-US" sz="2100" dirty="0">
                 <a:solidFill>
                   <a:srgbClr val="17364A"/>
                 </a:solidFill>
@@ -3347,13 +3425,13 @@
                 <a:ea typeface="Aptos" pitchFamily="34" charset="-122"/>
                 <a:cs typeface="Aptos" pitchFamily="34" charset="-120"/>
               </a:rPr>
-              <a:t>If the person matching process incorrectly combines two people, the summary may include information that belongs to someone.</a:t>
-            </a:r>
-            <a:endParaRPr lang="en-US" sz="1700" dirty="0"/>
-          </a:p>
-          <a:p>
-            <a:r>
-              <a:rPr lang="en-US" sz="1700" dirty="0">
+              <a:t>If the person matching process incorrectly combines two people, the summary may include information.</a:t>
+            </a:r>
+            <a:endParaRPr lang="en-US" sz="2100" dirty="0"/>
+          </a:p>
+          <a:p>
+            <a:r>
+              <a:rPr lang="en-US" sz="2100" dirty="0">
                 <a:solidFill>
                   <a:srgbClr val="17364A"/>
                 </a:solidFill>
@@ -3363,27 +3441,13 @@
               </a:rPr>
               <a:t>If the process misses a prior record, the summary may omit important history.</a:t>
             </a:r>
-            <a:endParaRPr lang="en-US" sz="1700" dirty="0"/>
-          </a:p>
-          <a:p>
-            <a:r>
-              <a:rPr lang="en-US" sz="1700" dirty="0">
-                <a:solidFill>
-                  <a:srgbClr val="17364A"/>
-                </a:solidFill>
-                <a:latin typeface="Aptos" pitchFamily="34" charset="0"/>
-                <a:ea typeface="Aptos" pitchFamily="34" charset="-122"/>
-                <a:cs typeface="Aptos" pitchFamily="34" charset="-120"/>
-              </a:rPr>
-              <a:t>The investigator needs visibility into linkage confidence and source records.</a:t>
-            </a:r>
-            <a:endParaRPr lang="en-US" sz="1700" dirty="0"/>
-          </a:p>
-        </p:txBody>
-      </p:sp>
-      <p:sp>
-        <p:nvSpPr>
-          <p:cNvPr id="11" name="Shape 9"/>
+            <a:endParaRPr lang="en-US" sz="2100" dirty="0"/>
+          </a:p>
+        </p:txBody>
+      </p:sp>
+      <p:sp>
+        <p:nvSpPr>
+          <p:cNvPr id="12" name="Shape 10"/>
           <p:cNvSpPr/>
           <p:nvPr/>
         </p:nvSpPr>
@@ -3410,14 +3474,14 @@
       </p:sp>
       <p:sp>
         <p:nvSpPr>
-          <p:cNvPr id="12" name="Text 10"/>
+          <p:cNvPr id="13" name="Text 11"/>
           <p:cNvSpPr/>
           <p:nvPr/>
         </p:nvSpPr>
         <p:spPr>
           <a:xfrm>
             <a:off x="8074152" y="1563624"/>
-            <a:ext cx="2825496" cy="201168"/>
+            <a:ext cx="2825496" cy="256032"/>
           </a:xfrm>
           <a:prstGeom prst="rect">
             <a:avLst/>
@@ -3433,7 +3497,7 @@
               <a:buNone/>
             </a:pPr>
             <a:r>
-              <a:rPr lang="en-US" sz="950" b="1" dirty="0">
+              <a:rPr lang="en-US" sz="1300" b="1" dirty="0">
                 <a:solidFill>
                   <a:srgbClr val="0068B7"/>
                 </a:solidFill>
@@ -3443,20 +3507,20 @@
               </a:rPr>
               <a:t>Key idea</a:t>
             </a:r>
-            <a:endParaRPr lang="en-US" sz="950" dirty="0"/>
-          </a:p>
-        </p:txBody>
-      </p:sp>
-      <p:sp>
-        <p:nvSpPr>
-          <p:cNvPr id="13" name="Text 11"/>
-          <p:cNvSpPr/>
-          <p:nvPr/>
-        </p:nvSpPr>
-        <p:spPr>
-          <a:xfrm>
-            <a:off x="8074152" y="1856232"/>
-            <a:ext cx="2825496" cy="1261872"/>
+            <a:endParaRPr lang="en-US" sz="1300" dirty="0"/>
+          </a:p>
+        </p:txBody>
+      </p:sp>
+      <p:sp>
+        <p:nvSpPr>
+          <p:cNvPr id="14" name="Text 12"/>
+          <p:cNvSpPr/>
+          <p:nvPr/>
+        </p:nvSpPr>
+        <p:spPr>
+          <a:xfrm>
+            <a:off x="8074152" y="1920240"/>
+            <a:ext cx="2825496" cy="1188720"/>
           </a:xfrm>
           <a:prstGeom prst="rect">
             <a:avLst/>
@@ -3474,7 +3538,7 @@
               <a:buNone/>
             </a:pPr>
             <a:r>
-              <a:rPr lang="en-US" sz="1250" dirty="0">
+              <a:rPr lang="en-US" sz="1550" dirty="0">
                 <a:solidFill>
                   <a:srgbClr val="17364A"/>
                 </a:solidFill>
@@ -3482,15 +3546,15 @@
                 <a:ea typeface="Aptos" pitchFamily="34" charset="-122"/>
                 <a:cs typeface="Aptos" pitchFamily="34" charset="-120"/>
               </a:rPr>
-              <a:t>An AI-supported case summary may pull together lab reports, case notes, hospitalization information, and prior reports for.</a:t>
-            </a:r>
-            <a:endParaRPr lang="en-US" sz="1250" dirty="0"/>
-          </a:p>
-        </p:txBody>
-      </p:sp>
-      <p:sp>
-        <p:nvSpPr>
-          <p:cNvPr id="14" name="Shape 12"/>
+              <a:t>An AI-supported case summary may pull together lab reports, case notes, hospitalization information,.</a:t>
+            </a:r>
+            <a:endParaRPr lang="en-US" sz="1550" dirty="0"/>
+          </a:p>
+        </p:txBody>
+      </p:sp>
+      <p:sp>
+        <p:nvSpPr>
+          <p:cNvPr id="15" name="Shape 13"/>
           <p:cNvSpPr/>
           <p:nvPr/>
         </p:nvSpPr>
@@ -3517,14 +3581,14 @@
       </p:sp>
       <p:sp>
         <p:nvSpPr>
-          <p:cNvPr id="15" name="Text 13"/>
+          <p:cNvPr id="16" name="Text 14"/>
           <p:cNvSpPr/>
           <p:nvPr/>
         </p:nvSpPr>
         <p:spPr>
           <a:xfrm>
             <a:off x="8074152" y="3666744"/>
-            <a:ext cx="2825496" cy="201168"/>
+            <a:ext cx="2825496" cy="256032"/>
           </a:xfrm>
           <a:prstGeom prst="rect">
             <a:avLst/>
@@ -3540,7 +3604,7 @@
               <a:buNone/>
             </a:pPr>
             <a:r>
-              <a:rPr lang="en-US" sz="950" b="1" dirty="0">
+              <a:rPr lang="en-US" sz="1300" b="1" dirty="0">
                 <a:solidFill>
                   <a:srgbClr val="0068B7"/>
                 </a:solidFill>
@@ -3550,20 +3614,20 @@
               </a:rPr>
               <a:t>Use this for</a:t>
             </a:r>
-            <a:endParaRPr lang="en-US" sz="950" dirty="0"/>
-          </a:p>
-        </p:txBody>
-      </p:sp>
-      <p:sp>
-        <p:nvSpPr>
-          <p:cNvPr id="16" name="Text 14"/>
-          <p:cNvSpPr/>
-          <p:nvPr/>
-        </p:nvSpPr>
-        <p:spPr>
-          <a:xfrm>
-            <a:off x="8074152" y="3959352"/>
-            <a:ext cx="2825496" cy="1170432"/>
+            <a:endParaRPr lang="en-US" sz="1300" dirty="0"/>
+          </a:p>
+        </p:txBody>
+      </p:sp>
+      <p:sp>
+        <p:nvSpPr>
+          <p:cNvPr id="17" name="Text 15"/>
+          <p:cNvSpPr/>
+          <p:nvPr/>
+        </p:nvSpPr>
+        <p:spPr>
+          <a:xfrm>
+            <a:off x="8074152" y="4023360"/>
+            <a:ext cx="2825496" cy="1097280"/>
           </a:xfrm>
           <a:prstGeom prst="rect">
             <a:avLst/>
@@ -3581,7 +3645,7 @@
               <a:buNone/>
             </a:pPr>
             <a:r>
-              <a:rPr lang="en-US" sz="1250" dirty="0">
+              <a:rPr lang="en-US" sz="1550" dirty="0">
                 <a:solidFill>
                   <a:srgbClr val="17364A"/>
                 </a:solidFill>
@@ -3591,7 +3655,7 @@
               </a:rPr>
               <a:t>Connect the concept to public health decisions, safeguards, documentation, or implementation work.</a:t>
             </a:r>
-            <a:endParaRPr lang="en-US" sz="1250" dirty="0"/>
+            <a:endParaRPr lang="en-US" sz="1550" dirty="0"/>
           </a:p>
         </p:txBody>
       </p:sp>
@@ -3788,7 +3852,7 @@
                 <a:ea typeface="Aptos" pitchFamily="34" charset="-122"/>
                 <a:cs typeface="Aptos" pitchFamily="34" charset="-120"/>
               </a:rPr>
-              <a:t>© Paula Soper</a:t>
+              <a:t>Â© Paula Soper</a:t>
             </a:r>
             <a:endParaRPr lang="en-US" sz="800" dirty="0"/>
           </a:p>
@@ -3796,7 +3860,46 @@
       </p:sp>
       <p:sp>
         <p:nvSpPr>
-          <p:cNvPr id="7" name="Shape 5"/>
+          <p:cNvPr id="7" name="Text 5"/>
+          <p:cNvSpPr/>
+          <p:nvPr/>
+        </p:nvSpPr>
+        <p:spPr>
+          <a:xfrm>
+            <a:off x="11137392" y="6510528"/>
+            <a:ext cx="411480" cy="201168"/>
+          </a:xfrm>
+          <a:prstGeom prst="rect">
+            <a:avLst/>
+          </a:prstGeom>
+          <a:noFill/>
+          <a:ln/>
+        </p:spPr>
+        <p:txBody>
+          <a:bodyPr wrap="square" lIns="0" tIns="0" rIns="0" bIns="0" rtlCol="0" anchor="ctr"/>
+          <a:lstStyle/>
+          <a:p>
+            <a:pPr algn="r" indent="0" marL="0">
+              <a:buNone/>
+            </a:pPr>
+            <a:r>
+              <a:rPr lang="en-US" sz="900" dirty="0">
+                <a:solidFill>
+                  <a:srgbClr val="5F7181"/>
+                </a:solidFill>
+                <a:latin typeface="Aptos" pitchFamily="34" charset="0"/>
+                <a:ea typeface="Aptos" pitchFamily="34" charset="-122"/>
+                <a:cs typeface="Aptos" pitchFamily="34" charset="-120"/>
+              </a:rPr>
+              <a:t>11</a:t>
+            </a:r>
+            <a:endParaRPr lang="en-US" sz="900" dirty="0"/>
+          </a:p>
+        </p:txBody>
+      </p:sp>
+      <p:sp>
+        <p:nvSpPr>
+          <p:cNvPr id="8" name="Shape 6"/>
           <p:cNvSpPr/>
           <p:nvPr/>
         </p:nvSpPr>
@@ -3821,7 +3924,7 @@
       </p:sp>
       <p:sp>
         <p:nvSpPr>
-          <p:cNvPr id="8" name="Text 6"/>
+          <p:cNvPr id="9" name="Text 7"/>
           <p:cNvSpPr/>
           <p:nvPr/>
         </p:nvSpPr>
@@ -3860,14 +3963,14 @@
       </p:sp>
       <p:sp>
         <p:nvSpPr>
-          <p:cNvPr id="9" name="Text 7"/>
+          <p:cNvPr id="10" name="Text 8"/>
           <p:cNvSpPr/>
           <p:nvPr/>
         </p:nvSpPr>
         <p:spPr>
           <a:xfrm>
             <a:off x="640080" y="621792"/>
-            <a:ext cx="10881360" cy="566928"/>
+            <a:ext cx="10881360" cy="713232"/>
           </a:xfrm>
           <a:prstGeom prst="rect">
             <a:avLst/>
@@ -3885,7 +3988,7 @@
               <a:buNone/>
             </a:pPr>
             <a:r>
-              <a:rPr lang="en-US" sz="2700" b="1" dirty="0">
+              <a:rPr lang="en-US" sz="3400" b="1" dirty="0">
                 <a:solidFill>
                   <a:srgbClr val="003A63"/>
                 </a:solidFill>
@@ -3895,20 +3998,20 @@
               </a:rPr>
               <a:t>Technical Deep Dive</a:t>
             </a:r>
-            <a:endParaRPr lang="en-US" sz="2700" dirty="0"/>
-          </a:p>
-        </p:txBody>
-      </p:sp>
-      <p:sp>
-        <p:nvSpPr>
-          <p:cNvPr id="10" name="Text 8"/>
-          <p:cNvSpPr/>
-          <p:nvPr/>
-        </p:nvSpPr>
-        <p:spPr>
-          <a:xfrm>
-            <a:off x="868680" y="1417320"/>
-            <a:ext cx="6675120" cy="4434840"/>
+            <a:endParaRPr lang="en-US" sz="3400" dirty="0"/>
+          </a:p>
+        </p:txBody>
+      </p:sp>
+      <p:sp>
+        <p:nvSpPr>
+          <p:cNvPr id="11" name="Text 9"/>
+          <p:cNvSpPr/>
+          <p:nvPr/>
+        </p:nvSpPr>
+        <p:spPr>
+          <a:xfrm>
+            <a:off x="868680" y="1508760"/>
+            <a:ext cx="6537960" cy="4160520"/>
           </a:xfrm>
           <a:prstGeom prst="rect">
             <a:avLst/>
@@ -3923,7 +4026,7 @@
           <a:lstStyle/>
           <a:p>
             <a:r>
-              <a:rPr lang="en-US" sz="1700" dirty="0">
+              <a:rPr lang="en-US" sz="2100" dirty="0">
                 <a:solidFill>
                   <a:srgbClr val="17364A"/>
                 </a:solidFill>
@@ -3933,11 +4036,11 @@
               </a:rPr>
               <a:t>Matching design begins with the entity being matched and the decision that depends on the match.</a:t>
             </a:r>
-            <a:endParaRPr lang="en-US" sz="1700" dirty="0"/>
-          </a:p>
-          <a:p>
-            <a:r>
-              <a:rPr lang="en-US" sz="1700" dirty="0">
+            <a:endParaRPr lang="en-US" sz="2100" dirty="0"/>
+          </a:p>
+          <a:p>
+            <a:r>
+              <a:rPr lang="en-US" sz="2100" dirty="0">
                 <a:solidFill>
                   <a:srgbClr val="17364A"/>
                 </a:solidFill>
@@ -3945,13 +4048,13 @@
                 <a:ea typeface="Aptos" pitchFamily="34" charset="-122"/>
                 <a:cs typeface="Aptos" pitchFamily="34" charset="-120"/>
               </a:rPr>
-              <a:t>Person matching may use name, date of birth, address, phone, medical record number, email, sex, or other identifiers.</a:t>
-            </a:r>
-            <a:endParaRPr lang="en-US" sz="1700" dirty="0"/>
-          </a:p>
-          <a:p>
-            <a:r>
-              <a:rPr lang="en-US" sz="1700" dirty="0">
+              <a:t>Person matching may use name, date of birth, address, phone, medical record number, email, sex, or.</a:t>
+            </a:r>
+            <a:endParaRPr lang="en-US" sz="2100" dirty="0"/>
+          </a:p>
+          <a:p>
+            <a:r>
+              <a:rPr lang="en-US" sz="2100" dirty="0">
                 <a:solidFill>
                   <a:srgbClr val="17364A"/>
                 </a:solidFill>
@@ -3961,27 +4064,13 @@
               </a:rPr>
               <a:t>Facility matching may use name, address, license number, geocode, and ownership information.</a:t>
             </a:r>
-            <a:endParaRPr lang="en-US" sz="1700" dirty="0"/>
-          </a:p>
-          <a:p>
-            <a:r>
-              <a:rPr lang="en-US" sz="1700" dirty="0">
-                <a:solidFill>
-                  <a:srgbClr val="17364A"/>
-                </a:solidFill>
-                <a:latin typeface="Aptos" pitchFamily="34" charset="0"/>
-                <a:ea typeface="Aptos" pitchFamily="34" charset="-122"/>
-                <a:cs typeface="Aptos" pitchFamily="34" charset="-120"/>
-              </a:rPr>
-              <a:t>Event matching may use dates, locations, condition, exposure, and related records.</a:t>
-            </a:r>
-            <a:endParaRPr lang="en-US" sz="1700" dirty="0"/>
-          </a:p>
-        </p:txBody>
-      </p:sp>
-      <p:sp>
-        <p:nvSpPr>
-          <p:cNvPr id="11" name="Shape 9"/>
+            <a:endParaRPr lang="en-US" sz="2100" dirty="0"/>
+          </a:p>
+        </p:txBody>
+      </p:sp>
+      <p:sp>
+        <p:nvSpPr>
+          <p:cNvPr id="12" name="Shape 10"/>
           <p:cNvSpPr/>
           <p:nvPr/>
         </p:nvSpPr>
@@ -4008,14 +4097,14 @@
       </p:sp>
       <p:sp>
         <p:nvSpPr>
-          <p:cNvPr id="12" name="Text 10"/>
+          <p:cNvPr id="13" name="Text 11"/>
           <p:cNvSpPr/>
           <p:nvPr/>
         </p:nvSpPr>
         <p:spPr>
           <a:xfrm>
             <a:off x="8074152" y="1563624"/>
-            <a:ext cx="2825496" cy="201168"/>
+            <a:ext cx="2825496" cy="256032"/>
           </a:xfrm>
           <a:prstGeom prst="rect">
             <a:avLst/>
@@ -4031,7 +4120,7 @@
               <a:buNone/>
             </a:pPr>
             <a:r>
-              <a:rPr lang="en-US" sz="950" b="1" dirty="0">
+              <a:rPr lang="en-US" sz="1300" b="1" dirty="0">
                 <a:solidFill>
                   <a:srgbClr val="0068B7"/>
                 </a:solidFill>
@@ -4041,20 +4130,20 @@
               </a:rPr>
               <a:t>Key idea</a:t>
             </a:r>
-            <a:endParaRPr lang="en-US" sz="950" dirty="0"/>
-          </a:p>
-        </p:txBody>
-      </p:sp>
-      <p:sp>
-        <p:nvSpPr>
-          <p:cNvPr id="13" name="Text 11"/>
-          <p:cNvSpPr/>
-          <p:nvPr/>
-        </p:nvSpPr>
-        <p:spPr>
-          <a:xfrm>
-            <a:off x="8074152" y="1856232"/>
-            <a:ext cx="2825496" cy="1261872"/>
+            <a:endParaRPr lang="en-US" sz="1300" dirty="0"/>
+          </a:p>
+        </p:txBody>
+      </p:sp>
+      <p:sp>
+        <p:nvSpPr>
+          <p:cNvPr id="14" name="Text 12"/>
+          <p:cNvSpPr/>
+          <p:nvPr/>
+        </p:nvSpPr>
+        <p:spPr>
+          <a:xfrm>
+            <a:off x="8074152" y="1920240"/>
+            <a:ext cx="2825496" cy="1188720"/>
           </a:xfrm>
           <a:prstGeom prst="rect">
             <a:avLst/>
@@ -4072,7 +4161,7 @@
               <a:buNone/>
             </a:pPr>
             <a:r>
-              <a:rPr lang="en-US" sz="1250" dirty="0">
+              <a:rPr lang="en-US" sz="1550" dirty="0">
                 <a:solidFill>
                   <a:srgbClr val="17364A"/>
                 </a:solidFill>
@@ -4082,13 +4171,13 @@
               </a:rPr>
               <a:t>Matching design begins with the entity being matched and the decision that depends on the match.</a:t>
             </a:r>
-            <a:endParaRPr lang="en-US" sz="1250" dirty="0"/>
-          </a:p>
-        </p:txBody>
-      </p:sp>
-      <p:sp>
-        <p:nvSpPr>
-          <p:cNvPr id="14" name="Shape 12"/>
+            <a:endParaRPr lang="en-US" sz="1550" dirty="0"/>
+          </a:p>
+        </p:txBody>
+      </p:sp>
+      <p:sp>
+        <p:nvSpPr>
+          <p:cNvPr id="15" name="Shape 13"/>
           <p:cNvSpPr/>
           <p:nvPr/>
         </p:nvSpPr>
@@ -4115,14 +4204,14 @@
       </p:sp>
       <p:sp>
         <p:nvSpPr>
-          <p:cNvPr id="15" name="Text 13"/>
+          <p:cNvPr id="16" name="Text 14"/>
           <p:cNvSpPr/>
           <p:nvPr/>
         </p:nvSpPr>
         <p:spPr>
           <a:xfrm>
             <a:off x="8074152" y="3666744"/>
-            <a:ext cx="2825496" cy="201168"/>
+            <a:ext cx="2825496" cy="256032"/>
           </a:xfrm>
           <a:prstGeom prst="rect">
             <a:avLst/>
@@ -4138,7 +4227,7 @@
               <a:buNone/>
             </a:pPr>
             <a:r>
-              <a:rPr lang="en-US" sz="950" b="1" dirty="0">
+              <a:rPr lang="en-US" sz="1300" b="1" dirty="0">
                 <a:solidFill>
                   <a:srgbClr val="0068B7"/>
                 </a:solidFill>
@@ -4148,20 +4237,20 @@
               </a:rPr>
               <a:t>Use this for</a:t>
             </a:r>
-            <a:endParaRPr lang="en-US" sz="950" dirty="0"/>
-          </a:p>
-        </p:txBody>
-      </p:sp>
-      <p:sp>
-        <p:nvSpPr>
-          <p:cNvPr id="16" name="Text 14"/>
-          <p:cNvSpPr/>
-          <p:nvPr/>
-        </p:nvSpPr>
-        <p:spPr>
-          <a:xfrm>
-            <a:off x="8074152" y="3959352"/>
-            <a:ext cx="2825496" cy="1170432"/>
+            <a:endParaRPr lang="en-US" sz="1300" dirty="0"/>
+          </a:p>
+        </p:txBody>
+      </p:sp>
+      <p:sp>
+        <p:nvSpPr>
+          <p:cNvPr id="17" name="Text 15"/>
+          <p:cNvSpPr/>
+          <p:nvPr/>
+        </p:nvSpPr>
+        <p:spPr>
+          <a:xfrm>
+            <a:off x="8074152" y="4023360"/>
+            <a:ext cx="2825496" cy="1097280"/>
           </a:xfrm>
           <a:prstGeom prst="rect">
             <a:avLst/>
@@ -4179,7 +4268,7 @@
               <a:buNone/>
             </a:pPr>
             <a:r>
-              <a:rPr lang="en-US" sz="1250" dirty="0">
+              <a:rPr lang="en-US" sz="1550" dirty="0">
                 <a:solidFill>
                   <a:srgbClr val="17364A"/>
                 </a:solidFill>
@@ -4189,7 +4278,7 @@
               </a:rPr>
               <a:t>Connect the concept to public health decisions, safeguards, documentation, or implementation work.</a:t>
             </a:r>
-            <a:endParaRPr lang="en-US" sz="1250" dirty="0"/>
+            <a:endParaRPr lang="en-US" sz="1550" dirty="0"/>
           </a:p>
         </p:txBody>
       </p:sp>
@@ -4386,7 +4475,7 @@
                 <a:ea typeface="Aptos" pitchFamily="34" charset="-122"/>
                 <a:cs typeface="Aptos" pitchFamily="34" charset="-120"/>
               </a:rPr>
-              <a:t>© Paula Soper</a:t>
+              <a:t>Â© Paula Soper</a:t>
             </a:r>
             <a:endParaRPr lang="en-US" sz="800" dirty="0"/>
           </a:p>
@@ -4394,7 +4483,46 @@
       </p:sp>
       <p:sp>
         <p:nvSpPr>
-          <p:cNvPr id="7" name="Shape 5"/>
+          <p:cNvPr id="7" name="Text 5"/>
+          <p:cNvSpPr/>
+          <p:nvPr/>
+        </p:nvSpPr>
+        <p:spPr>
+          <a:xfrm>
+            <a:off x="11137392" y="6510528"/>
+            <a:ext cx="411480" cy="201168"/>
+          </a:xfrm>
+          <a:prstGeom prst="rect">
+            <a:avLst/>
+          </a:prstGeom>
+          <a:noFill/>
+          <a:ln/>
+        </p:spPr>
+        <p:txBody>
+          <a:bodyPr wrap="square" lIns="0" tIns="0" rIns="0" bIns="0" rtlCol="0" anchor="ctr"/>
+          <a:lstStyle/>
+          <a:p>
+            <a:pPr algn="r" indent="0" marL="0">
+              <a:buNone/>
+            </a:pPr>
+            <a:r>
+              <a:rPr lang="en-US" sz="900" dirty="0">
+                <a:solidFill>
+                  <a:srgbClr val="5F7181"/>
+                </a:solidFill>
+                <a:latin typeface="Aptos" pitchFamily="34" charset="0"/>
+                <a:ea typeface="Aptos" pitchFamily="34" charset="-122"/>
+                <a:cs typeface="Aptos" pitchFamily="34" charset="-120"/>
+              </a:rPr>
+              <a:t>12</a:t>
+            </a:r>
+            <a:endParaRPr lang="en-US" sz="900" dirty="0"/>
+          </a:p>
+        </p:txBody>
+      </p:sp>
+      <p:sp>
+        <p:nvSpPr>
+          <p:cNvPr id="8" name="Shape 6"/>
           <p:cNvSpPr/>
           <p:nvPr/>
         </p:nvSpPr>
@@ -4419,7 +4547,7 @@
       </p:sp>
       <p:sp>
         <p:nvSpPr>
-          <p:cNvPr id="8" name="Text 6"/>
+          <p:cNvPr id="9" name="Text 7"/>
           <p:cNvSpPr/>
           <p:nvPr/>
         </p:nvSpPr>
@@ -4458,14 +4586,14 @@
       </p:sp>
       <p:sp>
         <p:nvSpPr>
-          <p:cNvPr id="9" name="Text 7"/>
+          <p:cNvPr id="10" name="Text 8"/>
           <p:cNvSpPr/>
           <p:nvPr/>
         </p:nvSpPr>
         <p:spPr>
           <a:xfrm>
             <a:off x="640080" y="621792"/>
-            <a:ext cx="10881360" cy="566928"/>
+            <a:ext cx="10881360" cy="713232"/>
           </a:xfrm>
           <a:prstGeom prst="rect">
             <a:avLst/>
@@ -4483,7 +4611,7 @@
               <a:buNone/>
             </a:pPr>
             <a:r>
-              <a:rPr lang="en-US" sz="2700" b="1" dirty="0">
+              <a:rPr lang="en-US" sz="3400" b="1" dirty="0">
                 <a:solidFill>
                   <a:srgbClr val="003A63"/>
                 </a:solidFill>
@@ -4493,20 +4621,20 @@
               </a:rPr>
               <a:t>Risks, Failure Modes, and Guardrails</a:t>
             </a:r>
-            <a:endParaRPr lang="en-US" sz="2700" dirty="0"/>
-          </a:p>
-        </p:txBody>
-      </p:sp>
-      <p:sp>
-        <p:nvSpPr>
-          <p:cNvPr id="10" name="Text 8"/>
-          <p:cNvSpPr/>
-          <p:nvPr/>
-        </p:nvSpPr>
-        <p:spPr>
-          <a:xfrm>
-            <a:off x="868680" y="1417320"/>
-            <a:ext cx="6675120" cy="4434840"/>
+            <a:endParaRPr lang="en-US" sz="3400" dirty="0"/>
+          </a:p>
+        </p:txBody>
+      </p:sp>
+      <p:sp>
+        <p:nvSpPr>
+          <p:cNvPr id="11" name="Text 9"/>
+          <p:cNvSpPr/>
+          <p:nvPr/>
+        </p:nvSpPr>
+        <p:spPr>
+          <a:xfrm>
+            <a:off x="868680" y="1508760"/>
+            <a:ext cx="6537960" cy="4160520"/>
           </a:xfrm>
           <a:prstGeom prst="rect">
             <a:avLst/>
@@ -4521,7 +4649,7 @@
           <a:lstStyle/>
           <a:p>
             <a:r>
-              <a:rPr lang="en-US" sz="1700" dirty="0">
+              <a:rPr lang="en-US" sz="2100" dirty="0">
                 <a:solidFill>
                   <a:srgbClr val="17364A"/>
                 </a:solidFill>
@@ -4531,11 +4659,11 @@
               </a:rPr>
               <a:t>False matches.</a:t>
             </a:r>
-            <a:endParaRPr lang="en-US" sz="1700" dirty="0"/>
-          </a:p>
-          <a:p>
-            <a:r>
-              <a:rPr lang="en-US" sz="1700" dirty="0">
+            <a:endParaRPr lang="en-US" sz="2100" dirty="0"/>
+          </a:p>
+          <a:p>
+            <a:r>
+              <a:rPr lang="en-US" sz="2100" dirty="0">
                 <a:solidFill>
                   <a:srgbClr val="17364A"/>
                 </a:solidFill>
@@ -4545,11 +4673,11 @@
               </a:rPr>
               <a:t>False matches can combine data from different people or entities.</a:t>
             </a:r>
-            <a:endParaRPr lang="en-US" sz="1700" dirty="0"/>
-          </a:p>
-          <a:p>
-            <a:r>
-              <a:rPr lang="en-US" sz="1700" dirty="0">
+            <a:endParaRPr lang="en-US" sz="2100" dirty="0"/>
+          </a:p>
+          <a:p>
+            <a:r>
+              <a:rPr lang="en-US" sz="2100" dirty="0">
                 <a:solidFill>
                   <a:srgbClr val="17364A"/>
                 </a:solidFill>
@@ -4559,27 +4687,13 @@
               </a:rPr>
               <a:t>Guardrails include conservative thresholds for consequential uses, clerical review, and source display.</a:t>
             </a:r>
-            <a:endParaRPr lang="en-US" sz="1700" dirty="0"/>
-          </a:p>
-          <a:p>
-            <a:r>
-              <a:rPr lang="en-US" sz="1700" dirty="0">
-                <a:solidFill>
-                  <a:srgbClr val="17364A"/>
-                </a:solidFill>
-                <a:latin typeface="Aptos" pitchFamily="34" charset="0"/>
-                <a:ea typeface="Aptos" pitchFamily="34" charset="-122"/>
-                <a:cs typeface="Aptos" pitchFamily="34" charset="-120"/>
-              </a:rPr>
-              <a:t>Missed matches.</a:t>
-            </a:r>
-            <a:endParaRPr lang="en-US" sz="1700" dirty="0"/>
-          </a:p>
-        </p:txBody>
-      </p:sp>
-      <p:sp>
-        <p:nvSpPr>
-          <p:cNvPr id="11" name="Shape 9"/>
+            <a:endParaRPr lang="en-US" sz="2100" dirty="0"/>
+          </a:p>
+        </p:txBody>
+      </p:sp>
+      <p:sp>
+        <p:nvSpPr>
+          <p:cNvPr id="12" name="Shape 10"/>
           <p:cNvSpPr/>
           <p:nvPr/>
         </p:nvSpPr>
@@ -4606,14 +4720,14 @@
       </p:sp>
       <p:sp>
         <p:nvSpPr>
-          <p:cNvPr id="12" name="Text 10"/>
+          <p:cNvPr id="13" name="Text 11"/>
           <p:cNvSpPr/>
           <p:nvPr/>
         </p:nvSpPr>
         <p:spPr>
           <a:xfrm>
             <a:off x="8074152" y="1563624"/>
-            <a:ext cx="2825496" cy="201168"/>
+            <a:ext cx="2825496" cy="256032"/>
           </a:xfrm>
           <a:prstGeom prst="rect">
             <a:avLst/>
@@ -4629,7 +4743,7 @@
               <a:buNone/>
             </a:pPr>
             <a:r>
-              <a:rPr lang="en-US" sz="950" b="1" dirty="0">
+              <a:rPr lang="en-US" sz="1300" b="1" dirty="0">
                 <a:solidFill>
                   <a:srgbClr val="0068B7"/>
                 </a:solidFill>
@@ -4639,20 +4753,20 @@
               </a:rPr>
               <a:t>Key idea</a:t>
             </a:r>
-            <a:endParaRPr lang="en-US" sz="950" dirty="0"/>
-          </a:p>
-        </p:txBody>
-      </p:sp>
-      <p:sp>
-        <p:nvSpPr>
-          <p:cNvPr id="13" name="Text 11"/>
-          <p:cNvSpPr/>
-          <p:nvPr/>
-        </p:nvSpPr>
-        <p:spPr>
-          <a:xfrm>
-            <a:off x="8074152" y="1856232"/>
-            <a:ext cx="2825496" cy="1261872"/>
+            <a:endParaRPr lang="en-US" sz="1300" dirty="0"/>
+          </a:p>
+        </p:txBody>
+      </p:sp>
+      <p:sp>
+        <p:nvSpPr>
+          <p:cNvPr id="14" name="Text 12"/>
+          <p:cNvSpPr/>
+          <p:nvPr/>
+        </p:nvSpPr>
+        <p:spPr>
+          <a:xfrm>
+            <a:off x="8074152" y="1920240"/>
+            <a:ext cx="2825496" cy="1188720"/>
           </a:xfrm>
           <a:prstGeom prst="rect">
             <a:avLst/>
@@ -4670,7 +4784,7 @@
               <a:buNone/>
             </a:pPr>
             <a:r>
-              <a:rPr lang="en-US" sz="1250" dirty="0">
+              <a:rPr lang="en-US" sz="1550" dirty="0">
                 <a:solidFill>
                   <a:srgbClr val="17364A"/>
                 </a:solidFill>
@@ -4680,13 +4794,13 @@
               </a:rPr>
               <a:t>False matches.</a:t>
             </a:r>
-            <a:endParaRPr lang="en-US" sz="1250" dirty="0"/>
-          </a:p>
-        </p:txBody>
-      </p:sp>
-      <p:sp>
-        <p:nvSpPr>
-          <p:cNvPr id="14" name="Shape 12"/>
+            <a:endParaRPr lang="en-US" sz="1550" dirty="0"/>
+          </a:p>
+        </p:txBody>
+      </p:sp>
+      <p:sp>
+        <p:nvSpPr>
+          <p:cNvPr id="15" name="Shape 13"/>
           <p:cNvSpPr/>
           <p:nvPr/>
         </p:nvSpPr>
@@ -4713,14 +4827,14 @@
       </p:sp>
       <p:sp>
         <p:nvSpPr>
-          <p:cNvPr id="15" name="Text 13"/>
+          <p:cNvPr id="16" name="Text 14"/>
           <p:cNvSpPr/>
           <p:nvPr/>
         </p:nvSpPr>
         <p:spPr>
           <a:xfrm>
             <a:off x="8074152" y="3666744"/>
-            <a:ext cx="2825496" cy="201168"/>
+            <a:ext cx="2825496" cy="256032"/>
           </a:xfrm>
           <a:prstGeom prst="rect">
             <a:avLst/>
@@ -4736,7 +4850,7 @@
               <a:buNone/>
             </a:pPr>
             <a:r>
-              <a:rPr lang="en-US" sz="950" b="1" dirty="0">
+              <a:rPr lang="en-US" sz="1300" b="1" dirty="0">
                 <a:solidFill>
                   <a:srgbClr val="0068B7"/>
                 </a:solidFill>
@@ -4746,20 +4860,20 @@
               </a:rPr>
               <a:t>Use this for</a:t>
             </a:r>
-            <a:endParaRPr lang="en-US" sz="950" dirty="0"/>
-          </a:p>
-        </p:txBody>
-      </p:sp>
-      <p:sp>
-        <p:nvSpPr>
-          <p:cNvPr id="16" name="Text 14"/>
-          <p:cNvSpPr/>
-          <p:nvPr/>
-        </p:nvSpPr>
-        <p:spPr>
-          <a:xfrm>
-            <a:off x="8074152" y="3959352"/>
-            <a:ext cx="2825496" cy="1170432"/>
+            <a:endParaRPr lang="en-US" sz="1300" dirty="0"/>
+          </a:p>
+        </p:txBody>
+      </p:sp>
+      <p:sp>
+        <p:nvSpPr>
+          <p:cNvPr id="17" name="Text 15"/>
+          <p:cNvSpPr/>
+          <p:nvPr/>
+        </p:nvSpPr>
+        <p:spPr>
+          <a:xfrm>
+            <a:off x="8074152" y="4023360"/>
+            <a:ext cx="2825496" cy="1097280"/>
           </a:xfrm>
           <a:prstGeom prst="rect">
             <a:avLst/>
@@ -4777,7 +4891,7 @@
               <a:buNone/>
             </a:pPr>
             <a:r>
-              <a:rPr lang="en-US" sz="1250" dirty="0">
+              <a:rPr lang="en-US" sz="1550" dirty="0">
                 <a:solidFill>
                   <a:srgbClr val="17364A"/>
                 </a:solidFill>
@@ -4787,7 +4901,7 @@
               </a:rPr>
               <a:t>Connect the concept to public health decisions, safeguards, documentation, or implementation work.</a:t>
             </a:r>
-            <a:endParaRPr lang="en-US" sz="1250" dirty="0"/>
+            <a:endParaRPr lang="en-US" sz="1550" dirty="0"/>
           </a:p>
         </p:txBody>
       </p:sp>
@@ -4984,7 +5098,7 @@
                 <a:ea typeface="Aptos" pitchFamily="34" charset="-122"/>
                 <a:cs typeface="Aptos" pitchFamily="34" charset="-120"/>
               </a:rPr>
-              <a:t>© Paula Soper</a:t>
+              <a:t>Â© Paula Soper</a:t>
             </a:r>
             <a:endParaRPr lang="en-US" sz="800" dirty="0"/>
           </a:p>
@@ -4998,8 +5112,47 @@
         </p:nvSpPr>
         <p:spPr>
           <a:xfrm>
+            <a:off x="11137392" y="6510528"/>
+            <a:ext cx="411480" cy="201168"/>
+          </a:xfrm>
+          <a:prstGeom prst="rect">
+            <a:avLst/>
+          </a:prstGeom>
+          <a:noFill/>
+          <a:ln/>
+        </p:spPr>
+        <p:txBody>
+          <a:bodyPr wrap="square" lIns="0" tIns="0" rIns="0" bIns="0" rtlCol="0" anchor="ctr"/>
+          <a:lstStyle/>
+          <a:p>
+            <a:pPr algn="r" indent="0" marL="0">
+              <a:buNone/>
+            </a:pPr>
+            <a:r>
+              <a:rPr lang="en-US" sz="900" dirty="0">
+                <a:solidFill>
+                  <a:srgbClr val="5F7181"/>
+                </a:solidFill>
+                <a:latin typeface="Aptos" pitchFamily="34" charset="0"/>
+                <a:ea typeface="Aptos" pitchFamily="34" charset="-122"/>
+                <a:cs typeface="Aptos" pitchFamily="34" charset="-120"/>
+              </a:rPr>
+              <a:t>13</a:t>
+            </a:r>
+            <a:endParaRPr lang="en-US" sz="900" dirty="0"/>
+          </a:p>
+        </p:txBody>
+      </p:sp>
+      <p:sp>
+        <p:nvSpPr>
+          <p:cNvPr id="8" name="Text 6"/>
+          <p:cNvSpPr/>
+          <p:nvPr/>
+        </p:nvSpPr>
+        <p:spPr>
+          <a:xfrm>
             <a:off x="640080" y="658368"/>
-            <a:ext cx="10881360" cy="566928"/>
+            <a:ext cx="10881360" cy="713232"/>
           </a:xfrm>
           <a:prstGeom prst="rect">
             <a:avLst/>
@@ -5017,7 +5170,7 @@
               <a:buNone/>
             </a:pPr>
             <a:r>
-              <a:rPr lang="en-US" sz="2700" b="1" dirty="0">
+              <a:rPr lang="en-US" sz="3400" b="1" dirty="0">
                 <a:solidFill>
                   <a:srgbClr val="003A63"/>
                 </a:solidFill>
@@ -5027,20 +5180,20 @@
               </a:rPr>
               <a:t>Risks, Failure Modes, and Guardrails Continued</a:t>
             </a:r>
-            <a:endParaRPr lang="en-US" sz="2700" dirty="0"/>
-          </a:p>
-        </p:txBody>
-      </p:sp>
-      <p:sp>
-        <p:nvSpPr>
-          <p:cNvPr id="8" name="Text 6"/>
-          <p:cNvSpPr/>
-          <p:nvPr/>
-        </p:nvSpPr>
-        <p:spPr>
-          <a:xfrm>
-            <a:off x="868680" y="1417320"/>
-            <a:ext cx="6675120" cy="4434840"/>
+            <a:endParaRPr lang="en-US" sz="3400" dirty="0"/>
+          </a:p>
+        </p:txBody>
+      </p:sp>
+      <p:sp>
+        <p:nvSpPr>
+          <p:cNvPr id="9" name="Text 7"/>
+          <p:cNvSpPr/>
+          <p:nvPr/>
+        </p:nvSpPr>
+        <p:spPr>
+          <a:xfrm>
+            <a:off x="868680" y="1508760"/>
+            <a:ext cx="6537960" cy="4160520"/>
           </a:xfrm>
           <a:prstGeom prst="rect">
             <a:avLst/>
@@ -5055,7 +5208,7 @@
           <a:lstStyle/>
           <a:p>
             <a:r>
-              <a:rPr lang="en-US" sz="1700" dirty="0">
+              <a:rPr lang="en-US" sz="2100" dirty="0">
                 <a:solidFill>
                   <a:srgbClr val="17364A"/>
                 </a:solidFill>
@@ -5065,11 +5218,11 @@
               </a:rPr>
               <a:t>Hidden linkage uncertainty.</a:t>
             </a:r>
-            <a:endParaRPr lang="en-US" sz="1700" dirty="0"/>
-          </a:p>
-          <a:p>
-            <a:r>
-              <a:rPr lang="en-US" sz="1700" dirty="0">
+            <a:endParaRPr lang="en-US" sz="2100" dirty="0"/>
+          </a:p>
+          <a:p>
+            <a:r>
+              <a:rPr lang="en-US" sz="2100" dirty="0">
                 <a:solidFill>
                   <a:srgbClr val="17364A"/>
                 </a:solidFill>
@@ -5079,11 +5232,11 @@
               </a:rPr>
               <a:t>AI outputs may present linked data as certain.</a:t>
             </a:r>
-            <a:endParaRPr lang="en-US" sz="1700" dirty="0"/>
-          </a:p>
-          <a:p>
-            <a:r>
-              <a:rPr lang="en-US" sz="1700" dirty="0">
+            <a:endParaRPr lang="en-US" sz="2100" dirty="0"/>
+          </a:p>
+          <a:p>
+            <a:r>
+              <a:rPr lang="en-US" sz="2100" dirty="0">
                 <a:solidFill>
                   <a:srgbClr val="17364A"/>
                 </a:solidFill>
@@ -5093,13 +5246,13 @@
               </a:rPr>
               <a:t>Guardrails include confidence indicators, source records, and user review of uncertain matches.</a:t>
             </a:r>
-            <a:endParaRPr lang="en-US" sz="1700" dirty="0"/>
-          </a:p>
-        </p:txBody>
-      </p:sp>
-      <p:sp>
-        <p:nvSpPr>
-          <p:cNvPr id="9" name="Shape 7"/>
+            <a:endParaRPr lang="en-US" sz="2100" dirty="0"/>
+          </a:p>
+        </p:txBody>
+      </p:sp>
+      <p:sp>
+        <p:nvSpPr>
+          <p:cNvPr id="10" name="Shape 8"/>
           <p:cNvSpPr/>
           <p:nvPr/>
         </p:nvSpPr>
@@ -5126,14 +5279,14 @@
       </p:sp>
       <p:sp>
         <p:nvSpPr>
-          <p:cNvPr id="10" name="Text 8"/>
+          <p:cNvPr id="11" name="Text 9"/>
           <p:cNvSpPr/>
           <p:nvPr/>
         </p:nvSpPr>
         <p:spPr>
           <a:xfrm>
             <a:off x="8074152" y="1563624"/>
-            <a:ext cx="2825496" cy="201168"/>
+            <a:ext cx="2825496" cy="256032"/>
           </a:xfrm>
           <a:prstGeom prst="rect">
             <a:avLst/>
@@ -5149,7 +5302,7 @@
               <a:buNone/>
             </a:pPr>
             <a:r>
-              <a:rPr lang="en-US" sz="950" b="1" dirty="0">
+              <a:rPr lang="en-US" sz="1300" b="1" dirty="0">
                 <a:solidFill>
                   <a:srgbClr val="0068B7"/>
                 </a:solidFill>
@@ -5159,20 +5312,20 @@
               </a:rPr>
               <a:t>Key idea</a:t>
             </a:r>
-            <a:endParaRPr lang="en-US" sz="950" dirty="0"/>
-          </a:p>
-        </p:txBody>
-      </p:sp>
-      <p:sp>
-        <p:nvSpPr>
-          <p:cNvPr id="11" name="Text 9"/>
-          <p:cNvSpPr/>
-          <p:nvPr/>
-        </p:nvSpPr>
-        <p:spPr>
-          <a:xfrm>
-            <a:off x="8074152" y="1856232"/>
-            <a:ext cx="2825496" cy="1261872"/>
+            <a:endParaRPr lang="en-US" sz="1300" dirty="0"/>
+          </a:p>
+        </p:txBody>
+      </p:sp>
+      <p:sp>
+        <p:nvSpPr>
+          <p:cNvPr id="12" name="Text 10"/>
+          <p:cNvSpPr/>
+          <p:nvPr/>
+        </p:nvSpPr>
+        <p:spPr>
+          <a:xfrm>
+            <a:off x="8074152" y="1920240"/>
+            <a:ext cx="2825496" cy="1188720"/>
           </a:xfrm>
           <a:prstGeom prst="rect">
             <a:avLst/>
@@ -5190,7 +5343,7 @@
               <a:buNone/>
             </a:pPr>
             <a:r>
-              <a:rPr lang="en-US" sz="1250" dirty="0">
+              <a:rPr lang="en-US" sz="1550" dirty="0">
                 <a:solidFill>
                   <a:srgbClr val="17364A"/>
                 </a:solidFill>
@@ -5200,13 +5353,13 @@
               </a:rPr>
               <a:t>Hidden linkage uncertainty.</a:t>
             </a:r>
-            <a:endParaRPr lang="en-US" sz="1250" dirty="0"/>
-          </a:p>
-        </p:txBody>
-      </p:sp>
-      <p:sp>
-        <p:nvSpPr>
-          <p:cNvPr id="12" name="Shape 10"/>
+            <a:endParaRPr lang="en-US" sz="1550" dirty="0"/>
+          </a:p>
+        </p:txBody>
+      </p:sp>
+      <p:sp>
+        <p:nvSpPr>
+          <p:cNvPr id="13" name="Shape 11"/>
           <p:cNvSpPr/>
           <p:nvPr/>
         </p:nvSpPr>
@@ -5233,14 +5386,14 @@
       </p:sp>
       <p:sp>
         <p:nvSpPr>
-          <p:cNvPr id="13" name="Text 11"/>
+          <p:cNvPr id="14" name="Text 12"/>
           <p:cNvSpPr/>
           <p:nvPr/>
         </p:nvSpPr>
         <p:spPr>
           <a:xfrm>
             <a:off x="8074152" y="3666744"/>
-            <a:ext cx="2825496" cy="201168"/>
+            <a:ext cx="2825496" cy="256032"/>
           </a:xfrm>
           <a:prstGeom prst="rect">
             <a:avLst/>
@@ -5256,7 +5409,7 @@
               <a:buNone/>
             </a:pPr>
             <a:r>
-              <a:rPr lang="en-US" sz="950" b="1" dirty="0">
+              <a:rPr lang="en-US" sz="1300" b="1" dirty="0">
                 <a:solidFill>
                   <a:srgbClr val="0068B7"/>
                 </a:solidFill>
@@ -5266,20 +5419,20 @@
               </a:rPr>
               <a:t>Use this for</a:t>
             </a:r>
-            <a:endParaRPr lang="en-US" sz="950" dirty="0"/>
-          </a:p>
-        </p:txBody>
-      </p:sp>
-      <p:sp>
-        <p:nvSpPr>
-          <p:cNvPr id="14" name="Text 12"/>
-          <p:cNvSpPr/>
-          <p:nvPr/>
-        </p:nvSpPr>
-        <p:spPr>
-          <a:xfrm>
-            <a:off x="8074152" y="3959352"/>
-            <a:ext cx="2825496" cy="1170432"/>
+            <a:endParaRPr lang="en-US" sz="1300" dirty="0"/>
+          </a:p>
+        </p:txBody>
+      </p:sp>
+      <p:sp>
+        <p:nvSpPr>
+          <p:cNvPr id="15" name="Text 13"/>
+          <p:cNvSpPr/>
+          <p:nvPr/>
+        </p:nvSpPr>
+        <p:spPr>
+          <a:xfrm>
+            <a:off x="8074152" y="4023360"/>
+            <a:ext cx="2825496" cy="1097280"/>
           </a:xfrm>
           <a:prstGeom prst="rect">
             <a:avLst/>
@@ -5297,7 +5450,7 @@
               <a:buNone/>
             </a:pPr>
             <a:r>
-              <a:rPr lang="en-US" sz="1250" dirty="0">
+              <a:rPr lang="en-US" sz="1550" dirty="0">
                 <a:solidFill>
                   <a:srgbClr val="17364A"/>
                 </a:solidFill>
@@ -5307,7 +5460,7 @@
               </a:rPr>
               <a:t>Connect the concept to public health decisions, safeguards, documentation, or implementation work.</a:t>
             </a:r>
-            <a:endParaRPr lang="en-US" sz="1250" dirty="0"/>
+            <a:endParaRPr lang="en-US" sz="1550" dirty="0"/>
           </a:p>
         </p:txBody>
       </p:sp>
@@ -5504,7 +5657,7 @@
                 <a:ea typeface="Aptos" pitchFamily="34" charset="-122"/>
                 <a:cs typeface="Aptos" pitchFamily="34" charset="-120"/>
               </a:rPr>
-              <a:t>© Paula Soper</a:t>
+              <a:t>Â© Paula Soper</a:t>
             </a:r>
             <a:endParaRPr lang="en-US" sz="800" dirty="0"/>
           </a:p>
@@ -5512,7 +5665,46 @@
       </p:sp>
       <p:sp>
         <p:nvSpPr>
-          <p:cNvPr id="7" name="Shape 5"/>
+          <p:cNvPr id="7" name="Text 5"/>
+          <p:cNvSpPr/>
+          <p:nvPr/>
+        </p:nvSpPr>
+        <p:spPr>
+          <a:xfrm>
+            <a:off x="11137392" y="6510528"/>
+            <a:ext cx="411480" cy="201168"/>
+          </a:xfrm>
+          <a:prstGeom prst="rect">
+            <a:avLst/>
+          </a:prstGeom>
+          <a:noFill/>
+          <a:ln/>
+        </p:spPr>
+        <p:txBody>
+          <a:bodyPr wrap="square" lIns="0" tIns="0" rIns="0" bIns="0" rtlCol="0" anchor="ctr"/>
+          <a:lstStyle/>
+          <a:p>
+            <a:pPr algn="r" indent="0" marL="0">
+              <a:buNone/>
+            </a:pPr>
+            <a:r>
+              <a:rPr lang="en-US" sz="900" dirty="0">
+                <a:solidFill>
+                  <a:srgbClr val="5F7181"/>
+                </a:solidFill>
+                <a:latin typeface="Aptos" pitchFamily="34" charset="0"/>
+                <a:ea typeface="Aptos" pitchFamily="34" charset="-122"/>
+                <a:cs typeface="Aptos" pitchFamily="34" charset="-120"/>
+              </a:rPr>
+              <a:t>14</a:t>
+            </a:r>
+            <a:endParaRPr lang="en-US" sz="900" dirty="0"/>
+          </a:p>
+        </p:txBody>
+      </p:sp>
+      <p:sp>
+        <p:nvSpPr>
+          <p:cNvPr id="8" name="Shape 6"/>
           <p:cNvSpPr/>
           <p:nvPr/>
         </p:nvSpPr>
@@ -5537,7 +5729,7 @@
       </p:sp>
       <p:sp>
         <p:nvSpPr>
-          <p:cNvPr id="8" name="Text 6"/>
+          <p:cNvPr id="9" name="Text 7"/>
           <p:cNvSpPr/>
           <p:nvPr/>
         </p:nvSpPr>
@@ -5576,14 +5768,14 @@
       </p:sp>
       <p:sp>
         <p:nvSpPr>
-          <p:cNvPr id="9" name="Text 7"/>
+          <p:cNvPr id="10" name="Text 8"/>
           <p:cNvSpPr/>
           <p:nvPr/>
         </p:nvSpPr>
         <p:spPr>
           <a:xfrm>
             <a:off x="640080" y="621792"/>
-            <a:ext cx="10881360" cy="566928"/>
+            <a:ext cx="10881360" cy="713232"/>
           </a:xfrm>
           <a:prstGeom prst="rect">
             <a:avLst/>
@@ -5601,7 +5793,7 @@
               <a:buNone/>
             </a:pPr>
             <a:r>
-              <a:rPr lang="en-US" sz="2700" b="1" dirty="0">
+              <a:rPr lang="en-US" sz="3400" b="1" dirty="0">
                 <a:solidFill>
                   <a:srgbClr val="003A63"/>
                 </a:solidFill>
@@ -5611,20 +5803,20 @@
               </a:rPr>
               <a:t>Application to AI-Supported Workflows</a:t>
             </a:r>
-            <a:endParaRPr lang="en-US" sz="2700" dirty="0"/>
-          </a:p>
-        </p:txBody>
-      </p:sp>
-      <p:sp>
-        <p:nvSpPr>
-          <p:cNvPr id="10" name="Text 8"/>
-          <p:cNvSpPr/>
-          <p:nvPr/>
-        </p:nvSpPr>
-        <p:spPr>
-          <a:xfrm>
-            <a:off x="868680" y="1417320"/>
-            <a:ext cx="6675120" cy="4434840"/>
+            <a:endParaRPr lang="en-US" sz="3400" dirty="0"/>
+          </a:p>
+        </p:txBody>
+      </p:sp>
+      <p:sp>
+        <p:nvSpPr>
+          <p:cNvPr id="11" name="Text 9"/>
+          <p:cNvSpPr/>
+          <p:nvPr/>
+        </p:nvSpPr>
+        <p:spPr>
+          <a:xfrm>
+            <a:off x="868680" y="1508760"/>
+            <a:ext cx="6537960" cy="4160520"/>
           </a:xfrm>
           <a:prstGeom prst="rect">
             <a:avLst/>
@@ -5639,7 +5831,7 @@
           <a:lstStyle/>
           <a:p>
             <a:r>
-              <a:rPr lang="en-US" sz="1700" dirty="0">
+              <a:rPr lang="en-US" sz="2100" dirty="0">
                 <a:solidFill>
                   <a:srgbClr val="17364A"/>
                 </a:solidFill>
@@ -5647,13 +5839,13 @@
                 <a:ea typeface="Aptos" pitchFamily="34" charset="-122"/>
                 <a:cs typeface="Aptos" pitchFamily="34" charset="-120"/>
               </a:rPr>
-              <a:t>Generative AI may summarize linked records, so source attribution and linkage confidence should be visible.</a:t>
-            </a:r>
-            <a:endParaRPr lang="en-US" sz="1700" dirty="0"/>
-          </a:p>
-          <a:p>
-            <a:r>
-              <a:rPr lang="en-US" sz="1700" dirty="0">
+              <a:t>Generative AI may summarize linked records, so source attribution and linkage confidence should be.</a:t>
+            </a:r>
+            <a:endParaRPr lang="en-US" sz="2100" dirty="0"/>
+          </a:p>
+          <a:p>
+            <a:r>
+              <a:rPr lang="en-US" sz="2100" dirty="0">
                 <a:solidFill>
                   <a:srgbClr val="17364A"/>
                 </a:solidFill>
@@ -5661,13 +5853,13 @@
                 <a:ea typeface="Aptos" pitchFamily="34" charset="-122"/>
                 <a:cs typeface="Aptos" pitchFamily="34" charset="-120"/>
               </a:rPr>
-              <a:t>Predictive analytics may use features created from linked records, making match quality part of model validity.</a:t>
-            </a:r>
-            <a:endParaRPr lang="en-US" sz="1700" dirty="0"/>
-          </a:p>
-          <a:p>
-            <a:r>
-              <a:rPr lang="en-US" sz="1700" dirty="0">
+              <a:t>Predictive analytics may use features created from linked records, making match quality part of model.</a:t>
+            </a:r>
+            <a:endParaRPr lang="en-US" sz="2100" dirty="0"/>
+          </a:p>
+          <a:p>
+            <a:r>
+              <a:rPr lang="en-US" sz="2100" dirty="0">
                 <a:solidFill>
                   <a:srgbClr val="17364A"/>
                 </a:solidFill>
@@ -5677,27 +5869,13 @@
               </a:rPr>
               <a:t>NLP may extract identifiers from text to support linkage, which requires privacy and accuracy review.</a:t>
             </a:r>
-            <a:endParaRPr lang="en-US" sz="1700" dirty="0"/>
-          </a:p>
-          <a:p>
-            <a:r>
-              <a:rPr lang="en-US" sz="1700" dirty="0">
-                <a:solidFill>
-                  <a:srgbClr val="17364A"/>
-                </a:solidFill>
-                <a:latin typeface="Aptos" pitchFamily="34" charset="0"/>
-                <a:ea typeface="Aptos" pitchFamily="34" charset="-122"/>
-                <a:cs typeface="Aptos" pitchFamily="34" charset="-120"/>
-              </a:rPr>
-              <a:t>Agentic AI should not automatically merge or update records without strong approval and rollback procedures.</a:t>
-            </a:r>
-            <a:endParaRPr lang="en-US" sz="1700" dirty="0"/>
-          </a:p>
-        </p:txBody>
-      </p:sp>
-      <p:sp>
-        <p:nvSpPr>
-          <p:cNvPr id="11" name="Shape 9"/>
+            <a:endParaRPr lang="en-US" sz="2100" dirty="0"/>
+          </a:p>
+        </p:txBody>
+      </p:sp>
+      <p:sp>
+        <p:nvSpPr>
+          <p:cNvPr id="12" name="Shape 10"/>
           <p:cNvSpPr/>
           <p:nvPr/>
         </p:nvSpPr>
@@ -5724,14 +5902,14 @@
       </p:sp>
       <p:sp>
         <p:nvSpPr>
-          <p:cNvPr id="12" name="Text 10"/>
+          <p:cNvPr id="13" name="Text 11"/>
           <p:cNvSpPr/>
           <p:nvPr/>
         </p:nvSpPr>
         <p:spPr>
           <a:xfrm>
             <a:off x="8074152" y="1563624"/>
-            <a:ext cx="2825496" cy="201168"/>
+            <a:ext cx="2825496" cy="256032"/>
           </a:xfrm>
           <a:prstGeom prst="rect">
             <a:avLst/>
@@ -5747,7 +5925,7 @@
               <a:buNone/>
             </a:pPr>
             <a:r>
-              <a:rPr lang="en-US" sz="950" b="1" dirty="0">
+              <a:rPr lang="en-US" sz="1300" b="1" dirty="0">
                 <a:solidFill>
                   <a:srgbClr val="0068B7"/>
                 </a:solidFill>
@@ -5757,20 +5935,20 @@
               </a:rPr>
               <a:t>Key idea</a:t>
             </a:r>
-            <a:endParaRPr lang="en-US" sz="950" dirty="0"/>
-          </a:p>
-        </p:txBody>
-      </p:sp>
-      <p:sp>
-        <p:nvSpPr>
-          <p:cNvPr id="13" name="Text 11"/>
-          <p:cNvSpPr/>
-          <p:nvPr/>
-        </p:nvSpPr>
-        <p:spPr>
-          <a:xfrm>
-            <a:off x="8074152" y="1856232"/>
-            <a:ext cx="2825496" cy="1261872"/>
+            <a:endParaRPr lang="en-US" sz="1300" dirty="0"/>
+          </a:p>
+        </p:txBody>
+      </p:sp>
+      <p:sp>
+        <p:nvSpPr>
+          <p:cNvPr id="14" name="Text 12"/>
+          <p:cNvSpPr/>
+          <p:nvPr/>
+        </p:nvSpPr>
+        <p:spPr>
+          <a:xfrm>
+            <a:off x="8074152" y="1920240"/>
+            <a:ext cx="2825496" cy="1188720"/>
           </a:xfrm>
           <a:prstGeom prst="rect">
             <a:avLst/>
@@ -5788,7 +5966,7 @@
               <a:buNone/>
             </a:pPr>
             <a:r>
-              <a:rPr lang="en-US" sz="1250" dirty="0">
+              <a:rPr lang="en-US" sz="1550" dirty="0">
                 <a:solidFill>
                   <a:srgbClr val="17364A"/>
                 </a:solidFill>
@@ -5796,15 +5974,15 @@
                 <a:ea typeface="Aptos" pitchFamily="34" charset="-122"/>
                 <a:cs typeface="Aptos" pitchFamily="34" charset="-120"/>
               </a:rPr>
-              <a:t>Generative AI may summarize linked records, so source attribution and linkage confidence should be visible.</a:t>
-            </a:r>
-            <a:endParaRPr lang="en-US" sz="1250" dirty="0"/>
-          </a:p>
-        </p:txBody>
-      </p:sp>
-      <p:sp>
-        <p:nvSpPr>
-          <p:cNvPr id="14" name="Shape 12"/>
+              <a:t>Generative AI may summarize linked records, so source attribution and linkage confidence should be.</a:t>
+            </a:r>
+            <a:endParaRPr lang="en-US" sz="1550" dirty="0"/>
+          </a:p>
+        </p:txBody>
+      </p:sp>
+      <p:sp>
+        <p:nvSpPr>
+          <p:cNvPr id="15" name="Shape 13"/>
           <p:cNvSpPr/>
           <p:nvPr/>
         </p:nvSpPr>
@@ -5831,14 +6009,14 @@
       </p:sp>
       <p:sp>
         <p:nvSpPr>
-          <p:cNvPr id="15" name="Text 13"/>
+          <p:cNvPr id="16" name="Text 14"/>
           <p:cNvSpPr/>
           <p:nvPr/>
         </p:nvSpPr>
         <p:spPr>
           <a:xfrm>
             <a:off x="8074152" y="3666744"/>
-            <a:ext cx="2825496" cy="201168"/>
+            <a:ext cx="2825496" cy="256032"/>
           </a:xfrm>
           <a:prstGeom prst="rect">
             <a:avLst/>
@@ -5854,7 +6032,7 @@
               <a:buNone/>
             </a:pPr>
             <a:r>
-              <a:rPr lang="en-US" sz="950" b="1" dirty="0">
+              <a:rPr lang="en-US" sz="1300" b="1" dirty="0">
                 <a:solidFill>
                   <a:srgbClr val="0068B7"/>
                 </a:solidFill>
@@ -5864,20 +6042,20 @@
               </a:rPr>
               <a:t>Use this for</a:t>
             </a:r>
-            <a:endParaRPr lang="en-US" sz="950" dirty="0"/>
-          </a:p>
-        </p:txBody>
-      </p:sp>
-      <p:sp>
-        <p:nvSpPr>
-          <p:cNvPr id="16" name="Text 14"/>
-          <p:cNvSpPr/>
-          <p:nvPr/>
-        </p:nvSpPr>
-        <p:spPr>
-          <a:xfrm>
-            <a:off x="8074152" y="3959352"/>
-            <a:ext cx="2825496" cy="1170432"/>
+            <a:endParaRPr lang="en-US" sz="1300" dirty="0"/>
+          </a:p>
+        </p:txBody>
+      </p:sp>
+      <p:sp>
+        <p:nvSpPr>
+          <p:cNvPr id="17" name="Text 15"/>
+          <p:cNvSpPr/>
+          <p:nvPr/>
+        </p:nvSpPr>
+        <p:spPr>
+          <a:xfrm>
+            <a:off x="8074152" y="4023360"/>
+            <a:ext cx="2825496" cy="1097280"/>
           </a:xfrm>
           <a:prstGeom prst="rect">
             <a:avLst/>
@@ -5895,7 +6073,7 @@
               <a:buNone/>
             </a:pPr>
             <a:r>
-              <a:rPr lang="en-US" sz="1250" dirty="0">
+              <a:rPr lang="en-US" sz="1550" dirty="0">
                 <a:solidFill>
                   <a:srgbClr val="17364A"/>
                 </a:solidFill>
@@ -5905,7 +6083,7 @@
               </a:rPr>
               <a:t>Connect the concept to public health decisions, safeguards, documentation, or implementation work.</a:t>
             </a:r>
-            <a:endParaRPr lang="en-US" sz="1250" dirty="0"/>
+            <a:endParaRPr lang="en-US" sz="1550" dirty="0"/>
           </a:p>
         </p:txBody>
       </p:sp>
@@ -6102,7 +6280,7 @@
                 <a:ea typeface="Aptos" pitchFamily="34" charset="-122"/>
                 <a:cs typeface="Aptos" pitchFamily="34" charset="-120"/>
               </a:rPr>
-              <a:t>© Paula Soper</a:t>
+              <a:t>Â© Paula Soper</a:t>
             </a:r>
             <a:endParaRPr lang="en-US" sz="800" dirty="0"/>
           </a:p>
@@ -6110,7 +6288,46 @@
       </p:sp>
       <p:sp>
         <p:nvSpPr>
-          <p:cNvPr id="7" name="Shape 5"/>
+          <p:cNvPr id="7" name="Text 5"/>
+          <p:cNvSpPr/>
+          <p:nvPr/>
+        </p:nvSpPr>
+        <p:spPr>
+          <a:xfrm>
+            <a:off x="11137392" y="6510528"/>
+            <a:ext cx="411480" cy="201168"/>
+          </a:xfrm>
+          <a:prstGeom prst="rect">
+            <a:avLst/>
+          </a:prstGeom>
+          <a:noFill/>
+          <a:ln/>
+        </p:spPr>
+        <p:txBody>
+          <a:bodyPr wrap="square" lIns="0" tIns="0" rIns="0" bIns="0" rtlCol="0" anchor="ctr"/>
+          <a:lstStyle/>
+          <a:p>
+            <a:pPr algn="r" indent="0" marL="0">
+              <a:buNone/>
+            </a:pPr>
+            <a:r>
+              <a:rPr lang="en-US" sz="900" dirty="0">
+                <a:solidFill>
+                  <a:srgbClr val="5F7181"/>
+                </a:solidFill>
+                <a:latin typeface="Aptos" pitchFamily="34" charset="0"/>
+                <a:ea typeface="Aptos" pitchFamily="34" charset="-122"/>
+                <a:cs typeface="Aptos" pitchFamily="34" charset="-120"/>
+              </a:rPr>
+              <a:t>15</a:t>
+            </a:r>
+            <a:endParaRPr lang="en-US" sz="900" dirty="0"/>
+          </a:p>
+        </p:txBody>
+      </p:sp>
+      <p:sp>
+        <p:nvSpPr>
+          <p:cNvPr id="8" name="Shape 6"/>
           <p:cNvSpPr/>
           <p:nvPr/>
         </p:nvSpPr>
@@ -6135,7 +6352,7 @@
       </p:sp>
       <p:sp>
         <p:nvSpPr>
-          <p:cNvPr id="8" name="Text 6"/>
+          <p:cNvPr id="9" name="Text 7"/>
           <p:cNvSpPr/>
           <p:nvPr/>
         </p:nvSpPr>
@@ -6174,14 +6391,14 @@
       </p:sp>
       <p:sp>
         <p:nvSpPr>
-          <p:cNvPr id="9" name="Text 7"/>
+          <p:cNvPr id="10" name="Text 8"/>
           <p:cNvSpPr/>
           <p:nvPr/>
         </p:nvSpPr>
         <p:spPr>
           <a:xfrm>
             <a:off x="640080" y="621792"/>
-            <a:ext cx="10881360" cy="566928"/>
+            <a:ext cx="10881360" cy="713232"/>
           </a:xfrm>
           <a:prstGeom prst="rect">
             <a:avLst/>
@@ -6199,7 +6416,7 @@
               <a:buNone/>
             </a:pPr>
             <a:r>
-              <a:rPr lang="en-US" sz="2700" b="1" dirty="0">
+              <a:rPr lang="en-US" sz="3400" b="1" dirty="0">
                 <a:solidFill>
                   <a:srgbClr val="003A63"/>
                 </a:solidFill>
@@ -6209,20 +6426,20 @@
               </a:rPr>
               <a:t>Reflection Questions</a:t>
             </a:r>
-            <a:endParaRPr lang="en-US" sz="2700" dirty="0"/>
-          </a:p>
-        </p:txBody>
-      </p:sp>
-      <p:sp>
-        <p:nvSpPr>
-          <p:cNvPr id="10" name="Text 8"/>
-          <p:cNvSpPr/>
-          <p:nvPr/>
-        </p:nvSpPr>
-        <p:spPr>
-          <a:xfrm>
-            <a:off x="868680" y="1417320"/>
-            <a:ext cx="6675120" cy="4434840"/>
+            <a:endParaRPr lang="en-US" sz="3400" dirty="0"/>
+          </a:p>
+        </p:txBody>
+      </p:sp>
+      <p:sp>
+        <p:nvSpPr>
+          <p:cNvPr id="11" name="Text 9"/>
+          <p:cNvSpPr/>
+          <p:nvPr/>
+        </p:nvSpPr>
+        <p:spPr>
+          <a:xfrm>
+            <a:off x="868680" y="1508760"/>
+            <a:ext cx="6537960" cy="4160520"/>
           </a:xfrm>
           <a:prstGeom prst="rect">
             <a:avLst/>
@@ -6237,7 +6454,7 @@
           <a:lstStyle/>
           <a:p>
             <a:r>
-              <a:rPr lang="en-US" sz="1700" dirty="0">
+              <a:rPr lang="en-US" sz="2100" dirty="0">
                 <a:solidFill>
                   <a:srgbClr val="17364A"/>
                 </a:solidFill>
@@ -6247,11 +6464,11 @@
               </a:rPr>
               <a:t>Which workflows in your agency depend on matching records across systems?</a:t>
             </a:r>
-            <a:endParaRPr lang="en-US" sz="1700" dirty="0"/>
-          </a:p>
-          <a:p>
-            <a:r>
-              <a:rPr lang="en-US" sz="1700" dirty="0">
+            <a:endParaRPr lang="en-US" sz="2100" dirty="0"/>
+          </a:p>
+          <a:p>
+            <a:r>
+              <a:rPr lang="en-US" sz="2100" dirty="0">
                 <a:solidFill>
                   <a:srgbClr val="17364A"/>
                 </a:solidFill>
@@ -6261,11 +6478,11 @@
               </a:rPr>
               <a:t>What fields are used for matching, and how complete are they?</a:t>
             </a:r>
-            <a:endParaRPr lang="en-US" sz="1700" dirty="0"/>
-          </a:p>
-          <a:p>
-            <a:r>
-              <a:rPr lang="en-US" sz="1700" dirty="0">
+            <a:endParaRPr lang="en-US" sz="2100" dirty="0"/>
+          </a:p>
+          <a:p>
+            <a:r>
+              <a:rPr lang="en-US" sz="2100" dirty="0">
                 <a:solidFill>
                   <a:srgbClr val="17364A"/>
                 </a:solidFill>
@@ -6275,13 +6492,13 @@
               </a:rPr>
               <a:t>Which populations may be more likely to experience missed or incorrect matches?</a:t>
             </a:r>
-            <a:endParaRPr lang="en-US" sz="1700" dirty="0"/>
-          </a:p>
-        </p:txBody>
-      </p:sp>
-      <p:sp>
-        <p:nvSpPr>
-          <p:cNvPr id="11" name="Shape 9"/>
+            <a:endParaRPr lang="en-US" sz="2100" dirty="0"/>
+          </a:p>
+        </p:txBody>
+      </p:sp>
+      <p:sp>
+        <p:nvSpPr>
+          <p:cNvPr id="12" name="Shape 10"/>
           <p:cNvSpPr/>
           <p:nvPr/>
         </p:nvSpPr>
@@ -6308,14 +6525,14 @@
       </p:sp>
       <p:sp>
         <p:nvSpPr>
-          <p:cNvPr id="12" name="Text 10"/>
+          <p:cNvPr id="13" name="Text 11"/>
           <p:cNvSpPr/>
           <p:nvPr/>
         </p:nvSpPr>
         <p:spPr>
           <a:xfrm>
             <a:off x="8074152" y="1563624"/>
-            <a:ext cx="2825496" cy="201168"/>
+            <a:ext cx="2825496" cy="256032"/>
           </a:xfrm>
           <a:prstGeom prst="rect">
             <a:avLst/>
@@ -6331,7 +6548,7 @@
               <a:buNone/>
             </a:pPr>
             <a:r>
-              <a:rPr lang="en-US" sz="950" b="1" dirty="0">
+              <a:rPr lang="en-US" sz="1300" b="1" dirty="0">
                 <a:solidFill>
                   <a:srgbClr val="0068B7"/>
                 </a:solidFill>
@@ -6341,20 +6558,20 @@
               </a:rPr>
               <a:t>Key idea</a:t>
             </a:r>
-            <a:endParaRPr lang="en-US" sz="950" dirty="0"/>
-          </a:p>
-        </p:txBody>
-      </p:sp>
-      <p:sp>
-        <p:nvSpPr>
-          <p:cNvPr id="13" name="Text 11"/>
-          <p:cNvSpPr/>
-          <p:nvPr/>
-        </p:nvSpPr>
-        <p:spPr>
-          <a:xfrm>
-            <a:off x="8074152" y="1856232"/>
-            <a:ext cx="2825496" cy="1261872"/>
+            <a:endParaRPr lang="en-US" sz="1300" dirty="0"/>
+          </a:p>
+        </p:txBody>
+      </p:sp>
+      <p:sp>
+        <p:nvSpPr>
+          <p:cNvPr id="14" name="Text 12"/>
+          <p:cNvSpPr/>
+          <p:nvPr/>
+        </p:nvSpPr>
+        <p:spPr>
+          <a:xfrm>
+            <a:off x="8074152" y="1920240"/>
+            <a:ext cx="2825496" cy="1188720"/>
           </a:xfrm>
           <a:prstGeom prst="rect">
             <a:avLst/>
@@ -6372,7 +6589,7 @@
               <a:buNone/>
             </a:pPr>
             <a:r>
-              <a:rPr lang="en-US" sz="1250" dirty="0">
+              <a:rPr lang="en-US" sz="1550" dirty="0">
                 <a:solidFill>
                   <a:srgbClr val="17364A"/>
                 </a:solidFill>
@@ -6382,13 +6599,13 @@
               </a:rPr>
               <a:t>Which workflows in your agency depend on matching records across systems?</a:t>
             </a:r>
-            <a:endParaRPr lang="en-US" sz="1250" dirty="0"/>
-          </a:p>
-        </p:txBody>
-      </p:sp>
-      <p:sp>
-        <p:nvSpPr>
-          <p:cNvPr id="14" name="Shape 12"/>
+            <a:endParaRPr lang="en-US" sz="1550" dirty="0"/>
+          </a:p>
+        </p:txBody>
+      </p:sp>
+      <p:sp>
+        <p:nvSpPr>
+          <p:cNvPr id="15" name="Shape 13"/>
           <p:cNvSpPr/>
           <p:nvPr/>
         </p:nvSpPr>
@@ -6415,14 +6632,14 @@
       </p:sp>
       <p:sp>
         <p:nvSpPr>
-          <p:cNvPr id="15" name="Text 13"/>
+          <p:cNvPr id="16" name="Text 14"/>
           <p:cNvSpPr/>
           <p:nvPr/>
         </p:nvSpPr>
         <p:spPr>
           <a:xfrm>
             <a:off x="8074152" y="3666744"/>
-            <a:ext cx="2825496" cy="201168"/>
+            <a:ext cx="2825496" cy="256032"/>
           </a:xfrm>
           <a:prstGeom prst="rect">
             <a:avLst/>
@@ -6438,7 +6655,7 @@
               <a:buNone/>
             </a:pPr>
             <a:r>
-              <a:rPr lang="en-US" sz="950" b="1" dirty="0">
+              <a:rPr lang="en-US" sz="1300" b="1" dirty="0">
                 <a:solidFill>
                   <a:srgbClr val="0068B7"/>
                 </a:solidFill>
@@ -6448,20 +6665,20 @@
               </a:rPr>
               <a:t>Use this for</a:t>
             </a:r>
-            <a:endParaRPr lang="en-US" sz="950" dirty="0"/>
-          </a:p>
-        </p:txBody>
-      </p:sp>
-      <p:sp>
-        <p:nvSpPr>
-          <p:cNvPr id="16" name="Text 14"/>
-          <p:cNvSpPr/>
-          <p:nvPr/>
-        </p:nvSpPr>
-        <p:spPr>
-          <a:xfrm>
-            <a:off x="8074152" y="3959352"/>
-            <a:ext cx="2825496" cy="1170432"/>
+            <a:endParaRPr lang="en-US" sz="1300" dirty="0"/>
+          </a:p>
+        </p:txBody>
+      </p:sp>
+      <p:sp>
+        <p:nvSpPr>
+          <p:cNvPr id="17" name="Text 15"/>
+          <p:cNvSpPr/>
+          <p:nvPr/>
+        </p:nvSpPr>
+        <p:spPr>
+          <a:xfrm>
+            <a:off x="8074152" y="4023360"/>
+            <a:ext cx="2825496" cy="1097280"/>
           </a:xfrm>
           <a:prstGeom prst="rect">
             <a:avLst/>
@@ -6479,7 +6696,7 @@
               <a:buNone/>
             </a:pPr>
             <a:r>
-              <a:rPr lang="en-US" sz="1250" dirty="0">
+              <a:rPr lang="en-US" sz="1550" dirty="0">
                 <a:solidFill>
                   <a:srgbClr val="17364A"/>
                 </a:solidFill>
@@ -6489,7 +6706,7 @@
               </a:rPr>
               <a:t>Connect the concept to public health decisions, safeguards, documentation, or implementation work.</a:t>
             </a:r>
-            <a:endParaRPr lang="en-US" sz="1250" dirty="0"/>
+            <a:endParaRPr lang="en-US" sz="1550" dirty="0"/>
           </a:p>
         </p:txBody>
       </p:sp>
@@ -6686,7 +6903,7 @@
                 <a:ea typeface="Aptos" pitchFamily="34" charset="-122"/>
                 <a:cs typeface="Aptos" pitchFamily="34" charset="-120"/>
               </a:rPr>
-              <a:t>© Paula Soper</a:t>
+              <a:t>Â© Paula Soper</a:t>
             </a:r>
             <a:endParaRPr lang="en-US" sz="800" dirty="0"/>
           </a:p>
@@ -6700,8 +6917,47 @@
         </p:nvSpPr>
         <p:spPr>
           <a:xfrm>
+            <a:off x="11137392" y="6510528"/>
+            <a:ext cx="411480" cy="201168"/>
+          </a:xfrm>
+          <a:prstGeom prst="rect">
+            <a:avLst/>
+          </a:prstGeom>
+          <a:noFill/>
+          <a:ln/>
+        </p:spPr>
+        <p:txBody>
+          <a:bodyPr wrap="square" lIns="0" tIns="0" rIns="0" bIns="0" rtlCol="0" anchor="ctr"/>
+          <a:lstStyle/>
+          <a:p>
+            <a:pPr algn="r" indent="0" marL="0">
+              <a:buNone/>
+            </a:pPr>
+            <a:r>
+              <a:rPr lang="en-US" sz="900" dirty="0">
+                <a:solidFill>
+                  <a:srgbClr val="5F7181"/>
+                </a:solidFill>
+                <a:latin typeface="Aptos" pitchFamily="34" charset="0"/>
+                <a:ea typeface="Aptos" pitchFamily="34" charset="-122"/>
+                <a:cs typeface="Aptos" pitchFamily="34" charset="-120"/>
+              </a:rPr>
+              <a:t>16</a:t>
+            </a:r>
+            <a:endParaRPr lang="en-US" sz="900" dirty="0"/>
+          </a:p>
+        </p:txBody>
+      </p:sp>
+      <p:sp>
+        <p:nvSpPr>
+          <p:cNvPr id="8" name="Text 6"/>
+          <p:cNvSpPr/>
+          <p:nvPr/>
+        </p:nvSpPr>
+        <p:spPr>
+          <a:xfrm>
             <a:off x="640080" y="658368"/>
-            <a:ext cx="10881360" cy="566928"/>
+            <a:ext cx="10881360" cy="713232"/>
           </a:xfrm>
           <a:prstGeom prst="rect">
             <a:avLst/>
@@ -6719,7 +6975,7 @@
               <a:buNone/>
             </a:pPr>
             <a:r>
-              <a:rPr lang="en-US" sz="2700" b="1" dirty="0">
+              <a:rPr lang="en-US" sz="3400" b="1" dirty="0">
                 <a:solidFill>
                   <a:srgbClr val="003A63"/>
                 </a:solidFill>
@@ -6729,20 +6985,20 @@
               </a:rPr>
               <a:t>Reflection Questions Continued</a:t>
             </a:r>
-            <a:endParaRPr lang="en-US" sz="2700" dirty="0"/>
-          </a:p>
-        </p:txBody>
-      </p:sp>
-      <p:sp>
-        <p:nvSpPr>
-          <p:cNvPr id="8" name="Text 6"/>
-          <p:cNvSpPr/>
-          <p:nvPr/>
-        </p:nvSpPr>
-        <p:spPr>
-          <a:xfrm>
-            <a:off x="868680" y="1417320"/>
-            <a:ext cx="6675120" cy="4434840"/>
+            <a:endParaRPr lang="en-US" sz="3400" dirty="0"/>
+          </a:p>
+        </p:txBody>
+      </p:sp>
+      <p:sp>
+        <p:nvSpPr>
+          <p:cNvPr id="9" name="Text 7"/>
+          <p:cNvSpPr/>
+          <p:nvPr/>
+        </p:nvSpPr>
+        <p:spPr>
+          <a:xfrm>
+            <a:off x="868680" y="1508760"/>
+            <a:ext cx="6537960" cy="4160520"/>
           </a:xfrm>
           <a:prstGeom prst="rect">
             <a:avLst/>
@@ -6757,7 +7013,7 @@
           <a:lstStyle/>
           <a:p>
             <a:r>
-              <a:rPr lang="en-US" sz="1700" dirty="0">
+              <a:rPr lang="en-US" sz="2100" dirty="0">
                 <a:solidFill>
                   <a:srgbClr val="17364A"/>
                 </a:solidFill>
@@ -6767,11 +7023,11 @@
               </a:rPr>
               <a:t>What happens when records are incorrectly merged or not merged?</a:t>
             </a:r>
-            <a:endParaRPr lang="en-US" sz="1700" dirty="0"/>
-          </a:p>
-          <a:p>
-            <a:r>
-              <a:rPr lang="en-US" sz="1700" dirty="0">
+            <a:endParaRPr lang="en-US" sz="2100" dirty="0"/>
+          </a:p>
+          <a:p>
+            <a:r>
+              <a:rPr lang="en-US" sz="2100" dirty="0">
                 <a:solidFill>
                   <a:srgbClr val="17364A"/>
                 </a:solidFill>
@@ -6781,13 +7037,13 @@
               </a:rPr>
               <a:t>Where should human review be required?</a:t>
             </a:r>
-            <a:endParaRPr lang="en-US" sz="1700" dirty="0"/>
-          </a:p>
-        </p:txBody>
-      </p:sp>
-      <p:sp>
-        <p:nvSpPr>
-          <p:cNvPr id="9" name="Shape 7"/>
+            <a:endParaRPr lang="en-US" sz="2100" dirty="0"/>
+          </a:p>
+        </p:txBody>
+      </p:sp>
+      <p:sp>
+        <p:nvSpPr>
+          <p:cNvPr id="10" name="Shape 8"/>
           <p:cNvSpPr/>
           <p:nvPr/>
         </p:nvSpPr>
@@ -6814,14 +7070,14 @@
       </p:sp>
       <p:sp>
         <p:nvSpPr>
-          <p:cNvPr id="10" name="Text 8"/>
+          <p:cNvPr id="11" name="Text 9"/>
           <p:cNvSpPr/>
           <p:nvPr/>
         </p:nvSpPr>
         <p:spPr>
           <a:xfrm>
             <a:off x="8074152" y="1563624"/>
-            <a:ext cx="2825496" cy="201168"/>
+            <a:ext cx="2825496" cy="256032"/>
           </a:xfrm>
           <a:prstGeom prst="rect">
             <a:avLst/>
@@ -6837,7 +7093,7 @@
               <a:buNone/>
             </a:pPr>
             <a:r>
-              <a:rPr lang="en-US" sz="950" b="1" dirty="0">
+              <a:rPr lang="en-US" sz="1300" b="1" dirty="0">
                 <a:solidFill>
                   <a:srgbClr val="0068B7"/>
                 </a:solidFill>
@@ -6847,20 +7103,20 @@
               </a:rPr>
               <a:t>Key idea</a:t>
             </a:r>
-            <a:endParaRPr lang="en-US" sz="950" dirty="0"/>
-          </a:p>
-        </p:txBody>
-      </p:sp>
-      <p:sp>
-        <p:nvSpPr>
-          <p:cNvPr id="11" name="Text 9"/>
-          <p:cNvSpPr/>
-          <p:nvPr/>
-        </p:nvSpPr>
-        <p:spPr>
-          <a:xfrm>
-            <a:off x="8074152" y="1856232"/>
-            <a:ext cx="2825496" cy="1261872"/>
+            <a:endParaRPr lang="en-US" sz="1300" dirty="0"/>
+          </a:p>
+        </p:txBody>
+      </p:sp>
+      <p:sp>
+        <p:nvSpPr>
+          <p:cNvPr id="12" name="Text 10"/>
+          <p:cNvSpPr/>
+          <p:nvPr/>
+        </p:nvSpPr>
+        <p:spPr>
+          <a:xfrm>
+            <a:off x="8074152" y="1920240"/>
+            <a:ext cx="2825496" cy="1188720"/>
           </a:xfrm>
           <a:prstGeom prst="rect">
             <a:avLst/>
@@ -6878,7 +7134,7 @@
               <a:buNone/>
             </a:pPr>
             <a:r>
-              <a:rPr lang="en-US" sz="1250" dirty="0">
+              <a:rPr lang="en-US" sz="1550" dirty="0">
                 <a:solidFill>
                   <a:srgbClr val="17364A"/>
                 </a:solidFill>
@@ -6888,13 +7144,13 @@
               </a:rPr>
               <a:t>What happens when records are incorrectly merged or not merged?</a:t>
             </a:r>
-            <a:endParaRPr lang="en-US" sz="1250" dirty="0"/>
-          </a:p>
-        </p:txBody>
-      </p:sp>
-      <p:sp>
-        <p:nvSpPr>
-          <p:cNvPr id="12" name="Shape 10"/>
+            <a:endParaRPr lang="en-US" sz="1550" dirty="0"/>
+          </a:p>
+        </p:txBody>
+      </p:sp>
+      <p:sp>
+        <p:nvSpPr>
+          <p:cNvPr id="13" name="Shape 11"/>
           <p:cNvSpPr/>
           <p:nvPr/>
         </p:nvSpPr>
@@ -6921,14 +7177,14 @@
       </p:sp>
       <p:sp>
         <p:nvSpPr>
-          <p:cNvPr id="13" name="Text 11"/>
+          <p:cNvPr id="14" name="Text 12"/>
           <p:cNvSpPr/>
           <p:nvPr/>
         </p:nvSpPr>
         <p:spPr>
           <a:xfrm>
             <a:off x="8074152" y="3666744"/>
-            <a:ext cx="2825496" cy="201168"/>
+            <a:ext cx="2825496" cy="256032"/>
           </a:xfrm>
           <a:prstGeom prst="rect">
             <a:avLst/>
@@ -6944,7 +7200,7 @@
               <a:buNone/>
             </a:pPr>
             <a:r>
-              <a:rPr lang="en-US" sz="950" b="1" dirty="0">
+              <a:rPr lang="en-US" sz="1300" b="1" dirty="0">
                 <a:solidFill>
                   <a:srgbClr val="0068B7"/>
                 </a:solidFill>
@@ -6954,20 +7210,20 @@
               </a:rPr>
               <a:t>Use this for</a:t>
             </a:r>
-            <a:endParaRPr lang="en-US" sz="950" dirty="0"/>
-          </a:p>
-        </p:txBody>
-      </p:sp>
-      <p:sp>
-        <p:nvSpPr>
-          <p:cNvPr id="14" name="Text 12"/>
-          <p:cNvSpPr/>
-          <p:nvPr/>
-        </p:nvSpPr>
-        <p:spPr>
-          <a:xfrm>
-            <a:off x="8074152" y="3959352"/>
-            <a:ext cx="2825496" cy="1170432"/>
+            <a:endParaRPr lang="en-US" sz="1300" dirty="0"/>
+          </a:p>
+        </p:txBody>
+      </p:sp>
+      <p:sp>
+        <p:nvSpPr>
+          <p:cNvPr id="15" name="Text 13"/>
+          <p:cNvSpPr/>
+          <p:nvPr/>
+        </p:nvSpPr>
+        <p:spPr>
+          <a:xfrm>
+            <a:off x="8074152" y="4023360"/>
+            <a:ext cx="2825496" cy="1097280"/>
           </a:xfrm>
           <a:prstGeom prst="rect">
             <a:avLst/>
@@ -6985,7 +7241,7 @@
               <a:buNone/>
             </a:pPr>
             <a:r>
-              <a:rPr lang="en-US" sz="1250" dirty="0">
+              <a:rPr lang="en-US" sz="1550" dirty="0">
                 <a:solidFill>
                   <a:srgbClr val="17364A"/>
                 </a:solidFill>
@@ -6995,7 +7251,7 @@
               </a:rPr>
               <a:t>Connect the concept to public health decisions, safeguards, documentation, or implementation work.</a:t>
             </a:r>
-            <a:endParaRPr lang="en-US" sz="1250" dirty="0"/>
+            <a:endParaRPr lang="en-US" sz="1550" dirty="0"/>
           </a:p>
         </p:txBody>
       </p:sp>
@@ -7192,7 +7448,7 @@
                 <a:ea typeface="Aptos" pitchFamily="34" charset="-122"/>
                 <a:cs typeface="Aptos" pitchFamily="34" charset="-120"/>
               </a:rPr>
-              <a:t>© Paula Soper</a:t>
+              <a:t>Â© Paula Soper</a:t>
             </a:r>
             <a:endParaRPr lang="en-US" sz="800" dirty="0"/>
           </a:p>
@@ -7200,7 +7456,46 @@
       </p:sp>
       <p:sp>
         <p:nvSpPr>
-          <p:cNvPr id="7" name="Shape 5"/>
+          <p:cNvPr id="7" name="Text 5"/>
+          <p:cNvSpPr/>
+          <p:nvPr/>
+        </p:nvSpPr>
+        <p:spPr>
+          <a:xfrm>
+            <a:off x="11137392" y="6510528"/>
+            <a:ext cx="411480" cy="201168"/>
+          </a:xfrm>
+          <a:prstGeom prst="rect">
+            <a:avLst/>
+          </a:prstGeom>
+          <a:noFill/>
+          <a:ln/>
+        </p:spPr>
+        <p:txBody>
+          <a:bodyPr wrap="square" lIns="0" tIns="0" rIns="0" bIns="0" rtlCol="0" anchor="ctr"/>
+          <a:lstStyle/>
+          <a:p>
+            <a:pPr algn="r" indent="0" marL="0">
+              <a:buNone/>
+            </a:pPr>
+            <a:r>
+              <a:rPr lang="en-US" sz="900" dirty="0">
+                <a:solidFill>
+                  <a:srgbClr val="5F7181"/>
+                </a:solidFill>
+                <a:latin typeface="Aptos" pitchFamily="34" charset="0"/>
+                <a:ea typeface="Aptos" pitchFamily="34" charset="-122"/>
+                <a:cs typeface="Aptos" pitchFamily="34" charset="-120"/>
+              </a:rPr>
+              <a:t>17</a:t>
+            </a:r>
+            <a:endParaRPr lang="en-US" sz="900" dirty="0"/>
+          </a:p>
+        </p:txBody>
+      </p:sp>
+      <p:sp>
+        <p:nvSpPr>
+          <p:cNvPr id="8" name="Shape 6"/>
           <p:cNvSpPr/>
           <p:nvPr/>
         </p:nvSpPr>
@@ -7225,7 +7520,7 @@
       </p:sp>
       <p:sp>
         <p:nvSpPr>
-          <p:cNvPr id="8" name="Text 6"/>
+          <p:cNvPr id="9" name="Text 7"/>
           <p:cNvSpPr/>
           <p:nvPr/>
         </p:nvSpPr>
@@ -7264,14 +7559,14 @@
       </p:sp>
       <p:sp>
         <p:nvSpPr>
-          <p:cNvPr id="9" name="Text 7"/>
+          <p:cNvPr id="10" name="Text 8"/>
           <p:cNvSpPr/>
           <p:nvPr/>
         </p:nvSpPr>
         <p:spPr>
           <a:xfrm>
             <a:off x="640080" y="621792"/>
-            <a:ext cx="10881360" cy="566928"/>
+            <a:ext cx="10881360" cy="713232"/>
           </a:xfrm>
           <a:prstGeom prst="rect">
             <a:avLst/>
@@ -7289,7 +7584,7 @@
               <a:buNone/>
             </a:pPr>
             <a:r>
-              <a:rPr lang="en-US" sz="2700" b="1" dirty="0">
+              <a:rPr lang="en-US" sz="3400" b="1" dirty="0">
                 <a:solidFill>
                   <a:srgbClr val="003A63"/>
                 </a:solidFill>
@@ -7299,20 +7594,20 @@
               </a:rPr>
               <a:t>Practical Exercise</a:t>
             </a:r>
-            <a:endParaRPr lang="en-US" sz="2700" dirty="0"/>
-          </a:p>
-        </p:txBody>
-      </p:sp>
-      <p:sp>
-        <p:nvSpPr>
-          <p:cNvPr id="10" name="Text 8"/>
-          <p:cNvSpPr/>
-          <p:nvPr/>
-        </p:nvSpPr>
-        <p:spPr>
-          <a:xfrm>
-            <a:off x="868680" y="1417320"/>
-            <a:ext cx="6675120" cy="4434840"/>
+            <a:endParaRPr lang="en-US" sz="3400" dirty="0"/>
+          </a:p>
+        </p:txBody>
+      </p:sp>
+      <p:sp>
+        <p:nvSpPr>
+          <p:cNvPr id="11" name="Text 9"/>
+          <p:cNvSpPr/>
+          <p:nvPr/>
+        </p:nvSpPr>
+        <p:spPr>
+          <a:xfrm>
+            <a:off x="868680" y="1508760"/>
+            <a:ext cx="6537960" cy="4160520"/>
           </a:xfrm>
           <a:prstGeom prst="rect">
             <a:avLst/>
@@ -7327,7 +7622,7 @@
           <a:lstStyle/>
           <a:p>
             <a:r>
-              <a:rPr lang="en-US" sz="1700" dirty="0">
+              <a:rPr lang="en-US" sz="2100" dirty="0">
                 <a:solidFill>
                   <a:srgbClr val="17364A"/>
                 </a:solidFill>
@@ -7337,11 +7632,11 @@
               </a:rPr>
               <a:t>Create a linkage risk review for one AI-supported public health workflow.</a:t>
             </a:r>
-            <a:endParaRPr lang="en-US" sz="1700" dirty="0"/>
-          </a:p>
-          <a:p>
-            <a:r>
-              <a:rPr lang="en-US" sz="1700" dirty="0">
+            <a:endParaRPr lang="en-US" sz="2100" dirty="0"/>
+          </a:p>
+          <a:p>
+            <a:r>
+              <a:rPr lang="en-US" sz="2100" dirty="0">
                 <a:solidFill>
                   <a:srgbClr val="17364A"/>
                 </a:solidFill>
@@ -7349,15 +7644,15 @@
                 <a:ea typeface="Aptos" pitchFamily="34" charset="-122"/>
                 <a:cs typeface="Aptos" pitchFamily="34" charset="-120"/>
               </a:rPr>
-              <a:t>Include the matching purpose, data sources, matching fields, known field quality issues, match method, thresholds, clerical.</a:t>
-            </a:r>
-            <a:endParaRPr lang="en-US" sz="1700" dirty="0"/>
-          </a:p>
-        </p:txBody>
-      </p:sp>
-      <p:sp>
-        <p:nvSpPr>
-          <p:cNvPr id="11" name="Shape 9"/>
+              <a:t>Include the matching purpose, data sources, matching fields, known field quality issues, match method,.</a:t>
+            </a:r>
+            <a:endParaRPr lang="en-US" sz="2100" dirty="0"/>
+          </a:p>
+        </p:txBody>
+      </p:sp>
+      <p:sp>
+        <p:nvSpPr>
+          <p:cNvPr id="12" name="Shape 10"/>
           <p:cNvSpPr/>
           <p:nvPr/>
         </p:nvSpPr>
@@ -7384,14 +7679,14 @@
       </p:sp>
       <p:sp>
         <p:nvSpPr>
-          <p:cNvPr id="12" name="Text 10"/>
+          <p:cNvPr id="13" name="Text 11"/>
           <p:cNvSpPr/>
           <p:nvPr/>
         </p:nvSpPr>
         <p:spPr>
           <a:xfrm>
             <a:off x="8074152" y="1563624"/>
-            <a:ext cx="2825496" cy="201168"/>
+            <a:ext cx="2825496" cy="256032"/>
           </a:xfrm>
           <a:prstGeom prst="rect">
             <a:avLst/>
@@ -7407,7 +7702,7 @@
               <a:buNone/>
             </a:pPr>
             <a:r>
-              <a:rPr lang="en-US" sz="950" b="1" dirty="0">
+              <a:rPr lang="en-US" sz="1300" b="1" dirty="0">
                 <a:solidFill>
                   <a:srgbClr val="0068B7"/>
                 </a:solidFill>
@@ -7417,20 +7712,20 @@
               </a:rPr>
               <a:t>Key idea</a:t>
             </a:r>
-            <a:endParaRPr lang="en-US" sz="950" dirty="0"/>
-          </a:p>
-        </p:txBody>
-      </p:sp>
-      <p:sp>
-        <p:nvSpPr>
-          <p:cNvPr id="13" name="Text 11"/>
-          <p:cNvSpPr/>
-          <p:nvPr/>
-        </p:nvSpPr>
-        <p:spPr>
-          <a:xfrm>
-            <a:off x="8074152" y="1856232"/>
-            <a:ext cx="2825496" cy="1261872"/>
+            <a:endParaRPr lang="en-US" sz="1300" dirty="0"/>
+          </a:p>
+        </p:txBody>
+      </p:sp>
+      <p:sp>
+        <p:nvSpPr>
+          <p:cNvPr id="14" name="Text 12"/>
+          <p:cNvSpPr/>
+          <p:nvPr/>
+        </p:nvSpPr>
+        <p:spPr>
+          <a:xfrm>
+            <a:off x="8074152" y="1920240"/>
+            <a:ext cx="2825496" cy="1188720"/>
           </a:xfrm>
           <a:prstGeom prst="rect">
             <a:avLst/>
@@ -7448,7 +7743,7 @@
               <a:buNone/>
             </a:pPr>
             <a:r>
-              <a:rPr lang="en-US" sz="1250" dirty="0">
+              <a:rPr lang="en-US" sz="1550" dirty="0">
                 <a:solidFill>
                   <a:srgbClr val="17364A"/>
                 </a:solidFill>
@@ -7458,13 +7753,13 @@
               </a:rPr>
               <a:t>Create a linkage risk review for one AI-supported public health workflow.</a:t>
             </a:r>
-            <a:endParaRPr lang="en-US" sz="1250" dirty="0"/>
-          </a:p>
-        </p:txBody>
-      </p:sp>
-      <p:sp>
-        <p:nvSpPr>
-          <p:cNvPr id="14" name="Shape 12"/>
+            <a:endParaRPr lang="en-US" sz="1550" dirty="0"/>
+          </a:p>
+        </p:txBody>
+      </p:sp>
+      <p:sp>
+        <p:nvSpPr>
+          <p:cNvPr id="15" name="Shape 13"/>
           <p:cNvSpPr/>
           <p:nvPr/>
         </p:nvSpPr>
@@ -7491,14 +7786,14 @@
       </p:sp>
       <p:sp>
         <p:nvSpPr>
-          <p:cNvPr id="15" name="Text 13"/>
+          <p:cNvPr id="16" name="Text 14"/>
           <p:cNvSpPr/>
           <p:nvPr/>
         </p:nvSpPr>
         <p:spPr>
           <a:xfrm>
             <a:off x="8074152" y="3666744"/>
-            <a:ext cx="2825496" cy="201168"/>
+            <a:ext cx="2825496" cy="256032"/>
           </a:xfrm>
           <a:prstGeom prst="rect">
             <a:avLst/>
@@ -7514,7 +7809,7 @@
               <a:buNone/>
             </a:pPr>
             <a:r>
-              <a:rPr lang="en-US" sz="950" b="1" dirty="0">
+              <a:rPr lang="en-US" sz="1300" b="1" dirty="0">
                 <a:solidFill>
                   <a:srgbClr val="0068B7"/>
                 </a:solidFill>
@@ -7524,20 +7819,20 @@
               </a:rPr>
               <a:t>Use this for</a:t>
             </a:r>
-            <a:endParaRPr lang="en-US" sz="950" dirty="0"/>
-          </a:p>
-        </p:txBody>
-      </p:sp>
-      <p:sp>
-        <p:nvSpPr>
-          <p:cNvPr id="16" name="Text 14"/>
-          <p:cNvSpPr/>
-          <p:nvPr/>
-        </p:nvSpPr>
-        <p:spPr>
-          <a:xfrm>
-            <a:off x="8074152" y="3959352"/>
-            <a:ext cx="2825496" cy="1170432"/>
+            <a:endParaRPr lang="en-US" sz="1300" dirty="0"/>
+          </a:p>
+        </p:txBody>
+      </p:sp>
+      <p:sp>
+        <p:nvSpPr>
+          <p:cNvPr id="17" name="Text 15"/>
+          <p:cNvSpPr/>
+          <p:nvPr/>
+        </p:nvSpPr>
+        <p:spPr>
+          <a:xfrm>
+            <a:off x="8074152" y="4023360"/>
+            <a:ext cx="2825496" cy="1097280"/>
           </a:xfrm>
           <a:prstGeom prst="rect">
             <a:avLst/>
@@ -7555,7 +7850,7 @@
               <a:buNone/>
             </a:pPr>
             <a:r>
-              <a:rPr lang="en-US" sz="1250" dirty="0">
+              <a:rPr lang="en-US" sz="1550" dirty="0">
                 <a:solidFill>
                   <a:srgbClr val="17364A"/>
                 </a:solidFill>
@@ -7565,7 +7860,7 @@
               </a:rPr>
               <a:t>Connect the concept to public health decisions, safeguards, documentation, or implementation work.</a:t>
             </a:r>
-            <a:endParaRPr lang="en-US" sz="1250" dirty="0"/>
+            <a:endParaRPr lang="en-US" sz="1550" dirty="0"/>
           </a:p>
         </p:txBody>
       </p:sp>
@@ -7762,7 +8057,7 @@
                 <a:ea typeface="Aptos" pitchFamily="34" charset="-122"/>
                 <a:cs typeface="Aptos" pitchFamily="34" charset="-120"/>
               </a:rPr>
-              <a:t>© Paula Soper</a:t>
+              <a:t>Â© Paula Soper</a:t>
             </a:r>
             <a:endParaRPr lang="en-US" sz="800" dirty="0"/>
           </a:p>
@@ -7770,7 +8065,46 @@
       </p:sp>
       <p:sp>
         <p:nvSpPr>
-          <p:cNvPr id="7" name="Shape 5"/>
+          <p:cNvPr id="7" name="Text 5"/>
+          <p:cNvSpPr/>
+          <p:nvPr/>
+        </p:nvSpPr>
+        <p:spPr>
+          <a:xfrm>
+            <a:off x="11137392" y="6510528"/>
+            <a:ext cx="411480" cy="201168"/>
+          </a:xfrm>
+          <a:prstGeom prst="rect">
+            <a:avLst/>
+          </a:prstGeom>
+          <a:noFill/>
+          <a:ln/>
+        </p:spPr>
+        <p:txBody>
+          <a:bodyPr wrap="square" lIns="0" tIns="0" rIns="0" bIns="0" rtlCol="0" anchor="ctr"/>
+          <a:lstStyle/>
+          <a:p>
+            <a:pPr algn="r" indent="0" marL="0">
+              <a:buNone/>
+            </a:pPr>
+            <a:r>
+              <a:rPr lang="en-US" sz="900" dirty="0">
+                <a:solidFill>
+                  <a:srgbClr val="5F7181"/>
+                </a:solidFill>
+                <a:latin typeface="Aptos" pitchFamily="34" charset="0"/>
+                <a:ea typeface="Aptos" pitchFamily="34" charset="-122"/>
+                <a:cs typeface="Aptos" pitchFamily="34" charset="-120"/>
+              </a:rPr>
+              <a:t>18</a:t>
+            </a:r>
+            <a:endParaRPr lang="en-US" sz="900" dirty="0"/>
+          </a:p>
+        </p:txBody>
+      </p:sp>
+      <p:sp>
+        <p:nvSpPr>
+          <p:cNvPr id="8" name="Shape 6"/>
           <p:cNvSpPr/>
           <p:nvPr/>
         </p:nvSpPr>
@@ -7795,7 +8129,7 @@
       </p:sp>
       <p:sp>
         <p:nvSpPr>
-          <p:cNvPr id="8" name="Text 6"/>
+          <p:cNvPr id="9" name="Text 7"/>
           <p:cNvSpPr/>
           <p:nvPr/>
         </p:nvSpPr>
@@ -7834,14 +8168,14 @@
       </p:sp>
       <p:sp>
         <p:nvSpPr>
-          <p:cNvPr id="9" name="Text 7"/>
+          <p:cNvPr id="10" name="Text 8"/>
           <p:cNvSpPr/>
           <p:nvPr/>
         </p:nvSpPr>
         <p:spPr>
           <a:xfrm>
             <a:off x="640080" y="621792"/>
-            <a:ext cx="10881360" cy="566928"/>
+            <a:ext cx="10881360" cy="713232"/>
           </a:xfrm>
           <a:prstGeom prst="rect">
             <a:avLst/>
@@ -7859,7 +8193,7 @@
               <a:buNone/>
             </a:pPr>
             <a:r>
-              <a:rPr lang="en-US" sz="2700" b="1" dirty="0">
+              <a:rPr lang="en-US" sz="3400" b="1" dirty="0">
                 <a:solidFill>
                   <a:srgbClr val="003A63"/>
                 </a:solidFill>
@@ -7869,20 +8203,20 @@
               </a:rPr>
               <a:t>Expected Artifact or Evidence</a:t>
             </a:r>
-            <a:endParaRPr lang="en-US" sz="2700" dirty="0"/>
-          </a:p>
-        </p:txBody>
-      </p:sp>
-      <p:sp>
-        <p:nvSpPr>
-          <p:cNvPr id="10" name="Text 8"/>
-          <p:cNvSpPr/>
-          <p:nvPr/>
-        </p:nvSpPr>
-        <p:spPr>
-          <a:xfrm>
-            <a:off x="868680" y="1417320"/>
-            <a:ext cx="6675120" cy="4434840"/>
+            <a:endParaRPr lang="en-US" sz="3400" dirty="0"/>
+          </a:p>
+        </p:txBody>
+      </p:sp>
+      <p:sp>
+        <p:nvSpPr>
+          <p:cNvPr id="11" name="Text 9"/>
+          <p:cNvSpPr/>
+          <p:nvPr/>
+        </p:nvSpPr>
+        <p:spPr>
+          <a:xfrm>
+            <a:off x="868680" y="1508760"/>
+            <a:ext cx="6537960" cy="4160520"/>
           </a:xfrm>
           <a:prstGeom prst="rect">
             <a:avLst/>
@@ -7897,7 +8231,7 @@
           <a:lstStyle/>
           <a:p>
             <a:r>
-              <a:rPr lang="en-US" sz="1700" dirty="0">
+              <a:rPr lang="en-US" sz="2100" dirty="0">
                 <a:solidFill>
                   <a:srgbClr val="17364A"/>
                 </a:solidFill>
@@ -7907,11 +8241,11 @@
               </a:rPr>
               <a:t>Linkage risk review</a:t>
             </a:r>
-            <a:endParaRPr lang="en-US" sz="1700" dirty="0"/>
-          </a:p>
-          <a:p>
-            <a:r>
-              <a:rPr lang="en-US" sz="1700" dirty="0">
+            <a:endParaRPr lang="en-US" sz="2100" dirty="0"/>
+          </a:p>
+          <a:p>
+            <a:r>
+              <a:rPr lang="en-US" sz="2100" dirty="0">
                 <a:solidFill>
                   <a:srgbClr val="17364A"/>
                 </a:solidFill>
@@ -7921,11 +8255,11 @@
               </a:rPr>
               <a:t>Deduplication workflow map</a:t>
             </a:r>
-            <a:endParaRPr lang="en-US" sz="1700" dirty="0"/>
-          </a:p>
-          <a:p>
-            <a:r>
-              <a:rPr lang="en-US" sz="1700" dirty="0">
+            <a:endParaRPr lang="en-US" sz="2100" dirty="0"/>
+          </a:p>
+          <a:p>
+            <a:r>
+              <a:rPr lang="en-US" sz="2100" dirty="0">
                 <a:solidFill>
                   <a:srgbClr val="17364A"/>
                 </a:solidFill>
@@ -7935,13 +8269,13 @@
               </a:rPr>
               <a:t>Match review questions</a:t>
             </a:r>
-            <a:endParaRPr lang="en-US" sz="1700" dirty="0"/>
-          </a:p>
-        </p:txBody>
-      </p:sp>
-      <p:sp>
-        <p:nvSpPr>
-          <p:cNvPr id="11" name="Shape 9"/>
+            <a:endParaRPr lang="en-US" sz="2100" dirty="0"/>
+          </a:p>
+        </p:txBody>
+      </p:sp>
+      <p:sp>
+        <p:nvSpPr>
+          <p:cNvPr id="12" name="Shape 10"/>
           <p:cNvSpPr/>
           <p:nvPr/>
         </p:nvSpPr>
@@ -7968,14 +8302,14 @@
       </p:sp>
       <p:sp>
         <p:nvSpPr>
-          <p:cNvPr id="12" name="Text 10"/>
+          <p:cNvPr id="13" name="Text 11"/>
           <p:cNvSpPr/>
           <p:nvPr/>
         </p:nvSpPr>
         <p:spPr>
           <a:xfrm>
             <a:off x="8074152" y="1563624"/>
-            <a:ext cx="2825496" cy="201168"/>
+            <a:ext cx="2825496" cy="256032"/>
           </a:xfrm>
           <a:prstGeom prst="rect">
             <a:avLst/>
@@ -7991,7 +8325,7 @@
               <a:buNone/>
             </a:pPr>
             <a:r>
-              <a:rPr lang="en-US" sz="950" b="1" dirty="0">
+              <a:rPr lang="en-US" sz="1300" b="1" dirty="0">
                 <a:solidFill>
                   <a:srgbClr val="0068B7"/>
                 </a:solidFill>
@@ -8001,20 +8335,20 @@
               </a:rPr>
               <a:t>Key idea</a:t>
             </a:r>
-            <a:endParaRPr lang="en-US" sz="950" dirty="0"/>
-          </a:p>
-        </p:txBody>
-      </p:sp>
-      <p:sp>
-        <p:nvSpPr>
-          <p:cNvPr id="13" name="Text 11"/>
-          <p:cNvSpPr/>
-          <p:nvPr/>
-        </p:nvSpPr>
-        <p:spPr>
-          <a:xfrm>
-            <a:off x="8074152" y="1856232"/>
-            <a:ext cx="2825496" cy="1261872"/>
+            <a:endParaRPr lang="en-US" sz="1300" dirty="0"/>
+          </a:p>
+        </p:txBody>
+      </p:sp>
+      <p:sp>
+        <p:nvSpPr>
+          <p:cNvPr id="14" name="Text 12"/>
+          <p:cNvSpPr/>
+          <p:nvPr/>
+        </p:nvSpPr>
+        <p:spPr>
+          <a:xfrm>
+            <a:off x="8074152" y="1920240"/>
+            <a:ext cx="2825496" cy="1188720"/>
           </a:xfrm>
           <a:prstGeom prst="rect">
             <a:avLst/>
@@ -8032,7 +8366,7 @@
               <a:buNone/>
             </a:pPr>
             <a:r>
-              <a:rPr lang="en-US" sz="1250" dirty="0">
+              <a:rPr lang="en-US" sz="1550" dirty="0">
                 <a:solidFill>
                   <a:srgbClr val="17364A"/>
                 </a:solidFill>
@@ -8042,13 +8376,13 @@
               </a:rPr>
               <a:t>Linkage risk review</a:t>
             </a:r>
-            <a:endParaRPr lang="en-US" sz="1250" dirty="0"/>
-          </a:p>
-        </p:txBody>
-      </p:sp>
-      <p:sp>
-        <p:nvSpPr>
-          <p:cNvPr id="14" name="Shape 12"/>
+            <a:endParaRPr lang="en-US" sz="1550" dirty="0"/>
+          </a:p>
+        </p:txBody>
+      </p:sp>
+      <p:sp>
+        <p:nvSpPr>
+          <p:cNvPr id="15" name="Shape 13"/>
           <p:cNvSpPr/>
           <p:nvPr/>
         </p:nvSpPr>
@@ -8075,14 +8409,14 @@
       </p:sp>
       <p:sp>
         <p:nvSpPr>
-          <p:cNvPr id="15" name="Text 13"/>
+          <p:cNvPr id="16" name="Text 14"/>
           <p:cNvSpPr/>
           <p:nvPr/>
         </p:nvSpPr>
         <p:spPr>
           <a:xfrm>
             <a:off x="8074152" y="3666744"/>
-            <a:ext cx="2825496" cy="201168"/>
+            <a:ext cx="2825496" cy="256032"/>
           </a:xfrm>
           <a:prstGeom prst="rect">
             <a:avLst/>
@@ -8098,7 +8432,7 @@
               <a:buNone/>
             </a:pPr>
             <a:r>
-              <a:rPr lang="en-US" sz="950" b="1" dirty="0">
+              <a:rPr lang="en-US" sz="1300" b="1" dirty="0">
                 <a:solidFill>
                   <a:srgbClr val="0068B7"/>
                 </a:solidFill>
@@ -8108,20 +8442,20 @@
               </a:rPr>
               <a:t>Use this for</a:t>
             </a:r>
-            <a:endParaRPr lang="en-US" sz="950" dirty="0"/>
-          </a:p>
-        </p:txBody>
-      </p:sp>
-      <p:sp>
-        <p:nvSpPr>
-          <p:cNvPr id="16" name="Text 14"/>
-          <p:cNvSpPr/>
-          <p:nvPr/>
-        </p:nvSpPr>
-        <p:spPr>
-          <a:xfrm>
-            <a:off x="8074152" y="3959352"/>
-            <a:ext cx="2825496" cy="1170432"/>
+            <a:endParaRPr lang="en-US" sz="1300" dirty="0"/>
+          </a:p>
+        </p:txBody>
+      </p:sp>
+      <p:sp>
+        <p:nvSpPr>
+          <p:cNvPr id="17" name="Text 15"/>
+          <p:cNvSpPr/>
+          <p:nvPr/>
+        </p:nvSpPr>
+        <p:spPr>
+          <a:xfrm>
+            <a:off x="8074152" y="4023360"/>
+            <a:ext cx="2825496" cy="1097280"/>
           </a:xfrm>
           <a:prstGeom prst="rect">
             <a:avLst/>
@@ -8139,7 +8473,7 @@
               <a:buNone/>
             </a:pPr>
             <a:r>
-              <a:rPr lang="en-US" sz="1250" dirty="0">
+              <a:rPr lang="en-US" sz="1550" dirty="0">
                 <a:solidFill>
                   <a:srgbClr val="17364A"/>
                 </a:solidFill>
@@ -8149,7 +8483,7 @@
               </a:rPr>
               <a:t>Connect the concept to public health decisions, safeguards, documentation, or implementation work.</a:t>
             </a:r>
-            <a:endParaRPr lang="en-US" sz="1250" dirty="0"/>
+            <a:endParaRPr lang="en-US" sz="1550" dirty="0"/>
           </a:p>
         </p:txBody>
       </p:sp>
@@ -8346,7 +8680,7 @@
                 <a:ea typeface="Aptos" pitchFamily="34" charset="-122"/>
                 <a:cs typeface="Aptos" pitchFamily="34" charset="-120"/>
               </a:rPr>
-              <a:t>© Paula Soper</a:t>
+              <a:t>Â© Paula Soper</a:t>
             </a:r>
             <a:endParaRPr lang="en-US" sz="800" dirty="0"/>
           </a:p>
@@ -8360,8 +8694,47 @@
         </p:nvSpPr>
         <p:spPr>
           <a:xfrm>
+            <a:off x="11137392" y="6510528"/>
+            <a:ext cx="411480" cy="201168"/>
+          </a:xfrm>
+          <a:prstGeom prst="rect">
+            <a:avLst/>
+          </a:prstGeom>
+          <a:noFill/>
+          <a:ln/>
+        </p:spPr>
+        <p:txBody>
+          <a:bodyPr wrap="square" lIns="0" tIns="0" rIns="0" bIns="0" rtlCol="0" anchor="ctr"/>
+          <a:lstStyle/>
+          <a:p>
+            <a:pPr algn="r" indent="0" marL="0">
+              <a:buNone/>
+            </a:pPr>
+            <a:r>
+              <a:rPr lang="en-US" sz="900" dirty="0">
+                <a:solidFill>
+                  <a:srgbClr val="5F7181"/>
+                </a:solidFill>
+                <a:latin typeface="Aptos" pitchFamily="34" charset="0"/>
+                <a:ea typeface="Aptos" pitchFamily="34" charset="-122"/>
+                <a:cs typeface="Aptos" pitchFamily="34" charset="-120"/>
+              </a:rPr>
+              <a:t>19</a:t>
+            </a:r>
+            <a:endParaRPr lang="en-US" sz="900" dirty="0"/>
+          </a:p>
+        </p:txBody>
+      </p:sp>
+      <p:sp>
+        <p:nvSpPr>
+          <p:cNvPr id="8" name="Text 6"/>
+          <p:cNvSpPr/>
+          <p:nvPr/>
+        </p:nvSpPr>
+        <p:spPr>
+          <a:xfrm>
             <a:off x="640080" y="658368"/>
-            <a:ext cx="10881360" cy="566928"/>
+            <a:ext cx="10881360" cy="713232"/>
           </a:xfrm>
           <a:prstGeom prst="rect">
             <a:avLst/>
@@ -8379,7 +8752,7 @@
               <a:buNone/>
             </a:pPr>
             <a:r>
-              <a:rPr lang="en-US" sz="2700" b="1" dirty="0">
+              <a:rPr lang="en-US" sz="3400" b="1" dirty="0">
                 <a:solidFill>
                   <a:srgbClr val="003A63"/>
                 </a:solidFill>
@@ -8389,20 +8762,20 @@
               </a:rPr>
               <a:t>Expected Artifact or Evidence Continued</a:t>
             </a:r>
-            <a:endParaRPr lang="en-US" sz="2700" dirty="0"/>
-          </a:p>
-        </p:txBody>
-      </p:sp>
-      <p:sp>
-        <p:nvSpPr>
-          <p:cNvPr id="8" name="Text 6"/>
-          <p:cNvSpPr/>
-          <p:nvPr/>
-        </p:nvSpPr>
-        <p:spPr>
-          <a:xfrm>
-            <a:off x="868680" y="1417320"/>
-            <a:ext cx="6675120" cy="4434840"/>
+            <a:endParaRPr lang="en-US" sz="3400" dirty="0"/>
+          </a:p>
+        </p:txBody>
+      </p:sp>
+      <p:sp>
+        <p:nvSpPr>
+          <p:cNvPr id="9" name="Text 7"/>
+          <p:cNvSpPr/>
+          <p:nvPr/>
+        </p:nvSpPr>
+        <p:spPr>
+          <a:xfrm>
+            <a:off x="868680" y="1508760"/>
+            <a:ext cx="6537960" cy="4160520"/>
           </a:xfrm>
           <a:prstGeom prst="rect">
             <a:avLst/>
@@ -8417,7 +8790,7 @@
           <a:lstStyle/>
           <a:p>
             <a:r>
-              <a:rPr lang="en-US" sz="1700" dirty="0">
+              <a:rPr lang="en-US" sz="2100" dirty="0">
                 <a:solidFill>
                   <a:srgbClr val="17364A"/>
                 </a:solidFill>
@@ -8427,13 +8800,13 @@
               </a:rPr>
               <a:t>Equity and escalation notes</a:t>
             </a:r>
-            <a:endParaRPr lang="en-US" sz="1700" dirty="0"/>
-          </a:p>
-        </p:txBody>
-      </p:sp>
-      <p:sp>
-        <p:nvSpPr>
-          <p:cNvPr id="9" name="Shape 7"/>
+            <a:endParaRPr lang="en-US" sz="2100" dirty="0"/>
+          </a:p>
+        </p:txBody>
+      </p:sp>
+      <p:sp>
+        <p:nvSpPr>
+          <p:cNvPr id="10" name="Shape 8"/>
           <p:cNvSpPr/>
           <p:nvPr/>
         </p:nvSpPr>
@@ -8460,14 +8833,14 @@
       </p:sp>
       <p:sp>
         <p:nvSpPr>
-          <p:cNvPr id="10" name="Text 8"/>
+          <p:cNvPr id="11" name="Text 9"/>
           <p:cNvSpPr/>
           <p:nvPr/>
         </p:nvSpPr>
         <p:spPr>
           <a:xfrm>
             <a:off x="8074152" y="1563624"/>
-            <a:ext cx="2825496" cy="201168"/>
+            <a:ext cx="2825496" cy="256032"/>
           </a:xfrm>
           <a:prstGeom prst="rect">
             <a:avLst/>
@@ -8483,7 +8856,7 @@
               <a:buNone/>
             </a:pPr>
             <a:r>
-              <a:rPr lang="en-US" sz="950" b="1" dirty="0">
+              <a:rPr lang="en-US" sz="1300" b="1" dirty="0">
                 <a:solidFill>
                   <a:srgbClr val="0068B7"/>
                 </a:solidFill>
@@ -8493,20 +8866,20 @@
               </a:rPr>
               <a:t>Key idea</a:t>
             </a:r>
-            <a:endParaRPr lang="en-US" sz="950" dirty="0"/>
-          </a:p>
-        </p:txBody>
-      </p:sp>
-      <p:sp>
-        <p:nvSpPr>
-          <p:cNvPr id="11" name="Text 9"/>
-          <p:cNvSpPr/>
-          <p:nvPr/>
-        </p:nvSpPr>
-        <p:spPr>
-          <a:xfrm>
-            <a:off x="8074152" y="1856232"/>
-            <a:ext cx="2825496" cy="1261872"/>
+            <a:endParaRPr lang="en-US" sz="1300" dirty="0"/>
+          </a:p>
+        </p:txBody>
+      </p:sp>
+      <p:sp>
+        <p:nvSpPr>
+          <p:cNvPr id="12" name="Text 10"/>
+          <p:cNvSpPr/>
+          <p:nvPr/>
+        </p:nvSpPr>
+        <p:spPr>
+          <a:xfrm>
+            <a:off x="8074152" y="1920240"/>
+            <a:ext cx="2825496" cy="1188720"/>
           </a:xfrm>
           <a:prstGeom prst="rect">
             <a:avLst/>
@@ -8524,7 +8897,7 @@
               <a:buNone/>
             </a:pPr>
             <a:r>
-              <a:rPr lang="en-US" sz="1250" dirty="0">
+              <a:rPr lang="en-US" sz="1550" dirty="0">
                 <a:solidFill>
                   <a:srgbClr val="17364A"/>
                 </a:solidFill>
@@ -8534,13 +8907,13 @@
               </a:rPr>
               <a:t>Equity and escalation notes</a:t>
             </a:r>
-            <a:endParaRPr lang="en-US" sz="1250" dirty="0"/>
-          </a:p>
-        </p:txBody>
-      </p:sp>
-      <p:sp>
-        <p:nvSpPr>
-          <p:cNvPr id="12" name="Shape 10"/>
+            <a:endParaRPr lang="en-US" sz="1550" dirty="0"/>
+          </a:p>
+        </p:txBody>
+      </p:sp>
+      <p:sp>
+        <p:nvSpPr>
+          <p:cNvPr id="13" name="Shape 11"/>
           <p:cNvSpPr/>
           <p:nvPr/>
         </p:nvSpPr>
@@ -8567,14 +8940,14 @@
       </p:sp>
       <p:sp>
         <p:nvSpPr>
-          <p:cNvPr id="13" name="Text 11"/>
+          <p:cNvPr id="14" name="Text 12"/>
           <p:cNvSpPr/>
           <p:nvPr/>
         </p:nvSpPr>
         <p:spPr>
           <a:xfrm>
             <a:off x="8074152" y="3666744"/>
-            <a:ext cx="2825496" cy="201168"/>
+            <a:ext cx="2825496" cy="256032"/>
           </a:xfrm>
           <a:prstGeom prst="rect">
             <a:avLst/>
@@ -8590,7 +8963,7 @@
               <a:buNone/>
             </a:pPr>
             <a:r>
-              <a:rPr lang="en-US" sz="950" b="1" dirty="0">
+              <a:rPr lang="en-US" sz="1300" b="1" dirty="0">
                 <a:solidFill>
                   <a:srgbClr val="0068B7"/>
                 </a:solidFill>
@@ -8600,20 +8973,20 @@
               </a:rPr>
               <a:t>Use this for</a:t>
             </a:r>
-            <a:endParaRPr lang="en-US" sz="950" dirty="0"/>
-          </a:p>
-        </p:txBody>
-      </p:sp>
-      <p:sp>
-        <p:nvSpPr>
-          <p:cNvPr id="14" name="Text 12"/>
-          <p:cNvSpPr/>
-          <p:nvPr/>
-        </p:nvSpPr>
-        <p:spPr>
-          <a:xfrm>
-            <a:off x="8074152" y="3959352"/>
-            <a:ext cx="2825496" cy="1170432"/>
+            <a:endParaRPr lang="en-US" sz="1300" dirty="0"/>
+          </a:p>
+        </p:txBody>
+      </p:sp>
+      <p:sp>
+        <p:nvSpPr>
+          <p:cNvPr id="15" name="Text 13"/>
+          <p:cNvSpPr/>
+          <p:nvPr/>
+        </p:nvSpPr>
+        <p:spPr>
+          <a:xfrm>
+            <a:off x="8074152" y="4023360"/>
+            <a:ext cx="2825496" cy="1097280"/>
           </a:xfrm>
           <a:prstGeom prst="rect">
             <a:avLst/>
@@ -8631,7 +9004,7 @@
               <a:buNone/>
             </a:pPr>
             <a:r>
-              <a:rPr lang="en-US" sz="1250" dirty="0">
+              <a:rPr lang="en-US" sz="1550" dirty="0">
                 <a:solidFill>
                   <a:srgbClr val="17364A"/>
                 </a:solidFill>
@@ -8641,7 +9014,7 @@
               </a:rPr>
               <a:t>Connect the concept to public health decisions, safeguards, documentation, or implementation work.</a:t>
             </a:r>
-            <a:endParaRPr lang="en-US" sz="1250" dirty="0"/>
+            <a:endParaRPr lang="en-US" sz="1550" dirty="0"/>
           </a:p>
         </p:txBody>
       </p:sp>
@@ -8838,7 +9211,7 @@
                 <a:ea typeface="Aptos" pitchFamily="34" charset="-122"/>
                 <a:cs typeface="Aptos" pitchFamily="34" charset="-120"/>
               </a:rPr>
-              <a:t>© Paula Soper</a:t>
+              <a:t>Â© Paula Soper</a:t>
             </a:r>
             <a:endParaRPr lang="en-US" sz="800" dirty="0"/>
           </a:p>
@@ -8852,8 +9225,47 @@
         </p:nvSpPr>
         <p:spPr>
           <a:xfrm>
+            <a:off x="11137392" y="6510528"/>
+            <a:ext cx="411480" cy="201168"/>
+          </a:xfrm>
+          <a:prstGeom prst="rect">
+            <a:avLst/>
+          </a:prstGeom>
+          <a:noFill/>
+          <a:ln/>
+        </p:spPr>
+        <p:txBody>
+          <a:bodyPr wrap="square" lIns="0" tIns="0" rIns="0" bIns="0" rtlCol="0" anchor="ctr"/>
+          <a:lstStyle/>
+          <a:p>
+            <a:pPr algn="r" indent="0" marL="0">
+              <a:buNone/>
+            </a:pPr>
+            <a:r>
+              <a:rPr lang="en-US" sz="900" dirty="0">
+                <a:solidFill>
+                  <a:srgbClr val="5F7181"/>
+                </a:solidFill>
+                <a:latin typeface="Aptos" pitchFamily="34" charset="0"/>
+                <a:ea typeface="Aptos" pitchFamily="34" charset="-122"/>
+                <a:cs typeface="Aptos" pitchFamily="34" charset="-120"/>
+              </a:rPr>
+              <a:t>2</a:t>
+            </a:r>
+            <a:endParaRPr lang="en-US" sz="900" dirty="0"/>
+          </a:p>
+        </p:txBody>
+      </p:sp>
+      <p:sp>
+        <p:nvSpPr>
+          <p:cNvPr id="8" name="Text 6"/>
+          <p:cNvSpPr/>
+          <p:nvPr/>
+        </p:nvSpPr>
+        <p:spPr>
+          <a:xfrm>
             <a:off x="640080" y="658368"/>
-            <a:ext cx="10881360" cy="566928"/>
+            <a:ext cx="10881360" cy="713232"/>
           </a:xfrm>
           <a:prstGeom prst="rect">
             <a:avLst/>
@@ -8871,7 +9283,7 @@
               <a:buNone/>
             </a:pPr>
             <a:r>
-              <a:rPr lang="en-US" sz="2700" b="1" dirty="0">
+              <a:rPr lang="en-US" sz="3400" b="1" dirty="0">
                 <a:solidFill>
                   <a:srgbClr val="003A63"/>
                 </a:solidFill>
@@ -8881,20 +9293,20 @@
               </a:rPr>
               <a:t>What this module helps you do</a:t>
             </a:r>
-            <a:endParaRPr lang="en-US" sz="2700" dirty="0"/>
-          </a:p>
-        </p:txBody>
-      </p:sp>
-      <p:sp>
-        <p:nvSpPr>
-          <p:cNvPr id="8" name="Text 6"/>
-          <p:cNvSpPr/>
-          <p:nvPr/>
-        </p:nvSpPr>
-        <p:spPr>
-          <a:xfrm>
-            <a:off x="868680" y="1417320"/>
-            <a:ext cx="6675120" cy="3291840"/>
+            <a:endParaRPr lang="en-US" sz="3400" dirty="0"/>
+          </a:p>
+        </p:txBody>
+      </p:sp>
+      <p:sp>
+        <p:nvSpPr>
+          <p:cNvPr id="9" name="Text 7"/>
+          <p:cNvSpPr/>
+          <p:nvPr/>
+        </p:nvSpPr>
+        <p:spPr>
+          <a:xfrm>
+            <a:off x="868680" y="1508760"/>
+            <a:ext cx="6446520" cy="2926080"/>
           </a:xfrm>
           <a:prstGeom prst="rect">
             <a:avLst/>
@@ -8909,7 +9321,7 @@
           <a:lstStyle/>
           <a:p>
             <a:r>
-              <a:rPr lang="en-US" sz="1700" dirty="0">
+              <a:rPr lang="en-US" sz="2100" dirty="0">
                 <a:solidFill>
                   <a:srgbClr val="17364A"/>
                 </a:solidFill>
@@ -8917,13 +9329,13 @@
                 <a:ea typeface="Aptos" pitchFamily="34" charset="-122"/>
                 <a:cs typeface="Aptos" pitchFamily="34" charset="-120"/>
               </a:rPr>
-              <a:t>Record linkage and entity resolution help public health systems determine whether records refer to the same person, provider, facility, address,.</a:t>
-            </a:r>
-            <a:endParaRPr lang="en-US" sz="1700" dirty="0"/>
-          </a:p>
-          <a:p>
-            <a:r>
-              <a:rPr lang="en-US" sz="1700" dirty="0">
+              <a:t>Record linkage and entity resolution help public health systems determine whether records refer to the same.</a:t>
+            </a:r>
+            <a:endParaRPr lang="en-US" sz="2100" dirty="0"/>
+          </a:p>
+          <a:p>
+            <a:r>
+              <a:rPr lang="en-US" sz="2100" dirty="0">
                 <a:solidFill>
                   <a:srgbClr val="17364A"/>
                 </a:solidFill>
@@ -8933,11 +9345,11 @@
               </a:rPr>
               <a:t>AI tools often rely on linked data even when the linkage process is invisible to users.</a:t>
             </a:r>
-            <a:endParaRPr lang="en-US" sz="1700" dirty="0"/>
-          </a:p>
-          <a:p>
-            <a:r>
-              <a:rPr lang="en-US" sz="1700" dirty="0">
+            <a:endParaRPr lang="en-US" sz="2100" dirty="0"/>
+          </a:p>
+          <a:p>
+            <a:r>
+              <a:rPr lang="en-US" sz="2100" dirty="0">
                 <a:solidFill>
                   <a:srgbClr val="17364A"/>
                 </a:solidFill>
@@ -8947,13 +9359,13 @@
               </a:rPr>
               <a:t>This module teaches learners how matching and deduplication affect AI outputs, surveillance quality, and equity.</a:t>
             </a:r>
-            <a:endParaRPr lang="en-US" sz="1700" dirty="0"/>
-          </a:p>
-        </p:txBody>
-      </p:sp>
-      <p:sp>
-        <p:nvSpPr>
-          <p:cNvPr id="9" name="Shape 7"/>
+            <a:endParaRPr lang="en-US" sz="2100" dirty="0"/>
+          </a:p>
+        </p:txBody>
+      </p:sp>
+      <p:sp>
+        <p:nvSpPr>
+          <p:cNvPr id="10" name="Shape 8"/>
           <p:cNvSpPr/>
           <p:nvPr/>
         </p:nvSpPr>
@@ -8980,14 +9392,14 @@
       </p:sp>
       <p:sp>
         <p:nvSpPr>
-          <p:cNvPr id="10" name="Text 8"/>
+          <p:cNvPr id="11" name="Text 9"/>
           <p:cNvSpPr/>
           <p:nvPr/>
         </p:nvSpPr>
         <p:spPr>
           <a:xfrm>
             <a:off x="8074152" y="1563624"/>
-            <a:ext cx="2825496" cy="201168"/>
+            <a:ext cx="2825496" cy="256032"/>
           </a:xfrm>
           <a:prstGeom prst="rect">
             <a:avLst/>
@@ -9003,7 +9415,7 @@
               <a:buNone/>
             </a:pPr>
             <a:r>
-              <a:rPr lang="en-US" sz="950" b="1" dirty="0">
+              <a:rPr lang="en-US" sz="1300" b="1" dirty="0">
                 <a:solidFill>
                   <a:srgbClr val="0068B7"/>
                 </a:solidFill>
@@ -9013,20 +9425,20 @@
               </a:rPr>
               <a:t>Module details</a:t>
             </a:r>
-            <a:endParaRPr lang="en-US" sz="950" dirty="0"/>
-          </a:p>
-        </p:txBody>
-      </p:sp>
-      <p:sp>
-        <p:nvSpPr>
-          <p:cNvPr id="11" name="Text 9"/>
-          <p:cNvSpPr/>
-          <p:nvPr/>
-        </p:nvSpPr>
-        <p:spPr>
-          <a:xfrm>
-            <a:off x="8074152" y="1856232"/>
-            <a:ext cx="2825496" cy="1353312"/>
+            <a:endParaRPr lang="en-US" sz="1300" dirty="0"/>
+          </a:p>
+        </p:txBody>
+      </p:sp>
+      <p:sp>
+        <p:nvSpPr>
+          <p:cNvPr id="12" name="Text 10"/>
+          <p:cNvSpPr/>
+          <p:nvPr/>
+        </p:nvSpPr>
+        <p:spPr>
+          <a:xfrm>
+            <a:off x="8074152" y="1920240"/>
+            <a:ext cx="2825496" cy="1280160"/>
           </a:xfrm>
           <a:prstGeom prst="rect">
             <a:avLst/>
@@ -9044,7 +9456,7 @@
               <a:buNone/>
             </a:pPr>
             <a:r>
-              <a:rPr lang="en-US" sz="1250" dirty="0">
+              <a:rPr lang="en-US" sz="1550" dirty="0">
                 <a:solidFill>
                   <a:srgbClr val="17364A"/>
                 </a:solidFill>
@@ -9054,14 +9466,14 @@
               </a:rPr>
               <a:t>Level: applied/foundational</a:t>
             </a:r>
-            <a:endParaRPr lang="en-US" sz="1250" dirty="0"/>
+            <a:endParaRPr lang="en-US" sz="1550" dirty="0"/>
           </a:p>
           <a:p>
             <a:pPr indent="0" marL="0">
               <a:buNone/>
             </a:pPr>
             <a:r>
-              <a:rPr lang="en-US" sz="1250" dirty="0">
+              <a:rPr lang="en-US" sz="1550" dirty="0">
                 <a:solidFill>
                   <a:srgbClr val="17364A"/>
                 </a:solidFill>
@@ -9071,14 +9483,14 @@
               </a:rPr>
               <a:t>Primary track: Operations and Data Quality Track</a:t>
             </a:r>
-            <a:endParaRPr lang="en-US" sz="1250" dirty="0"/>
+            <a:endParaRPr lang="en-US" sz="1550" dirty="0"/>
           </a:p>
           <a:p>
             <a:pPr indent="0" marL="0">
               <a:buNone/>
             </a:pPr>
             <a:r>
-              <a:rPr lang="en-US" sz="1250" dirty="0">
+              <a:rPr lang="en-US" sz="1550" dirty="0">
                 <a:solidFill>
                   <a:srgbClr val="17364A"/>
                 </a:solidFill>
@@ -9088,32 +9500,32 @@
               </a:rPr>
               <a:t>Appears in tracks: technical-architecture</a:t>
             </a:r>
-            <a:endParaRPr lang="en-US" sz="1250" dirty="0"/>
-          </a:p>
-        </p:txBody>
-      </p:sp>
-      <p:sp>
-        <p:nvSpPr>
-          <p:cNvPr id="12" name="Shape 10"/>
-          <p:cNvSpPr/>
-          <p:nvPr/>
-        </p:nvSpPr>
-        <p:spPr>
-          <a:xfrm>
-            <a:off x="7909560" y="3611880"/>
-            <a:ext cx="3154680" cy="1783080"/>
+            <a:endParaRPr lang="en-US" sz="1550" dirty="0"/>
+          </a:p>
+        </p:txBody>
+      </p:sp>
+      <p:sp>
+        <p:nvSpPr>
+          <p:cNvPr id="13" name="Shape 11"/>
+          <p:cNvSpPr/>
+          <p:nvPr/>
+        </p:nvSpPr>
+        <p:spPr>
+          <a:xfrm>
+            <a:off x="7635240" y="3730752"/>
+            <a:ext cx="1033272" cy="749808"/>
           </a:xfrm>
           <a:prstGeom prst="roundRect">
             <a:avLst>
-              <a:gd name="adj" fmla="val 6154"/>
+              <a:gd name="adj" fmla="val 14634"/>
             </a:avLst>
           </a:prstGeom>
           <a:solidFill>
-            <a:srgbClr val="EEF8ED"/>
+            <a:srgbClr val="0068B7"/>
           </a:solidFill>
           <a:ln w="12700">
             <a:solidFill>
-              <a:srgbClr val="B9D7E6"/>
+              <a:srgbClr val="0068B7"/>
             </a:solidFill>
             <a:prstDash val="solid"/>
           </a:ln>
@@ -9121,81 +9533,256 @@
       </p:sp>
       <p:sp>
         <p:nvSpPr>
-          <p:cNvPr id="13" name="Text 11"/>
-          <p:cNvSpPr/>
-          <p:nvPr/>
-        </p:nvSpPr>
-        <p:spPr>
-          <a:xfrm>
-            <a:off x="8074152" y="3758184"/>
-            <a:ext cx="2825496" cy="201168"/>
-          </a:xfrm>
-          <a:prstGeom prst="rect">
-            <a:avLst/>
-          </a:prstGeom>
-          <a:noFill/>
-          <a:ln/>
-        </p:spPr>
-        <p:txBody>
-          <a:bodyPr wrap="square" lIns="0" tIns="0" rIns="0" bIns="0" rtlCol="0" anchor="ctr"/>
-          <a:lstStyle/>
-          <a:p>
-            <a:pPr indent="0" marL="0">
-              <a:buNone/>
-            </a:pPr>
-            <a:r>
-              <a:rPr lang="en-US" sz="950" b="1" dirty="0">
-                <a:solidFill>
-                  <a:srgbClr val="0068B7"/>
-                </a:solidFill>
-                <a:latin typeface="Aptos" pitchFamily="34" charset="0"/>
-                <a:ea typeface="Aptos" pitchFamily="34" charset="-122"/>
-                <a:cs typeface="Aptos" pitchFamily="34" charset="-120"/>
-              </a:rPr>
-              <a:t>Learning approach</a:t>
-            </a:r>
-            <a:endParaRPr lang="en-US" sz="950" dirty="0"/>
-          </a:p>
-        </p:txBody>
-      </p:sp>
-      <p:sp>
-        <p:nvSpPr>
           <p:cNvPr id="14" name="Text 12"/>
           <p:cNvSpPr/>
           <p:nvPr/>
         </p:nvSpPr>
         <p:spPr>
           <a:xfrm>
-            <a:off x="8074152" y="4050792"/>
-            <a:ext cx="2825496" cy="1216152"/>
-          </a:xfrm>
-          <a:prstGeom prst="rect">
-            <a:avLst/>
-          </a:prstGeom>
-          <a:noFill/>
-          <a:ln/>
-        </p:spPr>
-        <p:txBody>
-          <a:bodyPr wrap="square" lIns="0" tIns="0" rIns="0" bIns="0" rtlCol="0" anchor="t">
+            <a:off x="7708392" y="3922776"/>
+            <a:ext cx="886968" cy="310896"/>
+          </a:xfrm>
+          <a:prstGeom prst="rect">
+            <a:avLst/>
+          </a:prstGeom>
+          <a:noFill/>
+          <a:ln/>
+        </p:spPr>
+        <p:txBody>
+          <a:bodyPr wrap="square" lIns="0" tIns="0" rIns="0" bIns="0" rtlCol="0" anchor="ctr">
             <a:normAutofit/>
           </a:bodyPr>
           <a:lstStyle/>
           <a:p>
-            <a:pPr indent="0" marL="0">
-              <a:buNone/>
-            </a:pPr>
-            <a:r>
-              <a:rPr lang="en-US" sz="1250" dirty="0">
-                <a:solidFill>
-                  <a:srgbClr val="17364A"/>
-                </a:solidFill>
-                <a:latin typeface="Aptos" pitchFamily="34" charset="0"/>
-                <a:ea typeface="Aptos" pitchFamily="34" charset="-122"/>
-                <a:cs typeface="Aptos" pitchFamily="34" charset="-120"/>
-              </a:rPr>
-              <a:t>Review the core ideas, complete the practical exercise, check your understanding, and use the related plays and tools to apply the lesson.</a:t>
-            </a:r>
-            <a:endParaRPr lang="en-US" sz="1250" dirty="0"/>
+            <a:pPr algn="ctr" indent="0" marL="0">
+              <a:buNone/>
+            </a:pPr>
+            <a:r>
+              <a:rPr lang="en-US" sz="1500" b="1" dirty="0">
+                <a:solidFill>
+                  <a:srgbClr val="FFFFFF"/>
+                </a:solidFill>
+                <a:latin typeface="Aptos" pitchFamily="34" charset="0"/>
+                <a:ea typeface="Aptos" pitchFamily="34" charset="-122"/>
+                <a:cs typeface="Aptos" pitchFamily="34" charset="-120"/>
+              </a:rPr>
+              <a:t>Learn</a:t>
+            </a:r>
+            <a:endParaRPr lang="en-US" sz="1500" dirty="0"/>
+          </a:p>
+        </p:txBody>
+      </p:sp>
+      <p:sp>
+        <p:nvSpPr>
+          <p:cNvPr id="15" name="Text 13"/>
+          <p:cNvSpPr/>
+          <p:nvPr/>
+        </p:nvSpPr>
+        <p:spPr>
+          <a:xfrm>
+            <a:off x="8695944" y="3941064"/>
+            <a:ext cx="201168" cy="256032"/>
+          </a:xfrm>
+          <a:prstGeom prst="rect">
+            <a:avLst/>
+          </a:prstGeom>
+          <a:noFill/>
+          <a:ln/>
+        </p:spPr>
+        <p:txBody>
+          <a:bodyPr wrap="square" lIns="0" tIns="0" rIns="0" bIns="0" rtlCol="0" anchor="ctr"/>
+          <a:lstStyle/>
+          <a:p>
+            <a:pPr algn="ctr" indent="0" marL="0">
+              <a:buNone/>
+            </a:pPr>
+            <a:r>
+              <a:rPr lang="en-US" sz="1800" b="1" dirty="0">
+                <a:solidFill>
+                  <a:srgbClr val="0068B7"/>
+                </a:solidFill>
+                <a:latin typeface="Aptos" pitchFamily="34" charset="0"/>
+                <a:ea typeface="Aptos" pitchFamily="34" charset="-122"/>
+                <a:cs typeface="Aptos" pitchFamily="34" charset="-120"/>
+              </a:rPr>
+              <a:t>â†’</a:t>
+            </a:r>
+            <a:endParaRPr lang="en-US" sz="1800" dirty="0"/>
+          </a:p>
+        </p:txBody>
+      </p:sp>
+      <p:sp>
+        <p:nvSpPr>
+          <p:cNvPr id="16" name="Shape 14"/>
+          <p:cNvSpPr/>
+          <p:nvPr/>
+        </p:nvSpPr>
+        <p:spPr>
+          <a:xfrm>
+            <a:off x="8924544" y="3730752"/>
+            <a:ext cx="1033272" cy="749808"/>
+          </a:xfrm>
+          <a:prstGeom prst="roundRect">
+            <a:avLst>
+              <a:gd name="adj" fmla="val 14634"/>
+            </a:avLst>
+          </a:prstGeom>
+          <a:solidFill>
+            <a:srgbClr val="2F8A28"/>
+          </a:solidFill>
+          <a:ln w="12700">
+            <a:solidFill>
+              <a:srgbClr val="2F8A28"/>
+            </a:solidFill>
+            <a:prstDash val="solid"/>
+          </a:ln>
+        </p:spPr>
+      </p:sp>
+      <p:sp>
+        <p:nvSpPr>
+          <p:cNvPr id="17" name="Text 15"/>
+          <p:cNvSpPr/>
+          <p:nvPr/>
+        </p:nvSpPr>
+        <p:spPr>
+          <a:xfrm>
+            <a:off x="8997696" y="3922776"/>
+            <a:ext cx="886968" cy="310896"/>
+          </a:xfrm>
+          <a:prstGeom prst="rect">
+            <a:avLst/>
+          </a:prstGeom>
+          <a:noFill/>
+          <a:ln/>
+        </p:spPr>
+        <p:txBody>
+          <a:bodyPr wrap="square" lIns="0" tIns="0" rIns="0" bIns="0" rtlCol="0" anchor="ctr">
+            <a:normAutofit/>
+          </a:bodyPr>
+          <a:lstStyle/>
+          <a:p>
+            <a:pPr algn="ctr" indent="0" marL="0">
+              <a:buNone/>
+            </a:pPr>
+            <a:r>
+              <a:rPr lang="en-US" sz="1500" b="1" dirty="0">
+                <a:solidFill>
+                  <a:srgbClr val="FFFFFF"/>
+                </a:solidFill>
+                <a:latin typeface="Aptos" pitchFamily="34" charset="0"/>
+                <a:ea typeface="Aptos" pitchFamily="34" charset="-122"/>
+                <a:cs typeface="Aptos" pitchFamily="34" charset="-120"/>
+              </a:rPr>
+              <a:t>Apply</a:t>
+            </a:r>
+            <a:endParaRPr lang="en-US" sz="1500" dirty="0"/>
+          </a:p>
+        </p:txBody>
+      </p:sp>
+      <p:sp>
+        <p:nvSpPr>
+          <p:cNvPr id="18" name="Text 16"/>
+          <p:cNvSpPr/>
+          <p:nvPr/>
+        </p:nvSpPr>
+        <p:spPr>
+          <a:xfrm>
+            <a:off x="9985248" y="3941064"/>
+            <a:ext cx="201168" cy="256032"/>
+          </a:xfrm>
+          <a:prstGeom prst="rect">
+            <a:avLst/>
+          </a:prstGeom>
+          <a:noFill/>
+          <a:ln/>
+        </p:spPr>
+        <p:txBody>
+          <a:bodyPr wrap="square" lIns="0" tIns="0" rIns="0" bIns="0" rtlCol="0" anchor="ctr"/>
+          <a:lstStyle/>
+          <a:p>
+            <a:pPr algn="ctr" indent="0" marL="0">
+              <a:buNone/>
+            </a:pPr>
+            <a:r>
+              <a:rPr lang="en-US" sz="1800" b="1" dirty="0">
+                <a:solidFill>
+                  <a:srgbClr val="0068B7"/>
+                </a:solidFill>
+                <a:latin typeface="Aptos" pitchFamily="34" charset="0"/>
+                <a:ea typeface="Aptos" pitchFamily="34" charset="-122"/>
+                <a:cs typeface="Aptos" pitchFamily="34" charset="-120"/>
+              </a:rPr>
+              <a:t>â†’</a:t>
+            </a:r>
+            <a:endParaRPr lang="en-US" sz="1800" dirty="0"/>
+          </a:p>
+        </p:txBody>
+      </p:sp>
+      <p:sp>
+        <p:nvSpPr>
+          <p:cNvPr id="19" name="Shape 17"/>
+          <p:cNvSpPr/>
+          <p:nvPr/>
+        </p:nvSpPr>
+        <p:spPr>
+          <a:xfrm>
+            <a:off x="10213848" y="3730752"/>
+            <a:ext cx="1033272" cy="749808"/>
+          </a:xfrm>
+          <a:prstGeom prst="roundRect">
+            <a:avLst>
+              <a:gd name="adj" fmla="val 14634"/>
+            </a:avLst>
+          </a:prstGeom>
+          <a:solidFill>
+            <a:srgbClr val="6A4CA3"/>
+          </a:solidFill>
+          <a:ln w="12700">
+            <a:solidFill>
+              <a:srgbClr val="6A4CA3"/>
+            </a:solidFill>
+            <a:prstDash val="solid"/>
+          </a:ln>
+        </p:spPr>
+      </p:sp>
+      <p:sp>
+        <p:nvSpPr>
+          <p:cNvPr id="20" name="Text 18"/>
+          <p:cNvSpPr/>
+          <p:nvPr/>
+        </p:nvSpPr>
+        <p:spPr>
+          <a:xfrm>
+            <a:off x="10287000" y="3922776"/>
+            <a:ext cx="886968" cy="310896"/>
+          </a:xfrm>
+          <a:prstGeom prst="rect">
+            <a:avLst/>
+          </a:prstGeom>
+          <a:noFill/>
+          <a:ln/>
+        </p:spPr>
+        <p:txBody>
+          <a:bodyPr wrap="square" lIns="0" tIns="0" rIns="0" bIns="0" rtlCol="0" anchor="ctr">
+            <a:normAutofit/>
+          </a:bodyPr>
+          <a:lstStyle/>
+          <a:p>
+            <a:pPr algn="ctr" indent="0" marL="0">
+              <a:buNone/>
+            </a:pPr>
+            <a:r>
+              <a:rPr lang="en-US" sz="1500" b="1" dirty="0">
+                <a:solidFill>
+                  <a:srgbClr val="FFFFFF"/>
+                </a:solidFill>
+                <a:latin typeface="Aptos" pitchFamily="34" charset="0"/>
+                <a:ea typeface="Aptos" pitchFamily="34" charset="-122"/>
+                <a:cs typeface="Aptos" pitchFamily="34" charset="-120"/>
+              </a:rPr>
+              <a:t>Document</a:t>
+            </a:r>
+            <a:endParaRPr lang="en-US" sz="1500" dirty="0"/>
           </a:p>
         </p:txBody>
       </p:sp>
@@ -9392,7 +9979,7 @@
                 <a:ea typeface="Aptos" pitchFamily="34" charset="-122"/>
                 <a:cs typeface="Aptos" pitchFamily="34" charset="-120"/>
               </a:rPr>
-              <a:t>© Paula Soper</a:t>
+              <a:t>Â© Paula Soper</a:t>
             </a:r>
             <a:endParaRPr lang="en-US" sz="800" dirty="0"/>
           </a:p>
@@ -9400,7 +9987,46 @@
       </p:sp>
       <p:sp>
         <p:nvSpPr>
-          <p:cNvPr id="7" name="Shape 5"/>
+          <p:cNvPr id="7" name="Text 5"/>
+          <p:cNvSpPr/>
+          <p:nvPr/>
+        </p:nvSpPr>
+        <p:spPr>
+          <a:xfrm>
+            <a:off x="11137392" y="6510528"/>
+            <a:ext cx="411480" cy="201168"/>
+          </a:xfrm>
+          <a:prstGeom prst="rect">
+            <a:avLst/>
+          </a:prstGeom>
+          <a:noFill/>
+          <a:ln/>
+        </p:spPr>
+        <p:txBody>
+          <a:bodyPr wrap="square" lIns="0" tIns="0" rIns="0" bIns="0" rtlCol="0" anchor="ctr"/>
+          <a:lstStyle/>
+          <a:p>
+            <a:pPr algn="r" indent="0" marL="0">
+              <a:buNone/>
+            </a:pPr>
+            <a:r>
+              <a:rPr lang="en-US" sz="900" dirty="0">
+                <a:solidFill>
+                  <a:srgbClr val="5F7181"/>
+                </a:solidFill>
+                <a:latin typeface="Aptos" pitchFamily="34" charset="0"/>
+                <a:ea typeface="Aptos" pitchFamily="34" charset="-122"/>
+                <a:cs typeface="Aptos" pitchFamily="34" charset="-120"/>
+              </a:rPr>
+              <a:t>20</a:t>
+            </a:r>
+            <a:endParaRPr lang="en-US" sz="900" dirty="0"/>
+          </a:p>
+        </p:txBody>
+      </p:sp>
+      <p:sp>
+        <p:nvSpPr>
+          <p:cNvPr id="8" name="Shape 6"/>
           <p:cNvSpPr/>
           <p:nvPr/>
         </p:nvSpPr>
@@ -9425,7 +10051,7 @@
       </p:sp>
       <p:sp>
         <p:nvSpPr>
-          <p:cNvPr id="8" name="Text 6"/>
+          <p:cNvPr id="9" name="Text 7"/>
           <p:cNvSpPr/>
           <p:nvPr/>
         </p:nvSpPr>
@@ -9464,14 +10090,14 @@
       </p:sp>
       <p:sp>
         <p:nvSpPr>
-          <p:cNvPr id="9" name="Text 7"/>
+          <p:cNvPr id="10" name="Text 8"/>
           <p:cNvSpPr/>
           <p:nvPr/>
         </p:nvSpPr>
         <p:spPr>
           <a:xfrm>
             <a:off x="640080" y="621792"/>
-            <a:ext cx="10881360" cy="566928"/>
+            <a:ext cx="10881360" cy="713232"/>
           </a:xfrm>
           <a:prstGeom prst="rect">
             <a:avLst/>
@@ -9489,7 +10115,7 @@
               <a:buNone/>
             </a:pPr>
             <a:r>
-              <a:rPr lang="en-US" sz="2700" b="1" dirty="0">
+              <a:rPr lang="en-US" sz="3400" b="1" dirty="0">
                 <a:solidFill>
                   <a:srgbClr val="003A63"/>
                 </a:solidFill>
@@ -9499,20 +10125,20 @@
               </a:rPr>
               <a:t>Expected Assignment</a:t>
             </a:r>
-            <a:endParaRPr lang="en-US" sz="2700" dirty="0"/>
-          </a:p>
-        </p:txBody>
-      </p:sp>
-      <p:sp>
-        <p:nvSpPr>
-          <p:cNvPr id="10" name="Text 8"/>
-          <p:cNvSpPr/>
-          <p:nvPr/>
-        </p:nvSpPr>
-        <p:spPr>
-          <a:xfrm>
-            <a:off x="868680" y="1417320"/>
-            <a:ext cx="6675120" cy="4434840"/>
+            <a:endParaRPr lang="en-US" sz="3400" dirty="0"/>
+          </a:p>
+        </p:txBody>
+      </p:sp>
+      <p:sp>
+        <p:nvSpPr>
+          <p:cNvPr id="11" name="Text 9"/>
+          <p:cNvSpPr/>
+          <p:nvPr/>
+        </p:nvSpPr>
+        <p:spPr>
+          <a:xfrm>
+            <a:off x="868680" y="1508760"/>
+            <a:ext cx="6537960" cy="4160520"/>
           </a:xfrm>
           <a:prstGeom prst="rect">
             <a:avLst/>
@@ -9527,7 +10153,7 @@
           <a:lstStyle/>
           <a:p>
             <a:r>
-              <a:rPr lang="en-US" sz="1700" dirty="0">
+              <a:rPr lang="en-US" sz="2100" dirty="0">
                 <a:solidFill>
                   <a:srgbClr val="17364A"/>
                 </a:solidFill>
@@ -9537,11 +10163,11 @@
               </a:rPr>
               <a:t>Linkage risk review</a:t>
             </a:r>
-            <a:endParaRPr lang="en-US" sz="1700" dirty="0"/>
-          </a:p>
-          <a:p>
-            <a:r>
-              <a:rPr lang="en-US" sz="1700" dirty="0">
+            <a:endParaRPr lang="en-US" sz="2100" dirty="0"/>
+          </a:p>
+          <a:p>
+            <a:r>
+              <a:rPr lang="en-US" sz="2100" dirty="0">
                 <a:solidFill>
                   <a:srgbClr val="17364A"/>
                 </a:solidFill>
@@ -9551,11 +10177,11 @@
               </a:rPr>
               <a:t>Deduplication workflow map</a:t>
             </a:r>
-            <a:endParaRPr lang="en-US" sz="1700" dirty="0"/>
-          </a:p>
-          <a:p>
-            <a:r>
-              <a:rPr lang="en-US" sz="1700" dirty="0">
+            <a:endParaRPr lang="en-US" sz="2100" dirty="0"/>
+          </a:p>
+          <a:p>
+            <a:r>
+              <a:rPr lang="en-US" sz="2100" dirty="0">
                 <a:solidFill>
                   <a:srgbClr val="17364A"/>
                 </a:solidFill>
@@ -9565,27 +10191,13 @@
               </a:rPr>
               <a:t>Match review questions</a:t>
             </a:r>
-            <a:endParaRPr lang="en-US" sz="1700" dirty="0"/>
-          </a:p>
-          <a:p>
-            <a:r>
-              <a:rPr lang="en-US" sz="1700" dirty="0">
-                <a:solidFill>
-                  <a:srgbClr val="17364A"/>
-                </a:solidFill>
-                <a:latin typeface="Aptos" pitchFamily="34" charset="0"/>
-                <a:ea typeface="Aptos" pitchFamily="34" charset="-122"/>
-                <a:cs typeface="Aptos" pitchFamily="34" charset="-120"/>
-              </a:rPr>
-              <a:t>Equity and escalation notes</a:t>
-            </a:r>
-            <a:endParaRPr lang="en-US" sz="1700" dirty="0"/>
-          </a:p>
-        </p:txBody>
-      </p:sp>
-      <p:sp>
-        <p:nvSpPr>
-          <p:cNvPr id="11" name="Shape 9"/>
+            <a:endParaRPr lang="en-US" sz="2100" dirty="0"/>
+          </a:p>
+        </p:txBody>
+      </p:sp>
+      <p:sp>
+        <p:nvSpPr>
+          <p:cNvPr id="12" name="Shape 10"/>
           <p:cNvSpPr/>
           <p:nvPr/>
         </p:nvSpPr>
@@ -9612,14 +10224,14 @@
       </p:sp>
       <p:sp>
         <p:nvSpPr>
-          <p:cNvPr id="12" name="Text 10"/>
+          <p:cNvPr id="13" name="Text 11"/>
           <p:cNvSpPr/>
           <p:nvPr/>
         </p:nvSpPr>
         <p:spPr>
           <a:xfrm>
             <a:off x="8074152" y="1563624"/>
-            <a:ext cx="2825496" cy="201168"/>
+            <a:ext cx="2825496" cy="256032"/>
           </a:xfrm>
           <a:prstGeom prst="rect">
             <a:avLst/>
@@ -9635,7 +10247,7 @@
               <a:buNone/>
             </a:pPr>
             <a:r>
-              <a:rPr lang="en-US" sz="950" b="1" dirty="0">
+              <a:rPr lang="en-US" sz="1300" b="1" dirty="0">
                 <a:solidFill>
                   <a:srgbClr val="0068B7"/>
                 </a:solidFill>
@@ -9645,20 +10257,20 @@
               </a:rPr>
               <a:t>Key idea</a:t>
             </a:r>
-            <a:endParaRPr lang="en-US" sz="950" dirty="0"/>
-          </a:p>
-        </p:txBody>
-      </p:sp>
-      <p:sp>
-        <p:nvSpPr>
-          <p:cNvPr id="13" name="Text 11"/>
-          <p:cNvSpPr/>
-          <p:nvPr/>
-        </p:nvSpPr>
-        <p:spPr>
-          <a:xfrm>
-            <a:off x="8074152" y="1856232"/>
-            <a:ext cx="2825496" cy="1261872"/>
+            <a:endParaRPr lang="en-US" sz="1300" dirty="0"/>
+          </a:p>
+        </p:txBody>
+      </p:sp>
+      <p:sp>
+        <p:nvSpPr>
+          <p:cNvPr id="14" name="Text 12"/>
+          <p:cNvSpPr/>
+          <p:nvPr/>
+        </p:nvSpPr>
+        <p:spPr>
+          <a:xfrm>
+            <a:off x="8074152" y="1920240"/>
+            <a:ext cx="2825496" cy="1188720"/>
           </a:xfrm>
           <a:prstGeom prst="rect">
             <a:avLst/>
@@ -9676,7 +10288,7 @@
               <a:buNone/>
             </a:pPr>
             <a:r>
-              <a:rPr lang="en-US" sz="1250" dirty="0">
+              <a:rPr lang="en-US" sz="1550" dirty="0">
                 <a:solidFill>
                   <a:srgbClr val="17364A"/>
                 </a:solidFill>
@@ -9686,13 +10298,13 @@
               </a:rPr>
               <a:t>Linkage risk review</a:t>
             </a:r>
-            <a:endParaRPr lang="en-US" sz="1250" dirty="0"/>
-          </a:p>
-        </p:txBody>
-      </p:sp>
-      <p:sp>
-        <p:nvSpPr>
-          <p:cNvPr id="14" name="Shape 12"/>
+            <a:endParaRPr lang="en-US" sz="1550" dirty="0"/>
+          </a:p>
+        </p:txBody>
+      </p:sp>
+      <p:sp>
+        <p:nvSpPr>
+          <p:cNvPr id="15" name="Shape 13"/>
           <p:cNvSpPr/>
           <p:nvPr/>
         </p:nvSpPr>
@@ -9719,14 +10331,14 @@
       </p:sp>
       <p:sp>
         <p:nvSpPr>
-          <p:cNvPr id="15" name="Text 13"/>
+          <p:cNvPr id="16" name="Text 14"/>
           <p:cNvSpPr/>
           <p:nvPr/>
         </p:nvSpPr>
         <p:spPr>
           <a:xfrm>
             <a:off x="8074152" y="3666744"/>
-            <a:ext cx="2825496" cy="201168"/>
+            <a:ext cx="2825496" cy="256032"/>
           </a:xfrm>
           <a:prstGeom prst="rect">
             <a:avLst/>
@@ -9742,7 +10354,7 @@
               <a:buNone/>
             </a:pPr>
             <a:r>
-              <a:rPr lang="en-US" sz="950" b="1" dirty="0">
+              <a:rPr lang="en-US" sz="1300" b="1" dirty="0">
                 <a:solidFill>
                   <a:srgbClr val="0068B7"/>
                 </a:solidFill>
@@ -9752,20 +10364,20 @@
               </a:rPr>
               <a:t>Use this for</a:t>
             </a:r>
-            <a:endParaRPr lang="en-US" sz="950" dirty="0"/>
-          </a:p>
-        </p:txBody>
-      </p:sp>
-      <p:sp>
-        <p:nvSpPr>
-          <p:cNvPr id="16" name="Text 14"/>
-          <p:cNvSpPr/>
-          <p:nvPr/>
-        </p:nvSpPr>
-        <p:spPr>
-          <a:xfrm>
-            <a:off x="8074152" y="3959352"/>
-            <a:ext cx="2825496" cy="1170432"/>
+            <a:endParaRPr lang="en-US" sz="1300" dirty="0"/>
+          </a:p>
+        </p:txBody>
+      </p:sp>
+      <p:sp>
+        <p:nvSpPr>
+          <p:cNvPr id="17" name="Text 15"/>
+          <p:cNvSpPr/>
+          <p:nvPr/>
+        </p:nvSpPr>
+        <p:spPr>
+          <a:xfrm>
+            <a:off x="8074152" y="4023360"/>
+            <a:ext cx="2825496" cy="1097280"/>
           </a:xfrm>
           <a:prstGeom prst="rect">
             <a:avLst/>
@@ -9783,7 +10395,7 @@
               <a:buNone/>
             </a:pPr>
             <a:r>
-              <a:rPr lang="en-US" sz="1250" dirty="0">
+              <a:rPr lang="en-US" sz="1550" dirty="0">
                 <a:solidFill>
                   <a:srgbClr val="17364A"/>
                 </a:solidFill>
@@ -9793,7 +10405,7 @@
               </a:rPr>
               <a:t>Connect the concept to public health decisions, safeguards, documentation, or implementation work.</a:t>
             </a:r>
-            <a:endParaRPr lang="en-US" sz="1250" dirty="0"/>
+            <a:endParaRPr lang="en-US" sz="1550" dirty="0"/>
           </a:p>
         </p:txBody>
       </p:sp>
@@ -9990,7 +10602,7 @@
                 <a:ea typeface="Aptos" pitchFamily="34" charset="-122"/>
                 <a:cs typeface="Aptos" pitchFamily="34" charset="-120"/>
               </a:rPr>
-              <a:t>© Paula Soper</a:t>
+              <a:t>Â© Paula Soper</a:t>
             </a:r>
             <a:endParaRPr lang="en-US" sz="800" dirty="0"/>
           </a:p>
@@ -9998,7 +10610,46 @@
       </p:sp>
       <p:sp>
         <p:nvSpPr>
-          <p:cNvPr id="7" name="Shape 5"/>
+          <p:cNvPr id="7" name="Text 5"/>
+          <p:cNvSpPr/>
+          <p:nvPr/>
+        </p:nvSpPr>
+        <p:spPr>
+          <a:xfrm>
+            <a:off x="11137392" y="6510528"/>
+            <a:ext cx="411480" cy="201168"/>
+          </a:xfrm>
+          <a:prstGeom prst="rect">
+            <a:avLst/>
+          </a:prstGeom>
+          <a:noFill/>
+          <a:ln/>
+        </p:spPr>
+        <p:txBody>
+          <a:bodyPr wrap="square" lIns="0" tIns="0" rIns="0" bIns="0" rtlCol="0" anchor="ctr"/>
+          <a:lstStyle/>
+          <a:p>
+            <a:pPr algn="r" indent="0" marL="0">
+              <a:buNone/>
+            </a:pPr>
+            <a:r>
+              <a:rPr lang="en-US" sz="900" dirty="0">
+                <a:solidFill>
+                  <a:srgbClr val="5F7181"/>
+                </a:solidFill>
+                <a:latin typeface="Aptos" pitchFamily="34" charset="0"/>
+                <a:ea typeface="Aptos" pitchFamily="34" charset="-122"/>
+                <a:cs typeface="Aptos" pitchFamily="34" charset="-120"/>
+              </a:rPr>
+              <a:t>21</a:t>
+            </a:r>
+            <a:endParaRPr lang="en-US" sz="900" dirty="0"/>
+          </a:p>
+        </p:txBody>
+      </p:sp>
+      <p:sp>
+        <p:nvSpPr>
+          <p:cNvPr id="8" name="Shape 6"/>
           <p:cNvSpPr/>
           <p:nvPr/>
         </p:nvSpPr>
@@ -10023,7 +10674,7 @@
       </p:sp>
       <p:sp>
         <p:nvSpPr>
-          <p:cNvPr id="8" name="Text 6"/>
+          <p:cNvPr id="9" name="Text 7"/>
           <p:cNvSpPr/>
           <p:nvPr/>
         </p:nvSpPr>
@@ -10062,14 +10713,14 @@
       </p:sp>
       <p:sp>
         <p:nvSpPr>
-          <p:cNvPr id="9" name="Text 7"/>
+          <p:cNvPr id="10" name="Text 8"/>
           <p:cNvSpPr/>
           <p:nvPr/>
         </p:nvSpPr>
         <p:spPr>
           <a:xfrm>
             <a:off x="640080" y="621792"/>
-            <a:ext cx="10881360" cy="566928"/>
+            <a:ext cx="10881360" cy="713232"/>
           </a:xfrm>
           <a:prstGeom prst="rect">
             <a:avLst/>
@@ -10087,7 +10738,7 @@
               <a:buNone/>
             </a:pPr>
             <a:r>
-              <a:rPr lang="en-US" sz="2700" b="1" dirty="0">
+              <a:rPr lang="en-US" sz="3400" b="1" dirty="0">
                 <a:solidFill>
                   <a:srgbClr val="003A63"/>
                 </a:solidFill>
@@ -10097,20 +10748,20 @@
               </a:rPr>
               <a:t>Knowledge Check</a:t>
             </a:r>
-            <a:endParaRPr lang="en-US" sz="2700" dirty="0"/>
-          </a:p>
-        </p:txBody>
-      </p:sp>
-      <p:sp>
-        <p:nvSpPr>
-          <p:cNvPr id="10" name="Text 8"/>
-          <p:cNvSpPr/>
-          <p:nvPr/>
-        </p:nvSpPr>
-        <p:spPr>
-          <a:xfrm>
-            <a:off x="868680" y="1417320"/>
-            <a:ext cx="6675120" cy="4434840"/>
+            <a:endParaRPr lang="en-US" sz="3400" dirty="0"/>
+          </a:p>
+        </p:txBody>
+      </p:sp>
+      <p:sp>
+        <p:nvSpPr>
+          <p:cNvPr id="11" name="Text 9"/>
+          <p:cNvSpPr/>
+          <p:nvPr/>
+        </p:nvSpPr>
+        <p:spPr>
+          <a:xfrm>
+            <a:off x="868680" y="1508760"/>
+            <a:ext cx="6537960" cy="4160520"/>
           </a:xfrm>
           <a:prstGeom prst="rect">
             <a:avLst/>
@@ -10125,7 +10776,7 @@
           <a:lstStyle/>
           <a:p>
             <a:r>
-              <a:rPr lang="en-US" sz="1700" dirty="0">
+              <a:rPr lang="en-US" sz="2100" dirty="0">
                 <a:solidFill>
                   <a:srgbClr val="17364A"/>
                 </a:solidFill>
@@ -10135,11 +10786,11 @@
               </a:rPr>
               <a:t>1. What is a false match?</a:t>
             </a:r>
-            <a:endParaRPr lang="en-US" sz="1700" dirty="0"/>
-          </a:p>
-          <a:p>
-            <a:r>
-              <a:rPr lang="en-US" sz="1700" dirty="0">
+            <a:endParaRPr lang="en-US" sz="2100" dirty="0"/>
+          </a:p>
+          <a:p>
+            <a:r>
+              <a:rPr lang="en-US" sz="2100" dirty="0">
                 <a:solidFill>
                   <a:srgbClr val="17364A"/>
                 </a:solidFill>
@@ -10149,11 +10800,11 @@
               </a:rPr>
               <a:t>2. What is a missed match?</a:t>
             </a:r>
-            <a:endParaRPr lang="en-US" sz="1700" dirty="0"/>
-          </a:p>
-          <a:p>
-            <a:r>
-              <a:rPr lang="en-US" sz="1700" dirty="0">
+            <a:endParaRPr lang="en-US" sz="2100" dirty="0"/>
+          </a:p>
+          <a:p>
+            <a:r>
+              <a:rPr lang="en-US" sz="2100" dirty="0">
                 <a:solidFill>
                   <a:srgbClr val="17364A"/>
                 </a:solidFill>
@@ -10163,27 +10814,13 @@
               </a:rPr>
               <a:t>3. Why does record linkage matter for AI?</a:t>
             </a:r>
-            <a:endParaRPr lang="en-US" sz="1700" dirty="0"/>
-          </a:p>
-          <a:p>
-            <a:r>
-              <a:rPr lang="en-US" sz="1700" dirty="0">
-                <a:solidFill>
-                  <a:srgbClr val="17364A"/>
-                </a:solidFill>
-                <a:latin typeface="Aptos" pitchFamily="34" charset="0"/>
-                <a:ea typeface="Aptos" pitchFamily="34" charset="-122"/>
-                <a:cs typeface="Aptos" pitchFamily="34" charset="-120"/>
-              </a:rPr>
-              <a:t>4. Who may need to review uncertain matches?</a:t>
-            </a:r>
-            <a:endParaRPr lang="en-US" sz="1700" dirty="0"/>
-          </a:p>
-        </p:txBody>
-      </p:sp>
-      <p:sp>
-        <p:nvSpPr>
-          <p:cNvPr id="11" name="Shape 9"/>
+            <a:endParaRPr lang="en-US" sz="2100" dirty="0"/>
+          </a:p>
+        </p:txBody>
+      </p:sp>
+      <p:sp>
+        <p:nvSpPr>
+          <p:cNvPr id="12" name="Shape 10"/>
           <p:cNvSpPr/>
           <p:nvPr/>
         </p:nvSpPr>
@@ -10210,14 +10847,14 @@
       </p:sp>
       <p:sp>
         <p:nvSpPr>
-          <p:cNvPr id="12" name="Text 10"/>
+          <p:cNvPr id="13" name="Text 11"/>
           <p:cNvSpPr/>
           <p:nvPr/>
         </p:nvSpPr>
         <p:spPr>
           <a:xfrm>
             <a:off x="8074152" y="1563624"/>
-            <a:ext cx="2825496" cy="201168"/>
+            <a:ext cx="2825496" cy="256032"/>
           </a:xfrm>
           <a:prstGeom prst="rect">
             <a:avLst/>
@@ -10233,7 +10870,7 @@
               <a:buNone/>
             </a:pPr>
             <a:r>
-              <a:rPr lang="en-US" sz="950" b="1" dirty="0">
+              <a:rPr lang="en-US" sz="1300" b="1" dirty="0">
                 <a:solidFill>
                   <a:srgbClr val="0068B7"/>
                 </a:solidFill>
@@ -10243,20 +10880,20 @@
               </a:rPr>
               <a:t>Key idea</a:t>
             </a:r>
-            <a:endParaRPr lang="en-US" sz="950" dirty="0"/>
-          </a:p>
-        </p:txBody>
-      </p:sp>
-      <p:sp>
-        <p:nvSpPr>
-          <p:cNvPr id="13" name="Text 11"/>
-          <p:cNvSpPr/>
-          <p:nvPr/>
-        </p:nvSpPr>
-        <p:spPr>
-          <a:xfrm>
-            <a:off x="8074152" y="1856232"/>
-            <a:ext cx="2825496" cy="1261872"/>
+            <a:endParaRPr lang="en-US" sz="1300" dirty="0"/>
+          </a:p>
+        </p:txBody>
+      </p:sp>
+      <p:sp>
+        <p:nvSpPr>
+          <p:cNvPr id="14" name="Text 12"/>
+          <p:cNvSpPr/>
+          <p:nvPr/>
+        </p:nvSpPr>
+        <p:spPr>
+          <a:xfrm>
+            <a:off x="8074152" y="1920240"/>
+            <a:ext cx="2825496" cy="1188720"/>
           </a:xfrm>
           <a:prstGeom prst="rect">
             <a:avLst/>
@@ -10274,7 +10911,7 @@
               <a:buNone/>
             </a:pPr>
             <a:r>
-              <a:rPr lang="en-US" sz="1250" dirty="0">
+              <a:rPr lang="en-US" sz="1550" dirty="0">
                 <a:solidFill>
                   <a:srgbClr val="17364A"/>
                 </a:solidFill>
@@ -10284,13 +10921,13 @@
               </a:rPr>
               <a:t>1. What is a false match?</a:t>
             </a:r>
-            <a:endParaRPr lang="en-US" sz="1250" dirty="0"/>
-          </a:p>
-        </p:txBody>
-      </p:sp>
-      <p:sp>
-        <p:nvSpPr>
-          <p:cNvPr id="14" name="Shape 12"/>
+            <a:endParaRPr lang="en-US" sz="1550" dirty="0"/>
+          </a:p>
+        </p:txBody>
+      </p:sp>
+      <p:sp>
+        <p:nvSpPr>
+          <p:cNvPr id="15" name="Shape 13"/>
           <p:cNvSpPr/>
           <p:nvPr/>
         </p:nvSpPr>
@@ -10317,14 +10954,14 @@
       </p:sp>
       <p:sp>
         <p:nvSpPr>
-          <p:cNvPr id="15" name="Text 13"/>
+          <p:cNvPr id="16" name="Text 14"/>
           <p:cNvSpPr/>
           <p:nvPr/>
         </p:nvSpPr>
         <p:spPr>
           <a:xfrm>
             <a:off x="8074152" y="3666744"/>
-            <a:ext cx="2825496" cy="201168"/>
+            <a:ext cx="2825496" cy="256032"/>
           </a:xfrm>
           <a:prstGeom prst="rect">
             <a:avLst/>
@@ -10340,7 +10977,7 @@
               <a:buNone/>
             </a:pPr>
             <a:r>
-              <a:rPr lang="en-US" sz="950" b="1" dirty="0">
+              <a:rPr lang="en-US" sz="1300" b="1" dirty="0">
                 <a:solidFill>
                   <a:srgbClr val="0068B7"/>
                 </a:solidFill>
@@ -10350,20 +10987,20 @@
               </a:rPr>
               <a:t>Use this for</a:t>
             </a:r>
-            <a:endParaRPr lang="en-US" sz="950" dirty="0"/>
-          </a:p>
-        </p:txBody>
-      </p:sp>
-      <p:sp>
-        <p:nvSpPr>
-          <p:cNvPr id="16" name="Text 14"/>
-          <p:cNvSpPr/>
-          <p:nvPr/>
-        </p:nvSpPr>
-        <p:spPr>
-          <a:xfrm>
-            <a:off x="8074152" y="3959352"/>
-            <a:ext cx="2825496" cy="1170432"/>
+            <a:endParaRPr lang="en-US" sz="1300" dirty="0"/>
+          </a:p>
+        </p:txBody>
+      </p:sp>
+      <p:sp>
+        <p:nvSpPr>
+          <p:cNvPr id="17" name="Text 15"/>
+          <p:cNvSpPr/>
+          <p:nvPr/>
+        </p:nvSpPr>
+        <p:spPr>
+          <a:xfrm>
+            <a:off x="8074152" y="4023360"/>
+            <a:ext cx="2825496" cy="1097280"/>
           </a:xfrm>
           <a:prstGeom prst="rect">
             <a:avLst/>
@@ -10381,7 +11018,7 @@
               <a:buNone/>
             </a:pPr>
             <a:r>
-              <a:rPr lang="en-US" sz="1250" dirty="0">
+              <a:rPr lang="en-US" sz="1550" dirty="0">
                 <a:solidFill>
                   <a:srgbClr val="17364A"/>
                 </a:solidFill>
@@ -10391,7 +11028,7 @@
               </a:rPr>
               <a:t>Connect the concept to public health decisions, safeguards, documentation, or implementation work.</a:t>
             </a:r>
-            <a:endParaRPr lang="en-US" sz="1250" dirty="0"/>
+            <a:endParaRPr lang="en-US" sz="1550" dirty="0"/>
           </a:p>
         </p:txBody>
       </p:sp>
@@ -10588,7 +11225,7 @@
                 <a:ea typeface="Aptos" pitchFamily="34" charset="-122"/>
                 <a:cs typeface="Aptos" pitchFamily="34" charset="-120"/>
               </a:rPr>
-              <a:t>© Paula Soper</a:t>
+              <a:t>Â© Paula Soper</a:t>
             </a:r>
             <a:endParaRPr lang="en-US" sz="800" dirty="0"/>
           </a:p>
@@ -10596,7 +11233,46 @@
       </p:sp>
       <p:sp>
         <p:nvSpPr>
-          <p:cNvPr id="7" name="Shape 5"/>
+          <p:cNvPr id="7" name="Text 5"/>
+          <p:cNvSpPr/>
+          <p:nvPr/>
+        </p:nvSpPr>
+        <p:spPr>
+          <a:xfrm>
+            <a:off x="11137392" y="6510528"/>
+            <a:ext cx="411480" cy="201168"/>
+          </a:xfrm>
+          <a:prstGeom prst="rect">
+            <a:avLst/>
+          </a:prstGeom>
+          <a:noFill/>
+          <a:ln/>
+        </p:spPr>
+        <p:txBody>
+          <a:bodyPr wrap="square" lIns="0" tIns="0" rIns="0" bIns="0" rtlCol="0" anchor="ctr"/>
+          <a:lstStyle/>
+          <a:p>
+            <a:pPr algn="r" indent="0" marL="0">
+              <a:buNone/>
+            </a:pPr>
+            <a:r>
+              <a:rPr lang="en-US" sz="900" dirty="0">
+                <a:solidFill>
+                  <a:srgbClr val="5F7181"/>
+                </a:solidFill>
+                <a:latin typeface="Aptos" pitchFamily="34" charset="0"/>
+                <a:ea typeface="Aptos" pitchFamily="34" charset="-122"/>
+                <a:cs typeface="Aptos" pitchFamily="34" charset="-120"/>
+              </a:rPr>
+              <a:t>22</a:t>
+            </a:r>
+            <a:endParaRPr lang="en-US" sz="900" dirty="0"/>
+          </a:p>
+        </p:txBody>
+      </p:sp>
+      <p:sp>
+        <p:nvSpPr>
+          <p:cNvPr id="8" name="Shape 6"/>
           <p:cNvSpPr/>
           <p:nvPr/>
         </p:nvSpPr>
@@ -10621,7 +11297,7 @@
       </p:sp>
       <p:sp>
         <p:nvSpPr>
-          <p:cNvPr id="8" name="Text 6"/>
+          <p:cNvPr id="9" name="Text 7"/>
           <p:cNvSpPr/>
           <p:nvPr/>
         </p:nvSpPr>
@@ -10660,14 +11336,14 @@
       </p:sp>
       <p:sp>
         <p:nvSpPr>
-          <p:cNvPr id="9" name="Text 7"/>
+          <p:cNvPr id="10" name="Text 8"/>
           <p:cNvSpPr/>
           <p:nvPr/>
         </p:nvSpPr>
         <p:spPr>
           <a:xfrm>
             <a:off x="640080" y="621792"/>
-            <a:ext cx="10881360" cy="566928"/>
+            <a:ext cx="10881360" cy="713232"/>
           </a:xfrm>
           <a:prstGeom prst="rect">
             <a:avLst/>
@@ -10685,7 +11361,7 @@
               <a:buNone/>
             </a:pPr>
             <a:r>
-              <a:rPr lang="en-US" sz="2700" b="1" dirty="0">
+              <a:rPr lang="en-US" sz="3400" b="1" dirty="0">
                 <a:solidFill>
                   <a:srgbClr val="003A63"/>
                 </a:solidFill>
@@ -10695,20 +11371,20 @@
               </a:rPr>
               <a:t>References and Resources</a:t>
             </a:r>
-            <a:endParaRPr lang="en-US" sz="2700" dirty="0"/>
-          </a:p>
-        </p:txBody>
-      </p:sp>
-      <p:sp>
-        <p:nvSpPr>
-          <p:cNvPr id="10" name="Text 8"/>
-          <p:cNvSpPr/>
-          <p:nvPr/>
-        </p:nvSpPr>
-        <p:spPr>
-          <a:xfrm>
-            <a:off x="868680" y="1417320"/>
-            <a:ext cx="6675120" cy="4434840"/>
+            <a:endParaRPr lang="en-US" sz="3400" dirty="0"/>
+          </a:p>
+        </p:txBody>
+      </p:sp>
+      <p:sp>
+        <p:nvSpPr>
+          <p:cNvPr id="11" name="Text 9"/>
+          <p:cNvSpPr/>
+          <p:nvPr/>
+        </p:nvSpPr>
+        <p:spPr>
+          <a:xfrm>
+            <a:off x="868680" y="1508760"/>
+            <a:ext cx="6537960" cy="4160520"/>
           </a:xfrm>
           <a:prstGeom prst="rect">
             <a:avLst/>
@@ -10723,7 +11399,7 @@
           <a:lstStyle/>
           <a:p>
             <a:r>
-              <a:rPr lang="en-US" sz="1700" dirty="0">
+              <a:rPr lang="en-US" sz="2100" dirty="0">
                 <a:solidFill>
                   <a:srgbClr val="17364A"/>
                 </a:solidFill>
@@ -10733,11 +11409,11 @@
               </a:rPr>
               <a:t>Public health IIS and surveillance data quality resources</a:t>
             </a:r>
-            <a:endParaRPr lang="en-US" sz="1700" dirty="0"/>
-          </a:p>
-          <a:p>
-            <a:r>
-              <a:rPr lang="en-US" sz="1700" dirty="0">
+            <a:endParaRPr lang="en-US" sz="2100" dirty="0"/>
+          </a:p>
+          <a:p>
+            <a:r>
+              <a:rPr lang="en-US" sz="2100" dirty="0">
                 <a:solidFill>
                   <a:srgbClr val="17364A"/>
                 </a:solidFill>
@@ -10747,11 +11423,11 @@
               </a:rPr>
               <a:t>CDC data modernization resources</a:t>
             </a:r>
-            <a:endParaRPr lang="en-US" sz="1700" dirty="0"/>
-          </a:p>
-          <a:p>
-            <a:r>
-              <a:rPr lang="en-US" sz="1700" dirty="0">
+            <a:endParaRPr lang="en-US" sz="2100" dirty="0"/>
+          </a:p>
+          <a:p>
+            <a:r>
+              <a:rPr lang="en-US" sz="2100" dirty="0">
                 <a:solidFill>
                   <a:srgbClr val="17364A"/>
                 </a:solidFill>
@@ -10761,27 +11437,13 @@
               </a:rPr>
               <a:t>Health information exchange data quality materials</a:t>
             </a:r>
-            <a:endParaRPr lang="en-US" sz="1700" dirty="0"/>
-          </a:p>
-          <a:p>
-            <a:r>
-              <a:rPr lang="en-US" sz="1700" dirty="0">
-                <a:solidFill>
-                  <a:srgbClr val="17364A"/>
-                </a:solidFill>
-                <a:latin typeface="Aptos" pitchFamily="34" charset="0"/>
-                <a:ea typeface="Aptos" pitchFamily="34" charset="-122"/>
-                <a:cs typeface="Aptos" pitchFamily="34" charset="-120"/>
-              </a:rPr>
-              <a:t>Agency matching and deduplication procedures</a:t>
-            </a:r>
-            <a:endParaRPr lang="en-US" sz="1700" dirty="0"/>
-          </a:p>
-        </p:txBody>
-      </p:sp>
-      <p:sp>
-        <p:nvSpPr>
-          <p:cNvPr id="11" name="Shape 9"/>
+            <a:endParaRPr lang="en-US" sz="2100" dirty="0"/>
+          </a:p>
+        </p:txBody>
+      </p:sp>
+      <p:sp>
+        <p:nvSpPr>
+          <p:cNvPr id="12" name="Shape 10"/>
           <p:cNvSpPr/>
           <p:nvPr/>
         </p:nvSpPr>
@@ -10808,14 +11470,14 @@
       </p:sp>
       <p:sp>
         <p:nvSpPr>
-          <p:cNvPr id="12" name="Text 10"/>
+          <p:cNvPr id="13" name="Text 11"/>
           <p:cNvSpPr/>
           <p:nvPr/>
         </p:nvSpPr>
         <p:spPr>
           <a:xfrm>
             <a:off x="8074152" y="1563624"/>
-            <a:ext cx="2825496" cy="201168"/>
+            <a:ext cx="2825496" cy="256032"/>
           </a:xfrm>
           <a:prstGeom prst="rect">
             <a:avLst/>
@@ -10831,7 +11493,7 @@
               <a:buNone/>
             </a:pPr>
             <a:r>
-              <a:rPr lang="en-US" sz="950" b="1" dirty="0">
+              <a:rPr lang="en-US" sz="1300" b="1" dirty="0">
                 <a:solidFill>
                   <a:srgbClr val="0068B7"/>
                 </a:solidFill>
@@ -10841,20 +11503,20 @@
               </a:rPr>
               <a:t>Key idea</a:t>
             </a:r>
-            <a:endParaRPr lang="en-US" sz="950" dirty="0"/>
-          </a:p>
-        </p:txBody>
-      </p:sp>
-      <p:sp>
-        <p:nvSpPr>
-          <p:cNvPr id="13" name="Text 11"/>
-          <p:cNvSpPr/>
-          <p:nvPr/>
-        </p:nvSpPr>
-        <p:spPr>
-          <a:xfrm>
-            <a:off x="8074152" y="1856232"/>
-            <a:ext cx="2825496" cy="1261872"/>
+            <a:endParaRPr lang="en-US" sz="1300" dirty="0"/>
+          </a:p>
+        </p:txBody>
+      </p:sp>
+      <p:sp>
+        <p:nvSpPr>
+          <p:cNvPr id="14" name="Text 12"/>
+          <p:cNvSpPr/>
+          <p:nvPr/>
+        </p:nvSpPr>
+        <p:spPr>
+          <a:xfrm>
+            <a:off x="8074152" y="1920240"/>
+            <a:ext cx="2825496" cy="1188720"/>
           </a:xfrm>
           <a:prstGeom prst="rect">
             <a:avLst/>
@@ -10872,7 +11534,7 @@
               <a:buNone/>
             </a:pPr>
             <a:r>
-              <a:rPr lang="en-US" sz="1250" dirty="0">
+              <a:rPr lang="en-US" sz="1550" dirty="0">
                 <a:solidFill>
                   <a:srgbClr val="17364A"/>
                 </a:solidFill>
@@ -10882,13 +11544,13 @@
               </a:rPr>
               <a:t>Public health IIS and surveillance data quality resources</a:t>
             </a:r>
-            <a:endParaRPr lang="en-US" sz="1250" dirty="0"/>
-          </a:p>
-        </p:txBody>
-      </p:sp>
-      <p:sp>
-        <p:nvSpPr>
-          <p:cNvPr id="14" name="Shape 12"/>
+            <a:endParaRPr lang="en-US" sz="1550" dirty="0"/>
+          </a:p>
+        </p:txBody>
+      </p:sp>
+      <p:sp>
+        <p:nvSpPr>
+          <p:cNvPr id="15" name="Shape 13"/>
           <p:cNvSpPr/>
           <p:nvPr/>
         </p:nvSpPr>
@@ -10915,14 +11577,14 @@
       </p:sp>
       <p:sp>
         <p:nvSpPr>
-          <p:cNvPr id="15" name="Text 13"/>
+          <p:cNvPr id="16" name="Text 14"/>
           <p:cNvSpPr/>
           <p:nvPr/>
         </p:nvSpPr>
         <p:spPr>
           <a:xfrm>
             <a:off x="8074152" y="3666744"/>
-            <a:ext cx="2825496" cy="201168"/>
+            <a:ext cx="2825496" cy="256032"/>
           </a:xfrm>
           <a:prstGeom prst="rect">
             <a:avLst/>
@@ -10938,7 +11600,7 @@
               <a:buNone/>
             </a:pPr>
             <a:r>
-              <a:rPr lang="en-US" sz="950" b="1" dirty="0">
+              <a:rPr lang="en-US" sz="1300" b="1" dirty="0">
                 <a:solidFill>
                   <a:srgbClr val="0068B7"/>
                 </a:solidFill>
@@ -10948,20 +11610,20 @@
               </a:rPr>
               <a:t>Use this for</a:t>
             </a:r>
-            <a:endParaRPr lang="en-US" sz="950" dirty="0"/>
-          </a:p>
-        </p:txBody>
-      </p:sp>
-      <p:sp>
-        <p:nvSpPr>
-          <p:cNvPr id="16" name="Text 14"/>
-          <p:cNvSpPr/>
-          <p:nvPr/>
-        </p:nvSpPr>
-        <p:spPr>
-          <a:xfrm>
-            <a:off x="8074152" y="3959352"/>
-            <a:ext cx="2825496" cy="1170432"/>
+            <a:endParaRPr lang="en-US" sz="1300" dirty="0"/>
+          </a:p>
+        </p:txBody>
+      </p:sp>
+      <p:sp>
+        <p:nvSpPr>
+          <p:cNvPr id="17" name="Text 15"/>
+          <p:cNvSpPr/>
+          <p:nvPr/>
+        </p:nvSpPr>
+        <p:spPr>
+          <a:xfrm>
+            <a:off x="8074152" y="4023360"/>
+            <a:ext cx="2825496" cy="1097280"/>
           </a:xfrm>
           <a:prstGeom prst="rect">
             <a:avLst/>
@@ -10979,7 +11641,7 @@
               <a:buNone/>
             </a:pPr>
             <a:r>
-              <a:rPr lang="en-US" sz="1250" dirty="0">
+              <a:rPr lang="en-US" sz="1550" dirty="0">
                 <a:solidFill>
                   <a:srgbClr val="17364A"/>
                 </a:solidFill>
@@ -10989,7 +11651,7 @@
               </a:rPr>
               <a:t>Connect the concept to public health decisions, safeguards, documentation, or implementation work.</a:t>
             </a:r>
-            <a:endParaRPr lang="en-US" sz="1250" dirty="0"/>
+            <a:endParaRPr lang="en-US" sz="1550" dirty="0"/>
           </a:p>
         </p:txBody>
       </p:sp>
@@ -11186,7 +11848,7 @@
                 <a:ea typeface="Aptos" pitchFamily="34" charset="-122"/>
                 <a:cs typeface="Aptos" pitchFamily="34" charset="-120"/>
               </a:rPr>
-              <a:t>© Paula Soper</a:t>
+              <a:t>Â© Paula Soper</a:t>
             </a:r>
             <a:endParaRPr lang="en-US" sz="800" dirty="0"/>
           </a:p>
@@ -11200,8 +11862,47 @@
         </p:nvSpPr>
         <p:spPr>
           <a:xfrm>
+            <a:off x="11137392" y="6510528"/>
+            <a:ext cx="411480" cy="201168"/>
+          </a:xfrm>
+          <a:prstGeom prst="rect">
+            <a:avLst/>
+          </a:prstGeom>
+          <a:noFill/>
+          <a:ln/>
+        </p:spPr>
+        <p:txBody>
+          <a:bodyPr wrap="square" lIns="0" tIns="0" rIns="0" bIns="0" rtlCol="0" anchor="ctr"/>
+          <a:lstStyle/>
+          <a:p>
+            <a:pPr algn="r" indent="0" marL="0">
+              <a:buNone/>
+            </a:pPr>
+            <a:r>
+              <a:rPr lang="en-US" sz="900" dirty="0">
+                <a:solidFill>
+                  <a:srgbClr val="5F7181"/>
+                </a:solidFill>
+                <a:latin typeface="Aptos" pitchFamily="34" charset="0"/>
+                <a:ea typeface="Aptos" pitchFamily="34" charset="-122"/>
+                <a:cs typeface="Aptos" pitchFamily="34" charset="-120"/>
+              </a:rPr>
+              <a:t>3</a:t>
+            </a:r>
+            <a:endParaRPr lang="en-US" sz="900" dirty="0"/>
+          </a:p>
+        </p:txBody>
+      </p:sp>
+      <p:sp>
+        <p:nvSpPr>
+          <p:cNvPr id="8" name="Text 6"/>
+          <p:cNvSpPr/>
+          <p:nvPr/>
+        </p:nvSpPr>
+        <p:spPr>
+          <a:xfrm>
             <a:off x="640080" y="658368"/>
-            <a:ext cx="10881360" cy="566928"/>
+            <a:ext cx="10881360" cy="713232"/>
           </a:xfrm>
           <a:prstGeom prst="rect">
             <a:avLst/>
@@ -11219,7 +11920,7 @@
               <a:buNone/>
             </a:pPr>
             <a:r>
-              <a:rPr lang="en-US" sz="2700" b="1" dirty="0">
+              <a:rPr lang="en-US" sz="3400" b="1" dirty="0">
                 <a:solidFill>
                   <a:srgbClr val="003A63"/>
                 </a:solidFill>
@@ -11229,20 +11930,20 @@
               </a:rPr>
               <a:t>How this module connects to the playbook</a:t>
             </a:r>
-            <a:endParaRPr lang="en-US" sz="2700" dirty="0"/>
-          </a:p>
-        </p:txBody>
-      </p:sp>
-      <p:sp>
-        <p:nvSpPr>
-          <p:cNvPr id="8" name="Text 6"/>
-          <p:cNvSpPr/>
-          <p:nvPr/>
-        </p:nvSpPr>
-        <p:spPr>
-          <a:xfrm>
-            <a:off x="868680" y="1417320"/>
-            <a:ext cx="6903720" cy="4480560"/>
+            <a:endParaRPr lang="en-US" sz="3400" dirty="0"/>
+          </a:p>
+        </p:txBody>
+      </p:sp>
+      <p:sp>
+        <p:nvSpPr>
+          <p:cNvPr id="9" name="Text 7"/>
+          <p:cNvSpPr/>
+          <p:nvPr/>
+        </p:nvSpPr>
+        <p:spPr>
+          <a:xfrm>
+            <a:off x="868680" y="1508760"/>
+            <a:ext cx="6812280" cy="3977640"/>
           </a:xfrm>
           <a:prstGeom prst="rect">
             <a:avLst/>
@@ -11257,7 +11958,7 @@
           <a:lstStyle/>
           <a:p>
             <a:r>
-              <a:rPr lang="en-US" sz="1540" dirty="0">
+              <a:rPr lang="en-US" sz="1900" dirty="0">
                 <a:solidFill>
                   <a:srgbClr val="17364A"/>
                 </a:solidFill>
@@ -11265,13 +11966,13 @@
                 <a:ea typeface="Aptos" pitchFamily="34" charset="-122"/>
                 <a:cs typeface="Aptos" pitchFamily="34" charset="-120"/>
               </a:rPr>
-              <a:t>Play 7: Prioritize Use Cases - This lesson informs Play 7 by helping learners connect the lesson topic to prioritize use cases work.</a:t>
-            </a:r>
-            <a:endParaRPr lang="en-US" sz="1540" dirty="0"/>
-          </a:p>
-          <a:p>
-            <a:r>
-              <a:rPr lang="en-US" sz="1540" dirty="0">
+              <a:t>Play 7: Prioritize Use Cases - This lesson informs Play 7 by helping learners connect the lesson topic to.</a:t>
+            </a:r>
+            <a:endParaRPr lang="en-US" sz="1900" dirty="0"/>
+          </a:p>
+          <a:p>
+            <a:r>
+              <a:rPr lang="en-US" sz="1900" dirty="0">
                 <a:solidFill>
                   <a:srgbClr val="17364A"/>
                 </a:solidFill>
@@ -11279,13 +11980,13 @@
                 <a:ea typeface="Aptos" pitchFamily="34" charset="-122"/>
                 <a:cs typeface="Aptos" pitchFamily="34" charset="-120"/>
               </a:rPr>
-              <a:t>Play 11: Build and Deploy AI Solutions - This lesson informs Play 11 by helping learners connect the lesson topic to build and deploy.</a:t>
-            </a:r>
-            <a:endParaRPr lang="en-US" sz="1540" dirty="0"/>
-          </a:p>
-          <a:p>
-            <a:r>
-              <a:rPr lang="en-US" sz="1540" dirty="0">
+              <a:t>Play 11: Build and Deploy AI Solutions - This lesson informs Play 11 by helping learners connect the lesson.</a:t>
+            </a:r>
+            <a:endParaRPr lang="en-US" sz="1900" dirty="0"/>
+          </a:p>
+          <a:p>
+            <a:r>
+              <a:rPr lang="en-US" sz="1900" dirty="0">
                 <a:solidFill>
                   <a:srgbClr val="17364A"/>
                 </a:solidFill>
@@ -11293,13 +11994,13 @@
                 <a:ea typeface="Aptos" pitchFamily="34" charset="-122"/>
                 <a:cs typeface="Aptos" pitchFamily="34" charset="-120"/>
               </a:rPr>
-              <a:t>Play 1: Vision &amp; Guardrails - This lesson informs Play 1 by helping learners connect the lesson topic to vision &amp; guardrails work in.</a:t>
-            </a:r>
-            <a:endParaRPr lang="en-US" sz="1540" dirty="0"/>
-          </a:p>
-          <a:p>
-            <a:r>
-              <a:rPr lang="en-US" sz="1540" dirty="0">
+              <a:t>Play 1: Vision &amp; Guardrails - This lesson informs Play 1 by helping learners connect the lesson topic to.</a:t>
+            </a:r>
+            <a:endParaRPr lang="en-US" sz="1900" dirty="0"/>
+          </a:p>
+          <a:p>
+            <a:r>
+              <a:rPr lang="en-US" sz="1900" dirty="0">
                 <a:solidFill>
                   <a:srgbClr val="17364A"/>
                 </a:solidFill>
@@ -11307,15 +12008,15 @@
                 <a:ea typeface="Aptos" pitchFamily="34" charset="-122"/>
                 <a:cs typeface="Aptos" pitchFamily="34" charset="-120"/>
               </a:rPr>
-              <a:t>Play 2: Readiness Assessment - This lesson informs Play 2 by helping learners connect the lesson topic to readiness assessment work.</a:t>
-            </a:r>
-            <a:endParaRPr lang="en-US" sz="1540" dirty="0"/>
-          </a:p>
-        </p:txBody>
-      </p:sp>
-      <p:sp>
-        <p:nvSpPr>
-          <p:cNvPr id="9" name="Shape 7"/>
+              <a:t>Play 2: Readiness Assessment - This lesson informs Play 2 by helping learners connect the lesson topic to.</a:t>
+            </a:r>
+            <a:endParaRPr lang="en-US" sz="1900" dirty="0"/>
+          </a:p>
+        </p:txBody>
+      </p:sp>
+      <p:sp>
+        <p:nvSpPr>
+          <p:cNvPr id="10" name="Shape 8"/>
           <p:cNvSpPr/>
           <p:nvPr/>
         </p:nvSpPr>
@@ -11342,14 +12043,14 @@
       </p:sp>
       <p:sp>
         <p:nvSpPr>
-          <p:cNvPr id="10" name="Text 8"/>
+          <p:cNvPr id="11" name="Text 9"/>
           <p:cNvSpPr/>
           <p:nvPr/>
         </p:nvSpPr>
         <p:spPr>
           <a:xfrm>
             <a:off x="8211312" y="1563624"/>
-            <a:ext cx="2734056" cy="201168"/>
+            <a:ext cx="2734056" cy="256032"/>
           </a:xfrm>
           <a:prstGeom prst="rect">
             <a:avLst/>
@@ -11365,7 +12066,7 @@
               <a:buNone/>
             </a:pPr>
             <a:r>
-              <a:rPr lang="en-US" sz="950" b="1" dirty="0">
+              <a:rPr lang="en-US" sz="1300" b="1" dirty="0">
                 <a:solidFill>
                   <a:srgbClr val="0068B7"/>
                 </a:solidFill>
@@ -11375,20 +12076,20 @@
               </a:rPr>
               <a:t>Apply the lesson</a:t>
             </a:r>
-            <a:endParaRPr lang="en-US" sz="950" dirty="0"/>
-          </a:p>
-        </p:txBody>
-      </p:sp>
-      <p:sp>
-        <p:nvSpPr>
-          <p:cNvPr id="11" name="Text 9"/>
-          <p:cNvSpPr/>
-          <p:nvPr/>
-        </p:nvSpPr>
-        <p:spPr>
-          <a:xfrm>
-            <a:off x="8211312" y="1856232"/>
-            <a:ext cx="2734056" cy="1536192"/>
+            <a:endParaRPr lang="en-US" sz="1300" dirty="0"/>
+          </a:p>
+        </p:txBody>
+      </p:sp>
+      <p:sp>
+        <p:nvSpPr>
+          <p:cNvPr id="12" name="Text 10"/>
+          <p:cNvSpPr/>
+          <p:nvPr/>
+        </p:nvSpPr>
+        <p:spPr>
+          <a:xfrm>
+            <a:off x="8211312" y="1920240"/>
+            <a:ext cx="2734056" cy="1463040"/>
           </a:xfrm>
           <a:prstGeom prst="rect">
             <a:avLst/>
@@ -11406,7 +12107,7 @@
               <a:buNone/>
             </a:pPr>
             <a:r>
-              <a:rPr lang="en-US" sz="1250" dirty="0">
+              <a:rPr lang="en-US" sz="1550" dirty="0">
                 <a:solidFill>
                   <a:srgbClr val="17364A"/>
                 </a:solidFill>
@@ -11416,32 +12117,32 @@
               </a:rPr>
               <a:t>Use the related plays to identify decisions, participants, timing, approvals, and documentation needed for responsible implementation.</a:t>
             </a:r>
-            <a:endParaRPr lang="en-US" sz="1250" dirty="0"/>
-          </a:p>
-        </p:txBody>
-      </p:sp>
-      <p:sp>
-        <p:nvSpPr>
-          <p:cNvPr id="12" name="Shape 10"/>
-          <p:cNvSpPr/>
-          <p:nvPr/>
-        </p:nvSpPr>
-        <p:spPr>
-          <a:xfrm>
-            <a:off x="8046720" y="3794760"/>
-            <a:ext cx="3063240" cy="1508760"/>
+            <a:endParaRPr lang="en-US" sz="1550" dirty="0"/>
+          </a:p>
+        </p:txBody>
+      </p:sp>
+      <p:sp>
+        <p:nvSpPr>
+          <p:cNvPr id="13" name="Shape 11"/>
+          <p:cNvSpPr/>
+          <p:nvPr/>
+        </p:nvSpPr>
+        <p:spPr>
+          <a:xfrm>
+            <a:off x="7818120" y="3977640"/>
+            <a:ext cx="972312" cy="749808"/>
           </a:xfrm>
           <a:prstGeom prst="roundRect">
             <a:avLst>
-              <a:gd name="adj" fmla="val 7273"/>
+              <a:gd name="adj" fmla="val 14634"/>
             </a:avLst>
           </a:prstGeom>
           <a:solidFill>
-            <a:srgbClr val="FFF4D9"/>
+            <a:srgbClr val="0068B7"/>
           </a:solidFill>
           <a:ln w="12700">
             <a:solidFill>
-              <a:srgbClr val="B9D7E6"/>
+              <a:srgbClr val="0068B7"/>
             </a:solidFill>
             <a:prstDash val="solid"/>
           </a:ln>
@@ -11449,81 +12150,256 @@
       </p:sp>
       <p:sp>
         <p:nvSpPr>
-          <p:cNvPr id="13" name="Text 11"/>
-          <p:cNvSpPr/>
-          <p:nvPr/>
-        </p:nvSpPr>
-        <p:spPr>
-          <a:xfrm>
-            <a:off x="8211312" y="3941064"/>
-            <a:ext cx="2734056" cy="201168"/>
-          </a:xfrm>
-          <a:prstGeom prst="rect">
-            <a:avLst/>
-          </a:prstGeom>
-          <a:noFill/>
-          <a:ln/>
-        </p:spPr>
-        <p:txBody>
-          <a:bodyPr wrap="square" lIns="0" tIns="0" rIns="0" bIns="0" rtlCol="0" anchor="ctr"/>
-          <a:lstStyle/>
-          <a:p>
-            <a:pPr indent="0" marL="0">
-              <a:buNone/>
-            </a:pPr>
-            <a:r>
-              <a:rPr lang="en-US" sz="950" b="1" dirty="0">
-                <a:solidFill>
-                  <a:srgbClr val="0068B7"/>
-                </a:solidFill>
-                <a:latin typeface="Aptos" pitchFamily="34" charset="0"/>
-                <a:ea typeface="Aptos" pitchFamily="34" charset="-122"/>
-                <a:cs typeface="Aptos" pitchFamily="34" charset="-120"/>
-              </a:rPr>
-              <a:t>Keep in mind</a:t>
-            </a:r>
-            <a:endParaRPr lang="en-US" sz="950" dirty="0"/>
-          </a:p>
-        </p:txBody>
-      </p:sp>
-      <p:sp>
-        <p:nvSpPr>
           <p:cNvPr id="14" name="Text 12"/>
           <p:cNvSpPr/>
           <p:nvPr/>
         </p:nvSpPr>
         <p:spPr>
           <a:xfrm>
-            <a:off x="8211312" y="4233672"/>
-            <a:ext cx="2734056" cy="941832"/>
-          </a:xfrm>
-          <a:prstGeom prst="rect">
-            <a:avLst/>
-          </a:prstGeom>
-          <a:noFill/>
-          <a:ln/>
-        </p:spPr>
-        <p:txBody>
-          <a:bodyPr wrap="square" lIns="0" tIns="0" rIns="0" bIns="0" rtlCol="0" anchor="t">
+            <a:off x="7891272" y="4169664"/>
+            <a:ext cx="826008" cy="310896"/>
+          </a:xfrm>
+          <a:prstGeom prst="rect">
+            <a:avLst/>
+          </a:prstGeom>
+          <a:noFill/>
+          <a:ln/>
+        </p:spPr>
+        <p:txBody>
+          <a:bodyPr wrap="square" lIns="0" tIns="0" rIns="0" bIns="0" rtlCol="0" anchor="ctr">
             <a:normAutofit/>
           </a:bodyPr>
           <a:lstStyle/>
           <a:p>
-            <a:pPr indent="0" marL="0">
-              <a:buNone/>
-            </a:pPr>
-            <a:r>
-              <a:rPr lang="en-US" sz="1250" dirty="0">
-                <a:solidFill>
-                  <a:srgbClr val="17364A"/>
-                </a:solidFill>
-                <a:latin typeface="Aptos" pitchFamily="34" charset="0"/>
-                <a:ea typeface="Aptos" pitchFamily="34" charset="-122"/>
-                <a:cs typeface="Aptos" pitchFamily="34" charset="-120"/>
-              </a:rPr>
-              <a:t>The playbook connection helps turn training into agency work, not just individual knowledge.</a:t>
-            </a:r>
-            <a:endParaRPr lang="en-US" sz="1250" dirty="0"/>
+            <a:pPr algn="ctr" indent="0" marL="0">
+              <a:buNone/>
+            </a:pPr>
+            <a:r>
+              <a:rPr lang="en-US" sz="1500" b="1" dirty="0">
+                <a:solidFill>
+                  <a:srgbClr val="FFFFFF"/>
+                </a:solidFill>
+                <a:latin typeface="Aptos" pitchFamily="34" charset="0"/>
+                <a:ea typeface="Aptos" pitchFamily="34" charset="-122"/>
+                <a:cs typeface="Aptos" pitchFamily="34" charset="-120"/>
+              </a:rPr>
+              <a:t>Lesson</a:t>
+            </a:r>
+            <a:endParaRPr lang="en-US" sz="1500" dirty="0"/>
+          </a:p>
+        </p:txBody>
+      </p:sp>
+      <p:sp>
+        <p:nvSpPr>
+          <p:cNvPr id="15" name="Text 13"/>
+          <p:cNvSpPr/>
+          <p:nvPr/>
+        </p:nvSpPr>
+        <p:spPr>
+          <a:xfrm>
+            <a:off x="8817864" y="4187952"/>
+            <a:ext cx="201168" cy="256032"/>
+          </a:xfrm>
+          <a:prstGeom prst="rect">
+            <a:avLst/>
+          </a:prstGeom>
+          <a:noFill/>
+          <a:ln/>
+        </p:spPr>
+        <p:txBody>
+          <a:bodyPr wrap="square" lIns="0" tIns="0" rIns="0" bIns="0" rtlCol="0" anchor="ctr"/>
+          <a:lstStyle/>
+          <a:p>
+            <a:pPr algn="ctr" indent="0" marL="0">
+              <a:buNone/>
+            </a:pPr>
+            <a:r>
+              <a:rPr lang="en-US" sz="1800" b="1" dirty="0">
+                <a:solidFill>
+                  <a:srgbClr val="0068B7"/>
+                </a:solidFill>
+                <a:latin typeface="Aptos" pitchFamily="34" charset="0"/>
+                <a:ea typeface="Aptos" pitchFamily="34" charset="-122"/>
+                <a:cs typeface="Aptos" pitchFamily="34" charset="-120"/>
+              </a:rPr>
+              <a:t>â†’</a:t>
+            </a:r>
+            <a:endParaRPr lang="en-US" sz="1800" dirty="0"/>
+          </a:p>
+        </p:txBody>
+      </p:sp>
+      <p:sp>
+        <p:nvSpPr>
+          <p:cNvPr id="16" name="Shape 14"/>
+          <p:cNvSpPr/>
+          <p:nvPr/>
+        </p:nvSpPr>
+        <p:spPr>
+          <a:xfrm>
+            <a:off x="9046464" y="3977640"/>
+            <a:ext cx="972312" cy="749808"/>
+          </a:xfrm>
+          <a:prstGeom prst="roundRect">
+            <a:avLst>
+              <a:gd name="adj" fmla="val 14634"/>
+            </a:avLst>
+          </a:prstGeom>
+          <a:solidFill>
+            <a:srgbClr val="2F8A28"/>
+          </a:solidFill>
+          <a:ln w="12700">
+            <a:solidFill>
+              <a:srgbClr val="2F8A28"/>
+            </a:solidFill>
+            <a:prstDash val="solid"/>
+          </a:ln>
+        </p:spPr>
+      </p:sp>
+      <p:sp>
+        <p:nvSpPr>
+          <p:cNvPr id="17" name="Text 15"/>
+          <p:cNvSpPr/>
+          <p:nvPr/>
+        </p:nvSpPr>
+        <p:spPr>
+          <a:xfrm>
+            <a:off x="9119616" y="4169664"/>
+            <a:ext cx="826008" cy="310896"/>
+          </a:xfrm>
+          <a:prstGeom prst="rect">
+            <a:avLst/>
+          </a:prstGeom>
+          <a:noFill/>
+          <a:ln/>
+        </p:spPr>
+        <p:txBody>
+          <a:bodyPr wrap="square" lIns="0" tIns="0" rIns="0" bIns="0" rtlCol="0" anchor="ctr">
+            <a:normAutofit/>
+          </a:bodyPr>
+          <a:lstStyle/>
+          <a:p>
+            <a:pPr algn="ctr" indent="0" marL="0">
+              <a:buNone/>
+            </a:pPr>
+            <a:r>
+              <a:rPr lang="en-US" sz="1500" b="1" dirty="0">
+                <a:solidFill>
+                  <a:srgbClr val="FFFFFF"/>
+                </a:solidFill>
+                <a:latin typeface="Aptos" pitchFamily="34" charset="0"/>
+                <a:ea typeface="Aptos" pitchFamily="34" charset="-122"/>
+                <a:cs typeface="Aptos" pitchFamily="34" charset="-120"/>
+              </a:rPr>
+              <a:t>Plays</a:t>
+            </a:r>
+            <a:endParaRPr lang="en-US" sz="1500" dirty="0"/>
+          </a:p>
+        </p:txBody>
+      </p:sp>
+      <p:sp>
+        <p:nvSpPr>
+          <p:cNvPr id="18" name="Text 16"/>
+          <p:cNvSpPr/>
+          <p:nvPr/>
+        </p:nvSpPr>
+        <p:spPr>
+          <a:xfrm>
+            <a:off x="10046208" y="4187952"/>
+            <a:ext cx="201168" cy="256032"/>
+          </a:xfrm>
+          <a:prstGeom prst="rect">
+            <a:avLst/>
+          </a:prstGeom>
+          <a:noFill/>
+          <a:ln/>
+        </p:spPr>
+        <p:txBody>
+          <a:bodyPr wrap="square" lIns="0" tIns="0" rIns="0" bIns="0" rtlCol="0" anchor="ctr"/>
+          <a:lstStyle/>
+          <a:p>
+            <a:pPr algn="ctr" indent="0" marL="0">
+              <a:buNone/>
+            </a:pPr>
+            <a:r>
+              <a:rPr lang="en-US" sz="1800" b="1" dirty="0">
+                <a:solidFill>
+                  <a:srgbClr val="0068B7"/>
+                </a:solidFill>
+                <a:latin typeface="Aptos" pitchFamily="34" charset="0"/>
+                <a:ea typeface="Aptos" pitchFamily="34" charset="-122"/>
+                <a:cs typeface="Aptos" pitchFamily="34" charset="-120"/>
+              </a:rPr>
+              <a:t>â†’</a:t>
+            </a:r>
+            <a:endParaRPr lang="en-US" sz="1800" dirty="0"/>
+          </a:p>
+        </p:txBody>
+      </p:sp>
+      <p:sp>
+        <p:nvSpPr>
+          <p:cNvPr id="19" name="Shape 17"/>
+          <p:cNvSpPr/>
+          <p:nvPr/>
+        </p:nvSpPr>
+        <p:spPr>
+          <a:xfrm>
+            <a:off x="10274808" y="3977640"/>
+            <a:ext cx="972312" cy="749808"/>
+          </a:xfrm>
+          <a:prstGeom prst="roundRect">
+            <a:avLst>
+              <a:gd name="adj" fmla="val 14634"/>
+            </a:avLst>
+          </a:prstGeom>
+          <a:solidFill>
+            <a:srgbClr val="6A4CA3"/>
+          </a:solidFill>
+          <a:ln w="12700">
+            <a:solidFill>
+              <a:srgbClr val="6A4CA3"/>
+            </a:solidFill>
+            <a:prstDash val="solid"/>
+          </a:ln>
+        </p:spPr>
+      </p:sp>
+      <p:sp>
+        <p:nvSpPr>
+          <p:cNvPr id="20" name="Text 18"/>
+          <p:cNvSpPr/>
+          <p:nvPr/>
+        </p:nvSpPr>
+        <p:spPr>
+          <a:xfrm>
+            <a:off x="10347960" y="4169664"/>
+            <a:ext cx="826008" cy="310896"/>
+          </a:xfrm>
+          <a:prstGeom prst="rect">
+            <a:avLst/>
+          </a:prstGeom>
+          <a:noFill/>
+          <a:ln/>
+        </p:spPr>
+        <p:txBody>
+          <a:bodyPr wrap="square" lIns="0" tIns="0" rIns="0" bIns="0" rtlCol="0" anchor="ctr">
+            <a:normAutofit/>
+          </a:bodyPr>
+          <a:lstStyle/>
+          <a:p>
+            <a:pPr algn="ctr" indent="0" marL="0">
+              <a:buNone/>
+            </a:pPr>
+            <a:r>
+              <a:rPr lang="en-US" sz="1500" b="1" dirty="0">
+                <a:solidFill>
+                  <a:srgbClr val="FFFFFF"/>
+                </a:solidFill>
+                <a:latin typeface="Aptos" pitchFamily="34" charset="0"/>
+                <a:ea typeface="Aptos" pitchFamily="34" charset="-122"/>
+                <a:cs typeface="Aptos" pitchFamily="34" charset="-120"/>
+              </a:rPr>
+              <a:t>Action</a:t>
+            </a:r>
+            <a:endParaRPr lang="en-US" sz="1500" dirty="0"/>
           </a:p>
         </p:txBody>
       </p:sp>
@@ -11720,7 +12596,7 @@
                 <a:ea typeface="Aptos" pitchFamily="34" charset="-122"/>
                 <a:cs typeface="Aptos" pitchFamily="34" charset="-120"/>
               </a:rPr>
-              <a:t>© Paula Soper</a:t>
+              <a:t>Â© Paula Soper</a:t>
             </a:r>
             <a:endParaRPr lang="en-US" sz="800" dirty="0"/>
           </a:p>
@@ -11734,8 +12610,47 @@
         </p:nvSpPr>
         <p:spPr>
           <a:xfrm>
+            <a:off x="11137392" y="6510528"/>
+            <a:ext cx="411480" cy="201168"/>
+          </a:xfrm>
+          <a:prstGeom prst="rect">
+            <a:avLst/>
+          </a:prstGeom>
+          <a:noFill/>
+          <a:ln/>
+        </p:spPr>
+        <p:txBody>
+          <a:bodyPr wrap="square" lIns="0" tIns="0" rIns="0" bIns="0" rtlCol="0" anchor="ctr"/>
+          <a:lstStyle/>
+          <a:p>
+            <a:pPr algn="r" indent="0" marL="0">
+              <a:buNone/>
+            </a:pPr>
+            <a:r>
+              <a:rPr lang="en-US" sz="900" dirty="0">
+                <a:solidFill>
+                  <a:srgbClr val="5F7181"/>
+                </a:solidFill>
+                <a:latin typeface="Aptos" pitchFamily="34" charset="0"/>
+                <a:ea typeface="Aptos" pitchFamily="34" charset="-122"/>
+                <a:cs typeface="Aptos" pitchFamily="34" charset="-120"/>
+              </a:rPr>
+              <a:t>4</a:t>
+            </a:r>
+            <a:endParaRPr lang="en-US" sz="900" dirty="0"/>
+          </a:p>
+        </p:txBody>
+      </p:sp>
+      <p:sp>
+        <p:nvSpPr>
+          <p:cNvPr id="8" name="Text 6"/>
+          <p:cNvSpPr/>
+          <p:nvPr/>
+        </p:nvSpPr>
+        <p:spPr>
+          <a:xfrm>
             <a:off x="640080" y="658368"/>
-            <a:ext cx="10881360" cy="566928"/>
+            <a:ext cx="10881360" cy="713232"/>
           </a:xfrm>
           <a:prstGeom prst="rect">
             <a:avLst/>
@@ -11753,7 +12668,7 @@
               <a:buNone/>
             </a:pPr>
             <a:r>
-              <a:rPr lang="en-US" sz="2700" b="1" dirty="0">
+              <a:rPr lang="en-US" sz="3400" b="1" dirty="0">
                 <a:solidFill>
                   <a:srgbClr val="003A63"/>
                 </a:solidFill>
@@ -11763,20 +12678,20 @@
               </a:rPr>
               <a:t>Related toolkit resources</a:t>
             </a:r>
-            <a:endParaRPr lang="en-US" sz="2700" dirty="0"/>
-          </a:p>
-        </p:txBody>
-      </p:sp>
-      <p:sp>
-        <p:nvSpPr>
-          <p:cNvPr id="8" name="Text 6"/>
-          <p:cNvSpPr/>
-          <p:nvPr/>
-        </p:nvSpPr>
-        <p:spPr>
-          <a:xfrm>
-            <a:off x="868680" y="1417320"/>
-            <a:ext cx="6903720" cy="4480560"/>
+            <a:endParaRPr lang="en-US" sz="3400" dirty="0"/>
+          </a:p>
+        </p:txBody>
+      </p:sp>
+      <p:sp>
+        <p:nvSpPr>
+          <p:cNvPr id="9" name="Text 7"/>
+          <p:cNvSpPr/>
+          <p:nvPr/>
+        </p:nvSpPr>
+        <p:spPr>
+          <a:xfrm>
+            <a:off x="868680" y="1508760"/>
+            <a:ext cx="6812280" cy="3977640"/>
           </a:xfrm>
           <a:prstGeom prst="rect">
             <a:avLst/>
@@ -11791,7 +12706,7 @@
           <a:lstStyle/>
           <a:p>
             <a:r>
-              <a:rPr lang="en-US" sz="1460" dirty="0">
+              <a:rPr lang="en-US" sz="1850" dirty="0">
                 <a:solidFill>
                   <a:srgbClr val="17364A"/>
                 </a:solidFill>
@@ -11799,13 +12714,13 @@
                 <a:ea typeface="Aptos" pitchFamily="34" charset="-122"/>
                 <a:cs typeface="Aptos" pitchFamily="34" charset="-120"/>
               </a:rPr>
-              <a:t>Tool 3: Equity Impact Assessment Checklist (Checklist) - Use this tool to complete or strengthen the practical exercise for the.</a:t>
-            </a:r>
-            <a:endParaRPr lang="en-US" sz="1460" dirty="0"/>
-          </a:p>
-          <a:p>
-            <a:r>
-              <a:rPr lang="en-US" sz="1460" dirty="0">
+              <a:t>Tool 3: Equity Impact Assessment Checklist (Checklist) - Use this tool to complete or strengthen the.</a:t>
+            </a:r>
+            <a:endParaRPr lang="en-US" sz="1850" dirty="0"/>
+          </a:p>
+          <a:p>
+            <a:r>
+              <a:rPr lang="en-US" sz="1850" dirty="0">
                 <a:solidFill>
                   <a:srgbClr val="17364A"/>
                 </a:solidFill>
@@ -11813,13 +12728,13 @@
                 <a:ea typeface="Aptos" pitchFamily="34" charset="-122"/>
                 <a:cs typeface="Aptos" pitchFamily="34" charset="-120"/>
               </a:rPr>
-              <a:t>Tool 4: AI Policy Landscape Scan (Worksheet) - Use AI Policy Landscape Scan to translate this lesson into a documented public health.</a:t>
-            </a:r>
-            <a:endParaRPr lang="en-US" sz="1460" dirty="0"/>
-          </a:p>
-          <a:p>
-            <a:r>
-              <a:rPr lang="en-US" sz="1460" dirty="0">
+              <a:t>Tool 4: AI Policy Landscape Scan (Worksheet) - Use AI Policy Landscape Scan to translate this lesson into a.</a:t>
+            </a:r>
+            <a:endParaRPr lang="en-US" sz="1850" dirty="0"/>
+          </a:p>
+          <a:p>
+            <a:r>
+              <a:rPr lang="en-US" sz="1850" dirty="0">
                 <a:solidFill>
                   <a:srgbClr val="17364A"/>
                 </a:solidFill>
@@ -11827,13 +12742,13 @@
                 <a:ea typeface="Aptos" pitchFamily="34" charset="-122"/>
                 <a:cs typeface="Aptos" pitchFamily="34" charset="-120"/>
               </a:rPr>
-              <a:t>Tool 5: AI Environmental and Resource Impact Review (Checklist) - Use AI Environmental and Resource Impact Review to translate this.</a:t>
-            </a:r>
-            <a:endParaRPr lang="en-US" sz="1460" dirty="0"/>
-          </a:p>
-          <a:p>
-            <a:r>
-              <a:rPr lang="en-US" sz="1460" dirty="0">
+              <a:t>Tool 5: AI Environmental and Resource Impact Review (Checklist) - Use AI Environmental and Resource Impact.</a:t>
+            </a:r>
+            <a:endParaRPr lang="en-US" sz="1850" dirty="0"/>
+          </a:p>
+          <a:p>
+            <a:r>
+              <a:rPr lang="en-US" sz="1850" dirty="0">
                 <a:solidFill>
                   <a:srgbClr val="17364A"/>
                 </a:solidFill>
@@ -11841,29 +12756,15 @@
                 <a:ea typeface="Aptos" pitchFamily="34" charset="-122"/>
                 <a:cs typeface="Aptos" pitchFamily="34" charset="-120"/>
               </a:rPr>
-              <a:t>Tool 6: Human-Centered AI Decision Rule Checklist (Checklist) - Use Human-Centered AI Decision Rule Checklist to translate this.</a:t>
-            </a:r>
-            <a:endParaRPr lang="en-US" sz="1460" dirty="0"/>
-          </a:p>
-          <a:p>
-            <a:r>
-              <a:rPr lang="en-US" sz="1460" dirty="0">
-                <a:solidFill>
-                  <a:srgbClr val="17364A"/>
-                </a:solidFill>
-                <a:latin typeface="Aptos" pitchFamily="34" charset="0"/>
-                <a:ea typeface="Aptos" pitchFamily="34" charset="-122"/>
-                <a:cs typeface="Aptos" pitchFamily="34" charset="-120"/>
-              </a:rPr>
-              <a:t>Tool 8: AI Project Charter (Planning) - Use AI Project Charter to translate this lesson into a documented public health AI planning,.</a:t>
-            </a:r>
-            <a:endParaRPr lang="en-US" sz="1460" dirty="0"/>
-          </a:p>
-        </p:txBody>
-      </p:sp>
-      <p:sp>
-        <p:nvSpPr>
-          <p:cNvPr id="9" name="Shape 7"/>
+              <a:t>Tool 6: Human-Centered AI Decision Rule Checklist (Checklist) - Use Human-Centered AI Decision Rule.</a:t>
+            </a:r>
+            <a:endParaRPr lang="en-US" sz="1850" dirty="0"/>
+          </a:p>
+        </p:txBody>
+      </p:sp>
+      <p:sp>
+        <p:nvSpPr>
+          <p:cNvPr id="10" name="Shape 8"/>
           <p:cNvSpPr/>
           <p:nvPr/>
         </p:nvSpPr>
@@ -11890,14 +12791,14 @@
       </p:sp>
       <p:sp>
         <p:nvSpPr>
-          <p:cNvPr id="10" name="Text 8"/>
+          <p:cNvPr id="11" name="Text 9"/>
           <p:cNvSpPr/>
           <p:nvPr/>
         </p:nvSpPr>
         <p:spPr>
           <a:xfrm>
             <a:off x="8211312" y="1563624"/>
-            <a:ext cx="2734056" cy="201168"/>
+            <a:ext cx="2734056" cy="256032"/>
           </a:xfrm>
           <a:prstGeom prst="rect">
             <a:avLst/>
@@ -11913,7 +12814,7 @@
               <a:buNone/>
             </a:pPr>
             <a:r>
-              <a:rPr lang="en-US" sz="950" b="1" dirty="0">
+              <a:rPr lang="en-US" sz="1300" b="1" dirty="0">
                 <a:solidFill>
                   <a:srgbClr val="0068B7"/>
                 </a:solidFill>
@@ -11923,20 +12824,20 @@
               </a:rPr>
               <a:t>Use the tools</a:t>
             </a:r>
-            <a:endParaRPr lang="en-US" sz="950" dirty="0"/>
-          </a:p>
-        </p:txBody>
-      </p:sp>
-      <p:sp>
-        <p:nvSpPr>
-          <p:cNvPr id="11" name="Text 9"/>
-          <p:cNvSpPr/>
-          <p:nvPr/>
-        </p:nvSpPr>
-        <p:spPr>
-          <a:xfrm>
-            <a:off x="8211312" y="1856232"/>
-            <a:ext cx="2734056" cy="1536192"/>
+            <a:endParaRPr lang="en-US" sz="1300" dirty="0"/>
+          </a:p>
+        </p:txBody>
+      </p:sp>
+      <p:sp>
+        <p:nvSpPr>
+          <p:cNvPr id="12" name="Text 10"/>
+          <p:cNvSpPr/>
+          <p:nvPr/>
+        </p:nvSpPr>
+        <p:spPr>
+          <a:xfrm>
+            <a:off x="8211312" y="1920240"/>
+            <a:ext cx="2734056" cy="1463040"/>
           </a:xfrm>
           <a:prstGeom prst="rect">
             <a:avLst/>
@@ -11954,7 +12855,7 @@
               <a:buNone/>
             </a:pPr>
             <a:r>
-              <a:rPr lang="en-US" sz="1250" dirty="0">
+              <a:rPr lang="en-US" sz="1550" dirty="0">
                 <a:solidFill>
                   <a:srgbClr val="17364A"/>
                 </a:solidFill>
@@ -11964,32 +12865,32 @@
               </a:rPr>
               <a:t>Use linked tools when your department needs a structured worksheet, template, checklist, review process, or documentation artifact.</a:t>
             </a:r>
-            <a:endParaRPr lang="en-US" sz="1250" dirty="0"/>
-          </a:p>
-        </p:txBody>
-      </p:sp>
-      <p:sp>
-        <p:nvSpPr>
-          <p:cNvPr id="12" name="Shape 10"/>
-          <p:cNvSpPr/>
-          <p:nvPr/>
-        </p:nvSpPr>
-        <p:spPr>
-          <a:xfrm>
-            <a:off x="8046720" y="3794760"/>
-            <a:ext cx="3063240" cy="1508760"/>
+            <a:endParaRPr lang="en-US" sz="1550" dirty="0"/>
+          </a:p>
+        </p:txBody>
+      </p:sp>
+      <p:sp>
+        <p:nvSpPr>
+          <p:cNvPr id="13" name="Shape 11"/>
+          <p:cNvSpPr/>
+          <p:nvPr/>
+        </p:nvSpPr>
+        <p:spPr>
+          <a:xfrm>
+            <a:off x="7818120" y="3977640"/>
+            <a:ext cx="972312" cy="749808"/>
           </a:xfrm>
           <a:prstGeom prst="roundRect">
             <a:avLst>
-              <a:gd name="adj" fmla="val 7273"/>
+              <a:gd name="adj" fmla="val 14634"/>
             </a:avLst>
           </a:prstGeom>
           <a:solidFill>
-            <a:srgbClr val="EEF8ED"/>
+            <a:srgbClr val="0068B7"/>
           </a:solidFill>
           <a:ln w="12700">
             <a:solidFill>
-              <a:srgbClr val="B9D7E6"/>
+              <a:srgbClr val="0068B7"/>
             </a:solidFill>
             <a:prstDash val="solid"/>
           </a:ln>
@@ -11997,81 +12898,256 @@
       </p:sp>
       <p:sp>
         <p:nvSpPr>
-          <p:cNvPr id="13" name="Text 11"/>
-          <p:cNvSpPr/>
-          <p:nvPr/>
-        </p:nvSpPr>
-        <p:spPr>
-          <a:xfrm>
-            <a:off x="8211312" y="3941064"/>
-            <a:ext cx="2734056" cy="201168"/>
-          </a:xfrm>
-          <a:prstGeom prst="rect">
-            <a:avLst/>
-          </a:prstGeom>
-          <a:noFill/>
-          <a:ln/>
-        </p:spPr>
-        <p:txBody>
-          <a:bodyPr wrap="square" lIns="0" tIns="0" rIns="0" bIns="0" rtlCol="0" anchor="ctr"/>
-          <a:lstStyle/>
-          <a:p>
-            <a:pPr indent="0" marL="0">
-              <a:buNone/>
-            </a:pPr>
-            <a:r>
-              <a:rPr lang="en-US" sz="950" b="1" dirty="0">
-                <a:solidFill>
-                  <a:srgbClr val="0068B7"/>
-                </a:solidFill>
-                <a:latin typeface="Aptos" pitchFamily="34" charset="0"/>
-                <a:ea typeface="Aptos" pitchFamily="34" charset="-122"/>
-                <a:cs typeface="Aptos" pitchFamily="34" charset="-120"/>
-              </a:rPr>
-              <a:t>Avoid duplication</a:t>
-            </a:r>
-            <a:endParaRPr lang="en-US" sz="950" dirty="0"/>
-          </a:p>
-        </p:txBody>
-      </p:sp>
-      <p:sp>
-        <p:nvSpPr>
           <p:cNvPr id="14" name="Text 12"/>
           <p:cNvSpPr/>
           <p:nvPr/>
         </p:nvSpPr>
         <p:spPr>
           <a:xfrm>
-            <a:off x="8211312" y="4233672"/>
-            <a:ext cx="2734056" cy="941832"/>
-          </a:xfrm>
-          <a:prstGeom prst="rect">
-            <a:avLst/>
-          </a:prstGeom>
-          <a:noFill/>
-          <a:ln/>
-        </p:spPr>
-        <p:txBody>
-          <a:bodyPr wrap="square" lIns="0" tIns="0" rIns="0" bIns="0" rtlCol="0" anchor="t">
+            <a:off x="7891272" y="4169664"/>
+            <a:ext cx="826008" cy="310896"/>
+          </a:xfrm>
+          <a:prstGeom prst="rect">
+            <a:avLst/>
+          </a:prstGeom>
+          <a:noFill/>
+          <a:ln/>
+        </p:spPr>
+        <p:txBody>
+          <a:bodyPr wrap="square" lIns="0" tIns="0" rIns="0" bIns="0" rtlCol="0" anchor="ctr">
             <a:normAutofit/>
           </a:bodyPr>
           <a:lstStyle/>
           <a:p>
-            <a:pPr indent="0" marL="0">
-              <a:buNone/>
-            </a:pPr>
-            <a:r>
-              <a:rPr lang="en-US" sz="1250" dirty="0">
-                <a:solidFill>
-                  <a:srgbClr val="17364A"/>
-                </a:solidFill>
-                <a:latin typeface="Aptos" pitchFamily="34" charset="0"/>
-                <a:ea typeface="Aptos" pitchFamily="34" charset="-122"/>
-                <a:cs typeface="Aptos" pitchFamily="34" charset="-120"/>
-              </a:rPr>
-              <a:t>If your department already has a strong equivalent tool, adapt or use the existing process instead of recreating it.</a:t>
-            </a:r>
-            <a:endParaRPr lang="en-US" sz="1250" dirty="0"/>
+            <a:pPr algn="ctr" indent="0" marL="0">
+              <a:buNone/>
+            </a:pPr>
+            <a:r>
+              <a:rPr lang="en-US" sz="1500" b="1" dirty="0">
+                <a:solidFill>
+                  <a:srgbClr val="FFFFFF"/>
+                </a:solidFill>
+                <a:latin typeface="Aptos" pitchFamily="34" charset="0"/>
+                <a:ea typeface="Aptos" pitchFamily="34" charset="-122"/>
+                <a:cs typeface="Aptos" pitchFamily="34" charset="-120"/>
+              </a:rPr>
+              <a:t>Concept</a:t>
+            </a:r>
+            <a:endParaRPr lang="en-US" sz="1500" dirty="0"/>
+          </a:p>
+        </p:txBody>
+      </p:sp>
+      <p:sp>
+        <p:nvSpPr>
+          <p:cNvPr id="15" name="Text 13"/>
+          <p:cNvSpPr/>
+          <p:nvPr/>
+        </p:nvSpPr>
+        <p:spPr>
+          <a:xfrm>
+            <a:off x="8817864" y="4187952"/>
+            <a:ext cx="201168" cy="256032"/>
+          </a:xfrm>
+          <a:prstGeom prst="rect">
+            <a:avLst/>
+          </a:prstGeom>
+          <a:noFill/>
+          <a:ln/>
+        </p:spPr>
+        <p:txBody>
+          <a:bodyPr wrap="square" lIns="0" tIns="0" rIns="0" bIns="0" rtlCol="0" anchor="ctr"/>
+          <a:lstStyle/>
+          <a:p>
+            <a:pPr algn="ctr" indent="0" marL="0">
+              <a:buNone/>
+            </a:pPr>
+            <a:r>
+              <a:rPr lang="en-US" sz="1800" b="1" dirty="0">
+                <a:solidFill>
+                  <a:srgbClr val="0068B7"/>
+                </a:solidFill>
+                <a:latin typeface="Aptos" pitchFamily="34" charset="0"/>
+                <a:ea typeface="Aptos" pitchFamily="34" charset="-122"/>
+                <a:cs typeface="Aptos" pitchFamily="34" charset="-120"/>
+              </a:rPr>
+              <a:t>â†’</a:t>
+            </a:r>
+            <a:endParaRPr lang="en-US" sz="1800" dirty="0"/>
+          </a:p>
+        </p:txBody>
+      </p:sp>
+      <p:sp>
+        <p:nvSpPr>
+          <p:cNvPr id="16" name="Shape 14"/>
+          <p:cNvSpPr/>
+          <p:nvPr/>
+        </p:nvSpPr>
+        <p:spPr>
+          <a:xfrm>
+            <a:off x="9046464" y="3977640"/>
+            <a:ext cx="972312" cy="749808"/>
+          </a:xfrm>
+          <a:prstGeom prst="roundRect">
+            <a:avLst>
+              <a:gd name="adj" fmla="val 14634"/>
+            </a:avLst>
+          </a:prstGeom>
+          <a:solidFill>
+            <a:srgbClr val="2F8A28"/>
+          </a:solidFill>
+          <a:ln w="12700">
+            <a:solidFill>
+              <a:srgbClr val="2F8A28"/>
+            </a:solidFill>
+            <a:prstDash val="solid"/>
+          </a:ln>
+        </p:spPr>
+      </p:sp>
+      <p:sp>
+        <p:nvSpPr>
+          <p:cNvPr id="17" name="Text 15"/>
+          <p:cNvSpPr/>
+          <p:nvPr/>
+        </p:nvSpPr>
+        <p:spPr>
+          <a:xfrm>
+            <a:off x="9119616" y="4169664"/>
+            <a:ext cx="826008" cy="310896"/>
+          </a:xfrm>
+          <a:prstGeom prst="rect">
+            <a:avLst/>
+          </a:prstGeom>
+          <a:noFill/>
+          <a:ln/>
+        </p:spPr>
+        <p:txBody>
+          <a:bodyPr wrap="square" lIns="0" tIns="0" rIns="0" bIns="0" rtlCol="0" anchor="ctr">
+            <a:normAutofit/>
+          </a:bodyPr>
+          <a:lstStyle/>
+          <a:p>
+            <a:pPr algn="ctr" indent="0" marL="0">
+              <a:buNone/>
+            </a:pPr>
+            <a:r>
+              <a:rPr lang="en-US" sz="1500" b="1" dirty="0">
+                <a:solidFill>
+                  <a:srgbClr val="FFFFFF"/>
+                </a:solidFill>
+                <a:latin typeface="Aptos" pitchFamily="34" charset="0"/>
+                <a:ea typeface="Aptos" pitchFamily="34" charset="-122"/>
+                <a:cs typeface="Aptos" pitchFamily="34" charset="-120"/>
+              </a:rPr>
+              <a:t>Tool</a:t>
+            </a:r>
+            <a:endParaRPr lang="en-US" sz="1500" dirty="0"/>
+          </a:p>
+        </p:txBody>
+      </p:sp>
+      <p:sp>
+        <p:nvSpPr>
+          <p:cNvPr id="18" name="Text 16"/>
+          <p:cNvSpPr/>
+          <p:nvPr/>
+        </p:nvSpPr>
+        <p:spPr>
+          <a:xfrm>
+            <a:off x="10046208" y="4187952"/>
+            <a:ext cx="201168" cy="256032"/>
+          </a:xfrm>
+          <a:prstGeom prst="rect">
+            <a:avLst/>
+          </a:prstGeom>
+          <a:noFill/>
+          <a:ln/>
+        </p:spPr>
+        <p:txBody>
+          <a:bodyPr wrap="square" lIns="0" tIns="0" rIns="0" bIns="0" rtlCol="0" anchor="ctr"/>
+          <a:lstStyle/>
+          <a:p>
+            <a:pPr algn="ctr" indent="0" marL="0">
+              <a:buNone/>
+            </a:pPr>
+            <a:r>
+              <a:rPr lang="en-US" sz="1800" b="1" dirty="0">
+                <a:solidFill>
+                  <a:srgbClr val="0068B7"/>
+                </a:solidFill>
+                <a:latin typeface="Aptos" pitchFamily="34" charset="0"/>
+                <a:ea typeface="Aptos" pitchFamily="34" charset="-122"/>
+                <a:cs typeface="Aptos" pitchFamily="34" charset="-120"/>
+              </a:rPr>
+              <a:t>â†’</a:t>
+            </a:r>
+            <a:endParaRPr lang="en-US" sz="1800" dirty="0"/>
+          </a:p>
+        </p:txBody>
+      </p:sp>
+      <p:sp>
+        <p:nvSpPr>
+          <p:cNvPr id="19" name="Shape 17"/>
+          <p:cNvSpPr/>
+          <p:nvPr/>
+        </p:nvSpPr>
+        <p:spPr>
+          <a:xfrm>
+            <a:off x="10274808" y="3977640"/>
+            <a:ext cx="972312" cy="749808"/>
+          </a:xfrm>
+          <a:prstGeom prst="roundRect">
+            <a:avLst>
+              <a:gd name="adj" fmla="val 14634"/>
+            </a:avLst>
+          </a:prstGeom>
+          <a:solidFill>
+            <a:srgbClr val="D69A2D"/>
+          </a:solidFill>
+          <a:ln w="12700">
+            <a:solidFill>
+              <a:srgbClr val="D69A2D"/>
+            </a:solidFill>
+            <a:prstDash val="solid"/>
+          </a:ln>
+        </p:spPr>
+      </p:sp>
+      <p:sp>
+        <p:nvSpPr>
+          <p:cNvPr id="20" name="Text 18"/>
+          <p:cNvSpPr/>
+          <p:nvPr/>
+        </p:nvSpPr>
+        <p:spPr>
+          <a:xfrm>
+            <a:off x="10347960" y="4169664"/>
+            <a:ext cx="826008" cy="310896"/>
+          </a:xfrm>
+          <a:prstGeom prst="rect">
+            <a:avLst/>
+          </a:prstGeom>
+          <a:noFill/>
+          <a:ln/>
+        </p:spPr>
+        <p:txBody>
+          <a:bodyPr wrap="square" lIns="0" tIns="0" rIns="0" bIns="0" rtlCol="0" anchor="ctr">
+            <a:normAutofit/>
+          </a:bodyPr>
+          <a:lstStyle/>
+          <a:p>
+            <a:pPr algn="ctr" indent="0" marL="0">
+              <a:buNone/>
+            </a:pPr>
+            <a:r>
+              <a:rPr lang="en-US" sz="1500" b="1" dirty="0">
+                <a:solidFill>
+                  <a:srgbClr val="FFFFFF"/>
+                </a:solidFill>
+                <a:latin typeface="Aptos" pitchFamily="34" charset="0"/>
+                <a:ea typeface="Aptos" pitchFamily="34" charset="-122"/>
+                <a:cs typeface="Aptos" pitchFamily="34" charset="-120"/>
+              </a:rPr>
+              <a:t>Artifact</a:t>
+            </a:r>
+            <a:endParaRPr lang="en-US" sz="1500" dirty="0"/>
           </a:p>
         </p:txBody>
       </p:sp>
@@ -12268,7 +13344,7 @@
                 <a:ea typeface="Aptos" pitchFamily="34" charset="-122"/>
                 <a:cs typeface="Aptos" pitchFamily="34" charset="-120"/>
               </a:rPr>
-              <a:t>© Paula Soper</a:t>
+              <a:t>Â© Paula Soper</a:t>
             </a:r>
             <a:endParaRPr lang="en-US" sz="800" dirty="0"/>
           </a:p>
@@ -12276,7 +13352,46 @@
       </p:sp>
       <p:sp>
         <p:nvSpPr>
-          <p:cNvPr id="7" name="Shape 5"/>
+          <p:cNvPr id="7" name="Text 5"/>
+          <p:cNvSpPr/>
+          <p:nvPr/>
+        </p:nvSpPr>
+        <p:spPr>
+          <a:xfrm>
+            <a:off x="11137392" y="6510528"/>
+            <a:ext cx="411480" cy="201168"/>
+          </a:xfrm>
+          <a:prstGeom prst="rect">
+            <a:avLst/>
+          </a:prstGeom>
+          <a:noFill/>
+          <a:ln/>
+        </p:spPr>
+        <p:txBody>
+          <a:bodyPr wrap="square" lIns="0" tIns="0" rIns="0" bIns="0" rtlCol="0" anchor="ctr"/>
+          <a:lstStyle/>
+          <a:p>
+            <a:pPr algn="r" indent="0" marL="0">
+              <a:buNone/>
+            </a:pPr>
+            <a:r>
+              <a:rPr lang="en-US" sz="900" dirty="0">
+                <a:solidFill>
+                  <a:srgbClr val="5F7181"/>
+                </a:solidFill>
+                <a:latin typeface="Aptos" pitchFamily="34" charset="0"/>
+                <a:ea typeface="Aptos" pitchFamily="34" charset="-122"/>
+                <a:cs typeface="Aptos" pitchFamily="34" charset="-120"/>
+              </a:rPr>
+              <a:t>5</a:t>
+            </a:r>
+            <a:endParaRPr lang="en-US" sz="900" dirty="0"/>
+          </a:p>
+        </p:txBody>
+      </p:sp>
+      <p:sp>
+        <p:nvSpPr>
+          <p:cNvPr id="8" name="Shape 6"/>
           <p:cNvSpPr/>
           <p:nvPr/>
         </p:nvSpPr>
@@ -12301,7 +13416,7 @@
       </p:sp>
       <p:sp>
         <p:nvSpPr>
-          <p:cNvPr id="8" name="Text 6"/>
+          <p:cNvPr id="9" name="Text 7"/>
           <p:cNvSpPr/>
           <p:nvPr/>
         </p:nvSpPr>
@@ -12340,14 +13455,14 @@
       </p:sp>
       <p:sp>
         <p:nvSpPr>
-          <p:cNvPr id="9" name="Text 7"/>
+          <p:cNvPr id="10" name="Text 8"/>
           <p:cNvSpPr/>
           <p:nvPr/>
         </p:nvSpPr>
         <p:spPr>
           <a:xfrm>
             <a:off x="640080" y="621792"/>
-            <a:ext cx="10881360" cy="566928"/>
+            <a:ext cx="10881360" cy="713232"/>
           </a:xfrm>
           <a:prstGeom prst="rect">
             <a:avLst/>
@@ -12365,7 +13480,7 @@
               <a:buNone/>
             </a:pPr>
             <a:r>
-              <a:rPr lang="en-US" sz="2700" b="1" dirty="0">
+              <a:rPr lang="en-US" sz="3400" b="1" dirty="0">
                 <a:solidFill>
                   <a:srgbClr val="003A63"/>
                 </a:solidFill>
@@ -12375,20 +13490,20 @@
               </a:rPr>
               <a:t>Learning Objectives</a:t>
             </a:r>
-            <a:endParaRPr lang="en-US" sz="2700" dirty="0"/>
-          </a:p>
-        </p:txBody>
-      </p:sp>
-      <p:sp>
-        <p:nvSpPr>
-          <p:cNvPr id="10" name="Text 8"/>
-          <p:cNvSpPr/>
-          <p:nvPr/>
-        </p:nvSpPr>
-        <p:spPr>
-          <a:xfrm>
-            <a:off x="868680" y="1417320"/>
-            <a:ext cx="6675120" cy="4434840"/>
+            <a:endParaRPr lang="en-US" sz="3400" dirty="0"/>
+          </a:p>
+        </p:txBody>
+      </p:sp>
+      <p:sp>
+        <p:nvSpPr>
+          <p:cNvPr id="11" name="Text 9"/>
+          <p:cNvSpPr/>
+          <p:nvPr/>
+        </p:nvSpPr>
+        <p:spPr>
+          <a:xfrm>
+            <a:off x="868680" y="1508760"/>
+            <a:ext cx="6537960" cy="4160520"/>
           </a:xfrm>
           <a:prstGeom prst="rect">
             <a:avLst/>
@@ -12403,7 +13518,7 @@
           <a:lstStyle/>
           <a:p>
             <a:r>
-              <a:rPr lang="en-US" sz="1700" dirty="0">
+              <a:rPr lang="en-US" sz="2100" dirty="0">
                 <a:solidFill>
                   <a:srgbClr val="17364A"/>
                 </a:solidFill>
@@ -12413,11 +13528,11 @@
               </a:rPr>
               <a:t>Explain why record linkage matters for public health AI.</a:t>
             </a:r>
-            <a:endParaRPr lang="en-US" sz="1700" dirty="0"/>
-          </a:p>
-          <a:p>
-            <a:r>
-              <a:rPr lang="en-US" sz="1700" dirty="0">
+            <a:endParaRPr lang="en-US" sz="2100" dirty="0"/>
+          </a:p>
+          <a:p>
+            <a:r>
+              <a:rPr lang="en-US" sz="2100" dirty="0">
                 <a:solidFill>
                   <a:srgbClr val="17364A"/>
                 </a:solidFill>
@@ -12427,11 +13542,11 @@
               </a:rPr>
               <a:t>Distinguish between deterministic matching, probabilistic matching, entity resolution, and deduplication.</a:t>
             </a:r>
-            <a:endParaRPr lang="en-US" sz="1700" dirty="0"/>
-          </a:p>
-          <a:p>
-            <a:r>
-              <a:rPr lang="en-US" sz="1700" dirty="0">
+            <a:endParaRPr lang="en-US" sz="2100" dirty="0"/>
+          </a:p>
+          <a:p>
+            <a:r>
+              <a:rPr lang="en-US" sz="2100" dirty="0">
                 <a:solidFill>
                   <a:srgbClr val="17364A"/>
                 </a:solidFill>
@@ -12441,27 +13556,13 @@
               </a:rPr>
               <a:t>Identify risks from false matches and missed matches.</a:t>
             </a:r>
-            <a:endParaRPr lang="en-US" sz="1700" dirty="0"/>
-          </a:p>
-          <a:p>
-            <a:r>
-              <a:rPr lang="en-US" sz="1700" dirty="0">
-                <a:solidFill>
-                  <a:srgbClr val="17364A"/>
-                </a:solidFill>
-                <a:latin typeface="Aptos" pitchFamily="34" charset="0"/>
-                <a:ea typeface="Aptos" pitchFamily="34" charset="-122"/>
-                <a:cs typeface="Aptos" pitchFamily="34" charset="-120"/>
-              </a:rPr>
-              <a:t>Describe how thresholds, clerical review, and data quality affect matching.</a:t>
-            </a:r>
-            <a:endParaRPr lang="en-US" sz="1700" dirty="0"/>
-          </a:p>
-        </p:txBody>
-      </p:sp>
-      <p:sp>
-        <p:nvSpPr>
-          <p:cNvPr id="11" name="Shape 9"/>
+            <a:endParaRPr lang="en-US" sz="2100" dirty="0"/>
+          </a:p>
+        </p:txBody>
+      </p:sp>
+      <p:sp>
+        <p:nvSpPr>
+          <p:cNvPr id="12" name="Shape 10"/>
           <p:cNvSpPr/>
           <p:nvPr/>
         </p:nvSpPr>
@@ -12488,14 +13589,14 @@
       </p:sp>
       <p:sp>
         <p:nvSpPr>
-          <p:cNvPr id="12" name="Text 10"/>
+          <p:cNvPr id="13" name="Text 11"/>
           <p:cNvSpPr/>
           <p:nvPr/>
         </p:nvSpPr>
         <p:spPr>
           <a:xfrm>
             <a:off x="8074152" y="1563624"/>
-            <a:ext cx="2825496" cy="201168"/>
+            <a:ext cx="2825496" cy="256032"/>
           </a:xfrm>
           <a:prstGeom prst="rect">
             <a:avLst/>
@@ -12511,7 +13612,7 @@
               <a:buNone/>
             </a:pPr>
             <a:r>
-              <a:rPr lang="en-US" sz="950" b="1" dirty="0">
+              <a:rPr lang="en-US" sz="1300" b="1" dirty="0">
                 <a:solidFill>
                   <a:srgbClr val="0068B7"/>
                 </a:solidFill>
@@ -12521,20 +13622,20 @@
               </a:rPr>
               <a:t>Key idea</a:t>
             </a:r>
-            <a:endParaRPr lang="en-US" sz="950" dirty="0"/>
-          </a:p>
-        </p:txBody>
-      </p:sp>
-      <p:sp>
-        <p:nvSpPr>
-          <p:cNvPr id="13" name="Text 11"/>
-          <p:cNvSpPr/>
-          <p:nvPr/>
-        </p:nvSpPr>
-        <p:spPr>
-          <a:xfrm>
-            <a:off x="8074152" y="1856232"/>
-            <a:ext cx="2825496" cy="1261872"/>
+            <a:endParaRPr lang="en-US" sz="1300" dirty="0"/>
+          </a:p>
+        </p:txBody>
+      </p:sp>
+      <p:sp>
+        <p:nvSpPr>
+          <p:cNvPr id="14" name="Text 12"/>
+          <p:cNvSpPr/>
+          <p:nvPr/>
+        </p:nvSpPr>
+        <p:spPr>
+          <a:xfrm>
+            <a:off x="8074152" y="1920240"/>
+            <a:ext cx="2825496" cy="1188720"/>
           </a:xfrm>
           <a:prstGeom prst="rect">
             <a:avLst/>
@@ -12552,7 +13653,7 @@
               <a:buNone/>
             </a:pPr>
             <a:r>
-              <a:rPr lang="en-US" sz="1250" dirty="0">
+              <a:rPr lang="en-US" sz="1550" dirty="0">
                 <a:solidFill>
                   <a:srgbClr val="17364A"/>
                 </a:solidFill>
@@ -12562,13 +13663,13 @@
               </a:rPr>
               <a:t>Explain why record linkage matters for public health AI.</a:t>
             </a:r>
-            <a:endParaRPr lang="en-US" sz="1250" dirty="0"/>
-          </a:p>
-        </p:txBody>
-      </p:sp>
-      <p:sp>
-        <p:nvSpPr>
-          <p:cNvPr id="14" name="Shape 12"/>
+            <a:endParaRPr lang="en-US" sz="1550" dirty="0"/>
+          </a:p>
+        </p:txBody>
+      </p:sp>
+      <p:sp>
+        <p:nvSpPr>
+          <p:cNvPr id="15" name="Shape 13"/>
           <p:cNvSpPr/>
           <p:nvPr/>
         </p:nvSpPr>
@@ -12595,14 +13696,14 @@
       </p:sp>
       <p:sp>
         <p:nvSpPr>
-          <p:cNvPr id="15" name="Text 13"/>
+          <p:cNvPr id="16" name="Text 14"/>
           <p:cNvSpPr/>
           <p:nvPr/>
         </p:nvSpPr>
         <p:spPr>
           <a:xfrm>
             <a:off x="8074152" y="3666744"/>
-            <a:ext cx="2825496" cy="201168"/>
+            <a:ext cx="2825496" cy="256032"/>
           </a:xfrm>
           <a:prstGeom prst="rect">
             <a:avLst/>
@@ -12618,7 +13719,7 @@
               <a:buNone/>
             </a:pPr>
             <a:r>
-              <a:rPr lang="en-US" sz="950" b="1" dirty="0">
+              <a:rPr lang="en-US" sz="1300" b="1" dirty="0">
                 <a:solidFill>
                   <a:srgbClr val="0068B7"/>
                 </a:solidFill>
@@ -12628,20 +13729,20 @@
               </a:rPr>
               <a:t>Use this for</a:t>
             </a:r>
-            <a:endParaRPr lang="en-US" sz="950" dirty="0"/>
-          </a:p>
-        </p:txBody>
-      </p:sp>
-      <p:sp>
-        <p:nvSpPr>
-          <p:cNvPr id="16" name="Text 14"/>
-          <p:cNvSpPr/>
-          <p:nvPr/>
-        </p:nvSpPr>
-        <p:spPr>
-          <a:xfrm>
-            <a:off x="8074152" y="3959352"/>
-            <a:ext cx="2825496" cy="1170432"/>
+            <a:endParaRPr lang="en-US" sz="1300" dirty="0"/>
+          </a:p>
+        </p:txBody>
+      </p:sp>
+      <p:sp>
+        <p:nvSpPr>
+          <p:cNvPr id="17" name="Text 15"/>
+          <p:cNvSpPr/>
+          <p:nvPr/>
+        </p:nvSpPr>
+        <p:spPr>
+          <a:xfrm>
+            <a:off x="8074152" y="4023360"/>
+            <a:ext cx="2825496" cy="1097280"/>
           </a:xfrm>
           <a:prstGeom prst="rect">
             <a:avLst/>
@@ -12659,7 +13760,7 @@
               <a:buNone/>
             </a:pPr>
             <a:r>
-              <a:rPr lang="en-US" sz="1250" dirty="0">
+              <a:rPr lang="en-US" sz="1550" dirty="0">
                 <a:solidFill>
                   <a:srgbClr val="17364A"/>
                 </a:solidFill>
@@ -12669,7 +13770,7 @@
               </a:rPr>
               <a:t>Connect the concept to public health decisions, safeguards, documentation, or implementation work.</a:t>
             </a:r>
-            <a:endParaRPr lang="en-US" sz="1250" dirty="0"/>
+            <a:endParaRPr lang="en-US" sz="1550" dirty="0"/>
           </a:p>
         </p:txBody>
       </p:sp>
@@ -12866,7 +13967,7 @@
                 <a:ea typeface="Aptos" pitchFamily="34" charset="-122"/>
                 <a:cs typeface="Aptos" pitchFamily="34" charset="-120"/>
               </a:rPr>
-              <a:t>© Paula Soper</a:t>
+              <a:t>Â© Paula Soper</a:t>
             </a:r>
             <a:endParaRPr lang="en-US" sz="800" dirty="0"/>
           </a:p>
@@ -12874,7 +13975,46 @@
       </p:sp>
       <p:sp>
         <p:nvSpPr>
-          <p:cNvPr id="7" name="Shape 5"/>
+          <p:cNvPr id="7" name="Text 5"/>
+          <p:cNvSpPr/>
+          <p:nvPr/>
+        </p:nvSpPr>
+        <p:spPr>
+          <a:xfrm>
+            <a:off x="11137392" y="6510528"/>
+            <a:ext cx="411480" cy="201168"/>
+          </a:xfrm>
+          <a:prstGeom prst="rect">
+            <a:avLst/>
+          </a:prstGeom>
+          <a:noFill/>
+          <a:ln/>
+        </p:spPr>
+        <p:txBody>
+          <a:bodyPr wrap="square" lIns="0" tIns="0" rIns="0" bIns="0" rtlCol="0" anchor="ctr"/>
+          <a:lstStyle/>
+          <a:p>
+            <a:pPr algn="r" indent="0" marL="0">
+              <a:buNone/>
+            </a:pPr>
+            <a:r>
+              <a:rPr lang="en-US" sz="900" dirty="0">
+                <a:solidFill>
+                  <a:srgbClr val="5F7181"/>
+                </a:solidFill>
+                <a:latin typeface="Aptos" pitchFamily="34" charset="0"/>
+                <a:ea typeface="Aptos" pitchFamily="34" charset="-122"/>
+                <a:cs typeface="Aptos" pitchFamily="34" charset="-120"/>
+              </a:rPr>
+              <a:t>6</a:t>
+            </a:r>
+            <a:endParaRPr lang="en-US" sz="900" dirty="0"/>
+          </a:p>
+        </p:txBody>
+      </p:sp>
+      <p:sp>
+        <p:nvSpPr>
+          <p:cNvPr id="8" name="Shape 6"/>
           <p:cNvSpPr/>
           <p:nvPr/>
         </p:nvSpPr>
@@ -12899,7 +14039,7 @@
       </p:sp>
       <p:sp>
         <p:nvSpPr>
-          <p:cNvPr id="8" name="Text 6"/>
+          <p:cNvPr id="9" name="Text 7"/>
           <p:cNvSpPr/>
           <p:nvPr/>
         </p:nvSpPr>
@@ -12938,14 +14078,14 @@
       </p:sp>
       <p:sp>
         <p:nvSpPr>
-          <p:cNvPr id="9" name="Text 7"/>
+          <p:cNvPr id="10" name="Text 8"/>
           <p:cNvSpPr/>
           <p:nvPr/>
         </p:nvSpPr>
         <p:spPr>
           <a:xfrm>
             <a:off x="640080" y="621792"/>
-            <a:ext cx="10881360" cy="566928"/>
+            <a:ext cx="10881360" cy="713232"/>
           </a:xfrm>
           <a:prstGeom prst="rect">
             <a:avLst/>
@@ -12963,7 +14103,7 @@
               <a:buNone/>
             </a:pPr>
             <a:r>
-              <a:rPr lang="en-US" sz="2700" b="1" dirty="0">
+              <a:rPr lang="en-US" sz="3400" b="1" dirty="0">
                 <a:solidFill>
                   <a:srgbClr val="003A63"/>
                 </a:solidFill>
@@ -12973,20 +14113,20 @@
               </a:rPr>
               <a:t>Module Overview</a:t>
             </a:r>
-            <a:endParaRPr lang="en-US" sz="2700" dirty="0"/>
-          </a:p>
-        </p:txBody>
-      </p:sp>
-      <p:sp>
-        <p:nvSpPr>
-          <p:cNvPr id="10" name="Text 8"/>
-          <p:cNvSpPr/>
-          <p:nvPr/>
-        </p:nvSpPr>
-        <p:spPr>
-          <a:xfrm>
-            <a:off x="868680" y="1417320"/>
-            <a:ext cx="6675120" cy="4434840"/>
+            <a:endParaRPr lang="en-US" sz="3400" dirty="0"/>
+          </a:p>
+        </p:txBody>
+      </p:sp>
+      <p:sp>
+        <p:nvSpPr>
+          <p:cNvPr id="11" name="Text 9"/>
+          <p:cNvSpPr/>
+          <p:nvPr/>
+        </p:nvSpPr>
+        <p:spPr>
+          <a:xfrm>
+            <a:off x="868680" y="1508760"/>
+            <a:ext cx="6537960" cy="4160520"/>
           </a:xfrm>
           <a:prstGeom prst="rect">
             <a:avLst/>
@@ -13001,7 +14141,7 @@
           <a:lstStyle/>
           <a:p>
             <a:r>
-              <a:rPr lang="en-US" sz="1700" dirty="0">
+              <a:rPr lang="en-US" sz="2100" dirty="0">
                 <a:solidFill>
                   <a:srgbClr val="17364A"/>
                 </a:solidFill>
@@ -13009,13 +14149,13 @@
                 <a:ea typeface="Aptos" pitchFamily="34" charset="-122"/>
                 <a:cs typeface="Aptos" pitchFamily="34" charset="-120"/>
               </a:rPr>
-              <a:t>Record linkage and entity resolution help public health systems determine whether records refer to the same person,.</a:t>
-            </a:r>
-            <a:endParaRPr lang="en-US" sz="1700" dirty="0"/>
-          </a:p>
-          <a:p>
-            <a:r>
-              <a:rPr lang="en-US" sz="1700" dirty="0">
+              <a:t>Record linkage and entity resolution help public health systems determine whether records refer to the.</a:t>
+            </a:r>
+            <a:endParaRPr lang="en-US" sz="2100" dirty="0"/>
+          </a:p>
+          <a:p>
+            <a:r>
+              <a:rPr lang="en-US" sz="2100" dirty="0">
                 <a:solidFill>
                   <a:srgbClr val="17364A"/>
                 </a:solidFill>
@@ -13025,11 +14165,11 @@
               </a:rPr>
               <a:t>AI tools often rely on linked data even when the linkage process is invisible to users.</a:t>
             </a:r>
-            <a:endParaRPr lang="en-US" sz="1700" dirty="0"/>
-          </a:p>
-          <a:p>
-            <a:r>
-              <a:rPr lang="en-US" sz="1700" dirty="0">
+            <a:endParaRPr lang="en-US" sz="2100" dirty="0"/>
+          </a:p>
+          <a:p>
+            <a:r>
+              <a:rPr lang="en-US" sz="2100" dirty="0">
                 <a:solidFill>
                   <a:srgbClr val="17364A"/>
                 </a:solidFill>
@@ -13037,15 +14177,15 @@
                 <a:ea typeface="Aptos" pitchFamily="34" charset="-122"/>
                 <a:cs typeface="Aptos" pitchFamily="34" charset="-120"/>
               </a:rPr>
-              <a:t>This module teaches learners how matching and deduplication affect AI outputs, surveillance quality, and equity.</a:t>
-            </a:r>
-            <a:endParaRPr lang="en-US" sz="1700" dirty="0"/>
-          </a:p>
-        </p:txBody>
-      </p:sp>
-      <p:sp>
-        <p:nvSpPr>
-          <p:cNvPr id="11" name="Shape 9"/>
+              <a:t>This module teaches learners how matching and deduplication affect AI outputs, surveillance quality,.</a:t>
+            </a:r>
+            <a:endParaRPr lang="en-US" sz="2100" dirty="0"/>
+          </a:p>
+        </p:txBody>
+      </p:sp>
+      <p:sp>
+        <p:nvSpPr>
+          <p:cNvPr id="12" name="Shape 10"/>
           <p:cNvSpPr/>
           <p:nvPr/>
         </p:nvSpPr>
@@ -13072,14 +14212,14 @@
       </p:sp>
       <p:sp>
         <p:nvSpPr>
-          <p:cNvPr id="12" name="Text 10"/>
+          <p:cNvPr id="13" name="Text 11"/>
           <p:cNvSpPr/>
           <p:nvPr/>
         </p:nvSpPr>
         <p:spPr>
           <a:xfrm>
             <a:off x="8074152" y="1563624"/>
-            <a:ext cx="2825496" cy="201168"/>
+            <a:ext cx="2825496" cy="256032"/>
           </a:xfrm>
           <a:prstGeom prst="rect">
             <a:avLst/>
@@ -13095,7 +14235,7 @@
               <a:buNone/>
             </a:pPr>
             <a:r>
-              <a:rPr lang="en-US" sz="950" b="1" dirty="0">
+              <a:rPr lang="en-US" sz="1300" b="1" dirty="0">
                 <a:solidFill>
                   <a:srgbClr val="0068B7"/>
                 </a:solidFill>
@@ -13105,20 +14245,20 @@
               </a:rPr>
               <a:t>Key idea</a:t>
             </a:r>
-            <a:endParaRPr lang="en-US" sz="950" dirty="0"/>
-          </a:p>
-        </p:txBody>
-      </p:sp>
-      <p:sp>
-        <p:nvSpPr>
-          <p:cNvPr id="13" name="Text 11"/>
-          <p:cNvSpPr/>
-          <p:nvPr/>
-        </p:nvSpPr>
-        <p:spPr>
-          <a:xfrm>
-            <a:off x="8074152" y="1856232"/>
-            <a:ext cx="2825496" cy="1261872"/>
+            <a:endParaRPr lang="en-US" sz="1300" dirty="0"/>
+          </a:p>
+        </p:txBody>
+      </p:sp>
+      <p:sp>
+        <p:nvSpPr>
+          <p:cNvPr id="14" name="Text 12"/>
+          <p:cNvSpPr/>
+          <p:nvPr/>
+        </p:nvSpPr>
+        <p:spPr>
+          <a:xfrm>
+            <a:off x="8074152" y="1920240"/>
+            <a:ext cx="2825496" cy="1188720"/>
           </a:xfrm>
           <a:prstGeom prst="rect">
             <a:avLst/>
@@ -13136,7 +14276,7 @@
               <a:buNone/>
             </a:pPr>
             <a:r>
-              <a:rPr lang="en-US" sz="1250" dirty="0">
+              <a:rPr lang="en-US" sz="1550" dirty="0">
                 <a:solidFill>
                   <a:srgbClr val="17364A"/>
                 </a:solidFill>
@@ -13144,15 +14284,15 @@
                 <a:ea typeface="Aptos" pitchFamily="34" charset="-122"/>
                 <a:cs typeface="Aptos" pitchFamily="34" charset="-120"/>
               </a:rPr>
-              <a:t>Record linkage and entity resolution help public health systems determine whether records refer to the same person,.</a:t>
-            </a:r>
-            <a:endParaRPr lang="en-US" sz="1250" dirty="0"/>
-          </a:p>
-        </p:txBody>
-      </p:sp>
-      <p:sp>
-        <p:nvSpPr>
-          <p:cNvPr id="14" name="Shape 12"/>
+              <a:t>Record linkage and entity resolution help public health systems determine whether records refer to the.</a:t>
+            </a:r>
+            <a:endParaRPr lang="en-US" sz="1550" dirty="0"/>
+          </a:p>
+        </p:txBody>
+      </p:sp>
+      <p:sp>
+        <p:nvSpPr>
+          <p:cNvPr id="15" name="Shape 13"/>
           <p:cNvSpPr/>
           <p:nvPr/>
         </p:nvSpPr>
@@ -13179,14 +14319,14 @@
       </p:sp>
       <p:sp>
         <p:nvSpPr>
-          <p:cNvPr id="15" name="Text 13"/>
+          <p:cNvPr id="16" name="Text 14"/>
           <p:cNvSpPr/>
           <p:nvPr/>
         </p:nvSpPr>
         <p:spPr>
           <a:xfrm>
             <a:off x="8074152" y="3666744"/>
-            <a:ext cx="2825496" cy="201168"/>
+            <a:ext cx="2825496" cy="256032"/>
           </a:xfrm>
           <a:prstGeom prst="rect">
             <a:avLst/>
@@ -13202,7 +14342,7 @@
               <a:buNone/>
             </a:pPr>
             <a:r>
-              <a:rPr lang="en-US" sz="950" b="1" dirty="0">
+              <a:rPr lang="en-US" sz="1300" b="1" dirty="0">
                 <a:solidFill>
                   <a:srgbClr val="0068B7"/>
                 </a:solidFill>
@@ -13212,20 +14352,20 @@
               </a:rPr>
               <a:t>Use this for</a:t>
             </a:r>
-            <a:endParaRPr lang="en-US" sz="950" dirty="0"/>
-          </a:p>
-        </p:txBody>
-      </p:sp>
-      <p:sp>
-        <p:nvSpPr>
-          <p:cNvPr id="16" name="Text 14"/>
-          <p:cNvSpPr/>
-          <p:nvPr/>
-        </p:nvSpPr>
-        <p:spPr>
-          <a:xfrm>
-            <a:off x="8074152" y="3959352"/>
-            <a:ext cx="2825496" cy="1170432"/>
+            <a:endParaRPr lang="en-US" sz="1300" dirty="0"/>
+          </a:p>
+        </p:txBody>
+      </p:sp>
+      <p:sp>
+        <p:nvSpPr>
+          <p:cNvPr id="17" name="Text 15"/>
+          <p:cNvSpPr/>
+          <p:nvPr/>
+        </p:nvSpPr>
+        <p:spPr>
+          <a:xfrm>
+            <a:off x="8074152" y="4023360"/>
+            <a:ext cx="2825496" cy="1097280"/>
           </a:xfrm>
           <a:prstGeom prst="rect">
             <a:avLst/>
@@ -13243,7 +14383,7 @@
               <a:buNone/>
             </a:pPr>
             <a:r>
-              <a:rPr lang="en-US" sz="1250" dirty="0">
+              <a:rPr lang="en-US" sz="1550" dirty="0">
                 <a:solidFill>
                   <a:srgbClr val="17364A"/>
                 </a:solidFill>
@@ -13253,7 +14393,7 @@
               </a:rPr>
               <a:t>Connect the concept to public health decisions, safeguards, documentation, or implementation work.</a:t>
             </a:r>
-            <a:endParaRPr lang="en-US" sz="1250" dirty="0"/>
+            <a:endParaRPr lang="en-US" sz="1550" dirty="0"/>
           </a:p>
         </p:txBody>
       </p:sp>
@@ -13450,7 +14590,7 @@
                 <a:ea typeface="Aptos" pitchFamily="34" charset="-122"/>
                 <a:cs typeface="Aptos" pitchFamily="34" charset="-120"/>
               </a:rPr>
-              <a:t>© Paula Soper</a:t>
+              <a:t>Â© Paula Soper</a:t>
             </a:r>
             <a:endParaRPr lang="en-US" sz="800" dirty="0"/>
           </a:p>
@@ -13458,7 +14598,46 @@
       </p:sp>
       <p:sp>
         <p:nvSpPr>
-          <p:cNvPr id="7" name="Shape 5"/>
+          <p:cNvPr id="7" name="Text 5"/>
+          <p:cNvSpPr/>
+          <p:nvPr/>
+        </p:nvSpPr>
+        <p:spPr>
+          <a:xfrm>
+            <a:off x="11137392" y="6510528"/>
+            <a:ext cx="411480" cy="201168"/>
+          </a:xfrm>
+          <a:prstGeom prst="rect">
+            <a:avLst/>
+          </a:prstGeom>
+          <a:noFill/>
+          <a:ln/>
+        </p:spPr>
+        <p:txBody>
+          <a:bodyPr wrap="square" lIns="0" tIns="0" rIns="0" bIns="0" rtlCol="0" anchor="ctr"/>
+          <a:lstStyle/>
+          <a:p>
+            <a:pPr algn="r" indent="0" marL="0">
+              <a:buNone/>
+            </a:pPr>
+            <a:r>
+              <a:rPr lang="en-US" sz="900" dirty="0">
+                <a:solidFill>
+                  <a:srgbClr val="5F7181"/>
+                </a:solidFill>
+                <a:latin typeface="Aptos" pitchFamily="34" charset="0"/>
+                <a:ea typeface="Aptos" pitchFamily="34" charset="-122"/>
+                <a:cs typeface="Aptos" pitchFamily="34" charset="-120"/>
+              </a:rPr>
+              <a:t>7</a:t>
+            </a:r>
+            <a:endParaRPr lang="en-US" sz="900" dirty="0"/>
+          </a:p>
+        </p:txBody>
+      </p:sp>
+      <p:sp>
+        <p:nvSpPr>
+          <p:cNvPr id="8" name="Shape 6"/>
           <p:cNvSpPr/>
           <p:nvPr/>
         </p:nvSpPr>
@@ -13483,7 +14662,7 @@
       </p:sp>
       <p:sp>
         <p:nvSpPr>
-          <p:cNvPr id="8" name="Text 6"/>
+          <p:cNvPr id="9" name="Text 7"/>
           <p:cNvSpPr/>
           <p:nvPr/>
         </p:nvSpPr>
@@ -13522,14 +14701,14 @@
       </p:sp>
       <p:sp>
         <p:nvSpPr>
-          <p:cNvPr id="9" name="Text 7"/>
+          <p:cNvPr id="10" name="Text 8"/>
           <p:cNvSpPr/>
           <p:nvPr/>
         </p:nvSpPr>
         <p:spPr>
           <a:xfrm>
             <a:off x="640080" y="621792"/>
-            <a:ext cx="10881360" cy="566928"/>
+            <a:ext cx="10881360" cy="713232"/>
           </a:xfrm>
           <a:prstGeom prst="rect">
             <a:avLst/>
@@ -13547,7 +14726,7 @@
               <a:buNone/>
             </a:pPr>
             <a:r>
-              <a:rPr lang="en-US" sz="2700" b="1" dirty="0">
+              <a:rPr lang="en-US" sz="3400" b="1" dirty="0">
                 <a:solidFill>
                   <a:srgbClr val="003A63"/>
                 </a:solidFill>
@@ -13557,20 +14736,20 @@
               </a:rPr>
               <a:t>Why This Topic Matters for Public Health AI</a:t>
             </a:r>
-            <a:endParaRPr lang="en-US" sz="2700" dirty="0"/>
-          </a:p>
-        </p:txBody>
-      </p:sp>
-      <p:sp>
-        <p:nvSpPr>
-          <p:cNvPr id="10" name="Text 8"/>
-          <p:cNvSpPr/>
-          <p:nvPr/>
-        </p:nvSpPr>
-        <p:spPr>
-          <a:xfrm>
-            <a:off x="868680" y="1417320"/>
-            <a:ext cx="6675120" cy="4434840"/>
+            <a:endParaRPr lang="en-US" sz="3400" dirty="0"/>
+          </a:p>
+        </p:txBody>
+      </p:sp>
+      <p:sp>
+        <p:nvSpPr>
+          <p:cNvPr id="11" name="Text 9"/>
+          <p:cNvSpPr/>
+          <p:nvPr/>
+        </p:nvSpPr>
+        <p:spPr>
+          <a:xfrm>
+            <a:off x="868680" y="1508760"/>
+            <a:ext cx="6537960" cy="4160520"/>
           </a:xfrm>
           <a:prstGeom prst="rect">
             <a:avLst/>
@@ -13585,7 +14764,7 @@
           <a:lstStyle/>
           <a:p>
             <a:r>
-              <a:rPr lang="en-US" sz="1700" dirty="0">
+              <a:rPr lang="en-US" sz="2100" dirty="0">
                 <a:solidFill>
                   <a:srgbClr val="17364A"/>
                 </a:solidFill>
@@ -13595,11 +14774,11 @@
               </a:rPr>
               <a:t>Record linkage matters because public health work often depends on combining information across systems.</a:t>
             </a:r>
-            <a:endParaRPr lang="en-US" sz="1700" dirty="0"/>
-          </a:p>
-          <a:p>
-            <a:r>
-              <a:rPr lang="en-US" sz="1700" dirty="0">
+            <a:endParaRPr lang="en-US" sz="2100" dirty="0"/>
+          </a:p>
+          <a:p>
+            <a:r>
+              <a:rPr lang="en-US" sz="2100" dirty="0">
                 <a:solidFill>
                   <a:srgbClr val="17364A"/>
                 </a:solidFill>
@@ -13609,11 +14788,11 @@
               </a:rPr>
               <a:t>A surveillance system may need to associate a lab report with an existing case.</a:t>
             </a:r>
-            <a:endParaRPr lang="en-US" sz="1700" dirty="0"/>
-          </a:p>
-          <a:p>
-            <a:r>
-              <a:rPr lang="en-US" sz="1700" dirty="0">
+            <a:endParaRPr lang="en-US" sz="2100" dirty="0"/>
+          </a:p>
+          <a:p>
+            <a:r>
+              <a:rPr lang="en-US" sz="2100" dirty="0">
                 <a:solidFill>
                   <a:srgbClr val="17364A"/>
                 </a:solidFill>
@@ -13623,27 +14802,13 @@
               </a:rPr>
               <a:t>An IIS may need to match vaccination records from multiple providers.</a:t>
             </a:r>
-            <a:endParaRPr lang="en-US" sz="1700" dirty="0"/>
-          </a:p>
-          <a:p>
-            <a:r>
-              <a:rPr lang="en-US" sz="1700" dirty="0">
-                <a:solidFill>
-                  <a:srgbClr val="17364A"/>
-                </a:solidFill>
-                <a:latin typeface="Aptos" pitchFamily="34" charset="0"/>
-                <a:ea typeface="Aptos" pitchFamily="34" charset="-122"/>
-                <a:cs typeface="Aptos" pitchFamily="34" charset="-120"/>
-              </a:rPr>
-              <a:t>A vital records linkage may support maternal and child health analysis.</a:t>
-            </a:r>
-            <a:endParaRPr lang="en-US" sz="1700" dirty="0"/>
-          </a:p>
-        </p:txBody>
-      </p:sp>
-      <p:sp>
-        <p:nvSpPr>
-          <p:cNvPr id="11" name="Shape 9"/>
+            <a:endParaRPr lang="en-US" sz="2100" dirty="0"/>
+          </a:p>
+        </p:txBody>
+      </p:sp>
+      <p:sp>
+        <p:nvSpPr>
+          <p:cNvPr id="12" name="Shape 10"/>
           <p:cNvSpPr/>
           <p:nvPr/>
         </p:nvSpPr>
@@ -13670,14 +14835,14 @@
       </p:sp>
       <p:sp>
         <p:nvSpPr>
-          <p:cNvPr id="12" name="Text 10"/>
+          <p:cNvPr id="13" name="Text 11"/>
           <p:cNvSpPr/>
           <p:nvPr/>
         </p:nvSpPr>
         <p:spPr>
           <a:xfrm>
             <a:off x="8074152" y="1563624"/>
-            <a:ext cx="2825496" cy="201168"/>
+            <a:ext cx="2825496" cy="256032"/>
           </a:xfrm>
           <a:prstGeom prst="rect">
             <a:avLst/>
@@ -13693,7 +14858,7 @@
               <a:buNone/>
             </a:pPr>
             <a:r>
-              <a:rPr lang="en-US" sz="950" b="1" dirty="0">
+              <a:rPr lang="en-US" sz="1300" b="1" dirty="0">
                 <a:solidFill>
                   <a:srgbClr val="0068B7"/>
                 </a:solidFill>
@@ -13703,20 +14868,20 @@
               </a:rPr>
               <a:t>Key idea</a:t>
             </a:r>
-            <a:endParaRPr lang="en-US" sz="950" dirty="0"/>
-          </a:p>
-        </p:txBody>
-      </p:sp>
-      <p:sp>
-        <p:nvSpPr>
-          <p:cNvPr id="13" name="Text 11"/>
-          <p:cNvSpPr/>
-          <p:nvPr/>
-        </p:nvSpPr>
-        <p:spPr>
-          <a:xfrm>
-            <a:off x="8074152" y="1856232"/>
-            <a:ext cx="2825496" cy="1261872"/>
+            <a:endParaRPr lang="en-US" sz="1300" dirty="0"/>
+          </a:p>
+        </p:txBody>
+      </p:sp>
+      <p:sp>
+        <p:nvSpPr>
+          <p:cNvPr id="14" name="Text 12"/>
+          <p:cNvSpPr/>
+          <p:nvPr/>
+        </p:nvSpPr>
+        <p:spPr>
+          <a:xfrm>
+            <a:off x="8074152" y="1920240"/>
+            <a:ext cx="2825496" cy="1188720"/>
           </a:xfrm>
           <a:prstGeom prst="rect">
             <a:avLst/>
@@ -13734,7 +14899,7 @@
               <a:buNone/>
             </a:pPr>
             <a:r>
-              <a:rPr lang="en-US" sz="1250" dirty="0">
+              <a:rPr lang="en-US" sz="1550" dirty="0">
                 <a:solidFill>
                   <a:srgbClr val="17364A"/>
                 </a:solidFill>
@@ -13744,13 +14909,13 @@
               </a:rPr>
               <a:t>Record linkage matters because public health work often depends on combining information across systems.</a:t>
             </a:r>
-            <a:endParaRPr lang="en-US" sz="1250" dirty="0"/>
-          </a:p>
-        </p:txBody>
-      </p:sp>
-      <p:sp>
-        <p:nvSpPr>
-          <p:cNvPr id="14" name="Shape 12"/>
+            <a:endParaRPr lang="en-US" sz="1550" dirty="0"/>
+          </a:p>
+        </p:txBody>
+      </p:sp>
+      <p:sp>
+        <p:nvSpPr>
+          <p:cNvPr id="15" name="Shape 13"/>
           <p:cNvSpPr/>
           <p:nvPr/>
         </p:nvSpPr>
@@ -13777,14 +14942,14 @@
       </p:sp>
       <p:sp>
         <p:nvSpPr>
-          <p:cNvPr id="15" name="Text 13"/>
+          <p:cNvPr id="16" name="Text 14"/>
           <p:cNvSpPr/>
           <p:nvPr/>
         </p:nvSpPr>
         <p:spPr>
           <a:xfrm>
             <a:off x="8074152" y="3666744"/>
-            <a:ext cx="2825496" cy="201168"/>
+            <a:ext cx="2825496" cy="256032"/>
           </a:xfrm>
           <a:prstGeom prst="rect">
             <a:avLst/>
@@ -13800,7 +14965,7 @@
               <a:buNone/>
             </a:pPr>
             <a:r>
-              <a:rPr lang="en-US" sz="950" b="1" dirty="0">
+              <a:rPr lang="en-US" sz="1300" b="1" dirty="0">
                 <a:solidFill>
                   <a:srgbClr val="0068B7"/>
                 </a:solidFill>
@@ -13810,20 +14975,20 @@
               </a:rPr>
               <a:t>Use this for</a:t>
             </a:r>
-            <a:endParaRPr lang="en-US" sz="950" dirty="0"/>
-          </a:p>
-        </p:txBody>
-      </p:sp>
-      <p:sp>
-        <p:nvSpPr>
-          <p:cNvPr id="16" name="Text 14"/>
-          <p:cNvSpPr/>
-          <p:nvPr/>
-        </p:nvSpPr>
-        <p:spPr>
-          <a:xfrm>
-            <a:off x="8074152" y="3959352"/>
-            <a:ext cx="2825496" cy="1170432"/>
+            <a:endParaRPr lang="en-US" sz="1300" dirty="0"/>
+          </a:p>
+        </p:txBody>
+      </p:sp>
+      <p:sp>
+        <p:nvSpPr>
+          <p:cNvPr id="17" name="Text 15"/>
+          <p:cNvSpPr/>
+          <p:nvPr/>
+        </p:nvSpPr>
+        <p:spPr>
+          <a:xfrm>
+            <a:off x="8074152" y="4023360"/>
+            <a:ext cx="2825496" cy="1097280"/>
           </a:xfrm>
           <a:prstGeom prst="rect">
             <a:avLst/>
@@ -13841,7 +15006,7 @@
               <a:buNone/>
             </a:pPr>
             <a:r>
-              <a:rPr lang="en-US" sz="1250" dirty="0">
+              <a:rPr lang="en-US" sz="1550" dirty="0">
                 <a:solidFill>
                   <a:srgbClr val="17364A"/>
                 </a:solidFill>
@@ -13851,7 +15016,7 @@
               </a:rPr>
               <a:t>Connect the concept to public health decisions, safeguards, documentation, or implementation work.</a:t>
             </a:r>
-            <a:endParaRPr lang="en-US" sz="1250" dirty="0"/>
+            <a:endParaRPr lang="en-US" sz="1550" dirty="0"/>
           </a:p>
         </p:txBody>
       </p:sp>
@@ -14048,7 +15213,7 @@
                 <a:ea typeface="Aptos" pitchFamily="34" charset="-122"/>
                 <a:cs typeface="Aptos" pitchFamily="34" charset="-120"/>
               </a:rPr>
-              <a:t>© Paula Soper</a:t>
+              <a:t>Â© Paula Soper</a:t>
             </a:r>
             <a:endParaRPr lang="en-US" sz="800" dirty="0"/>
           </a:p>
@@ -14056,7 +15221,46 @@
       </p:sp>
       <p:sp>
         <p:nvSpPr>
-          <p:cNvPr id="7" name="Shape 5"/>
+          <p:cNvPr id="7" name="Text 5"/>
+          <p:cNvSpPr/>
+          <p:nvPr/>
+        </p:nvSpPr>
+        <p:spPr>
+          <a:xfrm>
+            <a:off x="11137392" y="6510528"/>
+            <a:ext cx="411480" cy="201168"/>
+          </a:xfrm>
+          <a:prstGeom prst="rect">
+            <a:avLst/>
+          </a:prstGeom>
+          <a:noFill/>
+          <a:ln/>
+        </p:spPr>
+        <p:txBody>
+          <a:bodyPr wrap="square" lIns="0" tIns="0" rIns="0" bIns="0" rtlCol="0" anchor="ctr"/>
+          <a:lstStyle/>
+          <a:p>
+            <a:pPr algn="r" indent="0" marL="0">
+              <a:buNone/>
+            </a:pPr>
+            <a:r>
+              <a:rPr lang="en-US" sz="900" dirty="0">
+                <a:solidFill>
+                  <a:srgbClr val="5F7181"/>
+                </a:solidFill>
+                <a:latin typeface="Aptos" pitchFamily="34" charset="0"/>
+                <a:ea typeface="Aptos" pitchFamily="34" charset="-122"/>
+                <a:cs typeface="Aptos" pitchFamily="34" charset="-120"/>
+              </a:rPr>
+              <a:t>8</a:t>
+            </a:r>
+            <a:endParaRPr lang="en-US" sz="900" dirty="0"/>
+          </a:p>
+        </p:txBody>
+      </p:sp>
+      <p:sp>
+        <p:nvSpPr>
+          <p:cNvPr id="8" name="Shape 6"/>
           <p:cNvSpPr/>
           <p:nvPr/>
         </p:nvSpPr>
@@ -14081,7 +15285,7 @@
       </p:sp>
       <p:sp>
         <p:nvSpPr>
-          <p:cNvPr id="8" name="Text 6"/>
+          <p:cNvPr id="9" name="Text 7"/>
           <p:cNvSpPr/>
           <p:nvPr/>
         </p:nvSpPr>
@@ -14120,14 +15324,14 @@
       </p:sp>
       <p:sp>
         <p:nvSpPr>
-          <p:cNvPr id="9" name="Text 7"/>
+          <p:cNvPr id="10" name="Text 8"/>
           <p:cNvSpPr/>
           <p:nvPr/>
         </p:nvSpPr>
         <p:spPr>
           <a:xfrm>
             <a:off x="640080" y="621792"/>
-            <a:ext cx="10881360" cy="566928"/>
+            <a:ext cx="10881360" cy="713232"/>
           </a:xfrm>
           <a:prstGeom prst="rect">
             <a:avLst/>
@@ -14145,7 +15349,7 @@
               <a:buNone/>
             </a:pPr>
             <a:r>
-              <a:rPr lang="en-US" sz="2700" b="1" dirty="0">
+              <a:rPr lang="en-US" sz="3400" b="1" dirty="0">
                 <a:solidFill>
                   <a:srgbClr val="003A63"/>
                 </a:solidFill>
@@ -14155,20 +15359,20 @@
               </a:rPr>
               <a:t>Core Concepts</a:t>
             </a:r>
-            <a:endParaRPr lang="en-US" sz="2700" dirty="0"/>
-          </a:p>
-        </p:txBody>
-      </p:sp>
-      <p:sp>
-        <p:nvSpPr>
-          <p:cNvPr id="10" name="Text 8"/>
-          <p:cNvSpPr/>
-          <p:nvPr/>
-        </p:nvSpPr>
-        <p:spPr>
-          <a:xfrm>
-            <a:off x="868680" y="1417320"/>
-            <a:ext cx="6675120" cy="4434840"/>
+            <a:endParaRPr lang="en-US" sz="3400" dirty="0"/>
+          </a:p>
+        </p:txBody>
+      </p:sp>
+      <p:sp>
+        <p:nvSpPr>
+          <p:cNvPr id="11" name="Text 9"/>
+          <p:cNvSpPr/>
+          <p:nvPr/>
+        </p:nvSpPr>
+        <p:spPr>
+          <a:xfrm>
+            <a:off x="868680" y="1508760"/>
+            <a:ext cx="6537960" cy="4160520"/>
           </a:xfrm>
           <a:prstGeom prst="rect">
             <a:avLst/>
@@ -14183,7 +15387,7 @@
           <a:lstStyle/>
           <a:p>
             <a:r>
-              <a:rPr lang="en-US" sz="1700" dirty="0">
+              <a:rPr lang="en-US" sz="2100" dirty="0">
                 <a:solidFill>
                   <a:srgbClr val="17364A"/>
                 </a:solidFill>
@@ -14193,11 +15397,11 @@
               </a:rPr>
               <a:t>Record linkage.</a:t>
             </a:r>
-            <a:endParaRPr lang="en-US" sz="1700" dirty="0"/>
-          </a:p>
-          <a:p>
-            <a:r>
-              <a:rPr lang="en-US" sz="1700" dirty="0">
+            <a:endParaRPr lang="en-US" sz="2100" dirty="0"/>
+          </a:p>
+          <a:p>
+            <a:r>
+              <a:rPr lang="en-US" sz="2100" dirty="0">
                 <a:solidFill>
                   <a:srgbClr val="17364A"/>
                 </a:solidFill>
@@ -14205,13 +15409,13 @@
                 <a:ea typeface="Aptos" pitchFamily="34" charset="-122"/>
                 <a:cs typeface="Aptos" pitchFamily="34" charset="-120"/>
               </a:rPr>
-              <a:t>Record linkage is the process of determining whether records from one or more sources refer to the same entity.</a:t>
-            </a:r>
-            <a:endParaRPr lang="en-US" sz="1700" dirty="0"/>
-          </a:p>
-          <a:p>
-            <a:r>
-              <a:rPr lang="en-US" sz="1700" dirty="0">
+              <a:t>Record linkage is the process of determining whether records from one or more sources refer to the same.</a:t>
+            </a:r>
+            <a:endParaRPr lang="en-US" sz="2100" dirty="0"/>
+          </a:p>
+          <a:p>
+            <a:r>
+              <a:rPr lang="en-US" sz="2100" dirty="0">
                 <a:solidFill>
                   <a:srgbClr val="17364A"/>
                 </a:solidFill>
@@ -14221,27 +15425,13 @@
               </a:rPr>
               <a:t>The entity may be a person, provider, facility, address, organization, event, or outbreak.</a:t>
             </a:r>
-            <a:endParaRPr lang="en-US" sz="1700" dirty="0"/>
-          </a:p>
-          <a:p>
-            <a:r>
-              <a:rPr lang="en-US" sz="1700" dirty="0">
-                <a:solidFill>
-                  <a:srgbClr val="17364A"/>
-                </a:solidFill>
-                <a:latin typeface="Aptos" pitchFamily="34" charset="0"/>
-                <a:ea typeface="Aptos" pitchFamily="34" charset="-122"/>
-                <a:cs typeface="Aptos" pitchFamily="34" charset="-120"/>
-              </a:rPr>
-              <a:t>Entity resolution.</a:t>
-            </a:r>
-            <a:endParaRPr lang="en-US" sz="1700" dirty="0"/>
-          </a:p>
-        </p:txBody>
-      </p:sp>
-      <p:sp>
-        <p:nvSpPr>
-          <p:cNvPr id="11" name="Shape 9"/>
+            <a:endParaRPr lang="en-US" sz="2100" dirty="0"/>
+          </a:p>
+        </p:txBody>
+      </p:sp>
+      <p:sp>
+        <p:nvSpPr>
+          <p:cNvPr id="12" name="Shape 10"/>
           <p:cNvSpPr/>
           <p:nvPr/>
         </p:nvSpPr>
@@ -14268,14 +15458,14 @@
       </p:sp>
       <p:sp>
         <p:nvSpPr>
-          <p:cNvPr id="12" name="Text 10"/>
+          <p:cNvPr id="13" name="Text 11"/>
           <p:cNvSpPr/>
           <p:nvPr/>
         </p:nvSpPr>
         <p:spPr>
           <a:xfrm>
             <a:off x="8074152" y="1563624"/>
-            <a:ext cx="2825496" cy="201168"/>
+            <a:ext cx="2825496" cy="256032"/>
           </a:xfrm>
           <a:prstGeom prst="rect">
             <a:avLst/>
@@ -14291,7 +15481,7 @@
               <a:buNone/>
             </a:pPr>
             <a:r>
-              <a:rPr lang="en-US" sz="950" b="1" dirty="0">
+              <a:rPr lang="en-US" sz="1300" b="1" dirty="0">
                 <a:solidFill>
                   <a:srgbClr val="0068B7"/>
                 </a:solidFill>
@@ -14301,20 +15491,20 @@
               </a:rPr>
               <a:t>Key idea</a:t>
             </a:r>
-            <a:endParaRPr lang="en-US" sz="950" dirty="0"/>
-          </a:p>
-        </p:txBody>
-      </p:sp>
-      <p:sp>
-        <p:nvSpPr>
-          <p:cNvPr id="13" name="Text 11"/>
-          <p:cNvSpPr/>
-          <p:nvPr/>
-        </p:nvSpPr>
-        <p:spPr>
-          <a:xfrm>
-            <a:off x="8074152" y="1856232"/>
-            <a:ext cx="2825496" cy="1261872"/>
+            <a:endParaRPr lang="en-US" sz="1300" dirty="0"/>
+          </a:p>
+        </p:txBody>
+      </p:sp>
+      <p:sp>
+        <p:nvSpPr>
+          <p:cNvPr id="14" name="Text 12"/>
+          <p:cNvSpPr/>
+          <p:nvPr/>
+        </p:nvSpPr>
+        <p:spPr>
+          <a:xfrm>
+            <a:off x="8074152" y="1920240"/>
+            <a:ext cx="2825496" cy="1188720"/>
           </a:xfrm>
           <a:prstGeom prst="rect">
             <a:avLst/>
@@ -14332,7 +15522,7 @@
               <a:buNone/>
             </a:pPr>
             <a:r>
-              <a:rPr lang="en-US" sz="1250" dirty="0">
+              <a:rPr lang="en-US" sz="1550" dirty="0">
                 <a:solidFill>
                   <a:srgbClr val="17364A"/>
                 </a:solidFill>
@@ -14342,13 +15532,13 @@
               </a:rPr>
               <a:t>Record linkage.</a:t>
             </a:r>
-            <a:endParaRPr lang="en-US" sz="1250" dirty="0"/>
-          </a:p>
-        </p:txBody>
-      </p:sp>
-      <p:sp>
-        <p:nvSpPr>
-          <p:cNvPr id="14" name="Shape 12"/>
+            <a:endParaRPr lang="en-US" sz="1550" dirty="0"/>
+          </a:p>
+        </p:txBody>
+      </p:sp>
+      <p:sp>
+        <p:nvSpPr>
+          <p:cNvPr id="15" name="Shape 13"/>
           <p:cNvSpPr/>
           <p:nvPr/>
         </p:nvSpPr>
@@ -14375,14 +15565,14 @@
       </p:sp>
       <p:sp>
         <p:nvSpPr>
-          <p:cNvPr id="15" name="Text 13"/>
+          <p:cNvPr id="16" name="Text 14"/>
           <p:cNvSpPr/>
           <p:nvPr/>
         </p:nvSpPr>
         <p:spPr>
           <a:xfrm>
             <a:off x="8074152" y="3666744"/>
-            <a:ext cx="2825496" cy="201168"/>
+            <a:ext cx="2825496" cy="256032"/>
           </a:xfrm>
           <a:prstGeom prst="rect">
             <a:avLst/>
@@ -14398,7 +15588,7 @@
               <a:buNone/>
             </a:pPr>
             <a:r>
-              <a:rPr lang="en-US" sz="950" b="1" dirty="0">
+              <a:rPr lang="en-US" sz="1300" b="1" dirty="0">
                 <a:solidFill>
                   <a:srgbClr val="0068B7"/>
                 </a:solidFill>
@@ -14408,20 +15598,20 @@
               </a:rPr>
               <a:t>Use this for</a:t>
             </a:r>
-            <a:endParaRPr lang="en-US" sz="950" dirty="0"/>
-          </a:p>
-        </p:txBody>
-      </p:sp>
-      <p:sp>
-        <p:nvSpPr>
-          <p:cNvPr id="16" name="Text 14"/>
-          <p:cNvSpPr/>
-          <p:nvPr/>
-        </p:nvSpPr>
-        <p:spPr>
-          <a:xfrm>
-            <a:off x="8074152" y="3959352"/>
-            <a:ext cx="2825496" cy="1170432"/>
+            <a:endParaRPr lang="en-US" sz="1300" dirty="0"/>
+          </a:p>
+        </p:txBody>
+      </p:sp>
+      <p:sp>
+        <p:nvSpPr>
+          <p:cNvPr id="17" name="Text 15"/>
+          <p:cNvSpPr/>
+          <p:nvPr/>
+        </p:nvSpPr>
+        <p:spPr>
+          <a:xfrm>
+            <a:off x="8074152" y="4023360"/>
+            <a:ext cx="2825496" cy="1097280"/>
           </a:xfrm>
           <a:prstGeom prst="rect">
             <a:avLst/>
@@ -14439,7 +15629,7 @@
               <a:buNone/>
             </a:pPr>
             <a:r>
-              <a:rPr lang="en-US" sz="1250" dirty="0">
+              <a:rPr lang="en-US" sz="1550" dirty="0">
                 <a:solidFill>
                   <a:srgbClr val="17364A"/>
                 </a:solidFill>
@@ -14449,7 +15639,7 @@
               </a:rPr>
               <a:t>Connect the concept to public health decisions, safeguards, documentation, or implementation work.</a:t>
             </a:r>
-            <a:endParaRPr lang="en-US" sz="1250" dirty="0"/>
+            <a:endParaRPr lang="en-US" sz="1550" dirty="0"/>
           </a:p>
         </p:txBody>
       </p:sp>
@@ -14646,7 +15836,7 @@
                 <a:ea typeface="Aptos" pitchFamily="34" charset="-122"/>
                 <a:cs typeface="Aptos" pitchFamily="34" charset="-120"/>
               </a:rPr>
-              <a:t>© Paula Soper</a:t>
+              <a:t>Â© Paula Soper</a:t>
             </a:r>
             <a:endParaRPr lang="en-US" sz="800" dirty="0"/>
           </a:p>
@@ -14660,8 +15850,47 @@
         </p:nvSpPr>
         <p:spPr>
           <a:xfrm>
+            <a:off x="11137392" y="6510528"/>
+            <a:ext cx="411480" cy="201168"/>
+          </a:xfrm>
+          <a:prstGeom prst="rect">
+            <a:avLst/>
+          </a:prstGeom>
+          <a:noFill/>
+          <a:ln/>
+        </p:spPr>
+        <p:txBody>
+          <a:bodyPr wrap="square" lIns="0" tIns="0" rIns="0" bIns="0" rtlCol="0" anchor="ctr"/>
+          <a:lstStyle/>
+          <a:p>
+            <a:pPr algn="r" indent="0" marL="0">
+              <a:buNone/>
+            </a:pPr>
+            <a:r>
+              <a:rPr lang="en-US" sz="900" dirty="0">
+                <a:solidFill>
+                  <a:srgbClr val="5F7181"/>
+                </a:solidFill>
+                <a:latin typeface="Aptos" pitchFamily="34" charset="0"/>
+                <a:ea typeface="Aptos" pitchFamily="34" charset="-122"/>
+                <a:cs typeface="Aptos" pitchFamily="34" charset="-120"/>
+              </a:rPr>
+              <a:t>9</a:t>
+            </a:r>
+            <a:endParaRPr lang="en-US" sz="900" dirty="0"/>
+          </a:p>
+        </p:txBody>
+      </p:sp>
+      <p:sp>
+        <p:nvSpPr>
+          <p:cNvPr id="8" name="Text 6"/>
+          <p:cNvSpPr/>
+          <p:nvPr/>
+        </p:nvSpPr>
+        <p:spPr>
+          <a:xfrm>
             <a:off x="640080" y="658368"/>
-            <a:ext cx="10881360" cy="566928"/>
+            <a:ext cx="10881360" cy="713232"/>
           </a:xfrm>
           <a:prstGeom prst="rect">
             <a:avLst/>
@@ -14679,7 +15908,7 @@
               <a:buNone/>
             </a:pPr>
             <a:r>
-              <a:rPr lang="en-US" sz="2700" b="1" dirty="0">
+              <a:rPr lang="en-US" sz="3400" b="1" dirty="0">
                 <a:solidFill>
                   <a:srgbClr val="003A63"/>
                 </a:solidFill>
@@ -14689,20 +15918,20 @@
               </a:rPr>
               <a:t>Core Concepts Continued</a:t>
             </a:r>
-            <a:endParaRPr lang="en-US" sz="2700" dirty="0"/>
-          </a:p>
-        </p:txBody>
-      </p:sp>
-      <p:sp>
-        <p:nvSpPr>
-          <p:cNvPr id="8" name="Text 6"/>
-          <p:cNvSpPr/>
-          <p:nvPr/>
-        </p:nvSpPr>
-        <p:spPr>
-          <a:xfrm>
-            <a:off x="868680" y="1417320"/>
-            <a:ext cx="6675120" cy="4434840"/>
+            <a:endParaRPr lang="en-US" sz="3400" dirty="0"/>
+          </a:p>
+        </p:txBody>
+      </p:sp>
+      <p:sp>
+        <p:nvSpPr>
+          <p:cNvPr id="9" name="Text 7"/>
+          <p:cNvSpPr/>
+          <p:nvPr/>
+        </p:nvSpPr>
+        <p:spPr>
+          <a:xfrm>
+            <a:off x="868680" y="1508760"/>
+            <a:ext cx="6537960" cy="4160520"/>
           </a:xfrm>
           <a:prstGeom prst="rect">
             <a:avLst/>
@@ -14717,7 +15946,7 @@
           <a:lstStyle/>
           <a:p>
             <a:r>
-              <a:rPr lang="en-US" sz="1700" dirty="0">
+              <a:rPr lang="en-US" sz="2100" dirty="0">
                 <a:solidFill>
                   <a:srgbClr val="17364A"/>
                 </a:solidFill>
@@ -14727,11 +15956,11 @@
               </a:rPr>
               <a:t>Probabilistic matching.</a:t>
             </a:r>
-            <a:endParaRPr lang="en-US" sz="1700" dirty="0"/>
-          </a:p>
-          <a:p>
-            <a:r>
-              <a:rPr lang="en-US" sz="1700" dirty="0">
+            <a:endParaRPr lang="en-US" sz="2100" dirty="0"/>
+          </a:p>
+          <a:p>
+            <a:r>
+              <a:rPr lang="en-US" sz="2100" dirty="0">
                 <a:solidFill>
                   <a:srgbClr val="17364A"/>
                 </a:solidFill>
@@ -14739,13 +15968,13 @@
                 <a:ea typeface="Aptos" pitchFamily="34" charset="-122"/>
                 <a:cs typeface="Aptos" pitchFamily="34" charset="-120"/>
               </a:rPr>
-              <a:t>Probabilistic matching estimates the likelihood that records refer to the same entity even when fields differ.</a:t>
-            </a:r>
-            <a:endParaRPr lang="en-US" sz="1700" dirty="0"/>
-          </a:p>
-          <a:p>
-            <a:r>
-              <a:rPr lang="en-US" sz="1700" dirty="0">
+              <a:t>Probabilistic matching estimates the likelihood that records refer to the same entity even when fields.</a:t>
+            </a:r>
+            <a:endParaRPr lang="en-US" sz="2100" dirty="0"/>
+          </a:p>
+          <a:p>
+            <a:r>
+              <a:rPr lang="en-US" sz="2100" dirty="0">
                 <a:solidFill>
                   <a:srgbClr val="17364A"/>
                 </a:solidFill>
@@ -14755,27 +15984,13 @@
               </a:rPr>
               <a:t>It can improve recall but requires thresholds, validation, and review.</a:t>
             </a:r>
-            <a:endParaRPr lang="en-US" sz="1700" dirty="0"/>
-          </a:p>
-          <a:p>
-            <a:r>
-              <a:rPr lang="en-US" sz="1700" dirty="0">
-                <a:solidFill>
-                  <a:srgbClr val="17364A"/>
-                </a:solidFill>
-                <a:latin typeface="Aptos" pitchFamily="34" charset="0"/>
-                <a:ea typeface="Aptos" pitchFamily="34" charset="-122"/>
-                <a:cs typeface="Aptos" pitchFamily="34" charset="-120"/>
-              </a:rPr>
-              <a:t>Clerical review.</a:t>
-            </a:r>
-            <a:endParaRPr lang="en-US" sz="1700" dirty="0"/>
-          </a:p>
-        </p:txBody>
-      </p:sp>
-      <p:sp>
-        <p:nvSpPr>
-          <p:cNvPr id="9" name="Shape 7"/>
+            <a:endParaRPr lang="en-US" sz="2100" dirty="0"/>
+          </a:p>
+        </p:txBody>
+      </p:sp>
+      <p:sp>
+        <p:nvSpPr>
+          <p:cNvPr id="10" name="Shape 8"/>
           <p:cNvSpPr/>
           <p:nvPr/>
         </p:nvSpPr>
@@ -14802,14 +16017,14 @@
       </p:sp>
       <p:sp>
         <p:nvSpPr>
-          <p:cNvPr id="10" name="Text 8"/>
+          <p:cNvPr id="11" name="Text 9"/>
           <p:cNvSpPr/>
           <p:nvPr/>
         </p:nvSpPr>
         <p:spPr>
           <a:xfrm>
             <a:off x="8074152" y="1563624"/>
-            <a:ext cx="2825496" cy="201168"/>
+            <a:ext cx="2825496" cy="256032"/>
           </a:xfrm>
           <a:prstGeom prst="rect">
             <a:avLst/>
@@ -14825,7 +16040,7 @@
               <a:buNone/>
             </a:pPr>
             <a:r>
-              <a:rPr lang="en-US" sz="950" b="1" dirty="0">
+              <a:rPr lang="en-US" sz="1300" b="1" dirty="0">
                 <a:solidFill>
                   <a:srgbClr val="0068B7"/>
                 </a:solidFill>
@@ -14835,20 +16050,20 @@
               </a:rPr>
               <a:t>Key idea</a:t>
             </a:r>
-            <a:endParaRPr lang="en-US" sz="950" dirty="0"/>
-          </a:p>
-        </p:txBody>
-      </p:sp>
-      <p:sp>
-        <p:nvSpPr>
-          <p:cNvPr id="11" name="Text 9"/>
-          <p:cNvSpPr/>
-          <p:nvPr/>
-        </p:nvSpPr>
-        <p:spPr>
-          <a:xfrm>
-            <a:off x="8074152" y="1856232"/>
-            <a:ext cx="2825496" cy="1261872"/>
+            <a:endParaRPr lang="en-US" sz="1300" dirty="0"/>
+          </a:p>
+        </p:txBody>
+      </p:sp>
+      <p:sp>
+        <p:nvSpPr>
+          <p:cNvPr id="12" name="Text 10"/>
+          <p:cNvSpPr/>
+          <p:nvPr/>
+        </p:nvSpPr>
+        <p:spPr>
+          <a:xfrm>
+            <a:off x="8074152" y="1920240"/>
+            <a:ext cx="2825496" cy="1188720"/>
           </a:xfrm>
           <a:prstGeom prst="rect">
             <a:avLst/>
@@ -14866,7 +16081,7 @@
               <a:buNone/>
             </a:pPr>
             <a:r>
-              <a:rPr lang="en-US" sz="1250" dirty="0">
+              <a:rPr lang="en-US" sz="1550" dirty="0">
                 <a:solidFill>
                   <a:srgbClr val="17364A"/>
                 </a:solidFill>
@@ -14876,13 +16091,13 @@
               </a:rPr>
               <a:t>Probabilistic matching.</a:t>
             </a:r>
-            <a:endParaRPr lang="en-US" sz="1250" dirty="0"/>
-          </a:p>
-        </p:txBody>
-      </p:sp>
-      <p:sp>
-        <p:nvSpPr>
-          <p:cNvPr id="12" name="Shape 10"/>
+            <a:endParaRPr lang="en-US" sz="1550" dirty="0"/>
+          </a:p>
+        </p:txBody>
+      </p:sp>
+      <p:sp>
+        <p:nvSpPr>
+          <p:cNvPr id="13" name="Shape 11"/>
           <p:cNvSpPr/>
           <p:nvPr/>
         </p:nvSpPr>
@@ -14909,14 +16124,14 @@
       </p:sp>
       <p:sp>
         <p:nvSpPr>
-          <p:cNvPr id="13" name="Text 11"/>
+          <p:cNvPr id="14" name="Text 12"/>
           <p:cNvSpPr/>
           <p:nvPr/>
         </p:nvSpPr>
         <p:spPr>
           <a:xfrm>
             <a:off x="8074152" y="3666744"/>
-            <a:ext cx="2825496" cy="201168"/>
+            <a:ext cx="2825496" cy="256032"/>
           </a:xfrm>
           <a:prstGeom prst="rect">
             <a:avLst/>
@@ -14932,7 +16147,7 @@
               <a:buNone/>
             </a:pPr>
             <a:r>
-              <a:rPr lang="en-US" sz="950" b="1" dirty="0">
+              <a:rPr lang="en-US" sz="1300" b="1" dirty="0">
                 <a:solidFill>
                   <a:srgbClr val="0068B7"/>
                 </a:solidFill>
@@ -14942,20 +16157,20 @@
               </a:rPr>
               <a:t>Use this for</a:t>
             </a:r>
-            <a:endParaRPr lang="en-US" sz="950" dirty="0"/>
-          </a:p>
-        </p:txBody>
-      </p:sp>
-      <p:sp>
-        <p:nvSpPr>
-          <p:cNvPr id="14" name="Text 12"/>
-          <p:cNvSpPr/>
-          <p:nvPr/>
-        </p:nvSpPr>
-        <p:spPr>
-          <a:xfrm>
-            <a:off x="8074152" y="3959352"/>
-            <a:ext cx="2825496" cy="1170432"/>
+            <a:endParaRPr lang="en-US" sz="1300" dirty="0"/>
+          </a:p>
+        </p:txBody>
+      </p:sp>
+      <p:sp>
+        <p:nvSpPr>
+          <p:cNvPr id="15" name="Text 13"/>
+          <p:cNvSpPr/>
+          <p:nvPr/>
+        </p:nvSpPr>
+        <p:spPr>
+          <a:xfrm>
+            <a:off x="8074152" y="4023360"/>
+            <a:ext cx="2825496" cy="1097280"/>
           </a:xfrm>
           <a:prstGeom prst="rect">
             <a:avLst/>
@@ -14973,7 +16188,7 @@
               <a:buNone/>
             </a:pPr>
             <a:r>
-              <a:rPr lang="en-US" sz="1250" dirty="0">
+              <a:rPr lang="en-US" sz="1550" dirty="0">
                 <a:solidFill>
                   <a:srgbClr val="17364A"/>
                 </a:solidFill>
@@ -14983,7 +16198,7 @@
               </a:rPr>
               <a:t>Connect the concept to public health decisions, safeguards, documentation, or implementation work.</a:t>
             </a:r>
-            <a:endParaRPr lang="en-US" sz="1250" dirty="0"/>
+            <a:endParaRPr lang="en-US" sz="1550" dirty="0"/>
           </a:p>
         </p:txBody>
       </p:sp>
